--- a/edutrack-pitch-deck.pptx
+++ b/edutrack-pitch-deck.pptx
@@ -1,30 +1,30 @@
 
 <file path=ppt/presentation.xml><?xml version="1.0" encoding="utf-8"?>
-<p:presentation xmlns:a="http://schemas.openxmlformats.org/drawingml/2006/main" xmlns:r="http://schemas.openxmlformats.org/officeDocument/2006/relationships" xmlns:p="http://schemas.openxmlformats.org/presentationml/2006/main" saveSubsetFonts="1" autoCompressPictures="0">
+<p:presentation xmlns:a="http://schemas.openxmlformats.org/drawingml/2006/main" xmlns:r="http://schemas.openxmlformats.org/officeDocument/2006/relationships" xmlns:p="http://schemas.openxmlformats.org/presentationml/2006/main" autoCompressPictures="0">
   <p:sldMasterIdLst>
     <p:sldMasterId id="2147483648" r:id="rId1"/>
   </p:sldMasterIdLst>
+  <p:notesMasterIdLst>
+    <p:notesMasterId r:id="rId4"/>
+  </p:notesMasterIdLst>
   <p:sldIdLst>
-    <p:sldId id="256" r:id="rId2"/>
-    <p:sldId id="257" r:id="rId3"/>
-    <p:sldId id="258" r:id="rId4"/>
-    <p:sldId id="259" r:id="rId5"/>
-    <p:sldId id="260" r:id="rId6"/>
-    <p:sldId id="261" r:id="rId7"/>
-    <p:sldId id="262" r:id="rId8"/>
-    <p:sldId id="263" r:id="rId9"/>
-    <p:sldId id="264" r:id="rId10"/>
-    <p:sldId id="265" r:id="rId11"/>
-    <p:sldId id="266" r:id="rId12"/>
-    <p:sldId id="267" r:id="rId13"/>
-    <p:sldId id="268" r:id="rId14"/>
-    <p:sldId id="269" r:id="rId15"/>
+    <p:sldId id="256" r:id="rId3"/>
+    <p:sldId id="257" r:id="rId5"/>
+    <p:sldId id="258" r:id="rId6"/>
+    <p:sldId id="259" r:id="rId7"/>
+    <p:sldId id="260" r:id="rId8"/>
+    <p:sldId id="261" r:id="rId9"/>
+    <p:sldId id="262" r:id="rId10"/>
+    <p:sldId id="263" r:id="rId11"/>
+    <p:sldId id="264" r:id="rId12"/>
+    <p:sldId id="265" r:id="rId13"/>
+    <p:sldId id="266" r:id="rId14"/>
+    <p:sldId id="267" r:id="rId15"/>
+    <p:sldId id="268" r:id="rId16"/>
+    <p:sldId id="269" r:id="rId17"/>
   </p:sldIdLst>
-  <p:notesMasterIdLst>
-    <p:notesMasterId r:id="rId16"/>
-  </p:notesMasterIdLst>
-  <p:sldSz cx="12191695" cy="6858000"/>
-  <p:notesSz cx="6858000" cy="12191695"/>
+  <p:sldSz cx="12191365" cy="6858000"/>
+  <p:notesSz cx="6858000" cy="12191365"/>
   <p:defaultTextStyle>
     <a:lvl1pPr marL="0" algn="l" defTabSz="914400" rtl="0" eaLnBrk="1" latinLnBrk="0" hangingPunct="1">
       <a:defRPr sz="1800" kern="1200">
@@ -202,7 +202,6 @@
           <a:p>
             <a:fld id="{5282F153-3F37-0F45-9E97-73ACFA13230C}" type="datetimeFigureOut">
               <a:rPr lang="en-US"/>
-              <a:t>7/23/19</a:t>
             </a:fld>
             <a:endParaRPr lang="en-US"/>
           </a:p>
@@ -269,6 +268,7 @@
               <a:rPr lang="en-US"/>
               <a:t>Click to edit Master text styles</a:t>
             </a:r>
+            <a:endParaRPr lang="en-US"/>
           </a:p>
           <a:p>
             <a:pPr lvl="1"/>
@@ -276,6 +276,7 @@
               <a:rPr lang="en-US"/>
               <a:t>Second level</a:t>
             </a:r>
+            <a:endParaRPr lang="en-US"/>
           </a:p>
           <a:p>
             <a:pPr lvl="2"/>
@@ -283,6 +284,7 @@
               <a:rPr lang="en-US"/>
               <a:t>Third level</a:t>
             </a:r>
+            <a:endParaRPr lang="en-US"/>
           </a:p>
           <a:p>
             <a:pPr lvl="3"/>
@@ -290,6 +292,7 @@
               <a:rPr lang="en-US"/>
               <a:t>Fourth level</a:t>
             </a:r>
+            <a:endParaRPr lang="en-US"/>
           </a:p>
           <a:p>
             <a:pPr lvl="4"/>
@@ -297,6 +300,7 @@
               <a:rPr lang="en-US"/>
               <a:t>Fifth level</a:t>
             </a:r>
+            <a:endParaRPr lang="en-US"/>
           </a:p>
         </p:txBody>
       </p:sp>
@@ -360,18 +364,12 @@
           <a:p>
             <a:fld id="{CE5E9CC1-C706-0F49-92D6-E571CC5EEA8F}" type="slidenum">
               <a:rPr lang="en-US"/>
-              <a:t>‹#›</a:t>
             </a:fld>
             <a:endParaRPr lang="en-US"/>
           </a:p>
         </p:txBody>
       </p:sp>
     </p:spTree>
-    <p:extLst>
-      <p:ext uri="{BB962C8B-B14F-4D97-AF65-F5344CB8AC3E}">
-        <p14:creationId xmlns:p14="http://schemas.microsoft.com/office/powerpoint/2010/main" val="1024086991"/>
-      </p:ext>
-    </p:extLst>
   </p:cSld>
   <p:clrMap bg1="lt1" tx1="dk1" bg2="lt2" tx2="dk2" accent1="accent1" accent2="accent2" accent3="accent3" accent4="accent4" accent5="accent5" accent6="accent6" hlink="hlink" folHlink="folHlink"/>
   <p:notesStyle>
@@ -513,10 +511,6 @@
           <a:bodyPr/>
           <a:lstStyle/>
           <a:p>
-            <a:r>
-              <a:rPr lang="en-US" dirty="0"/>
-              <a:t/>
-            </a:r>
             <a:endParaRPr lang="en-US" dirty="0"/>
           </a:p>
         </p:txBody>
@@ -538,18 +532,12 @@
           <a:p>
             <a:fld id="{F7021451-1387-4CA6-816F-3879F97B5CBC}" type="slidenum">
               <a:rPr lang="en-US"/>
-              <a:t>1</a:t>
             </a:fld>
             <a:endParaRPr lang="en-US"/>
           </a:p>
         </p:txBody>
       </p:sp>
     </p:spTree>
-    <p:extLst>
-      <p:ext uri="{BB962C8B-B14F-4D97-AF65-F5344CB8AC3E}">
-        <p14:creationId xmlns:p14="http://schemas.microsoft.com/office/powerpoint/2010/main" val="1024086991"/>
-      </p:ext>
-    </p:extLst>
   </p:cSld>
   <p:clrMapOvr>
     <a:masterClrMapping/>
@@ -601,10 +589,6 @@
           <a:bodyPr/>
           <a:lstStyle/>
           <a:p>
-            <a:r>
-              <a:rPr lang="en-US" dirty="0"/>
-              <a:t/>
-            </a:r>
             <a:endParaRPr lang="en-US" dirty="0"/>
           </a:p>
         </p:txBody>
@@ -626,18 +610,12 @@
           <a:p>
             <a:fld id="{F7021451-1387-4CA6-816F-3879F97B5CBC}" type="slidenum">
               <a:rPr lang="en-US"/>
-              <a:t>10</a:t>
             </a:fld>
             <a:endParaRPr lang="en-US"/>
           </a:p>
         </p:txBody>
       </p:sp>
     </p:spTree>
-    <p:extLst>
-      <p:ext uri="{BB962C8B-B14F-4D97-AF65-F5344CB8AC3E}">
-        <p14:creationId xmlns:p14="http://schemas.microsoft.com/office/powerpoint/2010/main" val="1024086991"/>
-      </p:ext>
-    </p:extLst>
   </p:cSld>
   <p:clrMapOvr>
     <a:masterClrMapping/>
@@ -689,10 +667,6 @@
           <a:bodyPr/>
           <a:lstStyle/>
           <a:p>
-            <a:r>
-              <a:rPr lang="en-US" dirty="0"/>
-              <a:t/>
-            </a:r>
             <a:endParaRPr lang="en-US" dirty="0"/>
           </a:p>
         </p:txBody>
@@ -714,18 +688,12 @@
           <a:p>
             <a:fld id="{F7021451-1387-4CA6-816F-3879F97B5CBC}" type="slidenum">
               <a:rPr lang="en-US"/>
-              <a:t>11</a:t>
             </a:fld>
             <a:endParaRPr lang="en-US"/>
           </a:p>
         </p:txBody>
       </p:sp>
     </p:spTree>
-    <p:extLst>
-      <p:ext uri="{BB962C8B-B14F-4D97-AF65-F5344CB8AC3E}">
-        <p14:creationId xmlns:p14="http://schemas.microsoft.com/office/powerpoint/2010/main" val="1024086991"/>
-      </p:ext>
-    </p:extLst>
   </p:cSld>
   <p:clrMapOvr>
     <a:masterClrMapping/>
@@ -777,10 +745,6 @@
           <a:bodyPr/>
           <a:lstStyle/>
           <a:p>
-            <a:r>
-              <a:rPr lang="en-US" dirty="0"/>
-              <a:t/>
-            </a:r>
             <a:endParaRPr lang="en-US" dirty="0"/>
           </a:p>
         </p:txBody>
@@ -802,18 +766,12 @@
           <a:p>
             <a:fld id="{F7021451-1387-4CA6-816F-3879F97B5CBC}" type="slidenum">
               <a:rPr lang="en-US"/>
-              <a:t>12</a:t>
             </a:fld>
             <a:endParaRPr lang="en-US"/>
           </a:p>
         </p:txBody>
       </p:sp>
     </p:spTree>
-    <p:extLst>
-      <p:ext uri="{BB962C8B-B14F-4D97-AF65-F5344CB8AC3E}">
-        <p14:creationId xmlns:p14="http://schemas.microsoft.com/office/powerpoint/2010/main" val="1024086991"/>
-      </p:ext>
-    </p:extLst>
   </p:cSld>
   <p:clrMapOvr>
     <a:masterClrMapping/>
@@ -865,10 +823,6 @@
           <a:bodyPr/>
           <a:lstStyle/>
           <a:p>
-            <a:r>
-              <a:rPr lang="en-US" dirty="0"/>
-              <a:t/>
-            </a:r>
             <a:endParaRPr lang="en-US" dirty="0"/>
           </a:p>
         </p:txBody>
@@ -890,18 +844,12 @@
           <a:p>
             <a:fld id="{F7021451-1387-4CA6-816F-3879F97B5CBC}" type="slidenum">
               <a:rPr lang="en-US"/>
-              <a:t>13</a:t>
             </a:fld>
             <a:endParaRPr lang="en-US"/>
           </a:p>
         </p:txBody>
       </p:sp>
     </p:spTree>
-    <p:extLst>
-      <p:ext uri="{BB962C8B-B14F-4D97-AF65-F5344CB8AC3E}">
-        <p14:creationId xmlns:p14="http://schemas.microsoft.com/office/powerpoint/2010/main" val="1024086991"/>
-      </p:ext>
-    </p:extLst>
   </p:cSld>
   <p:clrMapOvr>
     <a:masterClrMapping/>
@@ -953,10 +901,6 @@
           <a:bodyPr/>
           <a:lstStyle/>
           <a:p>
-            <a:r>
-              <a:rPr lang="en-US" dirty="0"/>
-              <a:t/>
-            </a:r>
             <a:endParaRPr lang="en-US" dirty="0"/>
           </a:p>
         </p:txBody>
@@ -978,18 +922,12 @@
           <a:p>
             <a:fld id="{F7021451-1387-4CA6-816F-3879F97B5CBC}" type="slidenum">
               <a:rPr lang="en-US"/>
-              <a:t>14</a:t>
             </a:fld>
             <a:endParaRPr lang="en-US"/>
           </a:p>
         </p:txBody>
       </p:sp>
     </p:spTree>
-    <p:extLst>
-      <p:ext uri="{BB962C8B-B14F-4D97-AF65-F5344CB8AC3E}">
-        <p14:creationId xmlns:p14="http://schemas.microsoft.com/office/powerpoint/2010/main" val="1024086991"/>
-      </p:ext>
-    </p:extLst>
   </p:cSld>
   <p:clrMapOvr>
     <a:masterClrMapping/>
@@ -1041,10 +979,6 @@
           <a:bodyPr/>
           <a:lstStyle/>
           <a:p>
-            <a:r>
-              <a:rPr lang="en-US" dirty="0"/>
-              <a:t/>
-            </a:r>
             <a:endParaRPr lang="en-US" dirty="0"/>
           </a:p>
         </p:txBody>
@@ -1066,18 +1000,12 @@
           <a:p>
             <a:fld id="{F7021451-1387-4CA6-816F-3879F97B5CBC}" type="slidenum">
               <a:rPr lang="en-US"/>
-              <a:t>2</a:t>
             </a:fld>
             <a:endParaRPr lang="en-US"/>
           </a:p>
         </p:txBody>
       </p:sp>
     </p:spTree>
-    <p:extLst>
-      <p:ext uri="{BB962C8B-B14F-4D97-AF65-F5344CB8AC3E}">
-        <p14:creationId xmlns:p14="http://schemas.microsoft.com/office/powerpoint/2010/main" val="1024086991"/>
-      </p:ext>
-    </p:extLst>
   </p:cSld>
   <p:clrMapOvr>
     <a:masterClrMapping/>
@@ -1129,10 +1057,6 @@
           <a:bodyPr/>
           <a:lstStyle/>
           <a:p>
-            <a:r>
-              <a:rPr lang="en-US" dirty="0"/>
-              <a:t/>
-            </a:r>
             <a:endParaRPr lang="en-US" dirty="0"/>
           </a:p>
         </p:txBody>
@@ -1154,18 +1078,12 @@
           <a:p>
             <a:fld id="{F7021451-1387-4CA6-816F-3879F97B5CBC}" type="slidenum">
               <a:rPr lang="en-US"/>
-              <a:t>3</a:t>
             </a:fld>
             <a:endParaRPr lang="en-US"/>
           </a:p>
         </p:txBody>
       </p:sp>
     </p:spTree>
-    <p:extLst>
-      <p:ext uri="{BB962C8B-B14F-4D97-AF65-F5344CB8AC3E}">
-        <p14:creationId xmlns:p14="http://schemas.microsoft.com/office/powerpoint/2010/main" val="1024086991"/>
-      </p:ext>
-    </p:extLst>
   </p:cSld>
   <p:clrMapOvr>
     <a:masterClrMapping/>
@@ -1217,10 +1135,6 @@
           <a:bodyPr/>
           <a:lstStyle/>
           <a:p>
-            <a:r>
-              <a:rPr lang="en-US" dirty="0"/>
-              <a:t/>
-            </a:r>
             <a:endParaRPr lang="en-US" dirty="0"/>
           </a:p>
         </p:txBody>
@@ -1242,18 +1156,12 @@
           <a:p>
             <a:fld id="{F7021451-1387-4CA6-816F-3879F97B5CBC}" type="slidenum">
               <a:rPr lang="en-US"/>
-              <a:t>4</a:t>
             </a:fld>
             <a:endParaRPr lang="en-US"/>
           </a:p>
         </p:txBody>
       </p:sp>
     </p:spTree>
-    <p:extLst>
-      <p:ext uri="{BB962C8B-B14F-4D97-AF65-F5344CB8AC3E}">
-        <p14:creationId xmlns:p14="http://schemas.microsoft.com/office/powerpoint/2010/main" val="1024086991"/>
-      </p:ext>
-    </p:extLst>
   </p:cSld>
   <p:clrMapOvr>
     <a:masterClrMapping/>
@@ -1305,10 +1213,6 @@
           <a:bodyPr/>
           <a:lstStyle/>
           <a:p>
-            <a:r>
-              <a:rPr lang="en-US" dirty="0"/>
-              <a:t/>
-            </a:r>
             <a:endParaRPr lang="en-US" dirty="0"/>
           </a:p>
         </p:txBody>
@@ -1330,18 +1234,12 @@
           <a:p>
             <a:fld id="{F7021451-1387-4CA6-816F-3879F97B5CBC}" type="slidenum">
               <a:rPr lang="en-US"/>
-              <a:t>5</a:t>
             </a:fld>
             <a:endParaRPr lang="en-US"/>
           </a:p>
         </p:txBody>
       </p:sp>
     </p:spTree>
-    <p:extLst>
-      <p:ext uri="{BB962C8B-B14F-4D97-AF65-F5344CB8AC3E}">
-        <p14:creationId xmlns:p14="http://schemas.microsoft.com/office/powerpoint/2010/main" val="1024086991"/>
-      </p:ext>
-    </p:extLst>
   </p:cSld>
   <p:clrMapOvr>
     <a:masterClrMapping/>
@@ -1393,10 +1291,6 @@
           <a:bodyPr/>
           <a:lstStyle/>
           <a:p>
-            <a:r>
-              <a:rPr lang="en-US" dirty="0"/>
-              <a:t/>
-            </a:r>
             <a:endParaRPr lang="en-US" dirty="0"/>
           </a:p>
         </p:txBody>
@@ -1418,18 +1312,12 @@
           <a:p>
             <a:fld id="{F7021451-1387-4CA6-816F-3879F97B5CBC}" type="slidenum">
               <a:rPr lang="en-US"/>
-              <a:t>6</a:t>
             </a:fld>
             <a:endParaRPr lang="en-US"/>
           </a:p>
         </p:txBody>
       </p:sp>
     </p:spTree>
-    <p:extLst>
-      <p:ext uri="{BB962C8B-B14F-4D97-AF65-F5344CB8AC3E}">
-        <p14:creationId xmlns:p14="http://schemas.microsoft.com/office/powerpoint/2010/main" val="1024086991"/>
-      </p:ext>
-    </p:extLst>
   </p:cSld>
   <p:clrMapOvr>
     <a:masterClrMapping/>
@@ -1481,10 +1369,6 @@
           <a:bodyPr/>
           <a:lstStyle/>
           <a:p>
-            <a:r>
-              <a:rPr lang="en-US" dirty="0"/>
-              <a:t/>
-            </a:r>
             <a:endParaRPr lang="en-US" dirty="0"/>
           </a:p>
         </p:txBody>
@@ -1506,18 +1390,12 @@
           <a:p>
             <a:fld id="{F7021451-1387-4CA6-816F-3879F97B5CBC}" type="slidenum">
               <a:rPr lang="en-US"/>
-              <a:t>7</a:t>
             </a:fld>
             <a:endParaRPr lang="en-US"/>
           </a:p>
         </p:txBody>
       </p:sp>
     </p:spTree>
-    <p:extLst>
-      <p:ext uri="{BB962C8B-B14F-4D97-AF65-F5344CB8AC3E}">
-        <p14:creationId xmlns:p14="http://schemas.microsoft.com/office/powerpoint/2010/main" val="1024086991"/>
-      </p:ext>
-    </p:extLst>
   </p:cSld>
   <p:clrMapOvr>
     <a:masterClrMapping/>
@@ -1569,10 +1447,6 @@
           <a:bodyPr/>
           <a:lstStyle/>
           <a:p>
-            <a:r>
-              <a:rPr lang="en-US" dirty="0"/>
-              <a:t/>
-            </a:r>
             <a:endParaRPr lang="en-US" dirty="0"/>
           </a:p>
         </p:txBody>
@@ -1594,18 +1468,12 @@
           <a:p>
             <a:fld id="{F7021451-1387-4CA6-816F-3879F97B5CBC}" type="slidenum">
               <a:rPr lang="en-US"/>
-              <a:t>8</a:t>
             </a:fld>
             <a:endParaRPr lang="en-US"/>
           </a:p>
         </p:txBody>
       </p:sp>
     </p:spTree>
-    <p:extLst>
-      <p:ext uri="{BB962C8B-B14F-4D97-AF65-F5344CB8AC3E}">
-        <p14:creationId xmlns:p14="http://schemas.microsoft.com/office/powerpoint/2010/main" val="1024086991"/>
-      </p:ext>
-    </p:extLst>
   </p:cSld>
   <p:clrMapOvr>
     <a:masterClrMapping/>
@@ -1657,10 +1525,6 @@
           <a:bodyPr/>
           <a:lstStyle/>
           <a:p>
-            <a:r>
-              <a:rPr lang="en-US" dirty="0"/>
-              <a:t/>
-            </a:r>
             <a:endParaRPr lang="en-US" dirty="0"/>
           </a:p>
         </p:txBody>
@@ -1682,18 +1546,12 @@
           <a:p>
             <a:fld id="{F7021451-1387-4CA6-816F-3879F97B5CBC}" type="slidenum">
               <a:rPr lang="en-US"/>
-              <a:t>9</a:t>
             </a:fld>
             <a:endParaRPr lang="en-US"/>
           </a:p>
         </p:txBody>
       </p:sp>
     </p:spTree>
-    <p:extLst>
-      <p:ext uri="{BB962C8B-B14F-4D97-AF65-F5344CB8AC3E}">
-        <p14:creationId xmlns:p14="http://schemas.microsoft.com/office/powerpoint/2010/main" val="1024086991"/>
-      </p:ext>
-    </p:extLst>
   </p:cSld>
   <p:clrMapOvr>
     <a:masterClrMapping/>
@@ -1734,6 +1592,11 @@
 <file path=ppt/slideMasters/slideMaster1.xml><?xml version="1.0" encoding="utf-8"?>
 <p:sldMaster xmlns:a="http://schemas.openxmlformats.org/drawingml/2006/main" xmlns:r="http://schemas.openxmlformats.org/officeDocument/2006/relationships" xmlns:p="http://schemas.openxmlformats.org/presentationml/2006/main">
   <p:cSld>
+    <p:bg>
+      <p:bgRef idx="1001">
+        <a:schemeClr val="bg1"/>
+      </p:bgRef>
+    </p:bg>
     <p:spTree>
       <p:nvGrpSpPr>
         <p:cNvPr id="1" name=""/>
@@ -1777,7 +1640,7 @@
         <a:spcBef>
           <a:spcPct val="20000"/>
         </a:spcBef>
-        <a:buFont typeface="Arial" pitchFamily="34" charset="0"/>
+        <a:buFont typeface="Arial" panose="020B0604020202020204" pitchFamily="34" charset="0"/>
         <a:buChar char="•"/>
         <a:defRPr sz="3200" kern="1200">
           <a:solidFill>
@@ -1792,7 +1655,7 @@
         <a:spcBef>
           <a:spcPct val="20000"/>
         </a:spcBef>
-        <a:buFont typeface="Arial" pitchFamily="34" charset="0"/>
+        <a:buFont typeface="Arial" panose="020B0604020202020204" pitchFamily="34" charset="0"/>
         <a:buChar char="–"/>
         <a:defRPr sz="2800" kern="1200">
           <a:solidFill>
@@ -1807,7 +1670,7 @@
         <a:spcBef>
           <a:spcPct val="20000"/>
         </a:spcBef>
-        <a:buFont typeface="Arial" pitchFamily="34" charset="0"/>
+        <a:buFont typeface="Arial" panose="020B0604020202020204" pitchFamily="34" charset="0"/>
         <a:buChar char="•"/>
         <a:defRPr sz="2400" kern="1200">
           <a:solidFill>
@@ -1822,7 +1685,7 @@
         <a:spcBef>
           <a:spcPct val="20000"/>
         </a:spcBef>
-        <a:buFont typeface="Arial" pitchFamily="34" charset="0"/>
+        <a:buFont typeface="Arial" panose="020B0604020202020204" pitchFamily="34" charset="0"/>
         <a:buChar char="–"/>
         <a:defRPr sz="2000" kern="1200">
           <a:solidFill>
@@ -1837,7 +1700,7 @@
         <a:spcBef>
           <a:spcPct val="20000"/>
         </a:spcBef>
-        <a:buFont typeface="Arial" pitchFamily="34" charset="0"/>
+        <a:buFont typeface="Arial" panose="020B0604020202020204" pitchFamily="34" charset="0"/>
         <a:buChar char="»"/>
         <a:defRPr sz="2000" kern="1200">
           <a:solidFill>
@@ -1852,7 +1715,7 @@
         <a:spcBef>
           <a:spcPct val="20000"/>
         </a:spcBef>
-        <a:buFont typeface="Arial" pitchFamily="34" charset="0"/>
+        <a:buFont typeface="Arial" panose="020B0604020202020204" pitchFamily="34" charset="0"/>
         <a:buChar char="•"/>
         <a:defRPr sz="2000" kern="1200">
           <a:solidFill>
@@ -1867,7 +1730,7 @@
         <a:spcBef>
           <a:spcPct val="20000"/>
         </a:spcBef>
-        <a:buFont typeface="Arial" pitchFamily="34" charset="0"/>
+        <a:buFont typeface="Arial" panose="020B0604020202020204" pitchFamily="34" charset="0"/>
         <a:buChar char="•"/>
         <a:defRPr sz="2000" kern="1200">
           <a:solidFill>
@@ -1882,7 +1745,7 @@
         <a:spcBef>
           <a:spcPct val="20000"/>
         </a:spcBef>
-        <a:buFont typeface="Arial" pitchFamily="34" charset="0"/>
+        <a:buFont typeface="Arial" panose="020B0604020202020204" pitchFamily="34" charset="0"/>
         <a:buChar char="•"/>
         <a:defRPr sz="2000" kern="1200">
           <a:solidFill>
@@ -1897,7 +1760,7 @@
         <a:spcBef>
           <a:spcPct val="20000"/>
         </a:spcBef>
-        <a:buFont typeface="Arial" pitchFamily="34" charset="0"/>
+        <a:buFont typeface="Arial" panose="020B0604020202020204" pitchFamily="34" charset="0"/>
         <a:buChar char="•"/>
         <a:defRPr sz="2000" kern="1200">
           <a:solidFill>
@@ -2010,12 +1873,13 @@
 
 <file path=ppt/slides/slide1.xml><?xml version="1.0" encoding="utf-8"?>
 <p:sld xmlns:a="http://schemas.openxmlformats.org/drawingml/2006/main" xmlns:r="http://schemas.openxmlformats.org/officeDocument/2006/relationships" xmlns:p="http://schemas.openxmlformats.org/presentationml/2006/main">
-  <p:cSld name="Slide 1">
+  <p:cSld>
     <p:bg>
       <p:bgPr>
         <a:solidFill>
           <a:srgbClr val="020617"/>
         </a:solidFill>
+        <a:effectLst/>
       </p:bgPr>
     </p:bg>
     <p:spTree>
@@ -2051,7 +1915,6 @@
               <a:alpha val="8000"/>
             </a:srgbClr>
           </a:solidFill>
-          <a:ln/>
         </p:spPr>
       </p:sp>
       <p:sp>
@@ -2073,7 +1936,6 @@
               <a:alpha val="8000"/>
             </a:srgbClr>
           </a:solidFill>
-          <a:ln/>
         </p:spPr>
       </p:sp>
       <p:sp>
@@ -2095,7 +1957,6 @@
           <a:solidFill>
             <a:srgbClr val="2563EB"/>
           </a:solidFill>
-          <a:ln/>
         </p:spPr>
       </p:sp>
       <p:sp>
@@ -2113,13 +1974,12 @@
             <a:avLst/>
           </a:prstGeom>
           <a:noFill/>
-          <a:ln/>
         </p:spPr>
         <p:txBody>
           <a:bodyPr wrap="square" lIns="0" tIns="0" rIns="0" bIns="0" rtlCol="0" anchor="ctr"/>
           <a:lstStyle/>
           <a:p>
-            <a:pPr algn="ctr" indent="0" marL="0">
+            <a:pPr marL="0" indent="0" algn="ctr">
               <a:buNone/>
             </a:pPr>
             <a:r>
@@ -2127,9 +1987,9 @@
                 <a:solidFill>
                   <a:srgbClr val="FFFFFF"/>
                 </a:solidFill>
-                <a:latin typeface="Cambria" pitchFamily="34" charset="0"/>
-                <a:ea typeface="Cambria" pitchFamily="34" charset="-122"/>
-                <a:cs typeface="Cambria" pitchFamily="34" charset="-120"/>
+                <a:latin typeface="Cambria" panose="02040503050406030204" pitchFamily="34" charset="0"/>
+                <a:ea typeface="Cambria" panose="02040503050406030204" pitchFamily="34" charset="-122"/>
+                <a:cs typeface="Cambria" panose="02040503050406030204" pitchFamily="34" charset="-120"/>
               </a:rPr>
               <a:t>E</a:t>
             </a:r>
@@ -2152,13 +2012,12 @@
             <a:avLst/>
           </a:prstGeom>
           <a:noFill/>
-          <a:ln/>
         </p:spPr>
         <p:txBody>
           <a:bodyPr wrap="square" lIns="0" tIns="0" rIns="0" bIns="0" rtlCol="0" anchor="ctr"/>
           <a:lstStyle/>
           <a:p>
-            <a:pPr indent="0" marL="0">
+            <a:pPr marL="0" indent="0">
               <a:buNone/>
             </a:pPr>
             <a:r>
@@ -2166,23 +2025,20 @@
                 <a:solidFill>
                   <a:srgbClr val="FFFFFF"/>
                 </a:solidFill>
-                <a:latin typeface="Cambria" pitchFamily="34" charset="0"/>
-                <a:ea typeface="Cambria" pitchFamily="34" charset="-122"/>
-                <a:cs typeface="Cambria" pitchFamily="34" charset="-120"/>
+                <a:latin typeface="Cambria" panose="02040503050406030204" pitchFamily="34" charset="0"/>
+                <a:ea typeface="Cambria" panose="02040503050406030204" pitchFamily="34" charset="-122"/>
+                <a:cs typeface="Cambria" panose="02040503050406030204" pitchFamily="34" charset="-120"/>
               </a:rPr>
               <a:t>Edu</a:t>
             </a:r>
-            <a:pPr indent="0" marL="0">
-              <a:buNone/>
-            </a:pPr>
             <a:r>
               <a:rPr lang="en-US" sz="4400" b="1" dirty="0">
                 <a:solidFill>
                   <a:srgbClr val="60A5FA"/>
                 </a:solidFill>
-                <a:latin typeface="Cambria" pitchFamily="34" charset="0"/>
-                <a:ea typeface="Cambria" pitchFamily="34" charset="-122"/>
-                <a:cs typeface="Cambria" pitchFamily="34" charset="-120"/>
+                <a:latin typeface="Cambria" panose="02040503050406030204" pitchFamily="34" charset="0"/>
+                <a:ea typeface="Cambria" panose="02040503050406030204" pitchFamily="34" charset="-122"/>
+                <a:cs typeface="Cambria" panose="02040503050406030204" pitchFamily="34" charset="-120"/>
               </a:rPr>
               <a:t>Track</a:t>
             </a:r>
@@ -2205,23 +2061,22 @@
             <a:avLst/>
           </a:prstGeom>
           <a:noFill/>
-          <a:ln/>
         </p:spPr>
         <p:txBody>
           <a:bodyPr wrap="square" lIns="0" tIns="0" rIns="0" bIns="0" rtlCol="0" anchor="ctr"/>
           <a:lstStyle/>
           <a:p>
-            <a:pPr algn="ctr" indent="0" marL="0">
-              <a:buNone/>
-            </a:pPr>
-            <a:r>
-              <a:rPr lang="en-US" sz="1100" b="1" spc="300" kern="0" dirty="0">
+            <a:pPr marL="0" indent="0" algn="ctr">
+              <a:buNone/>
+            </a:pPr>
+            <a:r>
+              <a:rPr lang="en-US" sz="1100" b="1" kern="0" spc="300" dirty="0">
                 <a:solidFill>
                   <a:srgbClr val="60A5FA"/>
                 </a:solidFill>
-                <a:latin typeface="Calibri" pitchFamily="34" charset="0"/>
-                <a:ea typeface="Calibri" pitchFamily="34" charset="-122"/>
-                <a:cs typeface="Calibri" pitchFamily="34" charset="-120"/>
+                <a:latin typeface="Calibri" panose="020F0502020204030204" pitchFamily="34" charset="0"/>
+                <a:ea typeface="Calibri" panose="020F0502020204030204" pitchFamily="34" charset="-122"/>
+                <a:cs typeface="Calibri" panose="020F0502020204030204" pitchFamily="34" charset="-120"/>
               </a:rPr>
               <a:t>THE ALL-IN-ONE CLOUD PLATFORM FOR MODERN SCHOOLS</a:t>
             </a:r>
@@ -2244,13 +2099,12 @@
             <a:avLst/>
           </a:prstGeom>
           <a:noFill/>
-          <a:ln/>
         </p:spPr>
         <p:txBody>
           <a:bodyPr wrap="square" lIns="0" tIns="0" rIns="0" bIns="0" rtlCol="0" anchor="ctr"/>
           <a:lstStyle/>
           <a:p>
-            <a:pPr algn="ctr" indent="0" marL="0">
+            <a:pPr marL="0" indent="0" algn="ctr">
               <a:lnSpc>
                 <a:spcPct val="108000"/>
               </a:lnSpc>
@@ -2261,27 +2115,21 @@
                 <a:solidFill>
                   <a:srgbClr val="FFFFFF"/>
                 </a:solidFill>
-                <a:latin typeface="Cambria" pitchFamily="34" charset="0"/>
-                <a:ea typeface="Cambria" pitchFamily="34" charset="-122"/>
-                <a:cs typeface="Cambria" pitchFamily="34" charset="-120"/>
+                <a:latin typeface="Cambria" panose="02040503050406030204" pitchFamily="34" charset="0"/>
+                <a:ea typeface="Cambria" panose="02040503050406030204" pitchFamily="34" charset="-122"/>
+                <a:cs typeface="Cambria" panose="02040503050406030204" pitchFamily="34" charset="-120"/>
               </a:rPr>
               <a:t>Run your entire school from
 </a:t>
             </a:r>
-            <a:pPr algn="ctr" indent="0" marL="0">
-              <a:lnSpc>
-                <a:spcPct val="108000"/>
-              </a:lnSpc>
-              <a:buNone/>
-            </a:pPr>
             <a:r>
               <a:rPr lang="en-US" sz="3800" b="1" dirty="0">
                 <a:solidFill>
                   <a:srgbClr val="60A5FA"/>
                 </a:solidFill>
-                <a:latin typeface="Cambria" pitchFamily="34" charset="0"/>
-                <a:ea typeface="Cambria" pitchFamily="34" charset="-122"/>
-                <a:cs typeface="Cambria" pitchFamily="34" charset="-120"/>
+                <a:latin typeface="Cambria" panose="02040503050406030204" pitchFamily="34" charset="0"/>
+                <a:ea typeface="Cambria" panose="02040503050406030204" pitchFamily="34" charset="-122"/>
+                <a:cs typeface="Cambria" panose="02040503050406030204" pitchFamily="34" charset="-120"/>
               </a:rPr>
               <a:t>one cloud platform</a:t>
             </a:r>
@@ -2304,13 +2152,12 @@
             <a:avLst/>
           </a:prstGeom>
           <a:noFill/>
-          <a:ln/>
         </p:spPr>
         <p:txBody>
           <a:bodyPr wrap="square" lIns="0" tIns="0" rIns="0" bIns="0" rtlCol="0" anchor="ctr"/>
           <a:lstStyle/>
           <a:p>
-            <a:pPr algn="ctr" indent="0" marL="0">
+            <a:pPr marL="0" indent="0" algn="ctr">
               <a:lnSpc>
                 <a:spcPct val="120000"/>
               </a:lnSpc>
@@ -2321,9 +2168,9 @@
                 <a:solidFill>
                   <a:srgbClr val="94A3B8"/>
                 </a:solidFill>
-                <a:latin typeface="Calibri" pitchFamily="34" charset="0"/>
-                <a:ea typeface="Calibri" pitchFamily="34" charset="-122"/>
-                <a:cs typeface="Calibri" pitchFamily="34" charset="-120"/>
+                <a:latin typeface="Calibri" panose="020F0502020204030204" pitchFamily="34" charset="0"/>
+                <a:ea typeface="Calibri" panose="020F0502020204030204" pitchFamily="34" charset="-122"/>
+                <a:cs typeface="Calibri" panose="020F0502020204030204" pitchFamily="34" charset="-120"/>
               </a:rPr>
               <a:t>Automated report cards · Live grading · Daily attendance · Fee management · Teacher payroll · A parent portal — built for Nigerian schools, from JSS to SSS.</a:t>
             </a:r>
@@ -2377,13 +2224,12 @@
             <a:avLst/>
           </a:prstGeom>
           <a:noFill/>
-          <a:ln/>
         </p:spPr>
         <p:txBody>
           <a:bodyPr wrap="square" lIns="0" tIns="0" rIns="0" bIns="0" rtlCol="0" anchor="ctr"/>
           <a:lstStyle/>
           <a:p>
-            <a:pPr algn="ctr" indent="0" marL="0">
+            <a:pPr marL="0" indent="0" algn="ctr">
               <a:buNone/>
             </a:pPr>
             <a:r>
@@ -2391,23 +2237,20 @@
                 <a:solidFill>
                   <a:srgbClr val="60A5FA"/>
                 </a:solidFill>
-                <a:latin typeface="Calibri" pitchFamily="34" charset="0"/>
-                <a:ea typeface="Calibri" pitchFamily="34" charset="-122"/>
-                <a:cs typeface="Calibri" pitchFamily="34" charset="-120"/>
+                <a:latin typeface="Calibri" panose="020F0502020204030204" pitchFamily="34" charset="0"/>
+                <a:ea typeface="Calibri" panose="020F0502020204030204" pitchFamily="34" charset="-122"/>
+                <a:cs typeface="Calibri" panose="020F0502020204030204" pitchFamily="34" charset="-120"/>
               </a:rPr>
               <a:t>8</a:t>
             </a:r>
-            <a:pPr algn="ctr" indent="0" marL="0">
-              <a:buNone/>
-            </a:pPr>
             <a:r>
               <a:rPr lang="en-US" sz="1200" dirty="0">
                 <a:solidFill>
                   <a:srgbClr val="94A3B8"/>
                 </a:solidFill>
-                <a:latin typeface="Calibri" pitchFamily="34" charset="0"/>
-                <a:ea typeface="Calibri" pitchFamily="34" charset="-122"/>
-                <a:cs typeface="Calibri" pitchFamily="34" charset="-120"/>
+                <a:latin typeface="Calibri" panose="020F0502020204030204" pitchFamily="34" charset="0"/>
+                <a:ea typeface="Calibri" panose="020F0502020204030204" pitchFamily="34" charset="-122"/>
+                <a:cs typeface="Calibri" panose="020F0502020204030204" pitchFamily="34" charset="-120"/>
               </a:rPr>
               <a:t>  modules</a:t>
             </a:r>
@@ -2461,13 +2304,12 @@
             <a:avLst/>
           </a:prstGeom>
           <a:noFill/>
-          <a:ln/>
         </p:spPr>
         <p:txBody>
           <a:bodyPr wrap="square" lIns="0" tIns="0" rIns="0" bIns="0" rtlCol="0" anchor="ctr"/>
           <a:lstStyle/>
           <a:p>
-            <a:pPr algn="ctr" indent="0" marL="0">
+            <a:pPr marL="0" indent="0" algn="ctr">
               <a:buNone/>
             </a:pPr>
             <a:r>
@@ -2475,23 +2317,20 @@
                 <a:solidFill>
                   <a:srgbClr val="10B981"/>
                 </a:solidFill>
-                <a:latin typeface="Calibri" pitchFamily="34" charset="0"/>
-                <a:ea typeface="Calibri" pitchFamily="34" charset="-122"/>
-                <a:cs typeface="Calibri" pitchFamily="34" charset="-120"/>
+                <a:latin typeface="Calibri" panose="020F0502020204030204" pitchFamily="34" charset="0"/>
+                <a:ea typeface="Calibri" panose="020F0502020204030204" pitchFamily="34" charset="-122"/>
+                <a:cs typeface="Calibri" panose="020F0502020204030204" pitchFamily="34" charset="-120"/>
               </a:rPr>
               <a:t>4</a:t>
             </a:r>
-            <a:pPr algn="ctr" indent="0" marL="0">
-              <a:buNone/>
-            </a:pPr>
             <a:r>
               <a:rPr lang="en-US" sz="1200" dirty="0">
                 <a:solidFill>
                   <a:srgbClr val="94A3B8"/>
                 </a:solidFill>
-                <a:latin typeface="Calibri" pitchFamily="34" charset="0"/>
-                <a:ea typeface="Calibri" pitchFamily="34" charset="-122"/>
-                <a:cs typeface="Calibri" pitchFamily="34" charset="-120"/>
+                <a:latin typeface="Calibri" panose="020F0502020204030204" pitchFamily="34" charset="0"/>
+                <a:ea typeface="Calibri" panose="020F0502020204030204" pitchFamily="34" charset="-122"/>
+                <a:cs typeface="Calibri" panose="020F0502020204030204" pitchFamily="34" charset="-120"/>
               </a:rPr>
               <a:t>  portals · one login</a:t>
             </a:r>
@@ -2545,13 +2384,12 @@
             <a:avLst/>
           </a:prstGeom>
           <a:noFill/>
-          <a:ln/>
         </p:spPr>
         <p:txBody>
           <a:bodyPr wrap="square" lIns="0" tIns="0" rIns="0" bIns="0" rtlCol="0" anchor="ctr"/>
           <a:lstStyle/>
           <a:p>
-            <a:pPr algn="ctr" indent="0" marL="0">
+            <a:pPr marL="0" indent="0" algn="ctr">
               <a:buNone/>
             </a:pPr>
             <a:r>
@@ -2559,23 +2397,20 @@
                 <a:solidFill>
                   <a:srgbClr val="94A3B8"/>
                 </a:solidFill>
-                <a:latin typeface="Calibri" pitchFamily="34" charset="0"/>
-                <a:ea typeface="Calibri" pitchFamily="34" charset="-122"/>
-                <a:cs typeface="Calibri" pitchFamily="34" charset="-120"/>
+                <a:latin typeface="Calibri" panose="020F0502020204030204" pitchFamily="34" charset="0"/>
+                <a:ea typeface="Calibri" panose="020F0502020204030204" pitchFamily="34" charset="-122"/>
+                <a:cs typeface="Calibri" panose="020F0502020204030204" pitchFamily="34" charset="-120"/>
               </a:rPr>
               <a:t>Works on </a:t>
             </a:r>
-            <a:pPr algn="ctr" indent="0" marL="0">
-              <a:buNone/>
-            </a:pPr>
             <a:r>
               <a:rPr lang="en-US" sz="1200" b="1" dirty="0">
                 <a:solidFill>
                   <a:srgbClr val="A78BFA"/>
                 </a:solidFill>
-                <a:latin typeface="Calibri" pitchFamily="34" charset="0"/>
-                <a:ea typeface="Calibri" pitchFamily="34" charset="-122"/>
-                <a:cs typeface="Calibri" pitchFamily="34" charset="-120"/>
+                <a:latin typeface="Calibri" panose="020F0502020204030204" pitchFamily="34" charset="0"/>
+                <a:ea typeface="Calibri" panose="020F0502020204030204" pitchFamily="34" charset="-122"/>
+                <a:cs typeface="Calibri" panose="020F0502020204030204" pitchFamily="34" charset="-120"/>
               </a:rPr>
               <a:t>any device</a:t>
             </a:r>
@@ -2629,13 +2464,12 @@
             <a:avLst/>
           </a:prstGeom>
           <a:noFill/>
-          <a:ln/>
         </p:spPr>
         <p:txBody>
           <a:bodyPr wrap="square" lIns="0" tIns="0" rIns="0" bIns="0" rtlCol="0" anchor="ctr"/>
           <a:lstStyle/>
           <a:p>
-            <a:pPr algn="ctr" indent="0" marL="0">
+            <a:pPr marL="0" indent="0" algn="ctr">
               <a:buNone/>
             </a:pPr>
             <a:r>
@@ -2643,23 +2477,20 @@
                 <a:solidFill>
                   <a:srgbClr val="94A3B8"/>
                 </a:solidFill>
-                <a:latin typeface="Calibri" pitchFamily="34" charset="0"/>
-                <a:ea typeface="Calibri" pitchFamily="34" charset="-122"/>
-                <a:cs typeface="Calibri" pitchFamily="34" charset="-120"/>
+                <a:latin typeface="Calibri" panose="020F0502020204030204" pitchFamily="34" charset="0"/>
+                <a:ea typeface="Calibri" panose="020F0502020204030204" pitchFamily="34" charset="-122"/>
+                <a:cs typeface="Calibri" panose="020F0502020204030204" pitchFamily="34" charset="-120"/>
               </a:rPr>
               <a:t>Installable as an </a:t>
             </a:r>
-            <a:pPr algn="ctr" indent="0" marL="0">
-              <a:buNone/>
-            </a:pPr>
             <a:r>
               <a:rPr lang="en-US" sz="1200" b="1" dirty="0">
                 <a:solidFill>
                   <a:srgbClr val="F59E0B"/>
                 </a:solidFill>
-                <a:latin typeface="Calibri" pitchFamily="34" charset="0"/>
-                <a:ea typeface="Calibri" pitchFamily="34" charset="-122"/>
-                <a:cs typeface="Calibri" pitchFamily="34" charset="-120"/>
+                <a:latin typeface="Calibri" panose="020F0502020204030204" pitchFamily="34" charset="0"/>
+                <a:ea typeface="Calibri" panose="020F0502020204030204" pitchFamily="34" charset="-122"/>
+                <a:cs typeface="Calibri" panose="020F0502020204030204" pitchFamily="34" charset="-120"/>
               </a:rPr>
               <a:t>app</a:t>
             </a:r>
@@ -2713,13 +2544,12 @@
             <a:avLst/>
           </a:prstGeom>
           <a:noFill/>
-          <a:ln/>
         </p:spPr>
         <p:txBody>
           <a:bodyPr wrap="square" lIns="0" tIns="0" rIns="0" bIns="0" rtlCol="0" anchor="ctr"/>
           <a:lstStyle/>
           <a:p>
-            <a:pPr algn="ctr" indent="0" marL="0">
+            <a:pPr marL="0" indent="0" algn="ctr">
               <a:buNone/>
             </a:pPr>
             <a:r>
@@ -2727,23 +2557,20 @@
                 <a:solidFill>
                   <a:srgbClr val="10B981"/>
                 </a:solidFill>
-                <a:latin typeface="Calibri" pitchFamily="34" charset="0"/>
-                <a:ea typeface="Calibri" pitchFamily="34" charset="-122"/>
-                <a:cs typeface="Calibri" pitchFamily="34" charset="-120"/>
+                <a:latin typeface="Calibri" panose="020F0502020204030204" pitchFamily="34" charset="0"/>
+                <a:ea typeface="Calibri" panose="020F0502020204030204" pitchFamily="34" charset="-122"/>
+                <a:cs typeface="Calibri" panose="020F0502020204030204" pitchFamily="34" charset="-120"/>
               </a:rPr>
               <a:t>0</a:t>
             </a:r>
-            <a:pPr algn="ctr" indent="0" marL="0">
-              <a:buNone/>
-            </a:pPr>
             <a:r>
               <a:rPr lang="en-US" sz="1200" dirty="0">
                 <a:solidFill>
                   <a:srgbClr val="94A3B8"/>
                 </a:solidFill>
-                <a:latin typeface="Calibri" pitchFamily="34" charset="0"/>
-                <a:ea typeface="Calibri" pitchFamily="34" charset="-122"/>
-                <a:cs typeface="Calibri" pitchFamily="34" charset="-120"/>
+                <a:latin typeface="Calibri" panose="020F0502020204030204" pitchFamily="34" charset="0"/>
+                <a:ea typeface="Calibri" panose="020F0502020204030204" pitchFamily="34" charset="-122"/>
+                <a:cs typeface="Calibri" panose="020F0502020204030204" pitchFamily="34" charset="-120"/>
               </a:rPr>
               <a:t>  paper</a:t>
             </a:r>
@@ -2768,7 +2595,6 @@
           <a:solidFill>
             <a:srgbClr val="10B981"/>
           </a:solidFill>
-          <a:ln/>
         </p:spPr>
       </p:sp>
       <p:sp>
@@ -2786,13 +2612,12 @@
             <a:avLst/>
           </a:prstGeom>
           <a:noFill/>
-          <a:ln/>
         </p:spPr>
         <p:txBody>
           <a:bodyPr wrap="square" lIns="0" tIns="0" rIns="0" bIns="0" rtlCol="0" anchor="ctr"/>
           <a:lstStyle/>
           <a:p>
-            <a:pPr algn="ctr" indent="0" marL="0">
+            <a:pPr marL="0" indent="0" algn="ctr">
               <a:buNone/>
             </a:pPr>
             <a:r>
@@ -2800,11 +2625,11 @@
                 <a:solidFill>
                   <a:srgbClr val="10B981"/>
                 </a:solidFill>
-                <a:latin typeface="Calibri" pitchFamily="34" charset="0"/>
-                <a:ea typeface="Calibri" pitchFamily="34" charset="-122"/>
-                <a:cs typeface="Calibri" pitchFamily="34" charset="-120"/>
-              </a:rPr>
-              <a:t>Free pilot term for your school — no card required</a:t>
+                <a:latin typeface="Calibri" panose="020F0502020204030204" pitchFamily="34" charset="0"/>
+                <a:ea typeface="Calibri" panose="020F0502020204030204" pitchFamily="34" charset="-122"/>
+                <a:cs typeface="Calibri" panose="020F0502020204030204" pitchFamily="34" charset="-120"/>
+              </a:rPr>
+              <a:t>Free pilot  term for your school — no card required</a:t>
             </a:r>
             <a:endParaRPr lang="en-US" sz="1300" dirty="0"/>
           </a:p>
@@ -2825,13 +2650,12 @@
             <a:avLst/>
           </a:prstGeom>
           <a:noFill/>
-          <a:ln/>
         </p:spPr>
         <p:txBody>
           <a:bodyPr wrap="square" lIns="0" tIns="0" rIns="0" bIns="0" rtlCol="0" anchor="ctr"/>
           <a:lstStyle/>
           <a:p>
-            <a:pPr algn="ctr" indent="0" marL="0">
+            <a:pPr marL="0" indent="0" algn="ctr">
               <a:buNone/>
             </a:pPr>
             <a:r>
@@ -2839,9 +2663,9 @@
                 <a:solidFill>
                   <a:srgbClr val="64748B"/>
                 </a:solidFill>
-                <a:latin typeface="Calibri" pitchFamily="34" charset="0"/>
-                <a:ea typeface="Calibri" pitchFamily="34" charset="-122"/>
-                <a:cs typeface="Calibri" pitchFamily="34" charset="-120"/>
+                <a:latin typeface="Calibri" panose="020F0502020204030204" pitchFamily="34" charset="0"/>
+                <a:ea typeface="Calibri" panose="020F0502020204030204" pitchFamily="34" charset="-122"/>
+                <a:cs typeface="Calibri" panose="020F0502020204030204" pitchFamily="34" charset="-120"/>
               </a:rPr>
               <a:t>Presented by Ferdinard Ashonibare</a:t>
             </a:r>
@@ -2859,12 +2683,13 @@
 
 <file path=ppt/slides/slide10.xml><?xml version="1.0" encoding="utf-8"?>
 <p:sld xmlns:a="http://schemas.openxmlformats.org/drawingml/2006/main" xmlns:r="http://schemas.openxmlformats.org/officeDocument/2006/relationships" xmlns:p="http://schemas.openxmlformats.org/presentationml/2006/main">
-  <p:cSld name="Slide 10">
+  <p:cSld>
     <p:bg>
       <p:bgPr>
         <a:solidFill>
           <a:srgbClr val="0F172A"/>
         </a:solidFill>
+        <a:effectLst/>
       </p:bgPr>
     </p:bg>
     <p:spTree>
@@ -2896,23 +2721,22 @@
             <a:avLst/>
           </a:prstGeom>
           <a:noFill/>
-          <a:ln/>
         </p:spPr>
         <p:txBody>
           <a:bodyPr wrap="square" lIns="0" tIns="0" rIns="0" bIns="0" rtlCol="0" anchor="ctr"/>
           <a:lstStyle/>
           <a:p>
-            <a:pPr algn="l" indent="0" marL="0">
-              <a:buNone/>
-            </a:pPr>
-            <a:r>
-              <a:rPr lang="en-US" sz="1100" b="1" spc="300" kern="0" dirty="0">
+            <a:pPr marL="0" indent="0" algn="l">
+              <a:buNone/>
+            </a:pPr>
+            <a:r>
+              <a:rPr lang="en-US" sz="1100" b="1" kern="0" spc="300" dirty="0">
                 <a:solidFill>
                   <a:srgbClr val="60A5FA"/>
                 </a:solidFill>
-                <a:latin typeface="Calibri" pitchFamily="34" charset="0"/>
-                <a:ea typeface="Calibri" pitchFamily="34" charset="-122"/>
-                <a:cs typeface="Calibri" pitchFamily="34" charset="-120"/>
+                <a:latin typeface="Calibri" panose="020F0502020204030204" pitchFamily="34" charset="0"/>
+                <a:ea typeface="Calibri" panose="020F0502020204030204" pitchFamily="34" charset="-122"/>
+                <a:cs typeface="Calibri" panose="020F0502020204030204" pitchFamily="34" charset="-120"/>
               </a:rPr>
               <a:t>SECURITY &amp; TRUST</a:t>
             </a:r>
@@ -2935,13 +2759,12 @@
             <a:avLst/>
           </a:prstGeom>
           <a:noFill/>
-          <a:ln/>
         </p:spPr>
         <p:txBody>
           <a:bodyPr wrap="square" lIns="0" tIns="0" rIns="0" bIns="0" rtlCol="0" anchor="t"/>
           <a:lstStyle/>
           <a:p>
-            <a:pPr algn="l" indent="0" marL="0">
+            <a:pPr marL="0" indent="0" algn="l">
               <a:lnSpc>
                 <a:spcPct val="106000"/>
               </a:lnSpc>
@@ -2952,26 +2775,20 @@
                 <a:solidFill>
                   <a:srgbClr val="FFFFFF"/>
                 </a:solidFill>
-                <a:latin typeface="Cambria" pitchFamily="34" charset="0"/>
-                <a:ea typeface="Cambria" pitchFamily="34" charset="-122"/>
-                <a:cs typeface="Cambria" pitchFamily="34" charset="-120"/>
+                <a:latin typeface="Cambria" panose="02040503050406030204" pitchFamily="34" charset="0"/>
+                <a:ea typeface="Cambria" panose="02040503050406030204" pitchFamily="34" charset="-122"/>
+                <a:cs typeface="Cambria" panose="02040503050406030204" pitchFamily="34" charset="-120"/>
               </a:rPr>
               <a:t>Secure by design, </a:t>
             </a:r>
-            <a:pPr algn="l" indent="0" marL="0">
-              <a:lnSpc>
-                <a:spcPct val="106000"/>
-              </a:lnSpc>
-              <a:buNone/>
-            </a:pPr>
             <a:r>
               <a:rPr lang="en-US" sz="2900" b="1" dirty="0">
                 <a:solidFill>
                   <a:srgbClr val="FFFFFF"/>
                 </a:solidFill>
-                <a:latin typeface="Cambria" pitchFamily="34" charset="0"/>
-                <a:ea typeface="Cambria" pitchFamily="34" charset="-122"/>
-                <a:cs typeface="Cambria" pitchFamily="34" charset="-120"/>
+                <a:latin typeface="Cambria" panose="02040503050406030204" pitchFamily="34" charset="0"/>
+                <a:ea typeface="Cambria" panose="02040503050406030204" pitchFamily="34" charset="-122"/>
+                <a:cs typeface="Cambria" panose="02040503050406030204" pitchFamily="34" charset="-120"/>
               </a:rPr>
               <a:t>private by default</a:t>
             </a:r>
@@ -3025,7 +2842,6 @@
           <a:solidFill>
             <a:srgbClr val="A78BFA"/>
           </a:solidFill>
-          <a:ln/>
         </p:spPr>
       </p:sp>
       <p:sp>
@@ -3043,13 +2859,12 @@
             <a:avLst/>
           </a:prstGeom>
           <a:noFill/>
-          <a:ln/>
         </p:spPr>
         <p:txBody>
           <a:bodyPr wrap="square" lIns="0" tIns="0" rIns="0" bIns="0" rtlCol="0" anchor="ctr"/>
           <a:lstStyle/>
           <a:p>
-            <a:pPr algn="ctr" indent="0" marL="0">
+            <a:pPr marL="0" indent="0" algn="ctr">
               <a:buNone/>
             </a:pPr>
             <a:r>
@@ -3057,9 +2872,9 @@
                 <a:solidFill>
                   <a:srgbClr val="FFFFFF"/>
                 </a:solidFill>
-                <a:latin typeface="Calibri" pitchFamily="34" charset="0"/>
-                <a:ea typeface="Calibri" pitchFamily="34" charset="-122"/>
-                <a:cs typeface="Calibri" pitchFamily="34" charset="-120"/>
+                <a:latin typeface="Calibri" panose="020F0502020204030204" pitchFamily="34" charset="0"/>
+                <a:ea typeface="Calibri" panose="020F0502020204030204" pitchFamily="34" charset="-122"/>
+                <a:cs typeface="Calibri" panose="020F0502020204030204" pitchFamily="34" charset="-120"/>
               </a:rPr>
               <a:t>●</a:t>
             </a:r>
@@ -3082,13 +2897,12 @@
             <a:avLst/>
           </a:prstGeom>
           <a:noFill/>
-          <a:ln/>
         </p:spPr>
         <p:txBody>
           <a:bodyPr wrap="square" lIns="0" tIns="0" rIns="0" bIns="0" rtlCol="0" anchor="t"/>
           <a:lstStyle/>
           <a:p>
-            <a:pPr indent="0" marL="0">
+            <a:pPr marL="0" indent="0">
               <a:lnSpc>
                 <a:spcPct val="100000"/>
               </a:lnSpc>
@@ -3099,9 +2913,9 @@
                 <a:solidFill>
                   <a:srgbClr val="FFFFFF"/>
                 </a:solidFill>
-                <a:latin typeface="Calibri" pitchFamily="34" charset="0"/>
-                <a:ea typeface="Calibri" pitchFamily="34" charset="-122"/>
-                <a:cs typeface="Calibri" pitchFamily="34" charset="-120"/>
+                <a:latin typeface="Calibri" panose="020F0502020204030204" pitchFamily="34" charset="0"/>
+                <a:ea typeface="Calibri" panose="020F0502020204030204" pitchFamily="34" charset="-122"/>
+                <a:cs typeface="Calibri" panose="020F0502020204030204" pitchFamily="34" charset="-120"/>
               </a:rPr>
               <a:t>Multi-tenant isolation</a:t>
             </a:r>
@@ -3124,13 +2938,12 @@
             <a:avLst/>
           </a:prstGeom>
           <a:noFill/>
-          <a:ln/>
         </p:spPr>
         <p:txBody>
           <a:bodyPr wrap="square" lIns="0" tIns="0" rIns="0" bIns="0" rtlCol="0" anchor="t"/>
           <a:lstStyle/>
           <a:p>
-            <a:pPr indent="0" marL="0">
+            <a:pPr marL="0" indent="0">
               <a:lnSpc>
                 <a:spcPct val="112000"/>
               </a:lnSpc>
@@ -3141,9 +2954,9 @@
                 <a:solidFill>
                   <a:srgbClr val="94A3B8"/>
                 </a:solidFill>
-                <a:latin typeface="Calibri" pitchFamily="34" charset="0"/>
-                <a:ea typeface="Calibri" pitchFamily="34" charset="-122"/>
-                <a:cs typeface="Calibri" pitchFamily="34" charset="-120"/>
+                <a:latin typeface="Calibri" panose="020F0502020204030204" pitchFamily="34" charset="0"/>
+                <a:ea typeface="Calibri" panose="020F0502020204030204" pitchFamily="34" charset="-122"/>
+                <a:cs typeface="Calibri" panose="020F0502020204030204" pitchFamily="34" charset="-120"/>
               </a:rPr>
               <a:t>Your school's students, scores and finances are completely walled off from every other school — enforced at the data layer, not just the screen.</a:t>
             </a:r>
@@ -3197,7 +3010,6 @@
           <a:solidFill>
             <a:srgbClr val="10B981"/>
           </a:solidFill>
-          <a:ln/>
         </p:spPr>
       </p:sp>
       <p:sp>
@@ -3215,13 +3027,12 @@
             <a:avLst/>
           </a:prstGeom>
           <a:noFill/>
-          <a:ln/>
         </p:spPr>
         <p:txBody>
           <a:bodyPr wrap="square" lIns="0" tIns="0" rIns="0" bIns="0" rtlCol="0" anchor="ctr"/>
           <a:lstStyle/>
           <a:p>
-            <a:pPr algn="ctr" indent="0" marL="0">
+            <a:pPr marL="0" indent="0" algn="ctr">
               <a:buNone/>
             </a:pPr>
             <a:r>
@@ -3229,9 +3040,9 @@
                 <a:solidFill>
                   <a:srgbClr val="FFFFFF"/>
                 </a:solidFill>
-                <a:latin typeface="Calibri" pitchFamily="34" charset="0"/>
-                <a:ea typeface="Calibri" pitchFamily="34" charset="-122"/>
-                <a:cs typeface="Calibri" pitchFamily="34" charset="-120"/>
+                <a:latin typeface="Calibri" panose="020F0502020204030204" pitchFamily="34" charset="0"/>
+                <a:ea typeface="Calibri" panose="020F0502020204030204" pitchFamily="34" charset="-122"/>
+                <a:cs typeface="Calibri" panose="020F0502020204030204" pitchFamily="34" charset="-120"/>
               </a:rPr>
               <a:t>✓</a:t>
             </a:r>
@@ -3254,13 +3065,12 @@
             <a:avLst/>
           </a:prstGeom>
           <a:noFill/>
-          <a:ln/>
         </p:spPr>
         <p:txBody>
           <a:bodyPr wrap="square" lIns="0" tIns="0" rIns="0" bIns="0" rtlCol="0" anchor="t"/>
           <a:lstStyle/>
           <a:p>
-            <a:pPr indent="0" marL="0">
+            <a:pPr marL="0" indent="0">
               <a:lnSpc>
                 <a:spcPct val="100000"/>
               </a:lnSpc>
@@ -3271,9 +3081,9 @@
                 <a:solidFill>
                   <a:srgbClr val="FFFFFF"/>
                 </a:solidFill>
-                <a:latin typeface="Calibri" pitchFamily="34" charset="0"/>
-                <a:ea typeface="Calibri" pitchFamily="34" charset="-122"/>
-                <a:cs typeface="Calibri" pitchFamily="34" charset="-120"/>
+                <a:latin typeface="Calibri" panose="020F0502020204030204" pitchFamily="34" charset="0"/>
+                <a:ea typeface="Calibri" panose="020F0502020204030204" pitchFamily="34" charset="-122"/>
+                <a:cs typeface="Calibri" panose="020F0502020204030204" pitchFamily="34" charset="-120"/>
               </a:rPr>
               <a:t>Role-based portals</a:t>
             </a:r>
@@ -3296,13 +3106,12 @@
             <a:avLst/>
           </a:prstGeom>
           <a:noFill/>
-          <a:ln/>
         </p:spPr>
         <p:txBody>
           <a:bodyPr wrap="square" lIns="0" tIns="0" rIns="0" bIns="0" rtlCol="0" anchor="t"/>
           <a:lstStyle/>
           <a:p>
-            <a:pPr indent="0" marL="0">
+            <a:pPr marL="0" indent="0">
               <a:lnSpc>
                 <a:spcPct val="112000"/>
               </a:lnSpc>
@@ -3313,9 +3122,9 @@
                 <a:solidFill>
                   <a:srgbClr val="94A3B8"/>
                 </a:solidFill>
-                <a:latin typeface="Calibri" pitchFamily="34" charset="0"/>
-                <a:ea typeface="Calibri" pitchFamily="34" charset="-122"/>
-                <a:cs typeface="Calibri" pitchFamily="34" charset="-120"/>
+                <a:latin typeface="Calibri" panose="020F0502020204030204" pitchFamily="34" charset="0"/>
+                <a:ea typeface="Calibri" panose="020F0502020204030204" pitchFamily="34" charset="-122"/>
+                <a:cs typeface="Calibri" panose="020F0502020204030204" pitchFamily="34" charset="-120"/>
               </a:rPr>
               <a:t>Super Admin, Teacher, Student and Parent each see exactly their own world — nothing more, nothing less.</a:t>
             </a:r>
@@ -3369,7 +3178,6 @@
           <a:solidFill>
             <a:srgbClr val="2563EB"/>
           </a:solidFill>
-          <a:ln/>
         </p:spPr>
       </p:sp>
       <p:sp>
@@ -3387,13 +3195,12 @@
             <a:avLst/>
           </a:prstGeom>
           <a:noFill/>
-          <a:ln/>
         </p:spPr>
         <p:txBody>
           <a:bodyPr wrap="square" lIns="0" tIns="0" rIns="0" bIns="0" rtlCol="0" anchor="ctr"/>
           <a:lstStyle/>
           <a:p>
-            <a:pPr algn="ctr" indent="0" marL="0">
+            <a:pPr marL="0" indent="0" algn="ctr">
               <a:buNone/>
             </a:pPr>
             <a:r>
@@ -3401,9 +3208,9 @@
                 <a:solidFill>
                   <a:srgbClr val="FFFFFF"/>
                 </a:solidFill>
-                <a:latin typeface="Calibri" pitchFamily="34" charset="0"/>
-                <a:ea typeface="Calibri" pitchFamily="34" charset="-122"/>
-                <a:cs typeface="Calibri" pitchFamily="34" charset="-120"/>
+                <a:latin typeface="Calibri" panose="020F0502020204030204" pitchFamily="34" charset="0"/>
+                <a:ea typeface="Calibri" panose="020F0502020204030204" pitchFamily="34" charset="-122"/>
+                <a:cs typeface="Calibri" panose="020F0502020204030204" pitchFamily="34" charset="-120"/>
               </a:rPr>
               <a:t>☁</a:t>
             </a:r>
@@ -3426,13 +3233,12 @@
             <a:avLst/>
           </a:prstGeom>
           <a:noFill/>
-          <a:ln/>
         </p:spPr>
         <p:txBody>
           <a:bodyPr wrap="square" lIns="0" tIns="0" rIns="0" bIns="0" rtlCol="0" anchor="t"/>
           <a:lstStyle/>
           <a:p>
-            <a:pPr indent="0" marL="0">
+            <a:pPr marL="0" indent="0">
               <a:lnSpc>
                 <a:spcPct val="100000"/>
               </a:lnSpc>
@@ -3443,9 +3249,9 @@
                 <a:solidFill>
                   <a:srgbClr val="FFFFFF"/>
                 </a:solidFill>
-                <a:latin typeface="Calibri" pitchFamily="34" charset="0"/>
-                <a:ea typeface="Calibri" pitchFamily="34" charset="-122"/>
-                <a:cs typeface="Calibri" pitchFamily="34" charset="-120"/>
+                <a:latin typeface="Calibri" panose="020F0502020204030204" pitchFamily="34" charset="0"/>
+                <a:ea typeface="Calibri" panose="020F0502020204030204" pitchFamily="34" charset="-122"/>
+                <a:cs typeface="Calibri" panose="020F0502020204030204" pitchFamily="34" charset="-120"/>
               </a:rPr>
               <a:t>Strong auth</a:t>
             </a:r>
@@ -3468,13 +3274,12 @@
             <a:avLst/>
           </a:prstGeom>
           <a:noFill/>
-          <a:ln/>
         </p:spPr>
         <p:txBody>
           <a:bodyPr wrap="square" lIns="0" tIns="0" rIns="0" bIns="0" rtlCol="0" anchor="t"/>
           <a:lstStyle/>
           <a:p>
-            <a:pPr indent="0" marL="0">
+            <a:pPr marL="0" indent="0">
               <a:lnSpc>
                 <a:spcPct val="112000"/>
               </a:lnSpc>
@@ -3485,9 +3290,9 @@
                 <a:solidFill>
                   <a:srgbClr val="94A3B8"/>
                 </a:solidFill>
-                <a:latin typeface="Calibri" pitchFamily="34" charset="0"/>
-                <a:ea typeface="Calibri" pitchFamily="34" charset="-122"/>
-                <a:cs typeface="Calibri" pitchFamily="34" charset="-120"/>
+                <a:latin typeface="Calibri" panose="020F0502020204030204" pitchFamily="34" charset="0"/>
+                <a:ea typeface="Calibri" panose="020F0502020204030204" pitchFamily="34" charset="-122"/>
+                <a:cs typeface="Calibri" panose="020F0502020204030204" pitchFamily="34" charset="-120"/>
               </a:rPr>
               <a:t>Passwords are hashed, sessions use secure cookies, and every request is verified server-side.</a:t>
             </a:r>
@@ -3541,7 +3346,6 @@
           <a:solidFill>
             <a:srgbClr val="F59E0B"/>
           </a:solidFill>
-          <a:ln/>
         </p:spPr>
       </p:sp>
       <p:sp>
@@ -3559,13 +3363,12 @@
             <a:avLst/>
           </a:prstGeom>
           <a:noFill/>
-          <a:ln/>
         </p:spPr>
         <p:txBody>
           <a:bodyPr wrap="square" lIns="0" tIns="0" rIns="0" bIns="0" rtlCol="0" anchor="ctr"/>
           <a:lstStyle/>
           <a:p>
-            <a:pPr algn="ctr" indent="0" marL="0">
+            <a:pPr marL="0" indent="0" algn="ctr">
               <a:buNone/>
             </a:pPr>
             <a:r>
@@ -3573,9 +3376,9 @@
                 <a:solidFill>
                   <a:srgbClr val="FFFFFF"/>
                 </a:solidFill>
-                <a:latin typeface="Calibri" pitchFamily="34" charset="0"/>
-                <a:ea typeface="Calibri" pitchFamily="34" charset="-122"/>
-                <a:cs typeface="Calibri" pitchFamily="34" charset="-120"/>
+                <a:latin typeface="Calibri" panose="020F0502020204030204" pitchFamily="34" charset="0"/>
+                <a:ea typeface="Calibri" panose="020F0502020204030204" pitchFamily="34" charset="-122"/>
+                <a:cs typeface="Calibri" panose="020F0502020204030204" pitchFamily="34" charset="-120"/>
               </a:rPr>
               <a:t>✉</a:t>
             </a:r>
@@ -3598,13 +3401,12 @@
             <a:avLst/>
           </a:prstGeom>
           <a:noFill/>
-          <a:ln/>
         </p:spPr>
         <p:txBody>
           <a:bodyPr wrap="square" lIns="0" tIns="0" rIns="0" bIns="0" rtlCol="0" anchor="t"/>
           <a:lstStyle/>
           <a:p>
-            <a:pPr indent="0" marL="0">
+            <a:pPr marL="0" indent="0">
               <a:lnSpc>
                 <a:spcPct val="100000"/>
               </a:lnSpc>
@@ -3615,9 +3417,9 @@
                 <a:solidFill>
                   <a:srgbClr val="FFFFFF"/>
                 </a:solidFill>
-                <a:latin typeface="Calibri" pitchFamily="34" charset="0"/>
-                <a:ea typeface="Calibri" pitchFamily="34" charset="-122"/>
-                <a:cs typeface="Calibri" pitchFamily="34" charset="-120"/>
+                <a:latin typeface="Calibri" panose="020F0502020204030204" pitchFamily="34" charset="0"/>
+                <a:ea typeface="Calibri" panose="020F0502020204030204" pitchFamily="34" charset="-122"/>
+                <a:cs typeface="Calibri" panose="020F0502020204030204" pitchFamily="34" charset="-120"/>
               </a:rPr>
               <a:t>Cloud-hosted &amp; backed up</a:t>
             </a:r>
@@ -3640,13 +3442,12 @@
             <a:avLst/>
           </a:prstGeom>
           <a:noFill/>
-          <a:ln/>
         </p:spPr>
         <p:txBody>
           <a:bodyPr wrap="square" lIns="0" tIns="0" rIns="0" bIns="0" rtlCol="0" anchor="t"/>
           <a:lstStyle/>
           <a:p>
-            <a:pPr indent="0" marL="0">
+            <a:pPr marL="0" indent="0">
               <a:lnSpc>
                 <a:spcPct val="112000"/>
               </a:lnSpc>
@@ -3657,9 +3458,9 @@
                 <a:solidFill>
                   <a:srgbClr val="94A3B8"/>
                 </a:solidFill>
-                <a:latin typeface="Calibri" pitchFamily="34" charset="0"/>
-                <a:ea typeface="Calibri" pitchFamily="34" charset="-122"/>
-                <a:cs typeface="Calibri" pitchFamily="34" charset="-120"/>
+                <a:latin typeface="Calibri" panose="020F0502020204030204" pitchFamily="34" charset="0"/>
+                <a:ea typeface="Calibri" panose="020F0502020204030204" pitchFamily="34" charset="-122"/>
+                <a:cs typeface="Calibri" panose="020F0502020204030204" pitchFamily="34" charset="-120"/>
               </a:rPr>
               <a:t>Works from anywhere, on any device — with your data safe in the cloud, not in a filing cabinet.</a:t>
             </a:r>
@@ -3682,13 +3483,12 @@
             <a:avLst/>
           </a:prstGeom>
           <a:noFill/>
-          <a:ln/>
         </p:spPr>
         <p:txBody>
           <a:bodyPr wrap="square" lIns="0" tIns="0" rIns="0" bIns="0" rtlCol="0" anchor="ctr"/>
           <a:lstStyle/>
           <a:p>
-            <a:pPr indent="0" marL="0">
+            <a:pPr marL="0" indent="0">
               <a:buNone/>
             </a:pPr>
             <a:r>
@@ -3696,9 +3496,9 @@
                 <a:solidFill>
                   <a:srgbClr val="64748B"/>
                 </a:solidFill>
-                <a:latin typeface="Calibri" pitchFamily="34" charset="0"/>
-                <a:ea typeface="Calibri" pitchFamily="34" charset="-122"/>
-                <a:cs typeface="Calibri" pitchFamily="34" charset="-120"/>
+                <a:latin typeface="Calibri" panose="020F0502020204030204" pitchFamily="34" charset="0"/>
+                <a:ea typeface="Calibri" panose="020F0502020204030204" pitchFamily="34" charset="-122"/>
+                <a:cs typeface="Calibri" panose="020F0502020204030204" pitchFamily="34" charset="-120"/>
               </a:rPr>
               <a:t>EduTrack — School Management Platform</a:t>
             </a:r>
@@ -3721,13 +3521,12 @@
             <a:avLst/>
           </a:prstGeom>
           <a:noFill/>
-          <a:ln/>
         </p:spPr>
         <p:txBody>
           <a:bodyPr wrap="square" lIns="0" tIns="0" rIns="0" bIns="0" rtlCol="0" anchor="ctr"/>
           <a:lstStyle/>
           <a:p>
-            <a:pPr algn="r" indent="0" marL="0">
+            <a:pPr marL="0" indent="0" algn="r">
               <a:buNone/>
             </a:pPr>
             <a:r>
@@ -3735,9 +3534,9 @@
                 <a:solidFill>
                   <a:srgbClr val="94A3B8"/>
                 </a:solidFill>
-                <a:latin typeface="Calibri" pitchFamily="34" charset="0"/>
-                <a:ea typeface="Calibri" pitchFamily="34" charset="-122"/>
-                <a:cs typeface="Calibri" pitchFamily="34" charset="-120"/>
+                <a:latin typeface="Calibri" panose="020F0502020204030204" pitchFamily="34" charset="0"/>
+                <a:ea typeface="Calibri" panose="020F0502020204030204" pitchFamily="34" charset="-122"/>
+                <a:cs typeface="Calibri" panose="020F0502020204030204" pitchFamily="34" charset="-120"/>
               </a:rPr>
               <a:t>10</a:t>
             </a:r>
@@ -3755,12 +3554,13 @@
 
 <file path=ppt/slides/slide11.xml><?xml version="1.0" encoding="utf-8"?>
 <p:sld xmlns:a="http://schemas.openxmlformats.org/drawingml/2006/main" xmlns:r="http://schemas.openxmlformats.org/officeDocument/2006/relationships" xmlns:p="http://schemas.openxmlformats.org/presentationml/2006/main">
-  <p:cSld name="Slide 11">
+  <p:cSld>
     <p:bg>
       <p:bgPr>
         <a:solidFill>
           <a:srgbClr val="0F172A"/>
         </a:solidFill>
+        <a:effectLst/>
       </p:bgPr>
     </p:bg>
     <p:spTree>
@@ -3796,7 +3596,6 @@
               <a:alpha val="8000"/>
             </a:srgbClr>
           </a:solidFill>
-          <a:ln/>
         </p:spPr>
       </p:sp>
       <p:sp>
@@ -3814,23 +3613,22 @@
             <a:avLst/>
           </a:prstGeom>
           <a:noFill/>
-          <a:ln/>
         </p:spPr>
         <p:txBody>
           <a:bodyPr wrap="square" lIns="0" tIns="0" rIns="0" bIns="0" rtlCol="0" anchor="ctr"/>
           <a:lstStyle/>
           <a:p>
-            <a:pPr algn="l" indent="0" marL="0">
-              <a:buNone/>
-            </a:pPr>
-            <a:r>
-              <a:rPr lang="en-US" sz="1100" b="1" spc="300" kern="0" dirty="0">
+            <a:pPr marL="0" indent="0" algn="l">
+              <a:buNone/>
+            </a:pPr>
+            <a:r>
+              <a:rPr lang="en-US" sz="1100" b="1" kern="0" spc="300" dirty="0">
                 <a:solidFill>
                   <a:srgbClr val="60A5FA"/>
                 </a:solidFill>
-                <a:latin typeface="Calibri" pitchFamily="34" charset="0"/>
-                <a:ea typeface="Calibri" pitchFamily="34" charset="-122"/>
-                <a:cs typeface="Calibri" pitchFamily="34" charset="-120"/>
+                <a:latin typeface="Calibri" panose="020F0502020204030204" pitchFamily="34" charset="0"/>
+                <a:ea typeface="Calibri" panose="020F0502020204030204" pitchFamily="34" charset="-122"/>
+                <a:cs typeface="Calibri" panose="020F0502020204030204" pitchFamily="34" charset="-120"/>
               </a:rPr>
               <a:t>GETTING STARTED</a:t>
             </a:r>
@@ -3853,13 +3651,12 @@
             <a:avLst/>
           </a:prstGeom>
           <a:noFill/>
-          <a:ln/>
         </p:spPr>
         <p:txBody>
           <a:bodyPr wrap="square" lIns="0" tIns="0" rIns="0" bIns="0" rtlCol="0" anchor="t"/>
           <a:lstStyle/>
           <a:p>
-            <a:pPr algn="l" indent="0" marL="0">
+            <a:pPr marL="0" indent="0" algn="l">
               <a:lnSpc>
                 <a:spcPct val="106000"/>
               </a:lnSpc>
@@ -3870,26 +3667,20 @@
                 <a:solidFill>
                   <a:srgbClr val="FFFFFF"/>
                 </a:solidFill>
-                <a:latin typeface="Cambria" pitchFamily="34" charset="0"/>
-                <a:ea typeface="Cambria" pitchFamily="34" charset="-122"/>
-                <a:cs typeface="Cambria" pitchFamily="34" charset="-120"/>
+                <a:latin typeface="Cambria" panose="02040503050406030204" pitchFamily="34" charset="0"/>
+                <a:ea typeface="Cambria" panose="02040503050406030204" pitchFamily="34" charset="-122"/>
+                <a:cs typeface="Cambria" panose="02040503050406030204" pitchFamily="34" charset="-120"/>
               </a:rPr>
               <a:t>Live in </a:t>
             </a:r>
-            <a:pPr algn="l" indent="0" marL="0">
-              <a:lnSpc>
-                <a:spcPct val="106000"/>
-              </a:lnSpc>
-              <a:buNone/>
-            </a:pPr>
             <a:r>
               <a:rPr lang="en-US" sz="2900" b="1" dirty="0">
                 <a:solidFill>
                   <a:srgbClr val="FFFFFF"/>
                 </a:solidFill>
-                <a:latin typeface="Cambria" pitchFamily="34" charset="0"/>
-                <a:ea typeface="Cambria" pitchFamily="34" charset="-122"/>
-                <a:cs typeface="Cambria" pitchFamily="34" charset="-120"/>
+                <a:latin typeface="Cambria" panose="02040503050406030204" pitchFamily="34" charset="0"/>
+                <a:ea typeface="Cambria" panose="02040503050406030204" pitchFamily="34" charset="-122"/>
+                <a:cs typeface="Cambria" panose="02040503050406030204" pitchFamily="34" charset="-120"/>
               </a:rPr>
               <a:t>four simple steps</a:t>
             </a:r>
@@ -3939,13 +3730,12 @@
             <a:avLst/>
           </a:prstGeom>
           <a:noFill/>
-          <a:ln/>
         </p:spPr>
         <p:txBody>
           <a:bodyPr wrap="square" lIns="0" tIns="0" rIns="0" bIns="0" rtlCol="0" anchor="ctr"/>
           <a:lstStyle/>
           <a:p>
-            <a:pPr algn="l" indent="0" marL="0">
+            <a:pPr marL="0" indent="0" algn="l">
               <a:buNone/>
             </a:pPr>
             <a:r>
@@ -3953,9 +3743,9 @@
                 <a:solidFill>
                   <a:srgbClr val="60A5FA"/>
                 </a:solidFill>
-                <a:latin typeface="Cambria" pitchFamily="34" charset="0"/>
-                <a:ea typeface="Cambria" pitchFamily="34" charset="-122"/>
-                <a:cs typeface="Cambria" pitchFamily="34" charset="-120"/>
+                <a:latin typeface="Cambria" panose="02040503050406030204" pitchFamily="34" charset="0"/>
+                <a:ea typeface="Cambria" panose="02040503050406030204" pitchFamily="34" charset="-122"/>
+                <a:cs typeface="Cambria" panose="02040503050406030204" pitchFamily="34" charset="-120"/>
               </a:rPr>
               <a:t>01</a:t>
             </a:r>
@@ -3978,13 +3768,12 @@
             <a:avLst/>
           </a:prstGeom>
           <a:noFill/>
-          <a:ln/>
         </p:spPr>
         <p:txBody>
           <a:bodyPr wrap="square" lIns="0" tIns="0" rIns="0" bIns="0" rtlCol="0" anchor="ctr"/>
           <a:lstStyle/>
           <a:p>
-            <a:pPr indent="0" marL="0">
+            <a:pPr marL="0" indent="0">
               <a:buNone/>
             </a:pPr>
             <a:r>
@@ -3992,9 +3781,9 @@
                 <a:solidFill>
                   <a:srgbClr val="FFFFFF"/>
                 </a:solidFill>
-                <a:latin typeface="Calibri" pitchFamily="34" charset="0"/>
-                <a:ea typeface="Calibri" pitchFamily="34" charset="-122"/>
-                <a:cs typeface="Calibri" pitchFamily="34" charset="-120"/>
+                <a:latin typeface="Calibri" panose="020F0502020204030204" pitchFamily="34" charset="0"/>
+                <a:ea typeface="Calibri" panose="020F0502020204030204" pitchFamily="34" charset="-122"/>
+                <a:cs typeface="Calibri" panose="020F0502020204030204" pitchFamily="34" charset="-120"/>
               </a:rPr>
               <a:t>Register your school</a:t>
             </a:r>
@@ -4017,13 +3806,12 @@
             <a:avLst/>
           </a:prstGeom>
           <a:noFill/>
-          <a:ln/>
         </p:spPr>
         <p:txBody>
           <a:bodyPr wrap="square" lIns="0" tIns="0" rIns="0" bIns="0" rtlCol="0" anchor="t"/>
           <a:lstStyle/>
           <a:p>
-            <a:pPr indent="0" marL="0">
+            <a:pPr marL="0" indent="0">
               <a:lnSpc>
                 <a:spcPct val="114000"/>
               </a:lnSpc>
@@ -4034,9 +3822,9 @@
                 <a:solidFill>
                   <a:srgbClr val="94A3B8"/>
                 </a:solidFill>
-                <a:latin typeface="Calibri" pitchFamily="34" charset="0"/>
-                <a:ea typeface="Calibri" pitchFamily="34" charset="-122"/>
-                <a:cs typeface="Calibri" pitchFamily="34" charset="-120"/>
+                <a:latin typeface="Calibri" panose="020F0502020204030204" pitchFamily="34" charset="0"/>
+                <a:ea typeface="Calibri" panose="020F0502020204030204" pitchFamily="34" charset="-122"/>
+                <a:cs typeface="Calibri" panose="020F0502020204030204" pitchFamily="34" charset="-120"/>
               </a:rPr>
               <a:t>Create your account in under a minute. No card, no contract.</a:t>
             </a:r>
@@ -4086,13 +3874,12 @@
             <a:avLst/>
           </a:prstGeom>
           <a:noFill/>
-          <a:ln/>
         </p:spPr>
         <p:txBody>
           <a:bodyPr wrap="square" lIns="0" tIns="0" rIns="0" bIns="0" rtlCol="0" anchor="ctr"/>
           <a:lstStyle/>
           <a:p>
-            <a:pPr algn="l" indent="0" marL="0">
+            <a:pPr marL="0" indent="0" algn="l">
               <a:buNone/>
             </a:pPr>
             <a:r>
@@ -4100,9 +3887,9 @@
                 <a:solidFill>
                   <a:srgbClr val="60A5FA"/>
                 </a:solidFill>
-                <a:latin typeface="Cambria" pitchFamily="34" charset="0"/>
-                <a:ea typeface="Cambria" pitchFamily="34" charset="-122"/>
-                <a:cs typeface="Cambria" pitchFamily="34" charset="-120"/>
+                <a:latin typeface="Cambria" panose="02040503050406030204" pitchFamily="34" charset="0"/>
+                <a:ea typeface="Cambria" panose="02040503050406030204" pitchFamily="34" charset="-122"/>
+                <a:cs typeface="Cambria" panose="02040503050406030204" pitchFamily="34" charset="-120"/>
               </a:rPr>
               <a:t>02</a:t>
             </a:r>
@@ -4125,13 +3912,12 @@
             <a:avLst/>
           </a:prstGeom>
           <a:noFill/>
-          <a:ln/>
         </p:spPr>
         <p:txBody>
           <a:bodyPr wrap="square" lIns="0" tIns="0" rIns="0" bIns="0" rtlCol="0" anchor="ctr"/>
           <a:lstStyle/>
           <a:p>
-            <a:pPr indent="0" marL="0">
+            <a:pPr marL="0" indent="0">
               <a:buNone/>
             </a:pPr>
             <a:r>
@@ -4139,9 +3925,9 @@
                 <a:solidFill>
                   <a:srgbClr val="FFFFFF"/>
                 </a:solidFill>
-                <a:latin typeface="Calibri" pitchFamily="34" charset="0"/>
-                <a:ea typeface="Calibri" pitchFamily="34" charset="-122"/>
-                <a:cs typeface="Calibri" pitchFamily="34" charset="-120"/>
+                <a:latin typeface="Calibri" panose="020F0502020204030204" pitchFamily="34" charset="0"/>
+                <a:ea typeface="Calibri" panose="020F0502020204030204" pitchFamily="34" charset="-122"/>
+                <a:cs typeface="Calibri" panose="020F0502020204030204" pitchFamily="34" charset="-120"/>
               </a:rPr>
               <a:t>Onboard your school</a:t>
             </a:r>
@@ -4164,13 +3950,12 @@
             <a:avLst/>
           </a:prstGeom>
           <a:noFill/>
-          <a:ln/>
         </p:spPr>
         <p:txBody>
           <a:bodyPr wrap="square" lIns="0" tIns="0" rIns="0" bIns="0" rtlCol="0" anchor="t"/>
           <a:lstStyle/>
           <a:p>
-            <a:pPr indent="0" marL="0">
+            <a:pPr marL="0" indent="0">
               <a:lnSpc>
                 <a:spcPct val="114000"/>
               </a:lnSpc>
@@ -4181,9 +3966,9 @@
                 <a:solidFill>
                   <a:srgbClr val="94A3B8"/>
                 </a:solidFill>
-                <a:latin typeface="Calibri" pitchFamily="34" charset="0"/>
-                <a:ea typeface="Calibri" pitchFamily="34" charset="-122"/>
-                <a:cs typeface="Calibri" pitchFamily="34" charset="-120"/>
+                <a:latin typeface="Calibri" panose="020F0502020204030204" pitchFamily="34" charset="0"/>
+                <a:ea typeface="Calibri" panose="020F0502020204030204" pitchFamily="34" charset="-122"/>
+                <a:cs typeface="Calibri" panose="020F0502020204030204" pitchFamily="34" charset="-120"/>
               </a:rPr>
               <a:t>Set class arms (SS1 Science, JSS…), the term calendar and your branding.</a:t>
             </a:r>
@@ -4233,13 +4018,12 @@
             <a:avLst/>
           </a:prstGeom>
           <a:noFill/>
-          <a:ln/>
         </p:spPr>
         <p:txBody>
           <a:bodyPr wrap="square" lIns="0" tIns="0" rIns="0" bIns="0" rtlCol="0" anchor="ctr"/>
           <a:lstStyle/>
           <a:p>
-            <a:pPr algn="l" indent="0" marL="0">
+            <a:pPr marL="0" indent="0" algn="l">
               <a:buNone/>
             </a:pPr>
             <a:r>
@@ -4247,9 +4031,9 @@
                 <a:solidFill>
                   <a:srgbClr val="60A5FA"/>
                 </a:solidFill>
-                <a:latin typeface="Cambria" pitchFamily="34" charset="0"/>
-                <a:ea typeface="Cambria" pitchFamily="34" charset="-122"/>
-                <a:cs typeface="Cambria" pitchFamily="34" charset="-120"/>
+                <a:latin typeface="Cambria" panose="02040503050406030204" pitchFamily="34" charset="0"/>
+                <a:ea typeface="Cambria" panose="02040503050406030204" pitchFamily="34" charset="-122"/>
+                <a:cs typeface="Cambria" panose="02040503050406030204" pitchFamily="34" charset="-120"/>
               </a:rPr>
               <a:t>03</a:t>
             </a:r>
@@ -4272,13 +4056,12 @@
             <a:avLst/>
           </a:prstGeom>
           <a:noFill/>
-          <a:ln/>
         </p:spPr>
         <p:txBody>
           <a:bodyPr wrap="square" lIns="0" tIns="0" rIns="0" bIns="0" rtlCol="0" anchor="ctr"/>
           <a:lstStyle/>
           <a:p>
-            <a:pPr indent="0" marL="0">
+            <a:pPr marL="0" indent="0">
               <a:buNone/>
             </a:pPr>
             <a:r>
@@ -4286,9 +4069,9 @@
                 <a:solidFill>
                   <a:srgbClr val="FFFFFF"/>
                 </a:solidFill>
-                <a:latin typeface="Calibri" pitchFamily="34" charset="0"/>
-                <a:ea typeface="Calibri" pitchFamily="34" charset="-122"/>
-                <a:cs typeface="Calibri" pitchFamily="34" charset="-120"/>
+                <a:latin typeface="Calibri" panose="020F0502020204030204" pitchFamily="34" charset="0"/>
+                <a:ea typeface="Calibri" panose="020F0502020204030204" pitchFamily="34" charset="-122"/>
+                <a:cs typeface="Calibri" panose="020F0502020204030204" pitchFamily="34" charset="-120"/>
               </a:rPr>
               <a:t>Add your people</a:t>
             </a:r>
@@ -4311,13 +4094,12 @@
             <a:avLst/>
           </a:prstGeom>
           <a:noFill/>
-          <a:ln/>
         </p:spPr>
         <p:txBody>
           <a:bodyPr wrap="square" lIns="0" tIns="0" rIns="0" bIns="0" rtlCol="0" anchor="t"/>
           <a:lstStyle/>
           <a:p>
-            <a:pPr indent="0" marL="0">
+            <a:pPr marL="0" indent="0">
               <a:lnSpc>
                 <a:spcPct val="114000"/>
               </a:lnSpc>
@@ -4328,9 +4110,9 @@
                 <a:solidFill>
                   <a:srgbClr val="94A3B8"/>
                 </a:solidFill>
-                <a:latin typeface="Calibri" pitchFamily="34" charset="0"/>
-                <a:ea typeface="Calibri" pitchFamily="34" charset="-122"/>
-                <a:cs typeface="Calibri" pitchFamily="34" charset="-120"/>
+                <a:latin typeface="Calibri" panose="020F0502020204030204" pitchFamily="34" charset="0"/>
+                <a:ea typeface="Calibri" panose="020F0502020204030204" pitchFamily="34" charset="-122"/>
+                <a:cs typeface="Calibri" panose="020F0502020204030204" pitchFamily="34" charset="-120"/>
               </a:rPr>
               <a:t>Teachers, students and parents in minutes. Set fee structures per class.</a:t>
             </a:r>
@@ -4380,13 +4162,12 @@
             <a:avLst/>
           </a:prstGeom>
           <a:noFill/>
-          <a:ln/>
         </p:spPr>
         <p:txBody>
           <a:bodyPr wrap="square" lIns="0" tIns="0" rIns="0" bIns="0" rtlCol="0" anchor="ctr"/>
           <a:lstStyle/>
           <a:p>
-            <a:pPr algn="l" indent="0" marL="0">
+            <a:pPr marL="0" indent="0" algn="l">
               <a:buNone/>
             </a:pPr>
             <a:r>
@@ -4394,9 +4175,9 @@
                 <a:solidFill>
                   <a:srgbClr val="60A5FA"/>
                 </a:solidFill>
-                <a:latin typeface="Cambria" pitchFamily="34" charset="0"/>
-                <a:ea typeface="Cambria" pitchFamily="34" charset="-122"/>
-                <a:cs typeface="Cambria" pitchFamily="34" charset="-120"/>
+                <a:latin typeface="Cambria" panose="02040503050406030204" pitchFamily="34" charset="0"/>
+                <a:ea typeface="Cambria" panose="02040503050406030204" pitchFamily="34" charset="-122"/>
+                <a:cs typeface="Cambria" panose="02040503050406030204" pitchFamily="34" charset="-120"/>
               </a:rPr>
               <a:t>04</a:t>
             </a:r>
@@ -4419,13 +4200,12 @@
             <a:avLst/>
           </a:prstGeom>
           <a:noFill/>
-          <a:ln/>
         </p:spPr>
         <p:txBody>
           <a:bodyPr wrap="square" lIns="0" tIns="0" rIns="0" bIns="0" rtlCol="0" anchor="ctr"/>
           <a:lstStyle/>
           <a:p>
-            <a:pPr indent="0" marL="0">
+            <a:pPr marL="0" indent="0">
               <a:buNone/>
             </a:pPr>
             <a:r>
@@ -4433,9 +4213,9 @@
                 <a:solidFill>
                   <a:srgbClr val="FFFFFF"/>
                 </a:solidFill>
-                <a:latin typeface="Calibri" pitchFamily="34" charset="0"/>
-                <a:ea typeface="Calibri" pitchFamily="34" charset="-122"/>
-                <a:cs typeface="Calibri" pitchFamily="34" charset="-120"/>
+                <a:latin typeface="Calibri" panose="020F0502020204030204" pitchFamily="34" charset="0"/>
+                <a:ea typeface="Calibri" panose="020F0502020204030204" pitchFamily="34" charset="-122"/>
+                <a:cs typeface="Calibri" panose="020F0502020204030204" pitchFamily="34" charset="-120"/>
               </a:rPr>
               <a:t>Grade, mark &amp; collect</a:t>
             </a:r>
@@ -4458,13 +4238,12 @@
             <a:avLst/>
           </a:prstGeom>
           <a:noFill/>
-          <a:ln/>
         </p:spPr>
         <p:txBody>
           <a:bodyPr wrap="square" lIns="0" tIns="0" rIns="0" bIns="0" rtlCol="0" anchor="t"/>
           <a:lstStyle/>
           <a:p>
-            <a:pPr indent="0" marL="0">
+            <a:pPr marL="0" indent="0">
               <a:lnSpc>
                 <a:spcPct val="114000"/>
               </a:lnSpc>
@@ -4475,9 +4254,9 @@
                 <a:solidFill>
                   <a:srgbClr val="94A3B8"/>
                 </a:solidFill>
-                <a:latin typeface="Calibri" pitchFamily="34" charset="0"/>
-                <a:ea typeface="Calibri" pitchFamily="34" charset="-122"/>
-                <a:cs typeface="Calibri" pitchFamily="34" charset="-120"/>
+                <a:latin typeface="Calibri" panose="020F0502020204030204" pitchFamily="34" charset="0"/>
+                <a:ea typeface="Calibri" panose="020F0502020204030204" pitchFamily="34" charset="-122"/>
+                <a:cs typeface="Calibri" panose="020F0502020204030204" pitchFamily="34" charset="-120"/>
               </a:rPr>
               <a:t>Teachers grade and mark daily. Parents see everything and pay online. Print report cards.</a:t>
             </a:r>
@@ -4500,13 +4279,12 @@
             <a:avLst/>
           </a:prstGeom>
           <a:noFill/>
-          <a:ln/>
         </p:spPr>
         <p:txBody>
           <a:bodyPr wrap="square" lIns="0" tIns="0" rIns="0" bIns="0" rtlCol="0" anchor="t"/>
           <a:lstStyle/>
           <a:p>
-            <a:pPr algn="l" indent="0" marL="0">
+            <a:pPr marL="0" indent="0" algn="l">
               <a:lnSpc>
                 <a:spcPct val="115000"/>
               </a:lnSpc>
@@ -4517,43 +4295,31 @@
                 <a:solidFill>
                   <a:srgbClr val="FFFFFF"/>
                 </a:solidFill>
-                <a:latin typeface="Calibri" pitchFamily="34" charset="0"/>
-                <a:ea typeface="Calibri" pitchFamily="34" charset="-122"/>
-                <a:cs typeface="Calibri" pitchFamily="34" charset="-120"/>
+                <a:latin typeface="Calibri" panose="020F0502020204030204" pitchFamily="34" charset="0"/>
+                <a:ea typeface="Calibri" panose="020F0502020204030204" pitchFamily="34" charset="-122"/>
+                <a:cs typeface="Calibri" panose="020F0502020204030204" pitchFamily="34" charset="-120"/>
               </a:rPr>
               <a:t>Start with </a:t>
             </a:r>
-            <a:pPr algn="l" indent="0" marL="0">
-              <a:lnSpc>
-                <a:spcPct val="115000"/>
-              </a:lnSpc>
-              <a:buNone/>
-            </a:pPr>
             <a:r>
               <a:rPr lang="en-US" sz="1600" b="1" dirty="0">
                 <a:solidFill>
                   <a:srgbClr val="FFFFFF"/>
                 </a:solidFill>
-                <a:latin typeface="Calibri" pitchFamily="34" charset="0"/>
-                <a:ea typeface="Calibri" pitchFamily="34" charset="-122"/>
-                <a:cs typeface="Calibri" pitchFamily="34" charset="-120"/>
+                <a:latin typeface="Calibri" panose="020F0502020204030204" pitchFamily="34" charset="0"/>
+                <a:ea typeface="Calibri" panose="020F0502020204030204" pitchFamily="34" charset="-122"/>
+                <a:cs typeface="Calibri" panose="020F0502020204030204" pitchFamily="34" charset="-120"/>
               </a:rPr>
               <a:t>one class arm this week</a:t>
             </a:r>
-            <a:pPr algn="l" indent="0" marL="0">
-              <a:lnSpc>
-                <a:spcPct val="115000"/>
-              </a:lnSpc>
-              <a:buNone/>
-            </a:pPr>
             <a:r>
               <a:rPr lang="en-US" sz="1600" b="1" dirty="0">
                 <a:solidFill>
                   <a:srgbClr val="FFFFFF"/>
                 </a:solidFill>
-                <a:latin typeface="Calibri" pitchFamily="34" charset="0"/>
-                <a:ea typeface="Calibri" pitchFamily="34" charset="-122"/>
-                <a:cs typeface="Calibri" pitchFamily="34" charset="-120"/>
+                <a:latin typeface="Calibri" panose="020F0502020204030204" pitchFamily="34" charset="0"/>
+                <a:ea typeface="Calibri" panose="020F0502020204030204" pitchFamily="34" charset="-122"/>
+                <a:cs typeface="Calibri" panose="020F0502020204030204" pitchFamily="34" charset="-120"/>
               </a:rPr>
               <a:t> — you'll be live before the next staff meeting.</a:t>
             </a:r>
@@ -4576,13 +4342,12 @@
             <a:avLst/>
           </a:prstGeom>
           <a:noFill/>
-          <a:ln/>
         </p:spPr>
         <p:txBody>
           <a:bodyPr wrap="square" lIns="0" tIns="0" rIns="0" bIns="0" rtlCol="0" anchor="ctr"/>
           <a:lstStyle/>
           <a:p>
-            <a:pPr indent="0" marL="0">
+            <a:pPr marL="0" indent="0">
               <a:buNone/>
             </a:pPr>
             <a:r>
@@ -4590,9 +4355,9 @@
                 <a:solidFill>
                   <a:srgbClr val="64748B"/>
                 </a:solidFill>
-                <a:latin typeface="Calibri" pitchFamily="34" charset="0"/>
-                <a:ea typeface="Calibri" pitchFamily="34" charset="-122"/>
-                <a:cs typeface="Calibri" pitchFamily="34" charset="-120"/>
+                <a:latin typeface="Calibri" panose="020F0502020204030204" pitchFamily="34" charset="0"/>
+                <a:ea typeface="Calibri" panose="020F0502020204030204" pitchFamily="34" charset="-122"/>
+                <a:cs typeface="Calibri" panose="020F0502020204030204" pitchFamily="34" charset="-120"/>
               </a:rPr>
               <a:t>EduTrack — School Management Platform</a:t>
             </a:r>
@@ -4615,13 +4380,12 @@
             <a:avLst/>
           </a:prstGeom>
           <a:noFill/>
-          <a:ln/>
         </p:spPr>
         <p:txBody>
           <a:bodyPr wrap="square" lIns="0" tIns="0" rIns="0" bIns="0" rtlCol="0" anchor="ctr"/>
           <a:lstStyle/>
           <a:p>
-            <a:pPr algn="r" indent="0" marL="0">
+            <a:pPr marL="0" indent="0" algn="r">
               <a:buNone/>
             </a:pPr>
             <a:r>
@@ -4629,9 +4393,9 @@
                 <a:solidFill>
                   <a:srgbClr val="94A3B8"/>
                 </a:solidFill>
-                <a:latin typeface="Calibri" pitchFamily="34" charset="0"/>
-                <a:ea typeface="Calibri" pitchFamily="34" charset="-122"/>
-                <a:cs typeface="Calibri" pitchFamily="34" charset="-120"/>
+                <a:latin typeface="Calibri" panose="020F0502020204030204" pitchFamily="34" charset="0"/>
+                <a:ea typeface="Calibri" panose="020F0502020204030204" pitchFamily="34" charset="-122"/>
+                <a:cs typeface="Calibri" panose="020F0502020204030204" pitchFamily="34" charset="-120"/>
               </a:rPr>
               <a:t>11</a:t>
             </a:r>
@@ -4649,12 +4413,13 @@
 
 <file path=ppt/slides/slide12.xml><?xml version="1.0" encoding="utf-8"?>
 <p:sld xmlns:a="http://schemas.openxmlformats.org/drawingml/2006/main" xmlns:r="http://schemas.openxmlformats.org/officeDocument/2006/relationships" xmlns:p="http://schemas.openxmlformats.org/presentationml/2006/main">
-  <p:cSld name="Slide 12">
+  <p:cSld>
     <p:bg>
       <p:bgPr>
         <a:solidFill>
           <a:srgbClr val="0F172A"/>
         </a:solidFill>
+        <a:effectLst/>
       </p:bgPr>
     </p:bg>
     <p:spTree>
@@ -4686,23 +4451,22 @@
             <a:avLst/>
           </a:prstGeom>
           <a:noFill/>
-          <a:ln/>
         </p:spPr>
         <p:txBody>
           <a:bodyPr wrap="square" lIns="0" tIns="0" rIns="0" bIns="0" rtlCol="0" anchor="ctr"/>
           <a:lstStyle/>
           <a:p>
-            <a:pPr algn="l" indent="0" marL="0">
-              <a:buNone/>
-            </a:pPr>
-            <a:r>
-              <a:rPr lang="en-US" sz="1100" b="1" spc="300" kern="0" dirty="0">
+            <a:pPr marL="0" indent="0" algn="l">
+              <a:buNone/>
+            </a:pPr>
+            <a:r>
+              <a:rPr lang="en-US" sz="1100" b="1" kern="0" spc="300" dirty="0">
                 <a:solidFill>
                   <a:srgbClr val="60A5FA"/>
                 </a:solidFill>
-                <a:latin typeface="Calibri" pitchFamily="34" charset="0"/>
-                <a:ea typeface="Calibri" pitchFamily="34" charset="-122"/>
-                <a:cs typeface="Calibri" pitchFamily="34" charset="-120"/>
+                <a:latin typeface="Calibri" panose="020F0502020204030204" pitchFamily="34" charset="0"/>
+                <a:ea typeface="Calibri" panose="020F0502020204030204" pitchFamily="34" charset="-122"/>
+                <a:cs typeface="Calibri" panose="020F0502020204030204" pitchFamily="34" charset="-120"/>
               </a:rPr>
               <a:t>ONE PLATFORM, FOUR PORTALS</a:t>
             </a:r>
@@ -4725,13 +4489,12 @@
             <a:avLst/>
           </a:prstGeom>
           <a:noFill/>
-          <a:ln/>
         </p:spPr>
         <p:txBody>
           <a:bodyPr wrap="square" lIns="0" tIns="0" rIns="0" bIns="0" rtlCol="0" anchor="t"/>
           <a:lstStyle/>
           <a:p>
-            <a:pPr algn="l" indent="0" marL="0">
+            <a:pPr marL="0" indent="0" algn="l">
               <a:lnSpc>
                 <a:spcPct val="106000"/>
               </a:lnSpc>
@@ -4742,26 +4505,20 @@
                 <a:solidFill>
                   <a:srgbClr val="FFFFFF"/>
                 </a:solidFill>
-                <a:latin typeface="Cambria" pitchFamily="34" charset="0"/>
-                <a:ea typeface="Cambria" pitchFamily="34" charset="-122"/>
-                <a:cs typeface="Cambria" pitchFamily="34" charset="-120"/>
+                <a:latin typeface="Cambria" panose="02040503050406030204" pitchFamily="34" charset="0"/>
+                <a:ea typeface="Cambria" panose="02040503050406030204" pitchFamily="34" charset="-122"/>
+                <a:cs typeface="Cambria" panose="02040503050406030204" pitchFamily="34" charset="-120"/>
               </a:rPr>
               <a:t>Everyone gets </a:t>
             </a:r>
-            <a:pPr algn="l" indent="0" marL="0">
-              <a:lnSpc>
-                <a:spcPct val="106000"/>
-              </a:lnSpc>
-              <a:buNone/>
-            </a:pPr>
             <a:r>
               <a:rPr lang="en-US" sz="2900" b="1" dirty="0">
                 <a:solidFill>
                   <a:srgbClr val="FFFFFF"/>
                 </a:solidFill>
-                <a:latin typeface="Cambria" pitchFamily="34" charset="0"/>
-                <a:ea typeface="Cambria" pitchFamily="34" charset="-122"/>
-                <a:cs typeface="Cambria" pitchFamily="34" charset="-120"/>
+                <a:latin typeface="Cambria" panose="02040503050406030204" pitchFamily="34" charset="0"/>
+                <a:ea typeface="Cambria" panose="02040503050406030204" pitchFamily="34" charset="-122"/>
+                <a:cs typeface="Cambria" panose="02040503050406030204" pitchFamily="34" charset="-120"/>
               </a:rPr>
               <a:t>their own view</a:t>
             </a:r>
@@ -4811,13 +4568,12 @@
             <a:avLst/>
           </a:prstGeom>
           <a:noFill/>
-          <a:ln/>
         </p:spPr>
         <p:txBody>
           <a:bodyPr wrap="square" lIns="0" tIns="0" rIns="0" bIns="0" rtlCol="0" anchor="ctr"/>
           <a:lstStyle/>
           <a:p>
-            <a:pPr indent="0" marL="0">
+            <a:pPr marL="0" indent="0">
               <a:buNone/>
             </a:pPr>
             <a:r>
@@ -4825,9 +4581,9 @@
                 <a:solidFill>
                   <a:srgbClr val="FFFFFF"/>
                 </a:solidFill>
-                <a:latin typeface="Cambria" pitchFamily="34" charset="0"/>
-                <a:ea typeface="Cambria" pitchFamily="34" charset="-122"/>
-                <a:cs typeface="Cambria" pitchFamily="34" charset="-120"/>
+                <a:latin typeface="Cambria" panose="02040503050406030204" pitchFamily="34" charset="0"/>
+                <a:ea typeface="Cambria" panose="02040503050406030204" pitchFamily="34" charset="-122"/>
+                <a:cs typeface="Cambria" panose="02040503050406030204" pitchFamily="34" charset="-120"/>
               </a:rPr>
               <a:t>Super Admin</a:t>
             </a:r>
@@ -4881,23 +4637,22 @@
             <a:avLst/>
           </a:prstGeom>
           <a:noFill/>
-          <a:ln/>
         </p:spPr>
         <p:txBody>
           <a:bodyPr wrap="square" lIns="0" tIns="0" rIns="0" bIns="0" rtlCol="0" anchor="ctr"/>
           <a:lstStyle/>
           <a:p>
-            <a:pPr algn="ctr" indent="0" marL="0">
-              <a:buNone/>
-            </a:pPr>
-            <a:r>
-              <a:rPr lang="en-US" sz="750" b="1" spc="100" kern="0" dirty="0">
+            <a:pPr marL="0" indent="0" algn="ctr">
+              <a:buNone/>
+            </a:pPr>
+            <a:r>
+              <a:rPr lang="en-US" sz="750" b="1" kern="0" spc="100" dirty="0">
                 <a:solidFill>
                   <a:srgbClr val="60A5FA"/>
                 </a:solidFill>
-                <a:latin typeface="Calibri" pitchFamily="34" charset="0"/>
-                <a:ea typeface="Calibri" pitchFamily="34" charset="-122"/>
-                <a:cs typeface="Calibri" pitchFamily="34" charset="-120"/>
+                <a:latin typeface="Calibri" panose="020F0502020204030204" pitchFamily="34" charset="0"/>
+                <a:ea typeface="Calibri" panose="020F0502020204030204" pitchFamily="34" charset="-122"/>
+                <a:cs typeface="Calibri" panose="020F0502020204030204" pitchFamily="34" charset="-120"/>
               </a:rPr>
               <a:t>OWNER / PROPRIETOR</a:t>
             </a:r>
@@ -4920,13 +4675,12 @@
             <a:avLst/>
           </a:prstGeom>
           <a:noFill/>
-          <a:ln/>
         </p:spPr>
         <p:txBody>
           <a:bodyPr wrap="square" lIns="0" tIns="0" rIns="0" bIns="0" rtlCol="0" anchor="t"/>
           <a:lstStyle/>
           <a:p>
-            <a:pPr indent="0" marL="0">
+            <a:pPr marL="0" indent="0">
               <a:lnSpc>
                 <a:spcPct val="114000"/>
               </a:lnSpc>
@@ -4937,9 +4691,9 @@
                 <a:solidFill>
                   <a:srgbClr val="94A3B8"/>
                 </a:solidFill>
-                <a:latin typeface="Calibri" pitchFamily="34" charset="0"/>
-                <a:ea typeface="Calibri" pitchFamily="34" charset="-122"/>
-                <a:cs typeface="Calibri" pitchFamily="34" charset="-120"/>
+                <a:latin typeface="Calibri" panose="020F0502020204030204" pitchFamily="34" charset="0"/>
+                <a:ea typeface="Calibri" panose="020F0502020204030204" pitchFamily="34" charset="-122"/>
+                <a:cs typeface="Calibri" panose="020F0502020204030204" pitchFamily="34" charset="-120"/>
               </a:rPr>
               <a:t>Everything: students, teachers, fees, payroll, report cards, and school settings.</a:t>
             </a:r>
@@ -4989,13 +4743,12 @@
             <a:avLst/>
           </a:prstGeom>
           <a:noFill/>
-          <a:ln/>
         </p:spPr>
         <p:txBody>
           <a:bodyPr wrap="square" lIns="0" tIns="0" rIns="0" bIns="0" rtlCol="0" anchor="ctr"/>
           <a:lstStyle/>
           <a:p>
-            <a:pPr indent="0" marL="0">
+            <a:pPr marL="0" indent="0">
               <a:buNone/>
             </a:pPr>
             <a:r>
@@ -5003,9 +4756,9 @@
                 <a:solidFill>
                   <a:srgbClr val="FFFFFF"/>
                 </a:solidFill>
-                <a:latin typeface="Cambria" pitchFamily="34" charset="0"/>
-                <a:ea typeface="Cambria" pitchFamily="34" charset="-122"/>
-                <a:cs typeface="Cambria" pitchFamily="34" charset="-120"/>
+                <a:latin typeface="Cambria" panose="02040503050406030204" pitchFamily="34" charset="0"/>
+                <a:ea typeface="Cambria" panose="02040503050406030204" pitchFamily="34" charset="-122"/>
+                <a:cs typeface="Cambria" panose="02040503050406030204" pitchFamily="34" charset="-120"/>
               </a:rPr>
               <a:t>Teacher</a:t>
             </a:r>
@@ -5059,23 +4812,22 @@
             <a:avLst/>
           </a:prstGeom>
           <a:noFill/>
-          <a:ln/>
         </p:spPr>
         <p:txBody>
           <a:bodyPr wrap="square" lIns="0" tIns="0" rIns="0" bIns="0" rtlCol="0" anchor="ctr"/>
           <a:lstStyle/>
           <a:p>
-            <a:pPr algn="ctr" indent="0" marL="0">
-              <a:buNone/>
-            </a:pPr>
-            <a:r>
-              <a:rPr lang="en-US" sz="750" b="1" spc="100" kern="0" dirty="0">
+            <a:pPr marL="0" indent="0" algn="ctr">
+              <a:buNone/>
+            </a:pPr>
+            <a:r>
+              <a:rPr lang="en-US" sz="750" b="1" kern="0" spc="100" dirty="0">
                 <a:solidFill>
                   <a:srgbClr val="10B981"/>
                 </a:solidFill>
-                <a:latin typeface="Calibri" pitchFamily="34" charset="0"/>
-                <a:ea typeface="Calibri" pitchFamily="34" charset="-122"/>
-                <a:cs typeface="Calibri" pitchFamily="34" charset="-120"/>
+                <a:latin typeface="Calibri" panose="020F0502020204030204" pitchFamily="34" charset="0"/>
+                <a:ea typeface="Calibri" panose="020F0502020204030204" pitchFamily="34" charset="-122"/>
+                <a:cs typeface="Calibri" panose="020F0502020204030204" pitchFamily="34" charset="-120"/>
               </a:rPr>
               <a:t>CLASSROOM</a:t>
             </a:r>
@@ -5098,13 +4850,12 @@
             <a:avLst/>
           </a:prstGeom>
           <a:noFill/>
-          <a:ln/>
         </p:spPr>
         <p:txBody>
           <a:bodyPr wrap="square" lIns="0" tIns="0" rIns="0" bIns="0" rtlCol="0" anchor="t"/>
           <a:lstStyle/>
           <a:p>
-            <a:pPr indent="0" marL="0">
+            <a:pPr marL="0" indent="0">
               <a:lnSpc>
                 <a:spcPct val="114000"/>
               </a:lnSpc>
@@ -5115,9 +4866,9 @@
                 <a:solidFill>
                   <a:srgbClr val="94A3B8"/>
                 </a:solidFill>
-                <a:latin typeface="Calibri" pitchFamily="34" charset="0"/>
-                <a:ea typeface="Calibri" pitchFamily="34" charset="-122"/>
-                <a:cs typeface="Calibri" pitchFamily="34" charset="-120"/>
+                <a:latin typeface="Calibri" panose="020F0502020204030204" pitchFamily="34" charset="0"/>
+                <a:ea typeface="Calibri" panose="020F0502020204030204" pitchFamily="34" charset="-122"/>
+                <a:cs typeface="Calibri" panose="020F0502020204030204" pitchFamily="34" charset="-120"/>
               </a:rPr>
               <a:t>Their classes only: grade, mark attendance, add students, generate report cards.</a:t>
             </a:r>
@@ -5167,13 +4918,12 @@
             <a:avLst/>
           </a:prstGeom>
           <a:noFill/>
-          <a:ln/>
         </p:spPr>
         <p:txBody>
           <a:bodyPr wrap="square" lIns="0" tIns="0" rIns="0" bIns="0" rtlCol="0" anchor="ctr"/>
           <a:lstStyle/>
           <a:p>
-            <a:pPr indent="0" marL="0">
+            <a:pPr marL="0" indent="0">
               <a:buNone/>
             </a:pPr>
             <a:r>
@@ -5181,9 +4931,9 @@
                 <a:solidFill>
                   <a:srgbClr val="FFFFFF"/>
                 </a:solidFill>
-                <a:latin typeface="Cambria" pitchFamily="34" charset="0"/>
-                <a:ea typeface="Cambria" pitchFamily="34" charset="-122"/>
-                <a:cs typeface="Cambria" pitchFamily="34" charset="-120"/>
+                <a:latin typeface="Cambria" panose="02040503050406030204" pitchFamily="34" charset="0"/>
+                <a:ea typeface="Cambria" panose="02040503050406030204" pitchFamily="34" charset="-122"/>
+                <a:cs typeface="Cambria" panose="02040503050406030204" pitchFamily="34" charset="-120"/>
               </a:rPr>
               <a:t>Student</a:t>
             </a:r>
@@ -5237,23 +4987,22 @@
             <a:avLst/>
           </a:prstGeom>
           <a:noFill/>
-          <a:ln/>
         </p:spPr>
         <p:txBody>
           <a:bodyPr wrap="square" lIns="0" tIns="0" rIns="0" bIns="0" rtlCol="0" anchor="ctr"/>
           <a:lstStyle/>
           <a:p>
-            <a:pPr algn="ctr" indent="0" marL="0">
-              <a:buNone/>
-            </a:pPr>
-            <a:r>
-              <a:rPr lang="en-US" sz="750" b="1" spc="100" kern="0" dirty="0">
+            <a:pPr marL="0" indent="0" algn="ctr">
+              <a:buNone/>
+            </a:pPr>
+            <a:r>
+              <a:rPr lang="en-US" sz="750" b="1" kern="0" spc="100" dirty="0">
                 <a:solidFill>
                   <a:srgbClr val="A78BFA"/>
                 </a:solidFill>
-                <a:latin typeface="Calibri" pitchFamily="34" charset="0"/>
-                <a:ea typeface="Calibri" pitchFamily="34" charset="-122"/>
-                <a:cs typeface="Calibri" pitchFamily="34" charset="-120"/>
+                <a:latin typeface="Calibri" panose="020F0502020204030204" pitchFamily="34" charset="0"/>
+                <a:ea typeface="Calibri" panose="020F0502020204030204" pitchFamily="34" charset="-122"/>
+                <a:cs typeface="Calibri" panose="020F0502020204030204" pitchFamily="34" charset="-120"/>
               </a:rPr>
               <a:t>LEARNER</a:t>
             </a:r>
@@ -5276,13 +5025,12 @@
             <a:avLst/>
           </a:prstGeom>
           <a:noFill/>
-          <a:ln/>
         </p:spPr>
         <p:txBody>
           <a:bodyPr wrap="square" lIns="0" tIns="0" rIns="0" bIns="0" rtlCol="0" anchor="t"/>
           <a:lstStyle/>
           <a:p>
-            <a:pPr indent="0" marL="0">
+            <a:pPr marL="0" indent="0">
               <a:lnSpc>
                 <a:spcPct val="114000"/>
               </a:lnSpc>
@@ -5293,9 +5041,9 @@
                 <a:solidFill>
                   <a:srgbClr val="94A3B8"/>
                 </a:solidFill>
-                <a:latin typeface="Calibri" pitchFamily="34" charset="0"/>
-                <a:ea typeface="Calibri" pitchFamily="34" charset="-122"/>
-                <a:cs typeface="Calibri" pitchFamily="34" charset="-120"/>
+                <a:latin typeface="Calibri" panose="020F0502020204030204" pitchFamily="34" charset="0"/>
+                <a:ea typeface="Calibri" panose="020F0502020204030204" pitchFamily="34" charset="-122"/>
+                <a:cs typeface="Calibri" panose="020F0502020204030204" pitchFamily="34" charset="-120"/>
               </a:rPr>
               <a:t>Sees their own results, position, attendance and fee status — nothing else.</a:t>
             </a:r>
@@ -5345,13 +5093,12 @@
             <a:avLst/>
           </a:prstGeom>
           <a:noFill/>
-          <a:ln/>
         </p:spPr>
         <p:txBody>
           <a:bodyPr wrap="square" lIns="0" tIns="0" rIns="0" bIns="0" rtlCol="0" anchor="ctr"/>
           <a:lstStyle/>
           <a:p>
-            <a:pPr indent="0" marL="0">
+            <a:pPr marL="0" indent="0">
               <a:buNone/>
             </a:pPr>
             <a:r>
@@ -5359,9 +5106,9 @@
                 <a:solidFill>
                   <a:srgbClr val="FFFFFF"/>
                 </a:solidFill>
-                <a:latin typeface="Cambria" pitchFamily="34" charset="0"/>
-                <a:ea typeface="Cambria" pitchFamily="34" charset="-122"/>
-                <a:cs typeface="Cambria" pitchFamily="34" charset="-120"/>
+                <a:latin typeface="Cambria" panose="02040503050406030204" pitchFamily="34" charset="0"/>
+                <a:ea typeface="Cambria" panose="02040503050406030204" pitchFamily="34" charset="-122"/>
+                <a:cs typeface="Cambria" panose="02040503050406030204" pitchFamily="34" charset="-120"/>
               </a:rPr>
               <a:t>Parent</a:t>
             </a:r>
@@ -5415,23 +5162,22 @@
             <a:avLst/>
           </a:prstGeom>
           <a:noFill/>
-          <a:ln/>
         </p:spPr>
         <p:txBody>
           <a:bodyPr wrap="square" lIns="0" tIns="0" rIns="0" bIns="0" rtlCol="0" anchor="ctr"/>
           <a:lstStyle/>
           <a:p>
-            <a:pPr algn="ctr" indent="0" marL="0">
-              <a:buNone/>
-            </a:pPr>
-            <a:r>
-              <a:rPr lang="en-US" sz="750" b="1" spc="100" kern="0" dirty="0">
+            <a:pPr marL="0" indent="0" algn="ctr">
+              <a:buNone/>
+            </a:pPr>
+            <a:r>
+              <a:rPr lang="en-US" sz="750" b="1" kern="0" spc="100" dirty="0">
                 <a:solidFill>
                   <a:srgbClr val="F59E0B"/>
                 </a:solidFill>
-                <a:latin typeface="Calibri" pitchFamily="34" charset="0"/>
-                <a:ea typeface="Calibri" pitchFamily="34" charset="-122"/>
-                <a:cs typeface="Calibri" pitchFamily="34" charset="-120"/>
+                <a:latin typeface="Calibri" panose="020F0502020204030204" pitchFamily="34" charset="0"/>
+                <a:ea typeface="Calibri" panose="020F0502020204030204" pitchFamily="34" charset="-122"/>
+                <a:cs typeface="Calibri" panose="020F0502020204030204" pitchFamily="34" charset="-120"/>
               </a:rPr>
               <a:t>GUARDIAN</a:t>
             </a:r>
@@ -5454,13 +5200,12 @@
             <a:avLst/>
           </a:prstGeom>
           <a:noFill/>
-          <a:ln/>
         </p:spPr>
         <p:txBody>
           <a:bodyPr wrap="square" lIns="0" tIns="0" rIns="0" bIns="0" rtlCol="0" anchor="t"/>
           <a:lstStyle/>
           <a:p>
-            <a:pPr indent="0" marL="0">
+            <a:pPr marL="0" indent="0">
               <a:lnSpc>
                 <a:spcPct val="114000"/>
               </a:lnSpc>
@@ -5471,9 +5216,9 @@
                 <a:solidFill>
                   <a:srgbClr val="94A3B8"/>
                 </a:solidFill>
-                <a:latin typeface="Calibri" pitchFamily="34" charset="0"/>
-                <a:ea typeface="Calibri" pitchFamily="34" charset="-122"/>
-                <a:cs typeface="Calibri" pitchFamily="34" charset="-120"/>
+                <a:latin typeface="Calibri" panose="020F0502020204030204" pitchFamily="34" charset="0"/>
+                <a:ea typeface="Calibri" panose="020F0502020204030204" pitchFamily="34" charset="-122"/>
+                <a:cs typeface="Calibri" panose="020F0502020204030204" pitchFamily="34" charset="-120"/>
               </a:rPr>
               <a:t>Their children's report cards, attendance and fee balances — and Pay Now.</a:t>
             </a:r>
@@ -5523,13 +5268,12 @@
             <a:avLst/>
           </a:prstGeom>
           <a:noFill/>
-          <a:ln/>
         </p:spPr>
         <p:txBody>
           <a:bodyPr wrap="square" lIns="0" tIns="0" rIns="0" bIns="0" rtlCol="0" anchor="ctr"/>
           <a:lstStyle/>
           <a:p>
-            <a:pPr indent="0" marL="0">
+            <a:pPr marL="0" indent="0">
               <a:buNone/>
             </a:pPr>
             <a:r>
@@ -5537,9 +5281,9 @@
                 <a:solidFill>
                   <a:srgbClr val="FFFFFF"/>
                 </a:solidFill>
-                <a:latin typeface="Calibri" pitchFamily="34" charset="0"/>
-                <a:ea typeface="Calibri" pitchFamily="34" charset="-122"/>
-                <a:cs typeface="Calibri" pitchFamily="34" charset="-120"/>
+                <a:latin typeface="Calibri" panose="020F0502020204030204" pitchFamily="34" charset="0"/>
+                <a:ea typeface="Calibri" panose="020F0502020204030204" pitchFamily="34" charset="-122"/>
+                <a:cs typeface="Calibri" panose="020F0502020204030204" pitchFamily="34" charset="-120"/>
               </a:rPr>
               <a:t>Any browser</a:t>
             </a:r>
@@ -5562,13 +5306,12 @@
             <a:avLst/>
           </a:prstGeom>
           <a:noFill/>
-          <a:ln/>
         </p:spPr>
         <p:txBody>
           <a:bodyPr wrap="square" lIns="0" tIns="0" rIns="0" bIns="0" rtlCol="0" anchor="ctr"/>
           <a:lstStyle/>
           <a:p>
-            <a:pPr indent="0" marL="0">
+            <a:pPr marL="0" indent="0">
               <a:buNone/>
             </a:pPr>
             <a:r>
@@ -5576,9 +5319,9 @@
                 <a:solidFill>
                   <a:srgbClr val="94A3B8"/>
                 </a:solidFill>
-                <a:latin typeface="Calibri" pitchFamily="34" charset="0"/>
-                <a:ea typeface="Calibri" pitchFamily="34" charset="-122"/>
-                <a:cs typeface="Calibri" pitchFamily="34" charset="-120"/>
+                <a:latin typeface="Calibri" panose="020F0502020204030204" pitchFamily="34" charset="0"/>
+                <a:ea typeface="Calibri" panose="020F0502020204030204" pitchFamily="34" charset="-122"/>
+                <a:cs typeface="Calibri" panose="020F0502020204030204" pitchFamily="34" charset="-120"/>
               </a:rPr>
               <a:t>phone · tablet · laptop · shared PC</a:t>
             </a:r>
@@ -5628,13 +5371,12 @@
             <a:avLst/>
           </a:prstGeom>
           <a:noFill/>
-          <a:ln/>
         </p:spPr>
         <p:txBody>
           <a:bodyPr wrap="square" lIns="0" tIns="0" rIns="0" bIns="0" rtlCol="0" anchor="ctr"/>
           <a:lstStyle/>
           <a:p>
-            <a:pPr indent="0" marL="0">
+            <a:pPr marL="0" indent="0">
               <a:buNone/>
             </a:pPr>
             <a:r>
@@ -5642,9 +5384,9 @@
                 <a:solidFill>
                   <a:srgbClr val="FFFFFF"/>
                 </a:solidFill>
-                <a:latin typeface="Calibri" pitchFamily="34" charset="0"/>
-                <a:ea typeface="Calibri" pitchFamily="34" charset="-122"/>
-                <a:cs typeface="Calibri" pitchFamily="34" charset="-120"/>
+                <a:latin typeface="Calibri" panose="020F0502020204030204" pitchFamily="34" charset="0"/>
+                <a:ea typeface="Calibri" panose="020F0502020204030204" pitchFamily="34" charset="-122"/>
+                <a:cs typeface="Calibri" panose="020F0502020204030204" pitchFamily="34" charset="-120"/>
               </a:rPr>
               <a:t>Installable app</a:t>
             </a:r>
@@ -5667,13 +5409,12 @@
             <a:avLst/>
           </a:prstGeom>
           <a:noFill/>
-          <a:ln/>
         </p:spPr>
         <p:txBody>
           <a:bodyPr wrap="square" lIns="0" tIns="0" rIns="0" bIns="0" rtlCol="0" anchor="ctr"/>
           <a:lstStyle/>
           <a:p>
-            <a:pPr indent="0" marL="0">
+            <a:pPr marL="0" indent="0">
               <a:buNone/>
             </a:pPr>
             <a:r>
@@ -5681,9 +5422,9 @@
                 <a:solidFill>
                   <a:srgbClr val="94A3B8"/>
                 </a:solidFill>
-                <a:latin typeface="Calibri" pitchFamily="34" charset="0"/>
-                <a:ea typeface="Calibri" pitchFamily="34" charset="-122"/>
-                <a:cs typeface="Calibri" pitchFamily="34" charset="-120"/>
+                <a:latin typeface="Calibri" panose="020F0502020204030204" pitchFamily="34" charset="0"/>
+                <a:ea typeface="Calibri" panose="020F0502020204030204" pitchFamily="34" charset="-122"/>
+                <a:cs typeface="Calibri" panose="020F0502020204030204" pitchFamily="34" charset="-120"/>
               </a:rPr>
               <a:t>Android &amp; Windows, like native</a:t>
             </a:r>
@@ -5733,13 +5474,12 @@
             <a:avLst/>
           </a:prstGeom>
           <a:noFill/>
-          <a:ln/>
         </p:spPr>
         <p:txBody>
           <a:bodyPr wrap="square" lIns="0" tIns="0" rIns="0" bIns="0" rtlCol="0" anchor="ctr"/>
           <a:lstStyle/>
           <a:p>
-            <a:pPr indent="0" marL="0">
+            <a:pPr marL="0" indent="0">
               <a:buNone/>
             </a:pPr>
             <a:r>
@@ -5747,9 +5487,9 @@
                 <a:solidFill>
                   <a:srgbClr val="FFFFFF"/>
                 </a:solidFill>
-                <a:latin typeface="Calibri" pitchFamily="34" charset="0"/>
-                <a:ea typeface="Calibri" pitchFamily="34" charset="-122"/>
-                <a:cs typeface="Calibri" pitchFamily="34" charset="-120"/>
+                <a:latin typeface="Calibri" panose="020F0502020204030204" pitchFamily="34" charset="0"/>
+                <a:ea typeface="Calibri" panose="020F0502020204030204" pitchFamily="34" charset="-122"/>
+                <a:cs typeface="Calibri" panose="020F0502020204030204" pitchFamily="34" charset="-120"/>
               </a:rPr>
               <a:t>Zero training</a:t>
             </a:r>
@@ -5772,13 +5512,12 @@
             <a:avLst/>
           </a:prstGeom>
           <a:noFill/>
-          <a:ln/>
         </p:spPr>
         <p:txBody>
           <a:bodyPr wrap="square" lIns="0" tIns="0" rIns="0" bIns="0" rtlCol="0" anchor="ctr"/>
           <a:lstStyle/>
           <a:p>
-            <a:pPr indent="0" marL="0">
+            <a:pPr marL="0" indent="0">
               <a:buNone/>
             </a:pPr>
             <a:r>
@@ -5786,9 +5525,9 @@
                 <a:solidFill>
                   <a:srgbClr val="94A3B8"/>
                 </a:solidFill>
-                <a:latin typeface="Calibri" pitchFamily="34" charset="0"/>
-                <a:ea typeface="Calibri" pitchFamily="34" charset="-122"/>
-                <a:cs typeface="Calibri" pitchFamily="34" charset="-120"/>
+                <a:latin typeface="Calibri" panose="020F0502020204030204" pitchFamily="34" charset="0"/>
+                <a:ea typeface="Calibri" panose="020F0502020204030204" pitchFamily="34" charset="-122"/>
+                <a:cs typeface="Calibri" panose="020F0502020204030204" pitchFamily="34" charset="-120"/>
               </a:rPr>
               <a:t>teachers pick it up in minutes</a:t>
             </a:r>
@@ -5811,13 +5550,12 @@
             <a:avLst/>
           </a:prstGeom>
           <a:noFill/>
-          <a:ln/>
         </p:spPr>
         <p:txBody>
           <a:bodyPr wrap="square" lIns="0" tIns="0" rIns="0" bIns="0" rtlCol="0" anchor="ctr"/>
           <a:lstStyle/>
           <a:p>
-            <a:pPr indent="0" marL="0">
+            <a:pPr marL="0" indent="0">
               <a:buNone/>
             </a:pPr>
             <a:r>
@@ -5825,9 +5563,9 @@
                 <a:solidFill>
                   <a:srgbClr val="64748B"/>
                 </a:solidFill>
-                <a:latin typeface="Calibri" pitchFamily="34" charset="0"/>
-                <a:ea typeface="Calibri" pitchFamily="34" charset="-122"/>
-                <a:cs typeface="Calibri" pitchFamily="34" charset="-120"/>
+                <a:latin typeface="Calibri" panose="020F0502020204030204" pitchFamily="34" charset="0"/>
+                <a:ea typeface="Calibri" panose="020F0502020204030204" pitchFamily="34" charset="-122"/>
+                <a:cs typeface="Calibri" panose="020F0502020204030204" pitchFamily="34" charset="-120"/>
               </a:rPr>
               <a:t>EduTrack — School Management Platform</a:t>
             </a:r>
@@ -5850,13 +5588,12 @@
             <a:avLst/>
           </a:prstGeom>
           <a:noFill/>
-          <a:ln/>
         </p:spPr>
         <p:txBody>
           <a:bodyPr wrap="square" lIns="0" tIns="0" rIns="0" bIns="0" rtlCol="0" anchor="ctr"/>
           <a:lstStyle/>
           <a:p>
-            <a:pPr algn="r" indent="0" marL="0">
+            <a:pPr marL="0" indent="0" algn="r">
               <a:buNone/>
             </a:pPr>
             <a:r>
@@ -5864,9 +5601,9 @@
                 <a:solidFill>
                   <a:srgbClr val="94A3B8"/>
                 </a:solidFill>
-                <a:latin typeface="Calibri" pitchFamily="34" charset="0"/>
-                <a:ea typeface="Calibri" pitchFamily="34" charset="-122"/>
-                <a:cs typeface="Calibri" pitchFamily="34" charset="-120"/>
+                <a:latin typeface="Calibri" panose="020F0502020204030204" pitchFamily="34" charset="0"/>
+                <a:ea typeface="Calibri" panose="020F0502020204030204" pitchFamily="34" charset="-122"/>
+                <a:cs typeface="Calibri" panose="020F0502020204030204" pitchFamily="34" charset="-120"/>
               </a:rPr>
               <a:t>12</a:t>
             </a:r>
@@ -5884,12 +5621,13 @@
 
 <file path=ppt/slides/slide13.xml><?xml version="1.0" encoding="utf-8"?>
 <p:sld xmlns:a="http://schemas.openxmlformats.org/drawingml/2006/main" xmlns:r="http://schemas.openxmlformats.org/officeDocument/2006/relationships" xmlns:p="http://schemas.openxmlformats.org/presentationml/2006/main">
-  <p:cSld name="Slide 13">
+  <p:cSld>
     <p:bg>
       <p:bgPr>
         <a:solidFill>
           <a:srgbClr val="020617"/>
         </a:solidFill>
+        <a:effectLst/>
       </p:bgPr>
     </p:bg>
     <p:spTree>
@@ -5925,7 +5663,6 @@
               <a:alpha val="12000"/>
             </a:srgbClr>
           </a:solidFill>
-          <a:ln/>
         </p:spPr>
       </p:sp>
       <p:sp>
@@ -5943,23 +5680,22 @@
             <a:avLst/>
           </a:prstGeom>
           <a:noFill/>
-          <a:ln/>
         </p:spPr>
         <p:txBody>
           <a:bodyPr wrap="square" lIns="0" tIns="0" rIns="0" bIns="0" rtlCol="0" anchor="ctr"/>
           <a:lstStyle/>
           <a:p>
-            <a:pPr algn="ctr" indent="0" marL="0">
-              <a:buNone/>
-            </a:pPr>
-            <a:r>
-              <a:rPr lang="en-US" sz="1100" b="1" spc="300" kern="0" dirty="0">
+            <a:pPr marL="0" indent="0" algn="ctr">
+              <a:buNone/>
+            </a:pPr>
+            <a:r>
+              <a:rPr lang="en-US" sz="1100" b="1" kern="0" spc="300" dirty="0">
                 <a:solidFill>
                   <a:srgbClr val="60A5FA"/>
                 </a:solidFill>
-                <a:latin typeface="Calibri" pitchFamily="34" charset="0"/>
-                <a:ea typeface="Calibri" pitchFamily="34" charset="-122"/>
-                <a:cs typeface="Calibri" pitchFamily="34" charset="-120"/>
+                <a:latin typeface="Calibri" panose="020F0502020204030204" pitchFamily="34" charset="0"/>
+                <a:ea typeface="Calibri" panose="020F0502020204030204" pitchFamily="34" charset="-122"/>
+                <a:cs typeface="Calibri" panose="020F0502020204030204" pitchFamily="34" charset="-120"/>
               </a:rPr>
               <a:t>FOR YOUR SCHOOL</a:t>
             </a:r>
@@ -5982,13 +5718,12 @@
             <a:avLst/>
           </a:prstGeom>
           <a:noFill/>
-          <a:ln/>
         </p:spPr>
         <p:txBody>
           <a:bodyPr wrap="square" lIns="0" tIns="0" rIns="0" bIns="0" rtlCol="0" anchor="t"/>
           <a:lstStyle/>
           <a:p>
-            <a:pPr algn="ctr" indent="0" marL="0">
+            <a:pPr marL="0" indent="0" algn="ctr">
               <a:lnSpc>
                 <a:spcPct val="106000"/>
               </a:lnSpc>
@@ -5999,26 +5734,20 @@
                 <a:solidFill>
                   <a:srgbClr val="FFFFFF"/>
                 </a:solidFill>
-                <a:latin typeface="Cambria" pitchFamily="34" charset="0"/>
-                <a:ea typeface="Cambria" pitchFamily="34" charset="-122"/>
-                <a:cs typeface="Cambria" pitchFamily="34" charset="-120"/>
+                <a:latin typeface="Cambria" panose="02040503050406030204" pitchFamily="34" charset="0"/>
+                <a:ea typeface="Cambria" panose="02040503050406030204" pitchFamily="34" charset="-122"/>
+                <a:cs typeface="Cambria" panose="02040503050406030204" pitchFamily="34" charset="-120"/>
               </a:rPr>
               <a:t>A free pilot term. </a:t>
             </a:r>
-            <a:pPr algn="ctr" indent="0" marL="0">
-              <a:lnSpc>
-                <a:spcPct val="106000"/>
-              </a:lnSpc>
-              <a:buNone/>
-            </a:pPr>
             <a:r>
               <a:rPr lang="en-US" sz="3200" b="1" dirty="0">
                 <a:solidFill>
                   <a:srgbClr val="FFFFFF"/>
                 </a:solidFill>
-                <a:latin typeface="Cambria" pitchFamily="34" charset="0"/>
-                <a:ea typeface="Cambria" pitchFamily="34" charset="-122"/>
-                <a:cs typeface="Cambria" pitchFamily="34" charset="-120"/>
+                <a:latin typeface="Cambria" panose="02040503050406030204" pitchFamily="34" charset="0"/>
+                <a:ea typeface="Cambria" panose="02040503050406030204" pitchFamily="34" charset="-122"/>
+                <a:cs typeface="Cambria" panose="02040503050406030204" pitchFamily="34" charset="-120"/>
               </a:rPr>
               <a:t>Nothing to lose.</a:t>
             </a:r>
@@ -6072,7 +5801,6 @@
           <a:solidFill>
             <a:srgbClr val="10B981"/>
           </a:solidFill>
-          <a:ln/>
         </p:spPr>
       </p:sp>
       <p:sp>
@@ -6090,13 +5818,12 @@
             <a:avLst/>
           </a:prstGeom>
           <a:noFill/>
-          <a:ln/>
         </p:spPr>
         <p:txBody>
           <a:bodyPr wrap="square" lIns="0" tIns="0" rIns="0" bIns="0" rtlCol="0" anchor="ctr"/>
           <a:lstStyle/>
           <a:p>
-            <a:pPr algn="ctr" indent="0" marL="0">
+            <a:pPr marL="0" indent="0" algn="ctr">
               <a:buNone/>
             </a:pPr>
             <a:r>
@@ -6104,9 +5831,9 @@
                 <a:solidFill>
                   <a:srgbClr val="FFFFFF"/>
                 </a:solidFill>
-                <a:latin typeface="Calibri" pitchFamily="34" charset="0"/>
-                <a:ea typeface="Calibri" pitchFamily="34" charset="-122"/>
-                <a:cs typeface="Calibri" pitchFamily="34" charset="-120"/>
+                <a:latin typeface="Calibri" panose="020F0502020204030204" pitchFamily="34" charset="0"/>
+                <a:ea typeface="Calibri" panose="020F0502020204030204" pitchFamily="34" charset="-122"/>
+                <a:cs typeface="Calibri" panose="020F0502020204030204" pitchFamily="34" charset="-120"/>
               </a:rPr>
               <a:t>✓</a:t>
             </a:r>
@@ -6129,13 +5856,12 @@
             <a:avLst/>
           </a:prstGeom>
           <a:noFill/>
-          <a:ln/>
         </p:spPr>
         <p:txBody>
           <a:bodyPr wrap="square" lIns="0" tIns="0" rIns="0" bIns="0" rtlCol="0" anchor="t"/>
           <a:lstStyle/>
           <a:p>
-            <a:pPr indent="0" marL="0">
+            <a:pPr marL="0" indent="0">
               <a:lnSpc>
                 <a:spcPct val="100000"/>
               </a:lnSpc>
@@ -6146,9 +5872,9 @@
                 <a:solidFill>
                   <a:srgbClr val="FFFFFF"/>
                 </a:solidFill>
-                <a:latin typeface="Calibri" pitchFamily="34" charset="0"/>
-                <a:ea typeface="Calibri" pitchFamily="34" charset="-122"/>
-                <a:cs typeface="Calibri" pitchFamily="34" charset="-120"/>
+                <a:latin typeface="Calibri" panose="020F0502020204030204" pitchFamily="34" charset="0"/>
+                <a:ea typeface="Calibri" panose="020F0502020204030204" pitchFamily="34" charset="-122"/>
+                <a:cs typeface="Calibri" panose="020F0502020204030204" pitchFamily="34" charset="-120"/>
               </a:rPr>
               <a:t>Full platform, free</a:t>
             </a:r>
@@ -6171,13 +5897,12 @@
             <a:avLst/>
           </a:prstGeom>
           <a:noFill/>
-          <a:ln/>
         </p:spPr>
         <p:txBody>
           <a:bodyPr wrap="square" lIns="0" tIns="0" rIns="0" bIns="0" rtlCol="0" anchor="t"/>
           <a:lstStyle/>
           <a:p>
-            <a:pPr indent="0" marL="0">
+            <a:pPr marL="0" indent="0">
               <a:lnSpc>
                 <a:spcPct val="112000"/>
               </a:lnSpc>
@@ -6188,9 +5913,9 @@
                 <a:solidFill>
                   <a:srgbClr val="94A3B8"/>
                 </a:solidFill>
-                <a:latin typeface="Calibri" pitchFamily="34" charset="0"/>
-                <a:ea typeface="Calibri" pitchFamily="34" charset="-122"/>
-                <a:cs typeface="Calibri" pitchFamily="34" charset="-120"/>
+                <a:latin typeface="Calibri" panose="020F0502020204030204" pitchFamily="34" charset="0"/>
+                <a:ea typeface="Calibri" panose="020F0502020204030204" pitchFamily="34" charset="-122"/>
+                <a:cs typeface="Calibri" panose="020F0502020204030204" pitchFamily="34" charset="-120"/>
               </a:rPr>
               <a:t>Every module active for the pilot term — report cards, grading, attendance, fees, payroll and the parent portal.</a:t>
             </a:r>
@@ -6244,7 +5969,6 @@
           <a:solidFill>
             <a:srgbClr val="2563EB"/>
           </a:solidFill>
-          <a:ln/>
         </p:spPr>
       </p:sp>
       <p:sp>
@@ -6262,13 +5986,12 @@
             <a:avLst/>
           </a:prstGeom>
           <a:noFill/>
-          <a:ln/>
         </p:spPr>
         <p:txBody>
           <a:bodyPr wrap="square" lIns="0" tIns="0" rIns="0" bIns="0" rtlCol="0" anchor="ctr"/>
           <a:lstStyle/>
           <a:p>
-            <a:pPr algn="ctr" indent="0" marL="0">
+            <a:pPr marL="0" indent="0" algn="ctr">
               <a:buNone/>
             </a:pPr>
             <a:r>
@@ -6276,9 +5999,9 @@
                 <a:solidFill>
                   <a:srgbClr val="FFFFFF"/>
                 </a:solidFill>
-                <a:latin typeface="Calibri" pitchFamily="34" charset="0"/>
-                <a:ea typeface="Calibri" pitchFamily="34" charset="-122"/>
-                <a:cs typeface="Calibri" pitchFamily="34" charset="-120"/>
+                <a:latin typeface="Calibri" panose="020F0502020204030204" pitchFamily="34" charset="0"/>
+                <a:ea typeface="Calibri" panose="020F0502020204030204" pitchFamily="34" charset="-122"/>
+                <a:cs typeface="Calibri" panose="020F0502020204030204" pitchFamily="34" charset="-120"/>
               </a:rPr>
               <a:t>✉</a:t>
             </a:r>
@@ -6301,13 +6024,12 @@
             <a:avLst/>
           </a:prstGeom>
           <a:noFill/>
-          <a:ln/>
         </p:spPr>
         <p:txBody>
           <a:bodyPr wrap="square" lIns="0" tIns="0" rIns="0" bIns="0" rtlCol="0" anchor="t"/>
           <a:lstStyle/>
           <a:p>
-            <a:pPr indent="0" marL="0">
+            <a:pPr marL="0" indent="0">
               <a:lnSpc>
                 <a:spcPct val="100000"/>
               </a:lnSpc>
@@ -6318,9 +6040,9 @@
                 <a:solidFill>
                   <a:srgbClr val="FFFFFF"/>
                 </a:solidFill>
-                <a:latin typeface="Calibri" pitchFamily="34" charset="0"/>
-                <a:ea typeface="Calibri" pitchFamily="34" charset="-122"/>
-                <a:cs typeface="Calibri" pitchFamily="34" charset="-120"/>
+                <a:latin typeface="Calibri" panose="020F0502020204030204" pitchFamily="34" charset="0"/>
+                <a:ea typeface="Calibri" panose="020F0502020204030204" pitchFamily="34" charset="-122"/>
+                <a:cs typeface="Calibri" panose="020F0502020204030204" pitchFamily="34" charset="-120"/>
               </a:rPr>
               <a:t>Onboarding help included</a:t>
             </a:r>
@@ -6343,13 +6065,12 @@
             <a:avLst/>
           </a:prstGeom>
           <a:noFill/>
-          <a:ln/>
         </p:spPr>
         <p:txBody>
           <a:bodyPr wrap="square" lIns="0" tIns="0" rIns="0" bIns="0" rtlCol="0" anchor="t"/>
           <a:lstStyle/>
           <a:p>
-            <a:pPr indent="0" marL="0">
+            <a:pPr marL="0" indent="0">
               <a:lnSpc>
                 <a:spcPct val="112000"/>
               </a:lnSpc>
@@ -6360,9 +6081,9 @@
                 <a:solidFill>
                   <a:srgbClr val="94A3B8"/>
                 </a:solidFill>
-                <a:latin typeface="Calibri" pitchFamily="34" charset="0"/>
-                <a:ea typeface="Calibri" pitchFamily="34" charset="-122"/>
-                <a:cs typeface="Calibri" pitchFamily="34" charset="-120"/>
+                <a:latin typeface="Calibri" panose="020F0502020204030204" pitchFamily="34" charset="0"/>
+                <a:ea typeface="Calibri" panose="020F0502020204030204" pitchFamily="34" charset="-122"/>
+                <a:cs typeface="Calibri" panose="020F0502020204030204" pitchFamily="34" charset="-120"/>
               </a:rPr>
               <a:t>We help you set up class arms, staff and fee structures — and migrate from your current files if needed.</a:t>
             </a:r>
@@ -6416,7 +6137,6 @@
           <a:solidFill>
             <a:srgbClr val="F59E0B"/>
           </a:solidFill>
-          <a:ln/>
         </p:spPr>
       </p:sp>
       <p:sp>
@@ -6434,13 +6154,12 @@
             <a:avLst/>
           </a:prstGeom>
           <a:noFill/>
-          <a:ln/>
         </p:spPr>
         <p:txBody>
           <a:bodyPr wrap="square" lIns="0" tIns="0" rIns="0" bIns="0" rtlCol="0" anchor="ctr"/>
           <a:lstStyle/>
           <a:p>
-            <a:pPr algn="ctr" indent="0" marL="0">
+            <a:pPr marL="0" indent="0" algn="ctr">
               <a:buNone/>
             </a:pPr>
             <a:r>
@@ -6448,9 +6167,9 @@
                 <a:solidFill>
                   <a:srgbClr val="FFFFFF"/>
                 </a:solidFill>
-                <a:latin typeface="Calibri" pitchFamily="34" charset="0"/>
-                <a:ea typeface="Calibri" pitchFamily="34" charset="-122"/>
-                <a:cs typeface="Calibri" pitchFamily="34" charset="-120"/>
+                <a:latin typeface="Calibri" panose="020F0502020204030204" pitchFamily="34" charset="0"/>
+                <a:ea typeface="Calibri" panose="020F0502020204030204" pitchFamily="34" charset="-122"/>
+                <a:cs typeface="Calibri" panose="020F0502020204030204" pitchFamily="34" charset="-120"/>
               </a:rPr>
               <a:t>★</a:t>
             </a:r>
@@ -6473,13 +6192,12 @@
             <a:avLst/>
           </a:prstGeom>
           <a:noFill/>
-          <a:ln/>
         </p:spPr>
         <p:txBody>
           <a:bodyPr wrap="square" lIns="0" tIns="0" rIns="0" bIns="0" rtlCol="0" anchor="t"/>
           <a:lstStyle/>
           <a:p>
-            <a:pPr indent="0" marL="0">
+            <a:pPr marL="0" indent="0">
               <a:lnSpc>
                 <a:spcPct val="100000"/>
               </a:lnSpc>
@@ -6490,9 +6208,9 @@
                 <a:solidFill>
                   <a:srgbClr val="FFFFFF"/>
                 </a:solidFill>
-                <a:latin typeface="Calibri" pitchFamily="34" charset="0"/>
-                <a:ea typeface="Calibri" pitchFamily="34" charset="-122"/>
-                <a:cs typeface="Calibri" pitchFamily="34" charset="-120"/>
+                <a:latin typeface="Calibri" panose="020F0502020204030204" pitchFamily="34" charset="0"/>
+                <a:ea typeface="Calibri" panose="020F0502020204030204" pitchFamily="34" charset="-122"/>
+                <a:cs typeface="Calibri" panose="020F0502020204030204" pitchFamily="34" charset="-120"/>
               </a:rPr>
               <a:t>No card, no contract</a:t>
             </a:r>
@@ -6515,13 +6233,12 @@
             <a:avLst/>
           </a:prstGeom>
           <a:noFill/>
-          <a:ln/>
         </p:spPr>
         <p:txBody>
           <a:bodyPr wrap="square" lIns="0" tIns="0" rIns="0" bIns="0" rtlCol="0" anchor="t"/>
           <a:lstStyle/>
           <a:p>
-            <a:pPr indent="0" marL="0">
+            <a:pPr marL="0" indent="0">
               <a:lnSpc>
                 <a:spcPct val="112000"/>
               </a:lnSpc>
@@ -6532,9 +6249,9 @@
                 <a:solidFill>
                   <a:srgbClr val="94A3B8"/>
                 </a:solidFill>
-                <a:latin typeface="Calibri" pitchFamily="34" charset="0"/>
-                <a:ea typeface="Calibri" pitchFamily="34" charset="-122"/>
-                <a:cs typeface="Calibri" pitchFamily="34" charset="-120"/>
+                <a:latin typeface="Calibri" panose="020F0502020204030204" pitchFamily="34" charset="0"/>
+                <a:ea typeface="Calibri" panose="020F0502020204030204" pitchFamily="34" charset="-122"/>
+                <a:cs typeface="Calibri" panose="020F0502020204030204" pitchFamily="34" charset="-120"/>
               </a:rPr>
               <a:t>Try a real term with real data. If you love it, we move you to a simple plan. If not, walk away.</a:t>
             </a:r>
@@ -6557,13 +6274,12 @@
             <a:avLst/>
           </a:prstGeom>
           <a:noFill/>
-          <a:ln/>
         </p:spPr>
         <p:txBody>
           <a:bodyPr wrap="square" lIns="0" tIns="0" rIns="0" bIns="0" rtlCol="0" anchor="t"/>
           <a:lstStyle/>
           <a:p>
-            <a:pPr algn="ctr" indent="0" marL="0">
+            <a:pPr marL="0" indent="0" algn="ctr">
               <a:lnSpc>
                 <a:spcPct val="115000"/>
               </a:lnSpc>
@@ -6574,43 +6290,31 @@
                 <a:solidFill>
                   <a:srgbClr val="FFFFFF"/>
                 </a:solidFill>
-                <a:latin typeface="Calibri" pitchFamily="34" charset="0"/>
-                <a:ea typeface="Calibri" pitchFamily="34" charset="-122"/>
-                <a:cs typeface="Calibri" pitchFamily="34" charset="-120"/>
+                <a:latin typeface="Calibri" panose="020F0502020204030204" pitchFamily="34" charset="0"/>
+                <a:ea typeface="Calibri" panose="020F0502020204030204" pitchFamily="34" charset="-122"/>
+                <a:cs typeface="Calibri" panose="020F0502020204030204" pitchFamily="34" charset="-120"/>
               </a:rPr>
               <a:t>Most schools go live in </a:t>
             </a:r>
-            <a:pPr algn="ctr" indent="0" marL="0">
-              <a:lnSpc>
-                <a:spcPct val="115000"/>
-              </a:lnSpc>
-              <a:buNone/>
-            </a:pPr>
             <a:r>
               <a:rPr lang="en-US" sz="1600" b="1" dirty="0">
                 <a:solidFill>
                   <a:srgbClr val="FFFFFF"/>
                 </a:solidFill>
-                <a:latin typeface="Calibri" pitchFamily="34" charset="0"/>
-                <a:ea typeface="Calibri" pitchFamily="34" charset="-122"/>
-                <a:cs typeface="Calibri" pitchFamily="34" charset="-120"/>
+                <a:latin typeface="Calibri" panose="020F0502020204030204" pitchFamily="34" charset="0"/>
+                <a:ea typeface="Calibri" panose="020F0502020204030204" pitchFamily="34" charset="-122"/>
+                <a:cs typeface="Calibri" panose="020F0502020204030204" pitchFamily="34" charset="-120"/>
               </a:rPr>
               <a:t>under a week</a:t>
             </a:r>
-            <a:pPr algn="ctr" indent="0" marL="0">
-              <a:lnSpc>
-                <a:spcPct val="115000"/>
-              </a:lnSpc>
-              <a:buNone/>
-            </a:pPr>
             <a:r>
               <a:rPr lang="en-US" sz="1600" b="1" dirty="0">
                 <a:solidFill>
                   <a:srgbClr val="FFFFFF"/>
                 </a:solidFill>
-                <a:latin typeface="Calibri" pitchFamily="34" charset="0"/>
-                <a:ea typeface="Calibri" pitchFamily="34" charset="-122"/>
-                <a:cs typeface="Calibri" pitchFamily="34" charset="-120"/>
+                <a:latin typeface="Calibri" panose="020F0502020204030204" pitchFamily="34" charset="0"/>
+                <a:ea typeface="Calibri" panose="020F0502020204030204" pitchFamily="34" charset="-122"/>
+                <a:cs typeface="Calibri" panose="020F0502020204030204" pitchFamily="34" charset="-120"/>
               </a:rPr>
               <a:t> — start with one class arm and grow from there.</a:t>
             </a:r>
@@ -6633,13 +6337,12 @@
             <a:avLst/>
           </a:prstGeom>
           <a:noFill/>
-          <a:ln/>
         </p:spPr>
         <p:txBody>
           <a:bodyPr wrap="square" lIns="0" tIns="0" rIns="0" bIns="0" rtlCol="0" anchor="ctr"/>
           <a:lstStyle/>
           <a:p>
-            <a:pPr indent="0" marL="0">
+            <a:pPr marL="0" indent="0">
               <a:buNone/>
             </a:pPr>
             <a:r>
@@ -6647,9 +6350,9 @@
                 <a:solidFill>
                   <a:srgbClr val="64748B"/>
                 </a:solidFill>
-                <a:latin typeface="Calibri" pitchFamily="34" charset="0"/>
-                <a:ea typeface="Calibri" pitchFamily="34" charset="-122"/>
-                <a:cs typeface="Calibri" pitchFamily="34" charset="-120"/>
+                <a:latin typeface="Calibri" panose="020F0502020204030204" pitchFamily="34" charset="0"/>
+                <a:ea typeface="Calibri" panose="020F0502020204030204" pitchFamily="34" charset="-122"/>
+                <a:cs typeface="Calibri" panose="020F0502020204030204" pitchFamily="34" charset="-120"/>
               </a:rPr>
               <a:t>EduTrack — School Management Platform</a:t>
             </a:r>
@@ -6672,13 +6375,12 @@
             <a:avLst/>
           </a:prstGeom>
           <a:noFill/>
-          <a:ln/>
         </p:spPr>
         <p:txBody>
           <a:bodyPr wrap="square" lIns="0" tIns="0" rIns="0" bIns="0" rtlCol="0" anchor="ctr"/>
           <a:lstStyle/>
           <a:p>
-            <a:pPr algn="r" indent="0" marL="0">
+            <a:pPr marL="0" indent="0" algn="r">
               <a:buNone/>
             </a:pPr>
             <a:r>
@@ -6686,9 +6388,9 @@
                 <a:solidFill>
                   <a:srgbClr val="94A3B8"/>
                 </a:solidFill>
-                <a:latin typeface="Calibri" pitchFamily="34" charset="0"/>
-                <a:ea typeface="Calibri" pitchFamily="34" charset="-122"/>
-                <a:cs typeface="Calibri" pitchFamily="34" charset="-120"/>
+                <a:latin typeface="Calibri" panose="020F0502020204030204" pitchFamily="34" charset="0"/>
+                <a:ea typeface="Calibri" panose="020F0502020204030204" pitchFamily="34" charset="-122"/>
+                <a:cs typeface="Calibri" panose="020F0502020204030204" pitchFamily="34" charset="-120"/>
               </a:rPr>
               <a:t>13</a:t>
             </a:r>
@@ -6706,12 +6408,13 @@
 
 <file path=ppt/slides/slide14.xml><?xml version="1.0" encoding="utf-8"?>
 <p:sld xmlns:a="http://schemas.openxmlformats.org/drawingml/2006/main" xmlns:r="http://schemas.openxmlformats.org/officeDocument/2006/relationships" xmlns:p="http://schemas.openxmlformats.org/presentationml/2006/main">
-  <p:cSld name="Slide 14">
+  <p:cSld>
     <p:bg>
       <p:bgPr>
         <a:solidFill>
           <a:srgbClr val="020617"/>
         </a:solidFill>
+        <a:effectLst/>
       </p:bgPr>
     </p:bg>
     <p:spTree>
@@ -6747,7 +6450,6 @@
               <a:alpha val="8000"/>
             </a:srgbClr>
           </a:solidFill>
-          <a:ln/>
         </p:spPr>
       </p:sp>
       <p:sp>
@@ -6769,7 +6471,6 @@
               <a:alpha val="8000"/>
             </a:srgbClr>
           </a:solidFill>
-          <a:ln/>
         </p:spPr>
       </p:sp>
       <p:sp>
@@ -6787,23 +6488,22 @@
             <a:avLst/>
           </a:prstGeom>
           <a:noFill/>
-          <a:ln/>
         </p:spPr>
         <p:txBody>
           <a:bodyPr wrap="square" lIns="0" tIns="0" rIns="0" bIns="0" rtlCol="0" anchor="ctr"/>
           <a:lstStyle/>
           <a:p>
-            <a:pPr algn="ctr" indent="0" marL="0">
-              <a:buNone/>
-            </a:pPr>
-            <a:r>
-              <a:rPr lang="en-US" sz="1100" b="1" spc="300" kern="0" dirty="0">
+            <a:pPr marL="0" indent="0" algn="ctr">
+              <a:buNone/>
+            </a:pPr>
+            <a:r>
+              <a:rPr lang="en-US" sz="1100" b="1" kern="0" spc="300" dirty="0">
                 <a:solidFill>
                   <a:srgbClr val="60A5FA"/>
                 </a:solidFill>
-                <a:latin typeface="Calibri" pitchFamily="34" charset="0"/>
-                <a:ea typeface="Calibri" pitchFamily="34" charset="-122"/>
-                <a:cs typeface="Calibri" pitchFamily="34" charset="-120"/>
+                <a:latin typeface="Calibri" panose="020F0502020204030204" pitchFamily="34" charset="0"/>
+                <a:ea typeface="Calibri" panose="020F0502020204030204" pitchFamily="34" charset="-122"/>
+                <a:cs typeface="Calibri" panose="020F0502020204030204" pitchFamily="34" charset="-120"/>
               </a:rPr>
               <a:t>NEXT STEP</a:t>
             </a:r>
@@ -6826,13 +6526,12 @@
             <a:avLst/>
           </a:prstGeom>
           <a:noFill/>
-          <a:ln/>
         </p:spPr>
         <p:txBody>
           <a:bodyPr wrap="square" lIns="0" tIns="0" rIns="0" bIns="0" rtlCol="0" anchor="t"/>
           <a:lstStyle/>
           <a:p>
-            <a:pPr algn="ctr" indent="0" marL="0">
+            <a:pPr marL="0" indent="0" algn="ctr">
               <a:lnSpc>
                 <a:spcPct val="106000"/>
               </a:lnSpc>
@@ -6843,43 +6542,31 @@
                 <a:solidFill>
                   <a:srgbClr val="FFFFFF"/>
                 </a:solidFill>
-                <a:latin typeface="Cambria" pitchFamily="34" charset="0"/>
-                <a:ea typeface="Cambria" pitchFamily="34" charset="-122"/>
-                <a:cs typeface="Cambria" pitchFamily="34" charset="-120"/>
+                <a:latin typeface="Cambria" panose="02040503050406030204" pitchFamily="34" charset="0"/>
+                <a:ea typeface="Cambria" panose="02040503050406030204" pitchFamily="34" charset="-122"/>
+                <a:cs typeface="Cambria" panose="02040503050406030204" pitchFamily="34" charset="-120"/>
               </a:rPr>
               <a:t>See it </a:t>
             </a:r>
-            <a:pPr algn="ctr" indent="0" marL="0">
-              <a:lnSpc>
-                <a:spcPct val="106000"/>
-              </a:lnSpc>
-              <a:buNone/>
-            </a:pPr>
             <a:r>
               <a:rPr lang="en-US" sz="3100" b="1" dirty="0">
                 <a:solidFill>
                   <a:srgbClr val="FFFFFF"/>
                 </a:solidFill>
-                <a:latin typeface="Cambria" pitchFamily="34" charset="0"/>
-                <a:ea typeface="Cambria" pitchFamily="34" charset="-122"/>
-                <a:cs typeface="Cambria" pitchFamily="34" charset="-120"/>
+                <a:latin typeface="Cambria" panose="02040503050406030204" pitchFamily="34" charset="0"/>
+                <a:ea typeface="Cambria" panose="02040503050406030204" pitchFamily="34" charset="-122"/>
+                <a:cs typeface="Cambria" panose="02040503050406030204" pitchFamily="34" charset="-120"/>
               </a:rPr>
               <a:t>live</a:t>
             </a:r>
-            <a:pPr algn="ctr" indent="0" marL="0">
-              <a:lnSpc>
-                <a:spcPct val="106000"/>
-              </a:lnSpc>
-              <a:buNone/>
-            </a:pPr>
             <a:r>
               <a:rPr lang="en-US" sz="3100" b="1" dirty="0">
                 <a:solidFill>
                   <a:srgbClr val="FFFFFF"/>
                 </a:solidFill>
-                <a:latin typeface="Cambria" pitchFamily="34" charset="0"/>
-                <a:ea typeface="Cambria" pitchFamily="34" charset="-122"/>
-                <a:cs typeface="Cambria" pitchFamily="34" charset="-120"/>
+                <a:latin typeface="Cambria" panose="02040503050406030204" pitchFamily="34" charset="0"/>
+                <a:ea typeface="Cambria" panose="02040503050406030204" pitchFamily="34" charset="-122"/>
+                <a:cs typeface="Cambria" panose="02040503050406030204" pitchFamily="34" charset="-120"/>
               </a:rPr>
               <a:t> — a 3-minute demo</a:t>
             </a:r>
@@ -6933,7 +6620,6 @@
           <a:solidFill>
             <a:srgbClr val="10B981"/>
           </a:solidFill>
-          <a:ln/>
         </p:spPr>
       </p:sp>
       <p:sp>
@@ -6951,13 +6637,12 @@
             <a:avLst/>
           </a:prstGeom>
           <a:noFill/>
-          <a:ln/>
         </p:spPr>
         <p:txBody>
           <a:bodyPr wrap="square" lIns="0" tIns="0" rIns="0" bIns="0" rtlCol="0" anchor="ctr"/>
           <a:lstStyle/>
           <a:p>
-            <a:pPr algn="ctr" indent="0" marL="0">
+            <a:pPr marL="0" indent="0" algn="ctr">
               <a:buNone/>
             </a:pPr>
             <a:r>
@@ -6965,9 +6650,9 @@
                 <a:solidFill>
                   <a:srgbClr val="FFFFFF"/>
                 </a:solidFill>
-                <a:latin typeface="Calibri" pitchFamily="34" charset="0"/>
-                <a:ea typeface="Calibri" pitchFamily="34" charset="-122"/>
-                <a:cs typeface="Calibri" pitchFamily="34" charset="-120"/>
+                <a:latin typeface="Calibri" panose="020F0502020204030204" pitchFamily="34" charset="0"/>
+                <a:ea typeface="Calibri" panose="020F0502020204030204" pitchFamily="34" charset="-122"/>
+                <a:cs typeface="Calibri" panose="020F0502020204030204" pitchFamily="34" charset="-120"/>
               </a:rPr>
               <a:t>✓</a:t>
             </a:r>
@@ -6990,13 +6675,12 @@
             <a:avLst/>
           </a:prstGeom>
           <a:noFill/>
-          <a:ln/>
         </p:spPr>
         <p:txBody>
           <a:bodyPr wrap="square" lIns="0" tIns="0" rIns="0" bIns="0" rtlCol="0" anchor="t"/>
           <a:lstStyle/>
           <a:p>
-            <a:pPr indent="0" marL="0">
+            <a:pPr marL="0" indent="0">
               <a:lnSpc>
                 <a:spcPct val="100000"/>
               </a:lnSpc>
@@ -7007,9 +6691,9 @@
                 <a:solidFill>
                   <a:srgbClr val="FFFFFF"/>
                 </a:solidFill>
-                <a:latin typeface="Calibri" pitchFamily="34" charset="0"/>
-                <a:ea typeface="Calibri" pitchFamily="34" charset="-122"/>
-                <a:cs typeface="Calibri" pitchFamily="34" charset="-120"/>
+                <a:latin typeface="Calibri" panose="020F0502020204030204" pitchFamily="34" charset="0"/>
+                <a:ea typeface="Calibri" panose="020F0502020204030204" pitchFamily="34" charset="-122"/>
+                <a:cs typeface="Calibri" panose="020F0502020204030204" pitchFamily="34" charset="-120"/>
               </a:rPr>
               <a:t>A report card generated in one click</a:t>
             </a:r>
@@ -7032,13 +6716,12 @@
             <a:avLst/>
           </a:prstGeom>
           <a:noFill/>
-          <a:ln/>
         </p:spPr>
         <p:txBody>
           <a:bodyPr wrap="square" lIns="0" tIns="0" rIns="0" bIns="0" rtlCol="0" anchor="t"/>
           <a:lstStyle/>
           <a:p>
-            <a:pPr indent="0" marL="0">
+            <a:pPr marL="0" indent="0">
               <a:lnSpc>
                 <a:spcPct val="112000"/>
               </a:lnSpc>
@@ -7049,9 +6732,9 @@
                 <a:solidFill>
                   <a:srgbClr val="94A3B8"/>
                 </a:solidFill>
-                <a:latin typeface="Calibri" pitchFamily="34" charset="0"/>
-                <a:ea typeface="Calibri" pitchFamily="34" charset="-122"/>
-                <a:cs typeface="Calibri" pitchFamily="34" charset="-120"/>
+                <a:latin typeface="Calibri" panose="020F0502020204030204" pitchFamily="34" charset="0"/>
+                <a:ea typeface="Calibri" panose="020F0502020204030204" pitchFamily="34" charset="-122"/>
+                <a:cs typeface="Calibri" panose="020F0502020204030204" pitchFamily="34" charset="-120"/>
               </a:rPr>
               <a:t>Watch a branded A4 PDF appear from a grading matrix.</a:t>
             </a:r>
@@ -7105,7 +6788,6 @@
           <a:solidFill>
             <a:srgbClr val="2563EB"/>
           </a:solidFill>
-          <a:ln/>
         </p:spPr>
       </p:sp>
       <p:sp>
@@ -7123,13 +6805,12 @@
             <a:avLst/>
           </a:prstGeom>
           <a:noFill/>
-          <a:ln/>
         </p:spPr>
         <p:txBody>
           <a:bodyPr wrap="square" lIns="0" tIns="0" rIns="0" bIns="0" rtlCol="0" anchor="ctr"/>
           <a:lstStyle/>
           <a:p>
-            <a:pPr algn="ctr" indent="0" marL="0">
+            <a:pPr marL="0" indent="0" algn="ctr">
               <a:buNone/>
             </a:pPr>
             <a:r>
@@ -7137,9 +6818,9 @@
                 <a:solidFill>
                   <a:srgbClr val="FFFFFF"/>
                 </a:solidFill>
-                <a:latin typeface="Calibri" pitchFamily="34" charset="0"/>
-                <a:ea typeface="Calibri" pitchFamily="34" charset="-122"/>
-                <a:cs typeface="Calibri" pitchFamily="34" charset="-120"/>
+                <a:latin typeface="Calibri" panose="020F0502020204030204" pitchFamily="34" charset="0"/>
+                <a:ea typeface="Calibri" panose="020F0502020204030204" pitchFamily="34" charset="-122"/>
+                <a:cs typeface="Calibri" panose="020F0502020204030204" pitchFamily="34" charset="-120"/>
               </a:rPr>
               <a:t>✎</a:t>
             </a:r>
@@ -7162,13 +6843,12 @@
             <a:avLst/>
           </a:prstGeom>
           <a:noFill/>
-          <a:ln/>
         </p:spPr>
         <p:txBody>
           <a:bodyPr wrap="square" lIns="0" tIns="0" rIns="0" bIns="0" rtlCol="0" anchor="t"/>
           <a:lstStyle/>
           <a:p>
-            <a:pPr indent="0" marL="0">
+            <a:pPr marL="0" indent="0">
               <a:lnSpc>
                 <a:spcPct val="100000"/>
               </a:lnSpc>
@@ -7179,9 +6859,9 @@
                 <a:solidFill>
                   <a:srgbClr val="FFFFFF"/>
                 </a:solidFill>
-                <a:latin typeface="Calibri" pitchFamily="34" charset="0"/>
-                <a:ea typeface="Calibri" pitchFamily="34" charset="-122"/>
-                <a:cs typeface="Calibri" pitchFamily="34" charset="-120"/>
+                <a:latin typeface="Calibri" panose="020F0502020204030204" pitchFamily="34" charset="0"/>
+                <a:ea typeface="Calibri" panose="020F0502020204030204" pitchFamily="34" charset="-122"/>
+                <a:cs typeface="Calibri" panose="020F0502020204030204" pitchFamily="34" charset="-120"/>
               </a:rPr>
               <a:t>Grading as you type</a:t>
             </a:r>
@@ -7204,13 +6884,12 @@
             <a:avLst/>
           </a:prstGeom>
           <a:noFill/>
-          <a:ln/>
         </p:spPr>
         <p:txBody>
           <a:bodyPr wrap="square" lIns="0" tIns="0" rIns="0" bIns="0" rtlCol="0" anchor="t"/>
           <a:lstStyle/>
           <a:p>
-            <a:pPr indent="0" marL="0">
+            <a:pPr marL="0" indent="0">
               <a:lnSpc>
                 <a:spcPct val="112000"/>
               </a:lnSpc>
@@ -7221,9 +6900,9 @@
                 <a:solidFill>
                   <a:srgbClr val="94A3B8"/>
                 </a:solidFill>
-                <a:latin typeface="Calibri" pitchFamily="34" charset="0"/>
-                <a:ea typeface="Calibri" pitchFamily="34" charset="-122"/>
-                <a:cs typeface="Calibri" pitchFamily="34" charset="-120"/>
+                <a:latin typeface="Calibri" panose="020F0502020204030204" pitchFamily="34" charset="0"/>
+                <a:ea typeface="Calibri" panose="020F0502020204030204" pitchFamily="34" charset="-122"/>
+                <a:cs typeface="Calibri" panose="020F0502020204030204" pitchFamily="34" charset="-120"/>
               </a:rPr>
               <a:t>See totals and grades compute live in the matrix.</a:t>
             </a:r>
@@ -7277,7 +6956,6 @@
           <a:solidFill>
             <a:srgbClr val="F59E0B"/>
           </a:solidFill>
-          <a:ln/>
         </p:spPr>
       </p:sp>
       <p:sp>
@@ -7295,13 +6973,12 @@
             <a:avLst/>
           </a:prstGeom>
           <a:noFill/>
-          <a:ln/>
         </p:spPr>
         <p:txBody>
           <a:bodyPr wrap="square" lIns="0" tIns="0" rIns="0" bIns="0" rtlCol="0" anchor="ctr"/>
           <a:lstStyle/>
           <a:p>
-            <a:pPr algn="ctr" indent="0" marL="0">
+            <a:pPr marL="0" indent="0" algn="ctr">
               <a:buNone/>
             </a:pPr>
             <a:r>
@@ -7309,9 +6986,9 @@
                 <a:solidFill>
                   <a:srgbClr val="FFFFFF"/>
                 </a:solidFill>
-                <a:latin typeface="Calibri" pitchFamily="34" charset="0"/>
-                <a:ea typeface="Calibri" pitchFamily="34" charset="-122"/>
-                <a:cs typeface="Calibri" pitchFamily="34" charset="-120"/>
+                <a:latin typeface="Calibri" panose="020F0502020204030204" pitchFamily="34" charset="0"/>
+                <a:ea typeface="Calibri" panose="020F0502020204030204" pitchFamily="34" charset="-122"/>
+                <a:cs typeface="Calibri" panose="020F0502020204030204" pitchFamily="34" charset="-120"/>
               </a:rPr>
               <a:t>☁</a:t>
             </a:r>
@@ -7334,13 +7011,12 @@
             <a:avLst/>
           </a:prstGeom>
           <a:noFill/>
-          <a:ln/>
         </p:spPr>
         <p:txBody>
           <a:bodyPr wrap="square" lIns="0" tIns="0" rIns="0" bIns="0" rtlCol="0" anchor="t"/>
           <a:lstStyle/>
           <a:p>
-            <a:pPr indent="0" marL="0">
+            <a:pPr marL="0" indent="0">
               <a:lnSpc>
                 <a:spcPct val="100000"/>
               </a:lnSpc>
@@ -7351,9 +7027,9 @@
                 <a:solidFill>
                   <a:srgbClr val="FFFFFF"/>
                 </a:solidFill>
-                <a:latin typeface="Calibri" pitchFamily="34" charset="0"/>
-                <a:ea typeface="Calibri" pitchFamily="34" charset="-122"/>
-                <a:cs typeface="Calibri" pitchFamily="34" charset="-120"/>
+                <a:latin typeface="Calibri" panose="020F0502020204030204" pitchFamily="34" charset="0"/>
+                <a:ea typeface="Calibri" panose="020F0502020204030204" pitchFamily="34" charset="-122"/>
+                <a:cs typeface="Calibri" panose="020F0502020204030204" pitchFamily="34" charset="-120"/>
               </a:rPr>
               <a:t>A parent payment, start to finish</a:t>
             </a:r>
@@ -7376,13 +7052,12 @@
             <a:avLst/>
           </a:prstGeom>
           <a:noFill/>
-          <a:ln/>
         </p:spPr>
         <p:txBody>
           <a:bodyPr wrap="square" lIns="0" tIns="0" rIns="0" bIns="0" rtlCol="0" anchor="t"/>
           <a:lstStyle/>
           <a:p>
-            <a:pPr indent="0" marL="0">
+            <a:pPr marL="0" indent="0">
               <a:lnSpc>
                 <a:spcPct val="112000"/>
               </a:lnSpc>
@@ -7393,9 +7068,9 @@
                 <a:solidFill>
                   <a:srgbClr val="94A3B8"/>
                 </a:solidFill>
-                <a:latin typeface="Calibri" pitchFamily="34" charset="0"/>
-                <a:ea typeface="Calibri" pitchFamily="34" charset="-122"/>
-                <a:cs typeface="Calibri" pitchFamily="34" charset="-120"/>
+                <a:latin typeface="Calibri" panose="020F0502020204030204" pitchFamily="34" charset="0"/>
+                <a:ea typeface="Calibri" panose="020F0502020204030204" pitchFamily="34" charset="-122"/>
+                <a:cs typeface="Calibri" panose="020F0502020204030204" pitchFamily="34" charset="-120"/>
               </a:rPr>
               <a:t>Parent pays online → school confirms → balances update.</a:t>
             </a:r>
@@ -7445,13 +7120,12 @@
             <a:avLst/>
           </a:prstGeom>
           <a:noFill/>
-          <a:ln/>
         </p:spPr>
         <p:txBody>
           <a:bodyPr wrap="square" lIns="0" tIns="0" rIns="0" bIns="0" rtlCol="0" anchor="ctr"/>
           <a:lstStyle/>
           <a:p>
-            <a:pPr algn="ctr" indent="0" marL="0">
+            <a:pPr marL="0" indent="0" algn="ctr">
               <a:buNone/>
             </a:pPr>
             <a:r>
@@ -7459,9 +7133,9 @@
                 <a:solidFill>
                   <a:srgbClr val="FFFFFF"/>
                 </a:solidFill>
-                <a:latin typeface="Cambria" pitchFamily="34" charset="0"/>
-                <a:ea typeface="Cambria" pitchFamily="34" charset="-122"/>
-                <a:cs typeface="Cambria" pitchFamily="34" charset="-120"/>
+                <a:latin typeface="Cambria" panose="02040503050406030204" pitchFamily="34" charset="0"/>
+                <a:ea typeface="Cambria" panose="02040503050406030204" pitchFamily="34" charset="-122"/>
+                <a:cs typeface="Cambria" panose="02040503050406030204" pitchFamily="34" charset="-120"/>
               </a:rPr>
               <a:t>Ferdinard Ashonibare</a:t>
             </a:r>
@@ -7484,13 +7158,12 @@
             <a:avLst/>
           </a:prstGeom>
           <a:noFill/>
-          <a:ln/>
         </p:spPr>
         <p:txBody>
           <a:bodyPr wrap="square" lIns="0" tIns="0" rIns="0" bIns="0" rtlCol="0" anchor="ctr"/>
           <a:lstStyle/>
           <a:p>
-            <a:pPr algn="ctr" indent="0" marL="0">
+            <a:pPr marL="0" indent="0" algn="ctr">
               <a:buNone/>
             </a:pPr>
             <a:r>
@@ -7498,9 +7171,9 @@
                 <a:solidFill>
                   <a:srgbClr val="94A3B8"/>
                 </a:solidFill>
-                <a:latin typeface="Calibri" pitchFamily="34" charset="0"/>
-                <a:ea typeface="Calibri" pitchFamily="34" charset="-122"/>
-                <a:cs typeface="Calibri" pitchFamily="34" charset="-120"/>
+                <a:latin typeface="Calibri" panose="020F0502020204030204" pitchFamily="34" charset="0"/>
+                <a:ea typeface="Calibri" panose="020F0502020204030204" pitchFamily="34" charset="-122"/>
+                <a:cs typeface="Calibri" panose="020F0502020204030204" pitchFamily="34" charset="-120"/>
               </a:rPr>
               <a:t>ferdinardoluwajuwonlo@gmail.com   ·   +234 913 736 0986   ·   WhatsApp / call</a:t>
             </a:r>
@@ -7523,13 +7196,12 @@
             <a:avLst/>
           </a:prstGeom>
           <a:noFill/>
-          <a:ln/>
         </p:spPr>
         <p:txBody>
           <a:bodyPr wrap="square" lIns="0" tIns="0" rIns="0" bIns="0" rtlCol="0" anchor="ctr"/>
           <a:lstStyle/>
           <a:p>
-            <a:pPr algn="ctr" indent="0" marL="0">
+            <a:pPr marL="0" indent="0" algn="ctr">
               <a:buNone/>
             </a:pPr>
             <a:r>
@@ -7537,9 +7209,9 @@
                 <a:solidFill>
                   <a:srgbClr val="94A3B8"/>
                 </a:solidFill>
-                <a:latin typeface="Calibri" pitchFamily="34" charset="0"/>
-                <a:ea typeface="Calibri" pitchFamily="34" charset="-122"/>
-                <a:cs typeface="Calibri" pitchFamily="34" charset="-120"/>
+                <a:latin typeface="Calibri" panose="020F0502020204030204" pitchFamily="34" charset="0"/>
+                <a:ea typeface="Calibri" panose="020F0502020204030204" pitchFamily="34" charset="-122"/>
+                <a:cs typeface="Calibri" panose="020F0502020204030204" pitchFamily="34" charset="-120"/>
               </a:rPr>
               <a:t>ferdinardashonibare.com   ·   Lagos, Nigeria — serving schools nationwide</a:t>
             </a:r>
@@ -7564,7 +7236,6 @@
           <a:solidFill>
             <a:srgbClr val="10B981"/>
           </a:solidFill>
-          <a:ln/>
         </p:spPr>
       </p:sp>
       <p:sp>
@@ -7582,13 +7253,12 @@
             <a:avLst/>
           </a:prstGeom>
           <a:noFill/>
-          <a:ln/>
         </p:spPr>
         <p:txBody>
           <a:bodyPr wrap="square" lIns="0" tIns="0" rIns="0" bIns="0" rtlCol="0" anchor="ctr"/>
           <a:lstStyle/>
           <a:p>
-            <a:pPr algn="ctr" indent="0" marL="0">
+            <a:pPr marL="0" indent="0" algn="ctr">
               <a:buNone/>
             </a:pPr>
             <a:r>
@@ -7596,9 +7266,9 @@
                 <a:solidFill>
                   <a:srgbClr val="10B981"/>
                 </a:solidFill>
-                <a:latin typeface="Calibri" pitchFamily="34" charset="0"/>
-                <a:ea typeface="Calibri" pitchFamily="34" charset="-122"/>
-                <a:cs typeface="Calibri" pitchFamily="34" charset="-120"/>
+                <a:latin typeface="Calibri" panose="020F0502020204030204" pitchFamily="34" charset="0"/>
+                <a:ea typeface="Calibri" panose="020F0502020204030204" pitchFamily="34" charset="-122"/>
+                <a:cs typeface="Calibri" panose="020F0502020204030204" pitchFamily="34" charset="-120"/>
               </a:rPr>
               <a:t>Free pilot term — register today, no card required</a:t>
             </a:r>
@@ -7621,13 +7291,12 @@
             <a:avLst/>
           </a:prstGeom>
           <a:noFill/>
-          <a:ln/>
         </p:spPr>
         <p:txBody>
           <a:bodyPr wrap="square" lIns="0" tIns="0" rIns="0" bIns="0" rtlCol="0" anchor="ctr"/>
           <a:lstStyle/>
           <a:p>
-            <a:pPr indent="0" marL="0">
+            <a:pPr marL="0" indent="0">
               <a:buNone/>
             </a:pPr>
             <a:r>
@@ -7635,9 +7304,9 @@
                 <a:solidFill>
                   <a:srgbClr val="64748B"/>
                 </a:solidFill>
-                <a:latin typeface="Calibri" pitchFamily="34" charset="0"/>
-                <a:ea typeface="Calibri" pitchFamily="34" charset="-122"/>
-                <a:cs typeface="Calibri" pitchFamily="34" charset="-120"/>
+                <a:latin typeface="Calibri" panose="020F0502020204030204" pitchFamily="34" charset="0"/>
+                <a:ea typeface="Calibri" panose="020F0502020204030204" pitchFamily="34" charset="-122"/>
+                <a:cs typeface="Calibri" panose="020F0502020204030204" pitchFamily="34" charset="-120"/>
               </a:rPr>
               <a:t>EduTrack — School Management Platform</a:t>
             </a:r>
@@ -7660,13 +7329,12 @@
             <a:avLst/>
           </a:prstGeom>
           <a:noFill/>
-          <a:ln/>
         </p:spPr>
         <p:txBody>
           <a:bodyPr wrap="square" lIns="0" tIns="0" rIns="0" bIns="0" rtlCol="0" anchor="ctr"/>
           <a:lstStyle/>
           <a:p>
-            <a:pPr algn="r" indent="0" marL="0">
+            <a:pPr marL="0" indent="0" algn="r">
               <a:buNone/>
             </a:pPr>
             <a:r>
@@ -7674,9 +7342,9 @@
                 <a:solidFill>
                   <a:srgbClr val="94A3B8"/>
                 </a:solidFill>
-                <a:latin typeface="Calibri" pitchFamily="34" charset="0"/>
-                <a:ea typeface="Calibri" pitchFamily="34" charset="-122"/>
-                <a:cs typeface="Calibri" pitchFamily="34" charset="-120"/>
+                <a:latin typeface="Calibri" panose="020F0502020204030204" pitchFamily="34" charset="0"/>
+                <a:ea typeface="Calibri" panose="020F0502020204030204" pitchFamily="34" charset="-122"/>
+                <a:cs typeface="Calibri" panose="020F0502020204030204" pitchFamily="34" charset="-120"/>
               </a:rPr>
               <a:t>14</a:t>
             </a:r>
@@ -7694,12 +7362,13 @@
 
 <file path=ppt/slides/slide2.xml><?xml version="1.0" encoding="utf-8"?>
 <p:sld xmlns:a="http://schemas.openxmlformats.org/drawingml/2006/main" xmlns:r="http://schemas.openxmlformats.org/officeDocument/2006/relationships" xmlns:p="http://schemas.openxmlformats.org/presentationml/2006/main">
-  <p:cSld name="Slide 2">
+  <p:cSld>
     <p:bg>
       <p:bgPr>
         <a:solidFill>
           <a:srgbClr val="0F172A"/>
         </a:solidFill>
+        <a:effectLst/>
       </p:bgPr>
     </p:bg>
     <p:spTree>
@@ -7735,7 +7404,6 @@
               <a:alpha val="10000"/>
             </a:srgbClr>
           </a:solidFill>
-          <a:ln/>
         </p:spPr>
       </p:sp>
       <p:sp>
@@ -7753,23 +7421,22 @@
             <a:avLst/>
           </a:prstGeom>
           <a:noFill/>
-          <a:ln/>
         </p:spPr>
         <p:txBody>
           <a:bodyPr wrap="square" lIns="0" tIns="0" rIns="0" bIns="0" rtlCol="0" anchor="ctr"/>
           <a:lstStyle/>
           <a:p>
-            <a:pPr algn="l" indent="0" marL="0">
-              <a:buNone/>
-            </a:pPr>
-            <a:r>
-              <a:rPr lang="en-US" sz="1100" b="1" spc="300" kern="0" dirty="0">
+            <a:pPr marL="0" indent="0" algn="l">
+              <a:buNone/>
+            </a:pPr>
+            <a:r>
+              <a:rPr lang="en-US" sz="1100" b="1" kern="0" spc="300" dirty="0">
                 <a:solidFill>
                   <a:srgbClr val="60A5FA"/>
                 </a:solidFill>
-                <a:latin typeface="Calibri" pitchFamily="34" charset="0"/>
-                <a:ea typeface="Calibri" pitchFamily="34" charset="-122"/>
-                <a:cs typeface="Calibri" pitchFamily="34" charset="-120"/>
+                <a:latin typeface="Calibri" panose="020F0502020204030204" pitchFamily="34" charset="0"/>
+                <a:ea typeface="Calibri" panose="020F0502020204030204" pitchFamily="34" charset="-122"/>
+                <a:cs typeface="Calibri" panose="020F0502020204030204" pitchFamily="34" charset="-120"/>
               </a:rPr>
               <a:t>THE PROBLEM</a:t>
             </a:r>
@@ -7792,13 +7459,12 @@
             <a:avLst/>
           </a:prstGeom>
           <a:noFill/>
-          <a:ln/>
         </p:spPr>
         <p:txBody>
           <a:bodyPr wrap="square" lIns="0" tIns="0" rIns="0" bIns="0" rtlCol="0" anchor="t"/>
           <a:lstStyle/>
           <a:p>
-            <a:pPr algn="l" indent="0" marL="0">
+            <a:pPr marL="0" indent="0" algn="l">
               <a:lnSpc>
                 <a:spcPct val="106000"/>
               </a:lnSpc>
@@ -7809,44 +7475,32 @@
                 <a:solidFill>
                   <a:srgbClr val="FFFFFF"/>
                 </a:solidFill>
-                <a:latin typeface="Cambria" pitchFamily="34" charset="0"/>
-                <a:ea typeface="Cambria" pitchFamily="34" charset="-122"/>
-                <a:cs typeface="Cambria" pitchFamily="34" charset="-120"/>
+                <a:latin typeface="Cambria" panose="02040503050406030204" pitchFamily="34" charset="0"/>
+                <a:ea typeface="Cambria" panose="02040503050406030204" pitchFamily="34" charset="-122"/>
+                <a:cs typeface="Cambria" panose="02040503050406030204" pitchFamily="34" charset="-120"/>
               </a:rPr>
               <a:t>Running a school today is paper,
 </a:t>
             </a:r>
-            <a:pPr algn="l" indent="0" marL="0">
-              <a:lnSpc>
-                <a:spcPct val="106000"/>
-              </a:lnSpc>
-              <a:buNone/>
-            </a:pPr>
             <a:r>
               <a:rPr lang="en-US" sz="2900" b="1" dirty="0">
                 <a:solidFill>
                   <a:srgbClr val="FFFFFF"/>
                 </a:solidFill>
-                <a:latin typeface="Cambria" pitchFamily="34" charset="0"/>
-                <a:ea typeface="Cambria" pitchFamily="34" charset="-122"/>
-                <a:cs typeface="Cambria" pitchFamily="34" charset="-120"/>
+                <a:latin typeface="Cambria" panose="02040503050406030204" pitchFamily="34" charset="0"/>
+                <a:ea typeface="Cambria" panose="02040503050406030204" pitchFamily="34" charset="-122"/>
+                <a:cs typeface="Cambria" panose="02040503050406030204" pitchFamily="34" charset="-120"/>
               </a:rPr>
               <a:t>notebooks &amp; </a:t>
             </a:r>
-            <a:pPr algn="l" indent="0" marL="0">
-              <a:lnSpc>
-                <a:spcPct val="106000"/>
-              </a:lnSpc>
-              <a:buNone/>
-            </a:pPr>
             <a:r>
               <a:rPr lang="en-US" sz="2900" b="1" dirty="0">
                 <a:solidFill>
                   <a:srgbClr val="FFFFFF"/>
                 </a:solidFill>
-                <a:latin typeface="Cambria" pitchFamily="34" charset="0"/>
-                <a:ea typeface="Cambria" pitchFamily="34" charset="-122"/>
-                <a:cs typeface="Cambria" pitchFamily="34" charset="-120"/>
+                <a:latin typeface="Cambria" panose="02040503050406030204" pitchFamily="34" charset="0"/>
+                <a:ea typeface="Cambria" panose="02040503050406030204" pitchFamily="34" charset="-122"/>
+                <a:cs typeface="Cambria" panose="02040503050406030204" pitchFamily="34" charset="-120"/>
               </a:rPr>
               <a:t>2-week report cards</a:t>
             </a:r>
@@ -7900,7 +7554,6 @@
           <a:solidFill>
             <a:srgbClr val="10B981"/>
           </a:solidFill>
-          <a:ln/>
         </p:spPr>
       </p:sp>
       <p:sp>
@@ -7918,13 +7571,12 @@
             <a:avLst/>
           </a:prstGeom>
           <a:noFill/>
-          <a:ln/>
         </p:spPr>
         <p:txBody>
           <a:bodyPr wrap="square" lIns="0" tIns="0" rIns="0" bIns="0" rtlCol="0" anchor="ctr"/>
           <a:lstStyle/>
           <a:p>
-            <a:pPr algn="ctr" indent="0" marL="0">
+            <a:pPr marL="0" indent="0" algn="ctr">
               <a:buNone/>
             </a:pPr>
             <a:r>
@@ -7932,9 +7584,9 @@
                 <a:solidFill>
                   <a:srgbClr val="FFFFFF"/>
                 </a:solidFill>
-                <a:latin typeface="Calibri" pitchFamily="34" charset="0"/>
-                <a:ea typeface="Calibri" pitchFamily="34" charset="-122"/>
-                <a:cs typeface="Calibri" pitchFamily="34" charset="-120"/>
+                <a:latin typeface="Calibri" panose="020F0502020204030204" pitchFamily="34" charset="0"/>
+                <a:ea typeface="Calibri" panose="020F0502020204030204" pitchFamily="34" charset="-122"/>
+                <a:cs typeface="Calibri" panose="020F0502020204030204" pitchFamily="34" charset="-120"/>
               </a:rPr>
               <a:t>✓</a:t>
             </a:r>
@@ -7957,13 +7609,12 @@
             <a:avLst/>
           </a:prstGeom>
           <a:noFill/>
-          <a:ln/>
         </p:spPr>
         <p:txBody>
           <a:bodyPr wrap="square" lIns="0" tIns="0" rIns="0" bIns="0" rtlCol="0" anchor="t"/>
           <a:lstStyle/>
           <a:p>
-            <a:pPr indent="0" marL="0">
+            <a:pPr marL="0" indent="0">
               <a:lnSpc>
                 <a:spcPct val="100000"/>
               </a:lnSpc>
@@ -7974,9 +7625,9 @@
                 <a:solidFill>
                   <a:srgbClr val="FFFFFF"/>
                 </a:solidFill>
-                <a:latin typeface="Calibri" pitchFamily="34" charset="0"/>
-                <a:ea typeface="Calibri" pitchFamily="34" charset="-122"/>
-                <a:cs typeface="Calibri" pitchFamily="34" charset="-120"/>
+                <a:latin typeface="Calibri" panose="020F0502020204030204" pitchFamily="34" charset="0"/>
+                <a:ea typeface="Calibri" panose="020F0502020204030204" pitchFamily="34" charset="-122"/>
+                <a:cs typeface="Calibri" panose="020F0502020204030204" pitchFamily="34" charset="-120"/>
               </a:rPr>
               <a:t>Report cards take weeks</a:t>
             </a:r>
@@ -7999,13 +7650,12 @@
             <a:avLst/>
           </a:prstGeom>
           <a:noFill/>
-          <a:ln/>
         </p:spPr>
         <p:txBody>
           <a:bodyPr wrap="square" lIns="0" tIns="0" rIns="0" bIns="0" rtlCol="0" anchor="t"/>
           <a:lstStyle/>
           <a:p>
-            <a:pPr indent="0" marL="0">
+            <a:pPr marL="0" indent="0">
               <a:lnSpc>
                 <a:spcPct val="112000"/>
               </a:lnSpc>
@@ -8016,9 +7666,9 @@
                 <a:solidFill>
                   <a:srgbClr val="94A3B8"/>
                 </a:solidFill>
-                <a:latin typeface="Calibri" pitchFamily="34" charset="0"/>
-                <a:ea typeface="Calibri" pitchFamily="34" charset="-122"/>
-                <a:cs typeface="Calibri" pitchFamily="34" charset="-120"/>
+                <a:latin typeface="Calibri" panose="020F0502020204030204" pitchFamily="34" charset="0"/>
+                <a:ea typeface="Calibri" panose="020F0502020204030204" pitchFamily="34" charset="-122"/>
+                <a:cs typeface="Calibri" panose="020F0502020204030204" pitchFamily="34" charset="-120"/>
               </a:rPr>
               <a:t>Handwritten or Excel report cards mean a term-end crunch — teachers burn out and parents wait weeks for results.</a:t>
             </a:r>
@@ -8072,7 +7722,6 @@
           <a:solidFill>
             <a:srgbClr val="F59E0B"/>
           </a:solidFill>
-          <a:ln/>
         </p:spPr>
       </p:sp>
       <p:sp>
@@ -8090,13 +7739,12 @@
             <a:avLst/>
           </a:prstGeom>
           <a:noFill/>
-          <a:ln/>
         </p:spPr>
         <p:txBody>
           <a:bodyPr wrap="square" lIns="0" tIns="0" rIns="0" bIns="0" rtlCol="0" anchor="ctr"/>
           <a:lstStyle/>
           <a:p>
-            <a:pPr algn="ctr" indent="0" marL="0">
+            <a:pPr marL="0" indent="0" algn="ctr">
               <a:buNone/>
             </a:pPr>
             <a:r>
@@ -8104,9 +7752,9 @@
                 <a:solidFill>
                   <a:srgbClr val="FFFFFF"/>
                 </a:solidFill>
-                <a:latin typeface="Calibri" pitchFamily="34" charset="0"/>
-                <a:ea typeface="Calibri" pitchFamily="34" charset="-122"/>
-                <a:cs typeface="Calibri" pitchFamily="34" charset="-120"/>
+                <a:latin typeface="Calibri" panose="020F0502020204030204" pitchFamily="34" charset="0"/>
+                <a:ea typeface="Calibri" panose="020F0502020204030204" pitchFamily="34" charset="-122"/>
+                <a:cs typeface="Calibri" panose="020F0502020204030204" pitchFamily="34" charset="-120"/>
               </a:rPr>
               <a:t>★</a:t>
             </a:r>
@@ -8129,13 +7777,12 @@
             <a:avLst/>
           </a:prstGeom>
           <a:noFill/>
-          <a:ln/>
         </p:spPr>
         <p:txBody>
           <a:bodyPr wrap="square" lIns="0" tIns="0" rIns="0" bIns="0" rtlCol="0" anchor="t"/>
           <a:lstStyle/>
           <a:p>
-            <a:pPr indent="0" marL="0">
+            <a:pPr marL="0" indent="0">
               <a:lnSpc>
                 <a:spcPct val="100000"/>
               </a:lnSpc>
@@ -8146,9 +7793,9 @@
                 <a:solidFill>
                   <a:srgbClr val="FFFFFF"/>
                 </a:solidFill>
-                <a:latin typeface="Calibri" pitchFamily="34" charset="0"/>
-                <a:ea typeface="Calibri" pitchFamily="34" charset="-122"/>
-                <a:cs typeface="Calibri" pitchFamily="34" charset="-120"/>
+                <a:latin typeface="Calibri" panose="020F0502020204030204" pitchFamily="34" charset="0"/>
+                <a:ea typeface="Calibri" panose="020F0502020204030204" pitchFamily="34" charset="-122"/>
+                <a:cs typeface="Calibri" panose="020F0502020204030204" pitchFamily="34" charset="-120"/>
               </a:rPr>
               <a:t>Fees live in notebooks</a:t>
             </a:r>
@@ -8171,13 +7818,12 @@
             <a:avLst/>
           </a:prstGeom>
           <a:noFill/>
-          <a:ln/>
         </p:spPr>
         <p:txBody>
           <a:bodyPr wrap="square" lIns="0" tIns="0" rIns="0" bIns="0" rtlCol="0" anchor="t"/>
           <a:lstStyle/>
           <a:p>
-            <a:pPr indent="0" marL="0">
+            <a:pPr marL="0" indent="0">
               <a:lnSpc>
                 <a:spcPct val="112000"/>
               </a:lnSpc>
@@ -8188,9 +7834,9 @@
                 <a:solidFill>
                   <a:srgbClr val="94A3B8"/>
                 </a:solidFill>
-                <a:latin typeface="Calibri" pitchFamily="34" charset="0"/>
-                <a:ea typeface="Calibri" pitchFamily="34" charset="-122"/>
-                <a:cs typeface="Calibri" pitchFamily="34" charset="-120"/>
+                <a:latin typeface="Calibri" panose="020F0502020204030204" pitchFamily="34" charset="0"/>
+                <a:ea typeface="Calibri" panose="020F0502020204030204" pitchFamily="34" charset="-122"/>
+                <a:cs typeface="Calibri" panose="020F0502020204030204" pitchFamily="34" charset="-120"/>
               </a:rPr>
               <a:t>Balances tracked in jotter books and spreadsheets — collections leak and nobody knows who truly hasn't paid.</a:t>
             </a:r>
@@ -8244,7 +7890,6 @@
           <a:solidFill>
             <a:srgbClr val="A78BFA"/>
           </a:solidFill>
-          <a:ln/>
         </p:spPr>
       </p:sp>
       <p:sp>
@@ -8262,13 +7907,12 @@
             <a:avLst/>
           </a:prstGeom>
           <a:noFill/>
-          <a:ln/>
         </p:spPr>
         <p:txBody>
           <a:bodyPr wrap="square" lIns="0" tIns="0" rIns="0" bIns="0" rtlCol="0" anchor="ctr"/>
           <a:lstStyle/>
           <a:p>
-            <a:pPr algn="ctr" indent="0" marL="0">
+            <a:pPr marL="0" indent="0" algn="ctr">
               <a:buNone/>
             </a:pPr>
             <a:r>
@@ -8276,9 +7920,9 @@
                 <a:solidFill>
                   <a:srgbClr val="FFFFFF"/>
                 </a:solidFill>
-                <a:latin typeface="Calibri" pitchFamily="34" charset="0"/>
-                <a:ea typeface="Calibri" pitchFamily="34" charset="-122"/>
-                <a:cs typeface="Calibri" pitchFamily="34" charset="-120"/>
+                <a:latin typeface="Calibri" panose="020F0502020204030204" pitchFamily="34" charset="0"/>
+                <a:ea typeface="Calibri" panose="020F0502020204030204" pitchFamily="34" charset="-122"/>
+                <a:cs typeface="Calibri" panose="020F0502020204030204" pitchFamily="34" charset="-120"/>
               </a:rPr>
               <a:t>◔</a:t>
             </a:r>
@@ -8301,13 +7945,12 @@
             <a:avLst/>
           </a:prstGeom>
           <a:noFill/>
-          <a:ln/>
         </p:spPr>
         <p:txBody>
           <a:bodyPr wrap="square" lIns="0" tIns="0" rIns="0" bIns="0" rtlCol="0" anchor="t"/>
           <a:lstStyle/>
           <a:p>
-            <a:pPr indent="0" marL="0">
+            <a:pPr marL="0" indent="0">
               <a:lnSpc>
                 <a:spcPct val="100000"/>
               </a:lnSpc>
@@ -8318,9 +7961,9 @@
                 <a:solidFill>
                   <a:srgbClr val="FFFFFF"/>
                 </a:solidFill>
-                <a:latin typeface="Calibri" pitchFamily="34" charset="0"/>
-                <a:ea typeface="Calibri" pitchFamily="34" charset="-122"/>
-                <a:cs typeface="Calibri" pitchFamily="34" charset="-120"/>
+                <a:latin typeface="Calibri" panose="020F0502020204030204" pitchFamily="34" charset="0"/>
+                <a:ea typeface="Calibri" panose="020F0502020204030204" pitchFamily="34" charset="-122"/>
+                <a:cs typeface="Calibri" panose="020F0502020204030204" pitchFamily="34" charset="-120"/>
               </a:rPr>
               <a:t>Attendance is guesswork</a:t>
             </a:r>
@@ -8343,13 +7986,12 @@
             <a:avLst/>
           </a:prstGeom>
           <a:noFill/>
-          <a:ln/>
         </p:spPr>
         <p:txBody>
           <a:bodyPr wrap="square" lIns="0" tIns="0" rIns="0" bIns="0" rtlCol="0" anchor="t"/>
           <a:lstStyle/>
           <a:p>
-            <a:pPr indent="0" marL="0">
+            <a:pPr marL="0" indent="0">
               <a:lnSpc>
                 <a:spcPct val="112000"/>
               </a:lnSpc>
@@ -8360,9 +8002,9 @@
                 <a:solidFill>
                   <a:srgbClr val="94A3B8"/>
                 </a:solidFill>
-                <a:latin typeface="Calibri" pitchFamily="34" charset="0"/>
-                <a:ea typeface="Calibri" pitchFamily="34" charset="-122"/>
-                <a:cs typeface="Calibri" pitchFamily="34" charset="-120"/>
+                <a:latin typeface="Calibri" panose="020F0502020204030204" pitchFamily="34" charset="0"/>
+                <a:ea typeface="Calibri" panose="020F0502020204030204" pitchFamily="34" charset="-122"/>
+                <a:cs typeface="Calibri" panose="020F0502020204030204" pitchFamily="34" charset="-120"/>
               </a:rPr>
               <a:t>No single record of who's in class day to day — and nothing connects attendance to results or reports.</a:t>
             </a:r>
@@ -8416,7 +8058,6 @@
           <a:solidFill>
             <a:srgbClr val="2563EB"/>
           </a:solidFill>
-          <a:ln/>
         </p:spPr>
       </p:sp>
       <p:sp>
@@ -8434,13 +8075,12 @@
             <a:avLst/>
           </a:prstGeom>
           <a:noFill/>
-          <a:ln/>
         </p:spPr>
         <p:txBody>
           <a:bodyPr wrap="square" lIns="0" tIns="0" rIns="0" bIns="0" rtlCol="0" anchor="ctr"/>
           <a:lstStyle/>
           <a:p>
-            <a:pPr algn="ctr" indent="0" marL="0">
+            <a:pPr marL="0" indent="0" algn="ctr">
               <a:buNone/>
             </a:pPr>
             <a:r>
@@ -8448,9 +8088,9 @@
                 <a:solidFill>
                   <a:srgbClr val="FFFFFF"/>
                 </a:solidFill>
-                <a:latin typeface="Calibri" pitchFamily="34" charset="0"/>
-                <a:ea typeface="Calibri" pitchFamily="34" charset="-122"/>
-                <a:cs typeface="Calibri" pitchFamily="34" charset="-120"/>
+                <a:latin typeface="Calibri" panose="020F0502020204030204" pitchFamily="34" charset="0"/>
+                <a:ea typeface="Calibri" panose="020F0502020204030204" pitchFamily="34" charset="-122"/>
+                <a:cs typeface="Calibri" panose="020F0502020204030204" pitchFamily="34" charset="-120"/>
               </a:rPr>
               <a:t>✉</a:t>
             </a:r>
@@ -8473,13 +8113,12 @@
             <a:avLst/>
           </a:prstGeom>
           <a:noFill/>
-          <a:ln/>
         </p:spPr>
         <p:txBody>
           <a:bodyPr wrap="square" lIns="0" tIns="0" rIns="0" bIns="0" rtlCol="0" anchor="t"/>
           <a:lstStyle/>
           <a:p>
-            <a:pPr indent="0" marL="0">
+            <a:pPr marL="0" indent="0">
               <a:lnSpc>
                 <a:spcPct val="100000"/>
               </a:lnSpc>
@@ -8490,9 +8129,9 @@
                 <a:solidFill>
                   <a:srgbClr val="FFFFFF"/>
                 </a:solidFill>
-                <a:latin typeface="Calibri" pitchFamily="34" charset="0"/>
-                <a:ea typeface="Calibri" pitchFamily="34" charset="-122"/>
-                <a:cs typeface="Calibri" pitchFamily="34" charset="-120"/>
+                <a:latin typeface="Calibri" panose="020F0502020204030204" pitchFamily="34" charset="0"/>
+                <a:ea typeface="Calibri" panose="020F0502020204030204" pitchFamily="34" charset="-122"/>
+                <a:cs typeface="Calibri" panose="020F0502020204030204" pitchFamily="34" charset="-120"/>
               </a:rPr>
               <a:t>Parents are in the dark</a:t>
             </a:r>
@@ -8515,13 +8154,12 @@
             <a:avLst/>
           </a:prstGeom>
           <a:noFill/>
-          <a:ln/>
         </p:spPr>
         <p:txBody>
           <a:bodyPr wrap="square" lIns="0" tIns="0" rIns="0" bIns="0" rtlCol="0" anchor="t"/>
           <a:lstStyle/>
           <a:p>
-            <a:pPr indent="0" marL="0">
+            <a:pPr marL="0" indent="0">
               <a:lnSpc>
                 <a:spcPct val="112000"/>
               </a:lnSpc>
@@ -8532,9 +8170,9 @@
                 <a:solidFill>
                   <a:srgbClr val="94A3B8"/>
                 </a:solidFill>
-                <a:latin typeface="Calibri" pitchFamily="34" charset="0"/>
-                <a:ea typeface="Calibri" pitchFamily="34" charset="-122"/>
-                <a:cs typeface="Calibri" pitchFamily="34" charset="-120"/>
+                <a:latin typeface="Calibri" panose="020F0502020204030204" pitchFamily="34" charset="0"/>
+                <a:ea typeface="Calibri" panose="020F0502020204030204" pitchFamily="34" charset="-122"/>
+                <a:cs typeface="Calibri" panose="020F0502020204030204" pitchFamily="34" charset="-120"/>
               </a:rPr>
               <a:t>Parents only hear about results, attendance and fees when they ask — or when it's too late.</a:t>
             </a:r>
@@ -8557,13 +8195,12 @@
             <a:avLst/>
           </a:prstGeom>
           <a:noFill/>
-          <a:ln/>
         </p:spPr>
         <p:txBody>
           <a:bodyPr wrap="square" lIns="0" tIns="0" rIns="0" bIns="0" rtlCol="0" anchor="t"/>
           <a:lstStyle/>
           <a:p>
-            <a:pPr algn="l" indent="0" marL="0">
+            <a:pPr marL="0" indent="0" algn="l">
               <a:lnSpc>
                 <a:spcPct val="115000"/>
               </a:lnSpc>
@@ -8574,43 +8211,31 @@
                 <a:solidFill>
                   <a:srgbClr val="FFFFFF"/>
                 </a:solidFill>
-                <a:latin typeface="Calibri" pitchFamily="34" charset="0"/>
-                <a:ea typeface="Calibri" pitchFamily="34" charset="-122"/>
-                <a:cs typeface="Calibri" pitchFamily="34" charset="-120"/>
+                <a:latin typeface="Calibri" panose="020F0502020204030204" pitchFamily="34" charset="0"/>
+                <a:ea typeface="Calibri" panose="020F0502020204030204" pitchFamily="34" charset="-122"/>
+                <a:cs typeface="Calibri" panose="020F0502020204030204" pitchFamily="34" charset="-120"/>
               </a:rPr>
               <a:t>The result: </a:t>
             </a:r>
-            <a:pPr algn="l" indent="0" marL="0">
-              <a:lnSpc>
-                <a:spcPct val="115000"/>
-              </a:lnSpc>
-              <a:buNone/>
-            </a:pPr>
             <a:r>
               <a:rPr lang="en-US" sz="1300" b="1" dirty="0">
                 <a:solidFill>
                   <a:srgbClr val="FFFFFF"/>
                 </a:solidFill>
-                <a:latin typeface="Calibri" pitchFamily="34" charset="0"/>
-                <a:ea typeface="Calibri" pitchFamily="34" charset="-122"/>
-                <a:cs typeface="Calibri" pitchFamily="34" charset="-120"/>
+                <a:latin typeface="Calibri" panose="020F0502020204030204" pitchFamily="34" charset="0"/>
+                <a:ea typeface="Calibri" panose="020F0502020204030204" pitchFamily="34" charset="-122"/>
+                <a:cs typeface="Calibri" panose="020F0502020204030204" pitchFamily="34" charset="-120"/>
               </a:rPr>
               <a:t>a painful term-end crunch, uncertain cash flow,</a:t>
             </a:r>
-            <a:pPr algn="l" indent="0" marL="0">
-              <a:lnSpc>
-                <a:spcPct val="115000"/>
-              </a:lnSpc>
-              <a:buNone/>
-            </a:pPr>
             <a:r>
               <a:rPr lang="en-US" sz="1300" b="1" dirty="0">
                 <a:solidFill>
                   <a:srgbClr val="FFFFFF"/>
                 </a:solidFill>
-                <a:latin typeface="Calibri" pitchFamily="34" charset="0"/>
-                <a:ea typeface="Calibri" pitchFamily="34" charset="-122"/>
-                <a:cs typeface="Calibri" pitchFamily="34" charset="-120"/>
+                <a:latin typeface="Calibri" panose="020F0502020204030204" pitchFamily="34" charset="0"/>
+                <a:ea typeface="Calibri" panose="020F0502020204030204" pitchFamily="34" charset="-122"/>
+                <a:cs typeface="Calibri" panose="020F0502020204030204" pitchFamily="34" charset="-120"/>
               </a:rPr>
               <a:t> and no single dashboard where the school owner can see everything.</a:t>
             </a:r>
@@ -8633,13 +8258,12 @@
             <a:avLst/>
           </a:prstGeom>
           <a:noFill/>
-          <a:ln/>
         </p:spPr>
         <p:txBody>
           <a:bodyPr wrap="square" lIns="0" tIns="0" rIns="0" bIns="0" rtlCol="0" anchor="ctr"/>
           <a:lstStyle/>
           <a:p>
-            <a:pPr indent="0" marL="0">
+            <a:pPr marL="0" indent="0">
               <a:buNone/>
             </a:pPr>
             <a:r>
@@ -8647,9 +8271,9 @@
                 <a:solidFill>
                   <a:srgbClr val="64748B"/>
                 </a:solidFill>
-                <a:latin typeface="Calibri" pitchFamily="34" charset="0"/>
-                <a:ea typeface="Calibri" pitchFamily="34" charset="-122"/>
-                <a:cs typeface="Calibri" pitchFamily="34" charset="-120"/>
+                <a:latin typeface="Calibri" panose="020F0502020204030204" pitchFamily="34" charset="0"/>
+                <a:ea typeface="Calibri" panose="020F0502020204030204" pitchFamily="34" charset="-122"/>
+                <a:cs typeface="Calibri" panose="020F0502020204030204" pitchFamily="34" charset="-120"/>
               </a:rPr>
               <a:t>EduTrack — School Management Platform</a:t>
             </a:r>
@@ -8672,13 +8296,12 @@
             <a:avLst/>
           </a:prstGeom>
           <a:noFill/>
-          <a:ln/>
         </p:spPr>
         <p:txBody>
           <a:bodyPr wrap="square" lIns="0" tIns="0" rIns="0" bIns="0" rtlCol="0" anchor="ctr"/>
           <a:lstStyle/>
           <a:p>
-            <a:pPr algn="r" indent="0" marL="0">
+            <a:pPr marL="0" indent="0" algn="r">
               <a:buNone/>
             </a:pPr>
             <a:r>
@@ -8686,9 +8309,9 @@
                 <a:solidFill>
                   <a:srgbClr val="94A3B8"/>
                 </a:solidFill>
-                <a:latin typeface="Calibri" pitchFamily="34" charset="0"/>
-                <a:ea typeface="Calibri" pitchFamily="34" charset="-122"/>
-                <a:cs typeface="Calibri" pitchFamily="34" charset="-120"/>
+                <a:latin typeface="Calibri" panose="020F0502020204030204" pitchFamily="34" charset="0"/>
+                <a:ea typeface="Calibri" panose="020F0502020204030204" pitchFamily="34" charset="-122"/>
+                <a:cs typeface="Calibri" panose="020F0502020204030204" pitchFamily="34" charset="-120"/>
               </a:rPr>
               <a:t>02</a:t>
             </a:r>
@@ -8706,12 +8329,13 @@
 
 <file path=ppt/slides/slide3.xml><?xml version="1.0" encoding="utf-8"?>
 <p:sld xmlns:a="http://schemas.openxmlformats.org/drawingml/2006/main" xmlns:r="http://schemas.openxmlformats.org/officeDocument/2006/relationships" xmlns:p="http://schemas.openxmlformats.org/presentationml/2006/main">
-  <p:cSld name="Slide 3">
+  <p:cSld>
     <p:bg>
       <p:bgPr>
         <a:solidFill>
           <a:srgbClr val="0F172A"/>
         </a:solidFill>
+        <a:effectLst/>
       </p:bgPr>
     </p:bg>
     <p:spTree>
@@ -8747,7 +8371,6 @@
               <a:alpha val="8000"/>
             </a:srgbClr>
           </a:solidFill>
-          <a:ln/>
         </p:spPr>
       </p:sp>
       <p:sp>
@@ -8765,23 +8388,22 @@
             <a:avLst/>
           </a:prstGeom>
           <a:noFill/>
-          <a:ln/>
         </p:spPr>
         <p:txBody>
           <a:bodyPr wrap="square" lIns="0" tIns="0" rIns="0" bIns="0" rtlCol="0" anchor="ctr"/>
           <a:lstStyle/>
           <a:p>
-            <a:pPr algn="l" indent="0" marL="0">
-              <a:buNone/>
-            </a:pPr>
-            <a:r>
-              <a:rPr lang="en-US" sz="1100" b="1" spc="300" kern="0" dirty="0">
+            <a:pPr marL="0" indent="0" algn="l">
+              <a:buNone/>
+            </a:pPr>
+            <a:r>
+              <a:rPr lang="en-US" sz="1100" b="1" kern="0" spc="300" dirty="0">
                 <a:solidFill>
                   <a:srgbClr val="60A5FA"/>
                 </a:solidFill>
-                <a:latin typeface="Calibri" pitchFamily="34" charset="0"/>
-                <a:ea typeface="Calibri" pitchFamily="34" charset="-122"/>
-                <a:cs typeface="Calibri" pitchFamily="34" charset="-120"/>
+                <a:latin typeface="Calibri" panose="020F0502020204030204" pitchFamily="34" charset="0"/>
+                <a:ea typeface="Calibri" panose="020F0502020204030204" pitchFamily="34" charset="-122"/>
+                <a:cs typeface="Calibri" panose="020F0502020204030204" pitchFamily="34" charset="-120"/>
               </a:rPr>
               <a:t>THE SOLUTION</a:t>
             </a:r>
@@ -8804,13 +8426,12 @@
             <a:avLst/>
           </a:prstGeom>
           <a:noFill/>
-          <a:ln/>
         </p:spPr>
         <p:txBody>
           <a:bodyPr wrap="square" lIns="0" tIns="0" rIns="0" bIns="0" rtlCol="0" anchor="t"/>
           <a:lstStyle/>
           <a:p>
-            <a:pPr algn="l" indent="0" marL="0">
+            <a:pPr marL="0" indent="0" algn="l">
               <a:lnSpc>
                 <a:spcPct val="106000"/>
               </a:lnSpc>
@@ -8821,27 +8442,21 @@
                 <a:solidFill>
                   <a:srgbClr val="FFFFFF"/>
                 </a:solidFill>
-                <a:latin typeface="Cambria" pitchFamily="34" charset="0"/>
-                <a:ea typeface="Cambria" pitchFamily="34" charset="-122"/>
-                <a:cs typeface="Cambria" pitchFamily="34" charset="-120"/>
+                <a:latin typeface="Cambria" panose="02040503050406030204" pitchFamily="34" charset="0"/>
+                <a:ea typeface="Cambria" panose="02040503050406030204" pitchFamily="34" charset="-122"/>
+                <a:cs typeface="Cambria" panose="02040503050406030204" pitchFamily="34" charset="-120"/>
               </a:rPr>
               <a:t>Edutrack puts your whole school
 </a:t>
             </a:r>
-            <a:pPr algn="l" indent="0" marL="0">
-              <a:lnSpc>
-                <a:spcPct val="106000"/>
-              </a:lnSpc>
-              <a:buNone/>
-            </a:pPr>
             <a:r>
               <a:rPr lang="en-US" sz="2900" b="1" dirty="0">
                 <a:solidFill>
                   <a:srgbClr val="FFFFFF"/>
                 </a:solidFill>
-                <a:latin typeface="Cambria" pitchFamily="34" charset="0"/>
-                <a:ea typeface="Cambria" pitchFamily="34" charset="-122"/>
-                <a:cs typeface="Cambria" pitchFamily="34" charset="-120"/>
+                <a:latin typeface="Cambria" panose="02040503050406030204" pitchFamily="34" charset="0"/>
+                <a:ea typeface="Cambria" panose="02040503050406030204" pitchFamily="34" charset="-122"/>
+                <a:cs typeface="Cambria" panose="02040503050406030204" pitchFamily="34" charset="-120"/>
               </a:rPr>
               <a:t>in one cloud platform</a:t>
             </a:r>
@@ -8891,13 +8506,12 @@
             <a:avLst/>
           </a:prstGeom>
           <a:noFill/>
-          <a:ln/>
         </p:spPr>
         <p:txBody>
           <a:bodyPr wrap="square" lIns="0" tIns="0" rIns="0" bIns="0" rtlCol="0" anchor="ctr"/>
           <a:lstStyle/>
           <a:p>
-            <a:pPr algn="ctr" indent="0" marL="0">
+            <a:pPr marL="0" indent="0" algn="ctr">
               <a:buNone/>
             </a:pPr>
             <a:r>
@@ -8905,9 +8519,9 @@
                 <a:solidFill>
                   <a:srgbClr val="10B981"/>
                 </a:solidFill>
-                <a:latin typeface="Calibri" pitchFamily="34" charset="0"/>
-                <a:ea typeface="Calibri" pitchFamily="34" charset="-122"/>
-                <a:cs typeface="Calibri" pitchFamily="34" charset="-120"/>
+                <a:latin typeface="Calibri" panose="020F0502020204030204" pitchFamily="34" charset="0"/>
+                <a:ea typeface="Calibri" panose="020F0502020204030204" pitchFamily="34" charset="-122"/>
+                <a:cs typeface="Calibri" panose="020F0502020204030204" pitchFamily="34" charset="-120"/>
               </a:rPr>
               <a:t>✓</a:t>
             </a:r>
@@ -8930,13 +8544,12 @@
             <a:avLst/>
           </a:prstGeom>
           <a:noFill/>
-          <a:ln/>
         </p:spPr>
         <p:txBody>
           <a:bodyPr wrap="square" lIns="0" tIns="0" rIns="0" bIns="0" rtlCol="0" anchor="t"/>
           <a:lstStyle/>
           <a:p>
-            <a:pPr indent="0" marL="0">
+            <a:pPr marL="0" indent="0">
               <a:lnSpc>
                 <a:spcPct val="110000"/>
               </a:lnSpc>
@@ -8947,26 +8560,20 @@
                 <a:solidFill>
                   <a:srgbClr val="FFFFFF"/>
                 </a:solidFill>
-                <a:latin typeface="Calibri" pitchFamily="34" charset="0"/>
-                <a:ea typeface="Calibri" pitchFamily="34" charset="-122"/>
-                <a:cs typeface="Calibri" pitchFamily="34" charset="-120"/>
+                <a:latin typeface="Calibri" panose="020F0502020204030204" pitchFamily="34" charset="0"/>
+                <a:ea typeface="Calibri" panose="020F0502020204030204" pitchFamily="34" charset="-122"/>
+                <a:cs typeface="Calibri" panose="020F0502020204030204" pitchFamily="34" charset="-120"/>
               </a:rPr>
               <a:t>One login, four portals</a:t>
             </a:r>
-            <a:pPr indent="0" marL="0">
-              <a:lnSpc>
-                <a:spcPct val="110000"/>
-              </a:lnSpc>
-              <a:buNone/>
-            </a:pPr>
             <a:r>
               <a:rPr lang="en-US" sz="1300" dirty="0">
                 <a:solidFill>
                   <a:srgbClr val="94A3B8"/>
                 </a:solidFill>
-                <a:latin typeface="Calibri" pitchFamily="34" charset="0"/>
-                <a:ea typeface="Calibri" pitchFamily="34" charset="-122"/>
-                <a:cs typeface="Calibri" pitchFamily="34" charset="-120"/>
+                <a:latin typeface="Calibri" panose="020F0502020204030204" pitchFamily="34" charset="0"/>
+                <a:ea typeface="Calibri" panose="020F0502020204030204" pitchFamily="34" charset="-122"/>
+                <a:cs typeface="Calibri" panose="020F0502020204030204" pitchFamily="34" charset="-120"/>
               </a:rPr>
               <a:t> — Super Admin, Teacher, Student and Parent each see exactly what they should.</a:t>
             </a:r>
@@ -9016,13 +8623,12 @@
             <a:avLst/>
           </a:prstGeom>
           <a:noFill/>
-          <a:ln/>
         </p:spPr>
         <p:txBody>
           <a:bodyPr wrap="square" lIns="0" tIns="0" rIns="0" bIns="0" rtlCol="0" anchor="ctr"/>
           <a:lstStyle/>
           <a:p>
-            <a:pPr algn="ctr" indent="0" marL="0">
+            <a:pPr marL="0" indent="0" algn="ctr">
               <a:buNone/>
             </a:pPr>
             <a:r>
@@ -9030,9 +8636,9 @@
                 <a:solidFill>
                   <a:srgbClr val="10B981"/>
                 </a:solidFill>
-                <a:latin typeface="Calibri" pitchFamily="34" charset="0"/>
-                <a:ea typeface="Calibri" pitchFamily="34" charset="-122"/>
-                <a:cs typeface="Calibri" pitchFamily="34" charset="-120"/>
+                <a:latin typeface="Calibri" panose="020F0502020204030204" pitchFamily="34" charset="0"/>
+                <a:ea typeface="Calibri" panose="020F0502020204030204" pitchFamily="34" charset="-122"/>
+                <a:cs typeface="Calibri" panose="020F0502020204030204" pitchFamily="34" charset="-120"/>
               </a:rPr>
               <a:t>✓</a:t>
             </a:r>
@@ -9055,13 +8661,12 @@
             <a:avLst/>
           </a:prstGeom>
           <a:noFill/>
-          <a:ln/>
         </p:spPr>
         <p:txBody>
           <a:bodyPr wrap="square" lIns="0" tIns="0" rIns="0" bIns="0" rtlCol="0" anchor="t"/>
           <a:lstStyle/>
           <a:p>
-            <a:pPr indent="0" marL="0">
+            <a:pPr marL="0" indent="0">
               <a:lnSpc>
                 <a:spcPct val="110000"/>
               </a:lnSpc>
@@ -9072,26 +8677,20 @@
                 <a:solidFill>
                   <a:srgbClr val="FFFFFF"/>
                 </a:solidFill>
-                <a:latin typeface="Calibri" pitchFamily="34" charset="0"/>
-                <a:ea typeface="Calibri" pitchFamily="34" charset="-122"/>
-                <a:cs typeface="Calibri" pitchFamily="34" charset="-120"/>
+                <a:latin typeface="Calibri" panose="020F0502020204030204" pitchFamily="34" charset="0"/>
+                <a:ea typeface="Calibri" panose="020F0502020204030204" pitchFamily="34" charset="-122"/>
+                <a:cs typeface="Calibri" panose="020F0502020204030204" pitchFamily="34" charset="-120"/>
               </a:rPr>
               <a:t>Works in any browser</a:t>
             </a:r>
-            <a:pPr indent="0" marL="0">
-              <a:lnSpc>
-                <a:spcPct val="110000"/>
-              </a:lnSpc>
-              <a:buNone/>
-            </a:pPr>
             <a:r>
               <a:rPr lang="en-US" sz="1300" dirty="0">
                 <a:solidFill>
                   <a:srgbClr val="94A3B8"/>
                 </a:solidFill>
-                <a:latin typeface="Calibri" pitchFamily="34" charset="0"/>
-                <a:ea typeface="Calibri" pitchFamily="34" charset="-122"/>
-                <a:cs typeface="Calibri" pitchFamily="34" charset="-120"/>
+                <a:latin typeface="Calibri" panose="020F0502020204030204" pitchFamily="34" charset="0"/>
+                <a:ea typeface="Calibri" panose="020F0502020204030204" pitchFamily="34" charset="-122"/>
+                <a:cs typeface="Calibri" panose="020F0502020204030204" pitchFamily="34" charset="-120"/>
               </a:rPr>
               <a:t> — phones, tablets, laptops and shared school computers. No software to install on school machines.</a:t>
             </a:r>
@@ -9141,13 +8740,12 @@
             <a:avLst/>
           </a:prstGeom>
           <a:noFill/>
-          <a:ln/>
         </p:spPr>
         <p:txBody>
           <a:bodyPr wrap="square" lIns="0" tIns="0" rIns="0" bIns="0" rtlCol="0" anchor="ctr"/>
           <a:lstStyle/>
           <a:p>
-            <a:pPr algn="ctr" indent="0" marL="0">
+            <a:pPr marL="0" indent="0" algn="ctr">
               <a:buNone/>
             </a:pPr>
             <a:r>
@@ -9155,9 +8753,9 @@
                 <a:solidFill>
                   <a:srgbClr val="10B981"/>
                 </a:solidFill>
-                <a:latin typeface="Calibri" pitchFamily="34" charset="0"/>
-                <a:ea typeface="Calibri" pitchFamily="34" charset="-122"/>
-                <a:cs typeface="Calibri" pitchFamily="34" charset="-120"/>
+                <a:latin typeface="Calibri" panose="020F0502020204030204" pitchFamily="34" charset="0"/>
+                <a:ea typeface="Calibri" panose="020F0502020204030204" pitchFamily="34" charset="-122"/>
+                <a:cs typeface="Calibri" panose="020F0502020204030204" pitchFamily="34" charset="-120"/>
               </a:rPr>
               <a:t>✓</a:t>
             </a:r>
@@ -9180,13 +8778,12 @@
             <a:avLst/>
           </a:prstGeom>
           <a:noFill/>
-          <a:ln/>
         </p:spPr>
         <p:txBody>
           <a:bodyPr wrap="square" lIns="0" tIns="0" rIns="0" bIns="0" rtlCol="0" anchor="t"/>
           <a:lstStyle/>
           <a:p>
-            <a:pPr indent="0" marL="0">
+            <a:pPr marL="0" indent="0">
               <a:lnSpc>
                 <a:spcPct val="110000"/>
               </a:lnSpc>
@@ -9197,26 +8794,20 @@
                 <a:solidFill>
                   <a:srgbClr val="FFFFFF"/>
                 </a:solidFill>
-                <a:latin typeface="Calibri" pitchFamily="34" charset="0"/>
-                <a:ea typeface="Calibri" pitchFamily="34" charset="-122"/>
-                <a:cs typeface="Calibri" pitchFamily="34" charset="-120"/>
+                <a:latin typeface="Calibri" panose="020F0502020204030204" pitchFamily="34" charset="0"/>
+                <a:ea typeface="Calibri" panose="020F0502020204030204" pitchFamily="34" charset="-122"/>
+                <a:cs typeface="Calibri" panose="020F0502020204030204" pitchFamily="34" charset="-120"/>
               </a:rPr>
               <a:t>Installable as an app</a:t>
             </a:r>
-            <a:pPr indent="0" marL="0">
-              <a:lnSpc>
-                <a:spcPct val="110000"/>
-              </a:lnSpc>
-              <a:buNone/>
-            </a:pPr>
             <a:r>
               <a:rPr lang="en-US" sz="1300" dirty="0">
                 <a:solidFill>
                   <a:srgbClr val="94A3B8"/>
                 </a:solidFill>
-                <a:latin typeface="Calibri" pitchFamily="34" charset="0"/>
-                <a:ea typeface="Calibri" pitchFamily="34" charset="-122"/>
-                <a:cs typeface="Calibri" pitchFamily="34" charset="-120"/>
+                <a:latin typeface="Calibri" panose="020F0502020204030204" pitchFamily="34" charset="0"/>
+                <a:ea typeface="Calibri" panose="020F0502020204030204" pitchFamily="34" charset="-122"/>
+                <a:cs typeface="Calibri" panose="020F0502020204030204" pitchFamily="34" charset="-120"/>
               </a:rPr>
               <a:t> — teachers and admins can pin Edutrack to their Android or Windows device like a native app.</a:t>
             </a:r>
@@ -9266,13 +8857,12 @@
             <a:avLst/>
           </a:prstGeom>
           <a:noFill/>
-          <a:ln/>
         </p:spPr>
         <p:txBody>
           <a:bodyPr wrap="square" lIns="0" tIns="0" rIns="0" bIns="0" rtlCol="0" anchor="ctr"/>
           <a:lstStyle/>
           <a:p>
-            <a:pPr algn="ctr" indent="0" marL="0">
+            <a:pPr marL="0" indent="0" algn="ctr">
               <a:buNone/>
             </a:pPr>
             <a:r>
@@ -9280,9 +8870,9 @@
                 <a:solidFill>
                   <a:srgbClr val="10B981"/>
                 </a:solidFill>
-                <a:latin typeface="Calibri" pitchFamily="34" charset="0"/>
-                <a:ea typeface="Calibri" pitchFamily="34" charset="-122"/>
-                <a:cs typeface="Calibri" pitchFamily="34" charset="-120"/>
+                <a:latin typeface="Calibri" panose="020F0502020204030204" pitchFamily="34" charset="0"/>
+                <a:ea typeface="Calibri" panose="020F0502020204030204" pitchFamily="34" charset="-122"/>
+                <a:cs typeface="Calibri" panose="020F0502020204030204" pitchFamily="34" charset="-120"/>
               </a:rPr>
               <a:t>✓</a:t>
             </a:r>
@@ -9305,13 +8895,12 @@
             <a:avLst/>
           </a:prstGeom>
           <a:noFill/>
-          <a:ln/>
         </p:spPr>
         <p:txBody>
           <a:bodyPr wrap="square" lIns="0" tIns="0" rIns="0" bIns="0" rtlCol="0" anchor="t"/>
           <a:lstStyle/>
           <a:p>
-            <a:pPr indent="0" marL="0">
+            <a:pPr marL="0" indent="0">
               <a:lnSpc>
                 <a:spcPct val="110000"/>
               </a:lnSpc>
@@ -9322,26 +8911,20 @@
                 <a:solidFill>
                   <a:srgbClr val="FFFFFF"/>
                 </a:solidFill>
-                <a:latin typeface="Calibri" pitchFamily="34" charset="0"/>
-                <a:ea typeface="Calibri" pitchFamily="34" charset="-122"/>
-                <a:cs typeface="Calibri" pitchFamily="34" charset="-120"/>
+                <a:latin typeface="Calibri" panose="020F0502020204030204" pitchFamily="34" charset="0"/>
+                <a:ea typeface="Calibri" panose="020F0502020204030204" pitchFamily="34" charset="-122"/>
+                <a:cs typeface="Calibri" panose="020F0502020204030204" pitchFamily="34" charset="-120"/>
               </a:rPr>
               <a:t>Private &amp; secure</a:t>
             </a:r>
-            <a:pPr indent="0" marL="0">
-              <a:lnSpc>
-                <a:spcPct val="110000"/>
-              </a:lnSpc>
-              <a:buNone/>
-            </a:pPr>
             <a:r>
               <a:rPr lang="en-US" sz="1300" dirty="0">
                 <a:solidFill>
                   <a:srgbClr val="94A3B8"/>
                 </a:solidFill>
-                <a:latin typeface="Calibri" pitchFamily="34" charset="0"/>
-                <a:ea typeface="Calibri" pitchFamily="34" charset="-122"/>
-                <a:cs typeface="Calibri" pitchFamily="34" charset="-120"/>
+                <a:latin typeface="Calibri" panose="020F0502020204030204" pitchFamily="34" charset="0"/>
+                <a:ea typeface="Calibri" panose="020F0502020204030204" pitchFamily="34" charset="-122"/>
+                <a:cs typeface="Calibri" panose="020F0502020204030204" pitchFamily="34" charset="-120"/>
               </a:rPr>
               <a:t> — every school gets a fully isolated space; your data can never mix with another school's.</a:t>
             </a:r>
@@ -9391,13 +8974,12 @@
             <a:avLst/>
           </a:prstGeom>
           <a:noFill/>
-          <a:ln/>
         </p:spPr>
         <p:txBody>
           <a:bodyPr wrap="square" lIns="0" tIns="0" rIns="0" bIns="0" rtlCol="0" anchor="ctr"/>
           <a:lstStyle/>
           <a:p>
-            <a:pPr algn="ctr" indent="0" marL="0">
+            <a:pPr marL="0" indent="0" algn="ctr">
               <a:buNone/>
             </a:pPr>
             <a:r>
@@ -9405,9 +8987,9 @@
                 <a:solidFill>
                   <a:srgbClr val="60A5FA"/>
                 </a:solidFill>
-                <a:latin typeface="Cambria" pitchFamily="34" charset="0"/>
-                <a:ea typeface="Cambria" pitchFamily="34" charset="-122"/>
-                <a:cs typeface="Cambria" pitchFamily="34" charset="-120"/>
+                <a:latin typeface="Cambria" panose="02040503050406030204" pitchFamily="34" charset="0"/>
+                <a:ea typeface="Cambria" panose="02040503050406030204" pitchFamily="34" charset="-122"/>
+                <a:cs typeface="Cambria" panose="02040503050406030204" pitchFamily="34" charset="-120"/>
               </a:rPr>
               <a:t>8</a:t>
             </a:r>
@@ -9430,23 +9012,22 @@
             <a:avLst/>
           </a:prstGeom>
           <a:noFill/>
-          <a:ln/>
         </p:spPr>
         <p:txBody>
           <a:bodyPr wrap="square" lIns="0" tIns="0" rIns="0" bIns="0" rtlCol="0" anchor="ctr"/>
           <a:lstStyle/>
           <a:p>
-            <a:pPr algn="ctr" indent="0" marL="0">
-              <a:buNone/>
-            </a:pPr>
-            <a:r>
-              <a:rPr lang="en-US" sz="850" b="1" spc="100" kern="0" dirty="0">
+            <a:pPr marL="0" indent="0" algn="ctr">
+              <a:buNone/>
+            </a:pPr>
+            <a:r>
+              <a:rPr lang="en-US" sz="850" b="1" kern="0" spc="100" dirty="0">
                 <a:solidFill>
                   <a:srgbClr val="94A3B8"/>
                 </a:solidFill>
-                <a:latin typeface="Calibri" pitchFamily="34" charset="0"/>
-                <a:ea typeface="Calibri" pitchFamily="34" charset="-122"/>
-                <a:cs typeface="Calibri" pitchFamily="34" charset="-120"/>
+                <a:latin typeface="Calibri" panose="020F0502020204030204" pitchFamily="34" charset="0"/>
+                <a:ea typeface="Calibri" panose="020F0502020204030204" pitchFamily="34" charset="-122"/>
+                <a:cs typeface="Calibri" panose="020F0502020204030204" pitchFamily="34" charset="-120"/>
               </a:rPr>
               <a:t>MODULES</a:t>
             </a:r>
@@ -9496,13 +9077,12 @@
             <a:avLst/>
           </a:prstGeom>
           <a:noFill/>
-          <a:ln/>
         </p:spPr>
         <p:txBody>
           <a:bodyPr wrap="square" lIns="0" tIns="0" rIns="0" bIns="0" rtlCol="0" anchor="ctr"/>
           <a:lstStyle/>
           <a:p>
-            <a:pPr algn="ctr" indent="0" marL="0">
+            <a:pPr marL="0" indent="0" algn="ctr">
               <a:buNone/>
             </a:pPr>
             <a:r>
@@ -9510,9 +9090,9 @@
                 <a:solidFill>
                   <a:srgbClr val="10B981"/>
                 </a:solidFill>
-                <a:latin typeface="Cambria" pitchFamily="34" charset="0"/>
-                <a:ea typeface="Cambria" pitchFamily="34" charset="-122"/>
-                <a:cs typeface="Cambria" pitchFamily="34" charset="-120"/>
+                <a:latin typeface="Cambria" panose="02040503050406030204" pitchFamily="34" charset="0"/>
+                <a:ea typeface="Cambria" panose="02040503050406030204" pitchFamily="34" charset="-122"/>
+                <a:cs typeface="Cambria" panose="02040503050406030204" pitchFamily="34" charset="-120"/>
               </a:rPr>
               <a:t>4</a:t>
             </a:r>
@@ -9535,23 +9115,22 @@
             <a:avLst/>
           </a:prstGeom>
           <a:noFill/>
-          <a:ln/>
         </p:spPr>
         <p:txBody>
           <a:bodyPr wrap="square" lIns="0" tIns="0" rIns="0" bIns="0" rtlCol="0" anchor="ctr"/>
           <a:lstStyle/>
           <a:p>
-            <a:pPr algn="ctr" indent="0" marL="0">
-              <a:buNone/>
-            </a:pPr>
-            <a:r>
-              <a:rPr lang="en-US" sz="850" b="1" spc="100" kern="0" dirty="0">
+            <a:pPr marL="0" indent="0" algn="ctr">
+              <a:buNone/>
+            </a:pPr>
+            <a:r>
+              <a:rPr lang="en-US" sz="850" b="1" kern="0" spc="100" dirty="0">
                 <a:solidFill>
                   <a:srgbClr val="94A3B8"/>
                 </a:solidFill>
-                <a:latin typeface="Calibri" pitchFamily="34" charset="0"/>
-                <a:ea typeface="Calibri" pitchFamily="34" charset="-122"/>
-                <a:cs typeface="Calibri" pitchFamily="34" charset="-120"/>
+                <a:latin typeface="Calibri" panose="020F0502020204030204" pitchFamily="34" charset="0"/>
+                <a:ea typeface="Calibri" panose="020F0502020204030204" pitchFamily="34" charset="-122"/>
+                <a:cs typeface="Calibri" panose="020F0502020204030204" pitchFamily="34" charset="-120"/>
               </a:rPr>
               <a:t>ROLE PORTALS</a:t>
             </a:r>
@@ -9601,13 +9180,12 @@
             <a:avLst/>
           </a:prstGeom>
           <a:noFill/>
-          <a:ln/>
         </p:spPr>
         <p:txBody>
           <a:bodyPr wrap="square" lIns="0" tIns="0" rIns="0" bIns="0" rtlCol="0" anchor="ctr"/>
           <a:lstStyle/>
           <a:p>
-            <a:pPr algn="ctr" indent="0" marL="0">
+            <a:pPr marL="0" indent="0" algn="ctr">
               <a:buNone/>
             </a:pPr>
             <a:r>
@@ -9615,9 +9193,9 @@
                 <a:solidFill>
                   <a:srgbClr val="A78BFA"/>
                 </a:solidFill>
-                <a:latin typeface="Cambria" pitchFamily="34" charset="0"/>
-                <a:ea typeface="Cambria" pitchFamily="34" charset="-122"/>
-                <a:cs typeface="Cambria" pitchFamily="34" charset="-120"/>
+                <a:latin typeface="Cambria" panose="02040503050406030204" pitchFamily="34" charset="0"/>
+                <a:ea typeface="Cambria" panose="02040503050406030204" pitchFamily="34" charset="-122"/>
+                <a:cs typeface="Cambria" panose="02040503050406030204" pitchFamily="34" charset="-120"/>
               </a:rPr>
               <a:t>1</a:t>
             </a:r>
@@ -9640,23 +9218,22 @@
             <a:avLst/>
           </a:prstGeom>
           <a:noFill/>
-          <a:ln/>
         </p:spPr>
         <p:txBody>
           <a:bodyPr wrap="square" lIns="0" tIns="0" rIns="0" bIns="0" rtlCol="0" anchor="ctr"/>
           <a:lstStyle/>
           <a:p>
-            <a:pPr algn="ctr" indent="0" marL="0">
-              <a:buNone/>
-            </a:pPr>
-            <a:r>
-              <a:rPr lang="en-US" sz="850" b="1" spc="100" kern="0" dirty="0">
+            <a:pPr marL="0" indent="0" algn="ctr">
+              <a:buNone/>
+            </a:pPr>
+            <a:r>
+              <a:rPr lang="en-US" sz="850" b="1" kern="0" spc="100" dirty="0">
                 <a:solidFill>
                   <a:srgbClr val="94A3B8"/>
                 </a:solidFill>
-                <a:latin typeface="Calibri" pitchFamily="34" charset="0"/>
-                <a:ea typeface="Calibri" pitchFamily="34" charset="-122"/>
-                <a:cs typeface="Calibri" pitchFamily="34" charset="-120"/>
+                <a:latin typeface="Calibri" panose="020F0502020204030204" pitchFamily="34" charset="0"/>
+                <a:ea typeface="Calibri" panose="020F0502020204030204" pitchFamily="34" charset="-122"/>
+                <a:cs typeface="Calibri" panose="020F0502020204030204" pitchFamily="34" charset="-120"/>
               </a:rPr>
               <a:t>LOGIN</a:t>
             </a:r>
@@ -9706,13 +9283,12 @@
             <a:avLst/>
           </a:prstGeom>
           <a:noFill/>
-          <a:ln/>
         </p:spPr>
         <p:txBody>
           <a:bodyPr wrap="square" lIns="0" tIns="0" rIns="0" bIns="0" rtlCol="0" anchor="ctr"/>
           <a:lstStyle/>
           <a:p>
-            <a:pPr algn="ctr" indent="0" marL="0">
+            <a:pPr marL="0" indent="0" algn="ctr">
               <a:buNone/>
             </a:pPr>
             <a:r>
@@ -9720,9 +9296,9 @@
                 <a:solidFill>
                   <a:srgbClr val="F59E0B"/>
                 </a:solidFill>
-                <a:latin typeface="Cambria" pitchFamily="34" charset="0"/>
-                <a:ea typeface="Cambria" pitchFamily="34" charset="-122"/>
-                <a:cs typeface="Cambria" pitchFamily="34" charset="-120"/>
+                <a:latin typeface="Cambria" panose="02040503050406030204" pitchFamily="34" charset="0"/>
+                <a:ea typeface="Cambria" panose="02040503050406030204" pitchFamily="34" charset="-122"/>
+                <a:cs typeface="Cambria" panose="02040503050406030204" pitchFamily="34" charset="-120"/>
               </a:rPr>
               <a:t>0</a:t>
             </a:r>
@@ -9745,23 +9321,22 @@
             <a:avLst/>
           </a:prstGeom>
           <a:noFill/>
-          <a:ln/>
         </p:spPr>
         <p:txBody>
           <a:bodyPr wrap="square" lIns="0" tIns="0" rIns="0" bIns="0" rtlCol="0" anchor="ctr"/>
           <a:lstStyle/>
           <a:p>
-            <a:pPr algn="ctr" indent="0" marL="0">
-              <a:buNone/>
-            </a:pPr>
-            <a:r>
-              <a:rPr lang="en-US" sz="850" b="1" spc="100" kern="0" dirty="0">
+            <a:pPr marL="0" indent="0" algn="ctr">
+              <a:buNone/>
+            </a:pPr>
+            <a:r>
+              <a:rPr lang="en-US" sz="850" b="1" kern="0" spc="100" dirty="0">
                 <a:solidFill>
                   <a:srgbClr val="94A3B8"/>
                 </a:solidFill>
-                <a:latin typeface="Calibri" pitchFamily="34" charset="0"/>
-                <a:ea typeface="Calibri" pitchFamily="34" charset="-122"/>
-                <a:cs typeface="Calibri" pitchFamily="34" charset="-120"/>
+                <a:latin typeface="Calibri" panose="020F0502020204030204" pitchFamily="34" charset="0"/>
+                <a:ea typeface="Calibri" panose="020F0502020204030204" pitchFamily="34" charset="-122"/>
+                <a:cs typeface="Calibri" panose="020F0502020204030204" pitchFamily="34" charset="-120"/>
               </a:rPr>
               <a:t>PAPER NEEDED</a:t>
             </a:r>
@@ -9784,13 +9359,12 @@
             <a:avLst/>
           </a:prstGeom>
           <a:noFill/>
-          <a:ln/>
         </p:spPr>
         <p:txBody>
           <a:bodyPr wrap="square" lIns="0" tIns="0" rIns="0" bIns="0" rtlCol="0" anchor="ctr"/>
           <a:lstStyle/>
           <a:p>
-            <a:pPr indent="0" marL="0">
+            <a:pPr marL="0" indent="0">
               <a:buNone/>
             </a:pPr>
             <a:r>
@@ -9798,9 +9372,9 @@
                 <a:solidFill>
                   <a:srgbClr val="64748B"/>
                 </a:solidFill>
-                <a:latin typeface="Calibri" pitchFamily="34" charset="0"/>
-                <a:ea typeface="Calibri" pitchFamily="34" charset="-122"/>
-                <a:cs typeface="Calibri" pitchFamily="34" charset="-120"/>
+                <a:latin typeface="Calibri" panose="020F0502020204030204" pitchFamily="34" charset="0"/>
+                <a:ea typeface="Calibri" panose="020F0502020204030204" pitchFamily="34" charset="-122"/>
+                <a:cs typeface="Calibri" panose="020F0502020204030204" pitchFamily="34" charset="-120"/>
               </a:rPr>
               <a:t>EduTrack — School Management Platform</a:t>
             </a:r>
@@ -9823,13 +9397,12 @@
             <a:avLst/>
           </a:prstGeom>
           <a:noFill/>
-          <a:ln/>
         </p:spPr>
         <p:txBody>
           <a:bodyPr wrap="square" lIns="0" tIns="0" rIns="0" bIns="0" rtlCol="0" anchor="ctr"/>
           <a:lstStyle/>
           <a:p>
-            <a:pPr algn="r" indent="0" marL="0">
+            <a:pPr marL="0" indent="0" algn="r">
               <a:buNone/>
             </a:pPr>
             <a:r>
@@ -9837,9 +9410,9 @@
                 <a:solidFill>
                   <a:srgbClr val="94A3B8"/>
                 </a:solidFill>
-                <a:latin typeface="Calibri" pitchFamily="34" charset="0"/>
-                <a:ea typeface="Calibri" pitchFamily="34" charset="-122"/>
-                <a:cs typeface="Calibri" pitchFamily="34" charset="-120"/>
+                <a:latin typeface="Calibri" panose="020F0502020204030204" pitchFamily="34" charset="0"/>
+                <a:ea typeface="Calibri" panose="020F0502020204030204" pitchFamily="34" charset="-122"/>
+                <a:cs typeface="Calibri" panose="020F0502020204030204" pitchFamily="34" charset="-120"/>
               </a:rPr>
               <a:t>03</a:t>
             </a:r>
@@ -9857,12 +9430,13 @@
 
 <file path=ppt/slides/slide4.xml><?xml version="1.0" encoding="utf-8"?>
 <p:sld xmlns:a="http://schemas.openxmlformats.org/drawingml/2006/main" xmlns:r="http://schemas.openxmlformats.org/officeDocument/2006/relationships" xmlns:p="http://schemas.openxmlformats.org/presentationml/2006/main">
-  <p:cSld name="Slide 4">
+  <p:cSld>
     <p:bg>
       <p:bgPr>
         <a:solidFill>
           <a:srgbClr val="0F172A"/>
         </a:solidFill>
+        <a:effectLst/>
       </p:bgPr>
     </p:bg>
     <p:spTree>
@@ -9894,23 +9468,22 @@
             <a:avLst/>
           </a:prstGeom>
           <a:noFill/>
-          <a:ln/>
         </p:spPr>
         <p:txBody>
           <a:bodyPr wrap="square" lIns="0" tIns="0" rIns="0" bIns="0" rtlCol="0" anchor="ctr"/>
           <a:lstStyle/>
           <a:p>
-            <a:pPr algn="l" indent="0" marL="0">
-              <a:buNone/>
-            </a:pPr>
-            <a:r>
-              <a:rPr lang="en-US" sz="1100" b="1" spc="300" kern="0" dirty="0">
+            <a:pPr marL="0" indent="0" algn="l">
+              <a:buNone/>
+            </a:pPr>
+            <a:r>
+              <a:rPr lang="en-US" sz="1100" b="1" kern="0" spc="300" dirty="0">
                 <a:solidFill>
                   <a:srgbClr val="60A5FA"/>
                 </a:solidFill>
-                <a:latin typeface="Calibri" pitchFamily="34" charset="0"/>
-                <a:ea typeface="Calibri" pitchFamily="34" charset="-122"/>
-                <a:cs typeface="Calibri" pitchFamily="34" charset="-120"/>
+                <a:latin typeface="Calibri" panose="020F0502020204030204" pitchFamily="34" charset="0"/>
+                <a:ea typeface="Calibri" panose="020F0502020204030204" pitchFamily="34" charset="-122"/>
+                <a:cs typeface="Calibri" panose="020F0502020204030204" pitchFamily="34" charset="-120"/>
               </a:rPr>
               <a:t>WHAT YOU GET</a:t>
             </a:r>
@@ -9933,13 +9506,12 @@
             <a:avLst/>
           </a:prstGeom>
           <a:noFill/>
-          <a:ln/>
         </p:spPr>
         <p:txBody>
           <a:bodyPr wrap="square" lIns="0" tIns="0" rIns="0" bIns="0" rtlCol="0" anchor="t"/>
           <a:lstStyle/>
           <a:p>
-            <a:pPr algn="l" indent="0" marL="0">
+            <a:pPr marL="0" indent="0" algn="l">
               <a:lnSpc>
                 <a:spcPct val="106000"/>
               </a:lnSpc>
@@ -9950,26 +9522,20 @@
                 <a:solidFill>
                   <a:srgbClr val="FFFFFF"/>
                 </a:solidFill>
-                <a:latin typeface="Cambria" pitchFamily="34" charset="0"/>
-                <a:ea typeface="Cambria" pitchFamily="34" charset="-122"/>
-                <a:cs typeface="Cambria" pitchFamily="34" charset="-120"/>
+                <a:latin typeface="Cambria" panose="02040503050406030204" pitchFamily="34" charset="0"/>
+                <a:ea typeface="Cambria" panose="02040503050406030204" pitchFamily="34" charset="-122"/>
+                <a:cs typeface="Cambria" panose="02040503050406030204" pitchFamily="34" charset="-120"/>
               </a:rPr>
               <a:t>Eight</a:t>
             </a:r>
-            <a:pPr algn="l" indent="0" marL="0">
-              <a:lnSpc>
-                <a:spcPct val="106000"/>
-              </a:lnSpc>
-              <a:buNone/>
-            </a:pPr>
             <a:r>
               <a:rPr lang="en-US" sz="3000" b="1" dirty="0">
                 <a:solidFill>
                   <a:srgbClr val="FFFFFF"/>
                 </a:solidFill>
-                <a:latin typeface="Cambria" pitchFamily="34" charset="0"/>
-                <a:ea typeface="Cambria" pitchFamily="34" charset="-122"/>
-                <a:cs typeface="Cambria" pitchFamily="34" charset="-120"/>
+                <a:latin typeface="Cambria" panose="02040503050406030204" pitchFamily="34" charset="0"/>
+                <a:ea typeface="Cambria" panose="02040503050406030204" pitchFamily="34" charset="-122"/>
+                <a:cs typeface="Cambria" panose="02040503050406030204" pitchFamily="34" charset="-120"/>
               </a:rPr>
               <a:t> modules. One platform.</a:t>
             </a:r>
@@ -10023,7 +9589,6 @@
           <a:solidFill>
             <a:srgbClr val="10B981"/>
           </a:solidFill>
-          <a:ln/>
         </p:spPr>
       </p:sp>
       <p:sp>
@@ -10041,13 +9606,12 @@
             <a:avLst/>
           </a:prstGeom>
           <a:noFill/>
-          <a:ln/>
         </p:spPr>
         <p:txBody>
           <a:bodyPr wrap="square" lIns="0" tIns="0" rIns="0" bIns="0" rtlCol="0" anchor="ctr"/>
           <a:lstStyle/>
           <a:p>
-            <a:pPr algn="ctr" indent="0" marL="0">
+            <a:pPr marL="0" indent="0" algn="ctr">
               <a:buNone/>
             </a:pPr>
             <a:r>
@@ -10055,9 +9619,9 @@
                 <a:solidFill>
                   <a:srgbClr val="FFFFFF"/>
                 </a:solidFill>
-                <a:latin typeface="Calibri" pitchFamily="34" charset="0"/>
-                <a:ea typeface="Calibri" pitchFamily="34" charset="-122"/>
-                <a:cs typeface="Calibri" pitchFamily="34" charset="-120"/>
+                <a:latin typeface="Calibri" panose="020F0502020204030204" pitchFamily="34" charset="0"/>
+                <a:ea typeface="Calibri" panose="020F0502020204030204" pitchFamily="34" charset="-122"/>
+                <a:cs typeface="Calibri" panose="020F0502020204030204" pitchFamily="34" charset="-120"/>
               </a:rPr>
               <a:t>✓</a:t>
             </a:r>
@@ -10080,13 +9644,12 @@
             <a:avLst/>
           </a:prstGeom>
           <a:noFill/>
-          <a:ln/>
         </p:spPr>
         <p:txBody>
           <a:bodyPr wrap="square" lIns="0" tIns="0" rIns="0" bIns="0" rtlCol="0" anchor="t"/>
           <a:lstStyle/>
           <a:p>
-            <a:pPr indent="0" marL="0">
+            <a:pPr marL="0" indent="0">
               <a:lnSpc>
                 <a:spcPct val="100000"/>
               </a:lnSpc>
@@ -10097,9 +9660,9 @@
                 <a:solidFill>
                   <a:srgbClr val="FFFFFF"/>
                 </a:solidFill>
-                <a:latin typeface="Calibri" pitchFamily="34" charset="0"/>
-                <a:ea typeface="Calibri" pitchFamily="34" charset="-122"/>
-                <a:cs typeface="Calibri" pitchFamily="34" charset="-120"/>
+                <a:latin typeface="Calibri" panose="020F0502020204030204" pitchFamily="34" charset="0"/>
+                <a:ea typeface="Calibri" panose="020F0502020204030204" pitchFamily="34" charset="-122"/>
+                <a:cs typeface="Calibri" panose="020F0502020204030204" pitchFamily="34" charset="-120"/>
               </a:rPr>
               <a:t>Report Cards</a:t>
             </a:r>
@@ -10122,13 +9685,12 @@
             <a:avLst/>
           </a:prstGeom>
           <a:noFill/>
-          <a:ln/>
         </p:spPr>
         <p:txBody>
           <a:bodyPr wrap="square" lIns="0" tIns="0" rIns="0" bIns="0" rtlCol="0" anchor="t"/>
           <a:lstStyle/>
           <a:p>
-            <a:pPr indent="0" marL="0">
+            <a:pPr marL="0" indent="0">
               <a:lnSpc>
                 <a:spcPct val="112000"/>
               </a:lnSpc>
@@ -10139,9 +9701,9 @@
                 <a:solidFill>
                   <a:srgbClr val="94A3B8"/>
                 </a:solidFill>
-                <a:latin typeface="Calibri" pitchFamily="34" charset="0"/>
-                <a:ea typeface="Calibri" pitchFamily="34" charset="-122"/>
-                <a:cs typeface="Calibri" pitchFamily="34" charset="-120"/>
+                <a:latin typeface="Calibri" panose="020F0502020204030204" pitchFamily="34" charset="0"/>
+                <a:ea typeface="Calibri" panose="020F0502020204030204" pitchFamily="34" charset="-122"/>
+                <a:cs typeface="Calibri" panose="020F0502020204030204" pitchFamily="34" charset="-120"/>
               </a:rPr>
               <a:t>A4 PDF, one click.</a:t>
             </a:r>
@@ -10195,7 +9757,6 @@
           <a:solidFill>
             <a:srgbClr val="2563EB"/>
           </a:solidFill>
-          <a:ln/>
         </p:spPr>
       </p:sp>
       <p:sp>
@@ -10213,13 +9774,12 @@
             <a:avLst/>
           </a:prstGeom>
           <a:noFill/>
-          <a:ln/>
         </p:spPr>
         <p:txBody>
           <a:bodyPr wrap="square" lIns="0" tIns="0" rIns="0" bIns="0" rtlCol="0" anchor="ctr"/>
           <a:lstStyle/>
           <a:p>
-            <a:pPr algn="ctr" indent="0" marL="0">
+            <a:pPr marL="0" indent="0" algn="ctr">
               <a:buNone/>
             </a:pPr>
             <a:r>
@@ -10227,9 +9787,9 @@
                 <a:solidFill>
                   <a:srgbClr val="FFFFFF"/>
                 </a:solidFill>
-                <a:latin typeface="Calibri" pitchFamily="34" charset="0"/>
-                <a:ea typeface="Calibri" pitchFamily="34" charset="-122"/>
-                <a:cs typeface="Calibri" pitchFamily="34" charset="-120"/>
+                <a:latin typeface="Calibri" panose="020F0502020204030204" pitchFamily="34" charset="0"/>
+                <a:ea typeface="Calibri" panose="020F0502020204030204" pitchFamily="34" charset="-122"/>
+                <a:cs typeface="Calibri" panose="020F0502020204030204" pitchFamily="34" charset="-120"/>
               </a:rPr>
               <a:t>✎</a:t>
             </a:r>
@@ -10252,13 +9812,12 @@
             <a:avLst/>
           </a:prstGeom>
           <a:noFill/>
-          <a:ln/>
         </p:spPr>
         <p:txBody>
           <a:bodyPr wrap="square" lIns="0" tIns="0" rIns="0" bIns="0" rtlCol="0" anchor="t"/>
           <a:lstStyle/>
           <a:p>
-            <a:pPr indent="0" marL="0">
+            <a:pPr marL="0" indent="0">
               <a:lnSpc>
                 <a:spcPct val="100000"/>
               </a:lnSpc>
@@ -10269,9 +9828,9 @@
                 <a:solidFill>
                   <a:srgbClr val="FFFFFF"/>
                 </a:solidFill>
-                <a:latin typeface="Calibri" pitchFamily="34" charset="0"/>
-                <a:ea typeface="Calibri" pitchFamily="34" charset="-122"/>
-                <a:cs typeface="Calibri" pitchFamily="34" charset="-120"/>
+                <a:latin typeface="Calibri" panose="020F0502020204030204" pitchFamily="34" charset="0"/>
+                <a:ea typeface="Calibri" panose="020F0502020204030204" pitchFamily="34" charset="-122"/>
+                <a:cs typeface="Calibri" panose="020F0502020204030204" pitchFamily="34" charset="-120"/>
               </a:rPr>
               <a:t>Grading Matrix</a:t>
             </a:r>
@@ -10294,13 +9853,12 @@
             <a:avLst/>
           </a:prstGeom>
           <a:noFill/>
-          <a:ln/>
         </p:spPr>
         <p:txBody>
           <a:bodyPr wrap="square" lIns="0" tIns="0" rIns="0" bIns="0" rtlCol="0" anchor="t"/>
           <a:lstStyle/>
           <a:p>
-            <a:pPr indent="0" marL="0">
+            <a:pPr marL="0" indent="0">
               <a:lnSpc>
                 <a:spcPct val="112000"/>
               </a:lnSpc>
@@ -10311,9 +9869,9 @@
                 <a:solidFill>
                   <a:srgbClr val="94A3B8"/>
                 </a:solidFill>
-                <a:latin typeface="Calibri" pitchFamily="34" charset="0"/>
-                <a:ea typeface="Calibri" pitchFamily="34" charset="-122"/>
-                <a:cs typeface="Calibri" pitchFamily="34" charset="-120"/>
+                <a:latin typeface="Calibri" panose="020F0502020204030204" pitchFamily="34" charset="0"/>
+                <a:ea typeface="Calibri" panose="020F0502020204030204" pitchFamily="34" charset="-122"/>
+                <a:cs typeface="Calibri" panose="020F0502020204030204" pitchFamily="34" charset="-120"/>
               </a:rPr>
               <a:t>Grades compute live.</a:t>
             </a:r>
@@ -10367,7 +9925,6 @@
           <a:solidFill>
             <a:srgbClr val="F59E0B"/>
           </a:solidFill>
-          <a:ln/>
         </p:spPr>
       </p:sp>
       <p:sp>
@@ -10385,13 +9942,12 @@
             <a:avLst/>
           </a:prstGeom>
           <a:noFill/>
-          <a:ln/>
         </p:spPr>
         <p:txBody>
           <a:bodyPr wrap="square" lIns="0" tIns="0" rIns="0" bIns="0" rtlCol="0" anchor="ctr"/>
           <a:lstStyle/>
           <a:p>
-            <a:pPr algn="ctr" indent="0" marL="0">
+            <a:pPr marL="0" indent="0" algn="ctr">
               <a:buNone/>
             </a:pPr>
             <a:r>
@@ -10399,9 +9955,9 @@
                 <a:solidFill>
                   <a:srgbClr val="FFFFFF"/>
                 </a:solidFill>
-                <a:latin typeface="Calibri" pitchFamily="34" charset="0"/>
-                <a:ea typeface="Calibri" pitchFamily="34" charset="-122"/>
-                <a:cs typeface="Calibri" pitchFamily="34" charset="-120"/>
+                <a:latin typeface="Calibri" panose="020F0502020204030204" pitchFamily="34" charset="0"/>
+                <a:ea typeface="Calibri" panose="020F0502020204030204" pitchFamily="34" charset="-122"/>
+                <a:cs typeface="Calibri" panose="020F0502020204030204" pitchFamily="34" charset="-120"/>
               </a:rPr>
               <a:t>◔</a:t>
             </a:r>
@@ -10424,13 +9980,12 @@
             <a:avLst/>
           </a:prstGeom>
           <a:noFill/>
-          <a:ln/>
         </p:spPr>
         <p:txBody>
           <a:bodyPr wrap="square" lIns="0" tIns="0" rIns="0" bIns="0" rtlCol="0" anchor="t"/>
           <a:lstStyle/>
           <a:p>
-            <a:pPr indent="0" marL="0">
+            <a:pPr marL="0" indent="0">
               <a:lnSpc>
                 <a:spcPct val="100000"/>
               </a:lnSpc>
@@ -10441,9 +9996,9 @@
                 <a:solidFill>
                   <a:srgbClr val="FFFFFF"/>
                 </a:solidFill>
-                <a:latin typeface="Calibri" pitchFamily="34" charset="0"/>
-                <a:ea typeface="Calibri" pitchFamily="34" charset="-122"/>
-                <a:cs typeface="Calibri" pitchFamily="34" charset="-120"/>
+                <a:latin typeface="Calibri" panose="020F0502020204030204" pitchFamily="34" charset="0"/>
+                <a:ea typeface="Calibri" panose="020F0502020204030204" pitchFamily="34" charset="-122"/>
+                <a:cs typeface="Calibri" panose="020F0502020204030204" pitchFamily="34" charset="-120"/>
               </a:rPr>
               <a:t>Attendance</a:t>
             </a:r>
@@ -10466,13 +10021,12 @@
             <a:avLst/>
           </a:prstGeom>
           <a:noFill/>
-          <a:ln/>
         </p:spPr>
         <p:txBody>
           <a:bodyPr wrap="square" lIns="0" tIns="0" rIns="0" bIns="0" rtlCol="0" anchor="t"/>
           <a:lstStyle/>
           <a:p>
-            <a:pPr indent="0" marL="0">
+            <a:pPr marL="0" indent="0">
               <a:lnSpc>
                 <a:spcPct val="112000"/>
               </a:lnSpc>
@@ -10483,9 +10037,9 @@
                 <a:solidFill>
                   <a:srgbClr val="94A3B8"/>
                 </a:solidFill>
-                <a:latin typeface="Calibri" pitchFamily="34" charset="0"/>
-                <a:ea typeface="Calibri" pitchFamily="34" charset="-122"/>
-                <a:cs typeface="Calibri" pitchFamily="34" charset="-120"/>
+                <a:latin typeface="Calibri" panose="020F0502020204030204" pitchFamily="34" charset="0"/>
+                <a:ea typeface="Calibri" panose="020F0502020204030204" pitchFamily="34" charset="-122"/>
+                <a:cs typeface="Calibri" panose="020F0502020204030204" pitchFamily="34" charset="-120"/>
               </a:rPr>
               <a:t>One-tap registers.</a:t>
             </a:r>
@@ -10539,7 +10093,6 @@
           <a:solidFill>
             <a:srgbClr val="A78BFA"/>
           </a:solidFill>
-          <a:ln/>
         </p:spPr>
       </p:sp>
       <p:sp>
@@ -10557,13 +10110,12 @@
             <a:avLst/>
           </a:prstGeom>
           <a:noFill/>
-          <a:ln/>
         </p:spPr>
         <p:txBody>
           <a:bodyPr wrap="square" lIns="0" tIns="0" rIns="0" bIns="0" rtlCol="0" anchor="ctr"/>
           <a:lstStyle/>
           <a:p>
-            <a:pPr algn="ctr" indent="0" marL="0">
+            <a:pPr marL="0" indent="0" algn="ctr">
               <a:buNone/>
             </a:pPr>
             <a:r>
@@ -10571,9 +10123,9 @@
                 <a:solidFill>
                   <a:srgbClr val="FFFFFF"/>
                 </a:solidFill>
-                <a:latin typeface="Calibri" pitchFamily="34" charset="0"/>
-                <a:ea typeface="Calibri" pitchFamily="34" charset="-122"/>
-                <a:cs typeface="Calibri" pitchFamily="34" charset="-120"/>
+                <a:latin typeface="Calibri" panose="020F0502020204030204" pitchFamily="34" charset="0"/>
+                <a:ea typeface="Calibri" panose="020F0502020204030204" pitchFamily="34" charset="-122"/>
+                <a:cs typeface="Calibri" panose="020F0502020204030204" pitchFamily="34" charset="-120"/>
               </a:rPr>
               <a:t>★</a:t>
             </a:r>
@@ -10596,13 +10148,12 @@
             <a:avLst/>
           </a:prstGeom>
           <a:noFill/>
-          <a:ln/>
         </p:spPr>
         <p:txBody>
           <a:bodyPr wrap="square" lIns="0" tIns="0" rIns="0" bIns="0" rtlCol="0" anchor="t"/>
           <a:lstStyle/>
           <a:p>
-            <a:pPr indent="0" marL="0">
+            <a:pPr marL="0" indent="0">
               <a:lnSpc>
                 <a:spcPct val="100000"/>
               </a:lnSpc>
@@ -10613,9 +10164,9 @@
                 <a:solidFill>
                   <a:srgbClr val="FFFFFF"/>
                 </a:solidFill>
-                <a:latin typeface="Calibri" pitchFamily="34" charset="0"/>
-                <a:ea typeface="Calibri" pitchFamily="34" charset="-122"/>
-                <a:cs typeface="Calibri" pitchFamily="34" charset="-120"/>
+                <a:latin typeface="Calibri" panose="020F0502020204030204" pitchFamily="34" charset="0"/>
+                <a:ea typeface="Calibri" panose="020F0502020204030204" pitchFamily="34" charset="-122"/>
+                <a:cs typeface="Calibri" panose="020F0502020204030204" pitchFamily="34" charset="-120"/>
               </a:rPr>
               <a:t>Fee Management</a:t>
             </a:r>
@@ -10638,13 +10189,12 @@
             <a:avLst/>
           </a:prstGeom>
           <a:noFill/>
-          <a:ln/>
         </p:spPr>
         <p:txBody>
           <a:bodyPr wrap="square" lIns="0" tIns="0" rIns="0" bIns="0" rtlCol="0" anchor="t"/>
           <a:lstStyle/>
           <a:p>
-            <a:pPr indent="0" marL="0">
+            <a:pPr marL="0" indent="0">
               <a:lnSpc>
                 <a:spcPct val="112000"/>
               </a:lnSpc>
@@ -10655,9 +10205,9 @@
                 <a:solidFill>
                   <a:srgbClr val="94A3B8"/>
                 </a:solidFill>
-                <a:latin typeface="Calibri" pitchFamily="34" charset="0"/>
-                <a:ea typeface="Calibri" pitchFamily="34" charset="-122"/>
-                <a:cs typeface="Calibri" pitchFamily="34" charset="-120"/>
+                <a:latin typeface="Calibri" panose="020F0502020204030204" pitchFamily="34" charset="0"/>
+                <a:ea typeface="Calibri" panose="020F0502020204030204" pitchFamily="34" charset="-122"/>
+                <a:cs typeface="Calibri" panose="020F0502020204030204" pitchFamily="34" charset="-120"/>
               </a:rPr>
               <a:t>Live balances &amp; receipts.</a:t>
             </a:r>
@@ -10711,7 +10261,6 @@
           <a:solidFill>
             <a:srgbClr val="2563EB"/>
           </a:solidFill>
-          <a:ln/>
         </p:spPr>
       </p:sp>
       <p:sp>
@@ -10729,13 +10278,12 @@
             <a:avLst/>
           </a:prstGeom>
           <a:noFill/>
-          <a:ln/>
         </p:spPr>
         <p:txBody>
           <a:bodyPr wrap="square" lIns="0" tIns="0" rIns="0" bIns="0" rtlCol="0" anchor="ctr"/>
           <a:lstStyle/>
           <a:p>
-            <a:pPr algn="ctr" indent="0" marL="0">
+            <a:pPr marL="0" indent="0" algn="ctr">
               <a:buNone/>
             </a:pPr>
             <a:r>
@@ -10743,9 +10291,9 @@
                 <a:solidFill>
                   <a:srgbClr val="FFFFFF"/>
                 </a:solidFill>
-                <a:latin typeface="Calibri" pitchFamily="34" charset="0"/>
-                <a:ea typeface="Calibri" pitchFamily="34" charset="-122"/>
-                <a:cs typeface="Calibri" pitchFamily="34" charset="-120"/>
+                <a:latin typeface="Calibri" panose="020F0502020204030204" pitchFamily="34" charset="0"/>
+                <a:ea typeface="Calibri" panose="020F0502020204030204" pitchFamily="34" charset="-122"/>
+                <a:cs typeface="Calibri" panose="020F0502020204030204" pitchFamily="34" charset="-120"/>
               </a:rPr>
               <a:t>⚙</a:t>
             </a:r>
@@ -10768,13 +10316,12 @@
             <a:avLst/>
           </a:prstGeom>
           <a:noFill/>
-          <a:ln/>
         </p:spPr>
         <p:txBody>
           <a:bodyPr wrap="square" lIns="0" tIns="0" rIns="0" bIns="0" rtlCol="0" anchor="t"/>
           <a:lstStyle/>
           <a:p>
-            <a:pPr indent="0" marL="0">
+            <a:pPr marL="0" indent="0">
               <a:lnSpc>
                 <a:spcPct val="100000"/>
               </a:lnSpc>
@@ -10785,9 +10332,9 @@
                 <a:solidFill>
                   <a:srgbClr val="FFFFFF"/>
                 </a:solidFill>
-                <a:latin typeface="Calibri" pitchFamily="34" charset="0"/>
-                <a:ea typeface="Calibri" pitchFamily="34" charset="-122"/>
-                <a:cs typeface="Calibri" pitchFamily="34" charset="-120"/>
+                <a:latin typeface="Calibri" panose="020F0502020204030204" pitchFamily="34" charset="0"/>
+                <a:ea typeface="Calibri" panose="020F0502020204030204" pitchFamily="34" charset="-122"/>
+                <a:cs typeface="Calibri" panose="020F0502020204030204" pitchFamily="34" charset="-120"/>
               </a:rPr>
               <a:t>Teacher Payroll</a:t>
             </a:r>
@@ -10810,13 +10357,12 @@
             <a:avLst/>
           </a:prstGeom>
           <a:noFill/>
-          <a:ln/>
         </p:spPr>
         <p:txBody>
           <a:bodyPr wrap="square" lIns="0" tIns="0" rIns="0" bIns="0" rtlCol="0" anchor="t"/>
           <a:lstStyle/>
           <a:p>
-            <a:pPr indent="0" marL="0">
+            <a:pPr marL="0" indent="0">
               <a:lnSpc>
                 <a:spcPct val="112000"/>
               </a:lnSpc>
@@ -10827,9 +10373,9 @@
                 <a:solidFill>
                   <a:srgbClr val="94A3B8"/>
                 </a:solidFill>
-                <a:latin typeface="Calibri" pitchFamily="34" charset="0"/>
-                <a:ea typeface="Calibri" pitchFamily="34" charset="-122"/>
-                <a:cs typeface="Calibri" pitchFamily="34" charset="-120"/>
+                <a:latin typeface="Calibri" panose="020F0502020204030204" pitchFamily="34" charset="0"/>
+                <a:ea typeface="Calibri" panose="020F0502020204030204" pitchFamily="34" charset="-122"/>
+                <a:cs typeface="Calibri" panose="020F0502020204030204" pitchFamily="34" charset="-120"/>
               </a:rPr>
               <a:t>Paid / pending at a glance.</a:t>
             </a:r>
@@ -10883,7 +10429,6 @@
           <a:solidFill>
             <a:srgbClr val="10B981"/>
           </a:solidFill>
-          <a:ln/>
         </p:spPr>
       </p:sp>
       <p:sp>
@@ -10901,13 +10446,12 @@
             <a:avLst/>
           </a:prstGeom>
           <a:noFill/>
-          <a:ln/>
         </p:spPr>
         <p:txBody>
           <a:bodyPr wrap="square" lIns="0" tIns="0" rIns="0" bIns="0" rtlCol="0" anchor="ctr"/>
           <a:lstStyle/>
           <a:p>
-            <a:pPr algn="ctr" indent="0" marL="0">
+            <a:pPr marL="0" indent="0" algn="ctr">
               <a:buNone/>
             </a:pPr>
             <a:r>
@@ -10915,9 +10459,9 @@
                 <a:solidFill>
                   <a:srgbClr val="FFFFFF"/>
                 </a:solidFill>
-                <a:latin typeface="Calibri" pitchFamily="34" charset="0"/>
-                <a:ea typeface="Calibri" pitchFamily="34" charset="-122"/>
-                <a:cs typeface="Calibri" pitchFamily="34" charset="-120"/>
+                <a:latin typeface="Calibri" panose="020F0502020204030204" pitchFamily="34" charset="0"/>
+                <a:ea typeface="Calibri" panose="020F0502020204030204" pitchFamily="34" charset="-122"/>
+                <a:cs typeface="Calibri" panose="020F0502020204030204" pitchFamily="34" charset="-120"/>
               </a:rPr>
               <a:t>✉</a:t>
             </a:r>
@@ -10940,13 +10484,12 @@
             <a:avLst/>
           </a:prstGeom>
           <a:noFill/>
-          <a:ln/>
         </p:spPr>
         <p:txBody>
           <a:bodyPr wrap="square" lIns="0" tIns="0" rIns="0" bIns="0" rtlCol="0" anchor="t"/>
           <a:lstStyle/>
           <a:p>
-            <a:pPr indent="0" marL="0">
+            <a:pPr marL="0" indent="0">
               <a:lnSpc>
                 <a:spcPct val="100000"/>
               </a:lnSpc>
@@ -10957,9 +10500,9 @@
                 <a:solidFill>
                   <a:srgbClr val="FFFFFF"/>
                 </a:solidFill>
-                <a:latin typeface="Calibri" pitchFamily="34" charset="0"/>
-                <a:ea typeface="Calibri" pitchFamily="34" charset="-122"/>
-                <a:cs typeface="Calibri" pitchFamily="34" charset="-120"/>
+                <a:latin typeface="Calibri" panose="020F0502020204030204" pitchFamily="34" charset="0"/>
+                <a:ea typeface="Calibri" panose="020F0502020204030204" pitchFamily="34" charset="-122"/>
+                <a:cs typeface="Calibri" panose="020F0502020204030204" pitchFamily="34" charset="-120"/>
               </a:rPr>
               <a:t>Parent Portal</a:t>
             </a:r>
@@ -10982,13 +10525,12 @@
             <a:avLst/>
           </a:prstGeom>
           <a:noFill/>
-          <a:ln/>
         </p:spPr>
         <p:txBody>
           <a:bodyPr wrap="square" lIns="0" tIns="0" rIns="0" bIns="0" rtlCol="0" anchor="t"/>
           <a:lstStyle/>
           <a:p>
-            <a:pPr indent="0" marL="0">
+            <a:pPr marL="0" indent="0">
               <a:lnSpc>
                 <a:spcPct val="112000"/>
               </a:lnSpc>
@@ -10999,9 +10541,9 @@
                 <a:solidFill>
                   <a:srgbClr val="94A3B8"/>
                 </a:solidFill>
-                <a:latin typeface="Calibri" pitchFamily="34" charset="0"/>
-                <a:ea typeface="Calibri" pitchFamily="34" charset="-122"/>
-                <a:cs typeface="Calibri" pitchFamily="34" charset="-120"/>
+                <a:latin typeface="Calibri" panose="020F0502020204030204" pitchFamily="34" charset="0"/>
+                <a:ea typeface="Calibri" panose="020F0502020204030204" pitchFamily="34" charset="-122"/>
+                <a:cs typeface="Calibri" panose="020F0502020204030204" pitchFamily="34" charset="-120"/>
               </a:rPr>
               <a:t>Results, fees &amp; Pay Now.</a:t>
             </a:r>
@@ -11055,7 +10597,6 @@
           <a:solidFill>
             <a:srgbClr val="A78BFA"/>
           </a:solidFill>
-          <a:ln/>
         </p:spPr>
       </p:sp>
       <p:sp>
@@ -11073,13 +10614,12 @@
             <a:avLst/>
           </a:prstGeom>
           <a:noFill/>
-          <a:ln/>
         </p:spPr>
         <p:txBody>
           <a:bodyPr wrap="square" lIns="0" tIns="0" rIns="0" bIns="0" rtlCol="0" anchor="ctr"/>
           <a:lstStyle/>
           <a:p>
-            <a:pPr algn="ctr" indent="0" marL="0">
+            <a:pPr marL="0" indent="0" algn="ctr">
               <a:buNone/>
             </a:pPr>
             <a:r>
@@ -11087,9 +10627,9 @@
                 <a:solidFill>
                   <a:srgbClr val="FFFFFF"/>
                 </a:solidFill>
-                <a:latin typeface="Calibri" pitchFamily="34" charset="0"/>
-                <a:ea typeface="Calibri" pitchFamily="34" charset="-122"/>
-                <a:cs typeface="Calibri" pitchFamily="34" charset="-120"/>
+                <a:latin typeface="Calibri" panose="020F0502020204030204" pitchFamily="34" charset="0"/>
+                <a:ea typeface="Calibri" panose="020F0502020204030204" pitchFamily="34" charset="-122"/>
+                <a:cs typeface="Calibri" panose="020F0502020204030204" pitchFamily="34" charset="-120"/>
               </a:rPr>
               <a:t>●</a:t>
             </a:r>
@@ -11112,13 +10652,12 @@
             <a:avLst/>
           </a:prstGeom>
           <a:noFill/>
-          <a:ln/>
         </p:spPr>
         <p:txBody>
           <a:bodyPr wrap="square" lIns="0" tIns="0" rIns="0" bIns="0" rtlCol="0" anchor="t"/>
           <a:lstStyle/>
           <a:p>
-            <a:pPr indent="0" marL="0">
+            <a:pPr marL="0" indent="0">
               <a:lnSpc>
                 <a:spcPct val="100000"/>
               </a:lnSpc>
@@ -11129,9 +10668,9 @@
                 <a:solidFill>
                   <a:srgbClr val="FFFFFF"/>
                 </a:solidFill>
-                <a:latin typeface="Calibri" pitchFamily="34" charset="0"/>
-                <a:ea typeface="Calibri" pitchFamily="34" charset="-122"/>
-                <a:cs typeface="Calibri" pitchFamily="34" charset="-120"/>
+                <a:latin typeface="Calibri" panose="020F0502020204030204" pitchFamily="34" charset="0"/>
+                <a:ea typeface="Calibri" panose="020F0502020204030204" pitchFamily="34" charset="-122"/>
+                <a:cs typeface="Calibri" panose="020F0502020204030204" pitchFamily="34" charset="-120"/>
               </a:rPr>
               <a:t>Multi-Tenant</a:t>
             </a:r>
@@ -11154,13 +10693,12 @@
             <a:avLst/>
           </a:prstGeom>
           <a:noFill/>
-          <a:ln/>
         </p:spPr>
         <p:txBody>
           <a:bodyPr wrap="square" lIns="0" tIns="0" rIns="0" bIns="0" rtlCol="0" anchor="t"/>
           <a:lstStyle/>
           <a:p>
-            <a:pPr indent="0" marL="0">
+            <a:pPr marL="0" indent="0">
               <a:lnSpc>
                 <a:spcPct val="112000"/>
               </a:lnSpc>
@@ -11171,9 +10709,9 @@
                 <a:solidFill>
                   <a:srgbClr val="94A3B8"/>
                 </a:solidFill>
-                <a:latin typeface="Calibri" pitchFamily="34" charset="0"/>
-                <a:ea typeface="Calibri" pitchFamily="34" charset="-122"/>
-                <a:cs typeface="Calibri" pitchFamily="34" charset="-120"/>
+                <a:latin typeface="Calibri" panose="020F0502020204030204" pitchFamily="34" charset="0"/>
+                <a:ea typeface="Calibri" panose="020F0502020204030204" pitchFamily="34" charset="-122"/>
+                <a:cs typeface="Calibri" panose="020F0502020204030204" pitchFamily="34" charset="-120"/>
               </a:rPr>
               <a:t>Schools fully isolated.</a:t>
             </a:r>
@@ -11227,7 +10765,6 @@
           <a:solidFill>
             <a:srgbClr val="F59E0B"/>
           </a:solidFill>
-          <a:ln/>
         </p:spPr>
       </p:sp>
       <p:sp>
@@ -11245,13 +10782,12 @@
             <a:avLst/>
           </a:prstGeom>
           <a:noFill/>
-          <a:ln/>
         </p:spPr>
         <p:txBody>
           <a:bodyPr wrap="square" lIns="0" tIns="0" rIns="0" bIns="0" rtlCol="0" anchor="ctr"/>
           <a:lstStyle/>
           <a:p>
-            <a:pPr algn="ctr" indent="0" marL="0">
+            <a:pPr marL="0" indent="0" algn="ctr">
               <a:buNone/>
             </a:pPr>
             <a:r>
@@ -11259,9 +10795,9 @@
                 <a:solidFill>
                   <a:srgbClr val="FFFFFF"/>
                 </a:solidFill>
-                <a:latin typeface="Calibri" pitchFamily="34" charset="0"/>
-                <a:ea typeface="Calibri" pitchFamily="34" charset="-122"/>
-                <a:cs typeface="Calibri" pitchFamily="34" charset="-120"/>
+                <a:latin typeface="Calibri" panose="020F0502020204030204" pitchFamily="34" charset="0"/>
+                <a:ea typeface="Calibri" panose="020F0502020204030204" pitchFamily="34" charset="-122"/>
+                <a:cs typeface="Calibri" panose="020F0502020204030204" pitchFamily="34" charset="-120"/>
               </a:rPr>
               <a:t>☁</a:t>
             </a:r>
@@ -11284,13 +10820,12 @@
             <a:avLst/>
           </a:prstGeom>
           <a:noFill/>
-          <a:ln/>
         </p:spPr>
         <p:txBody>
           <a:bodyPr wrap="square" lIns="0" tIns="0" rIns="0" bIns="0" rtlCol="0" anchor="t"/>
           <a:lstStyle/>
           <a:p>
-            <a:pPr indent="0" marL="0">
+            <a:pPr marL="0" indent="0">
               <a:lnSpc>
                 <a:spcPct val="100000"/>
               </a:lnSpc>
@@ -11301,9 +10836,9 @@
                 <a:solidFill>
                   <a:srgbClr val="FFFFFF"/>
                 </a:solidFill>
-                <a:latin typeface="Calibri" pitchFamily="34" charset="0"/>
-                <a:ea typeface="Calibri" pitchFamily="34" charset="-122"/>
-                <a:cs typeface="Calibri" pitchFamily="34" charset="-120"/>
+                <a:latin typeface="Calibri" panose="020F0502020204030204" pitchFamily="34" charset="0"/>
+                <a:ea typeface="Calibri" panose="020F0502020204030204" pitchFamily="34" charset="-122"/>
+                <a:cs typeface="Calibri" panose="020F0502020204030204" pitchFamily="34" charset="-120"/>
               </a:rPr>
               <a:t>Installable App</a:t>
             </a:r>
@@ -11326,13 +10861,12 @@
             <a:avLst/>
           </a:prstGeom>
           <a:noFill/>
-          <a:ln/>
         </p:spPr>
         <p:txBody>
           <a:bodyPr wrap="square" lIns="0" tIns="0" rIns="0" bIns="0" rtlCol="0" anchor="t"/>
           <a:lstStyle/>
           <a:p>
-            <a:pPr indent="0" marL="0">
+            <a:pPr marL="0" indent="0">
               <a:lnSpc>
                 <a:spcPct val="112000"/>
               </a:lnSpc>
@@ -11343,9 +10877,9 @@
                 <a:solidFill>
                   <a:srgbClr val="94A3B8"/>
                 </a:solidFill>
-                <a:latin typeface="Calibri" pitchFamily="34" charset="0"/>
-                <a:ea typeface="Calibri" pitchFamily="34" charset="-122"/>
-                <a:cs typeface="Calibri" pitchFamily="34" charset="-120"/>
+                <a:latin typeface="Calibri" panose="020F0502020204030204" pitchFamily="34" charset="0"/>
+                <a:ea typeface="Calibri" panose="020F0502020204030204" pitchFamily="34" charset="-122"/>
+                <a:cs typeface="Calibri" panose="020F0502020204030204" pitchFamily="34" charset="-120"/>
               </a:rPr>
               <a:t>Android &amp; Windows.</a:t>
             </a:r>
@@ -11368,13 +10902,12 @@
             <a:avLst/>
           </a:prstGeom>
           <a:noFill/>
-          <a:ln/>
         </p:spPr>
         <p:txBody>
           <a:bodyPr wrap="square" lIns="0" tIns="0" rIns="0" bIns="0" rtlCol="0" anchor="ctr"/>
           <a:lstStyle/>
           <a:p>
-            <a:pPr indent="0" marL="0">
+            <a:pPr marL="0" indent="0">
               <a:buNone/>
             </a:pPr>
             <a:r>
@@ -11382,9 +10915,9 @@
                 <a:solidFill>
                   <a:srgbClr val="64748B"/>
                 </a:solidFill>
-                <a:latin typeface="Calibri" pitchFamily="34" charset="0"/>
-                <a:ea typeface="Calibri" pitchFamily="34" charset="-122"/>
-                <a:cs typeface="Calibri" pitchFamily="34" charset="-120"/>
+                <a:latin typeface="Calibri" panose="020F0502020204030204" pitchFamily="34" charset="0"/>
+                <a:ea typeface="Calibri" panose="020F0502020204030204" pitchFamily="34" charset="-122"/>
+                <a:cs typeface="Calibri" panose="020F0502020204030204" pitchFamily="34" charset="-120"/>
               </a:rPr>
               <a:t>EduTrack — School Management Platform</a:t>
             </a:r>
@@ -11407,13 +10940,12 @@
             <a:avLst/>
           </a:prstGeom>
           <a:noFill/>
-          <a:ln/>
         </p:spPr>
         <p:txBody>
           <a:bodyPr wrap="square" lIns="0" tIns="0" rIns="0" bIns="0" rtlCol="0" anchor="ctr"/>
           <a:lstStyle/>
           <a:p>
-            <a:pPr algn="r" indent="0" marL="0">
+            <a:pPr marL="0" indent="0" algn="r">
               <a:buNone/>
             </a:pPr>
             <a:r>
@@ -11421,9 +10953,9 @@
                 <a:solidFill>
                   <a:srgbClr val="94A3B8"/>
                 </a:solidFill>
-                <a:latin typeface="Calibri" pitchFamily="34" charset="0"/>
-                <a:ea typeface="Calibri" pitchFamily="34" charset="-122"/>
-                <a:cs typeface="Calibri" pitchFamily="34" charset="-120"/>
+                <a:latin typeface="Calibri" panose="020F0502020204030204" pitchFamily="34" charset="0"/>
+                <a:ea typeface="Calibri" panose="020F0502020204030204" pitchFamily="34" charset="-122"/>
+                <a:cs typeface="Calibri" panose="020F0502020204030204" pitchFamily="34" charset="-120"/>
               </a:rPr>
               <a:t>04</a:t>
             </a:r>
@@ -11441,12 +10973,13 @@
 
 <file path=ppt/slides/slide5.xml><?xml version="1.0" encoding="utf-8"?>
 <p:sld xmlns:a="http://schemas.openxmlformats.org/drawingml/2006/main" xmlns:r="http://schemas.openxmlformats.org/officeDocument/2006/relationships" xmlns:p="http://schemas.openxmlformats.org/presentationml/2006/main">
-  <p:cSld name="Slide 5">
+  <p:cSld>
     <p:bg>
       <p:bgPr>
         <a:solidFill>
           <a:srgbClr val="0F172A"/>
         </a:solidFill>
+        <a:effectLst/>
       </p:bgPr>
     </p:bg>
     <p:spTree>
@@ -11482,7 +11015,6 @@
               <a:alpha val="8000"/>
             </a:srgbClr>
           </a:solidFill>
-          <a:ln/>
         </p:spPr>
       </p:sp>
       <p:sp>
@@ -11500,23 +11032,22 @@
             <a:avLst/>
           </a:prstGeom>
           <a:noFill/>
-          <a:ln/>
         </p:spPr>
         <p:txBody>
           <a:bodyPr wrap="square" lIns="0" tIns="0" rIns="0" bIns="0" rtlCol="0" anchor="ctr"/>
           <a:lstStyle/>
           <a:p>
-            <a:pPr algn="l" indent="0" marL="0">
-              <a:buNone/>
-            </a:pPr>
-            <a:r>
-              <a:rPr lang="en-US" sz="1100" b="1" spc="300" kern="0" dirty="0">
+            <a:pPr marL="0" indent="0" algn="l">
+              <a:buNone/>
+            </a:pPr>
+            <a:r>
+              <a:rPr lang="en-US" sz="1100" b="1" kern="0" spc="300" dirty="0">
                 <a:solidFill>
                   <a:srgbClr val="60A5FA"/>
                 </a:solidFill>
-                <a:latin typeface="Calibri" pitchFamily="34" charset="0"/>
-                <a:ea typeface="Calibri" pitchFamily="34" charset="-122"/>
-                <a:cs typeface="Calibri" pitchFamily="34" charset="-120"/>
+                <a:latin typeface="Calibri" panose="020F0502020204030204" pitchFamily="34" charset="0"/>
+                <a:ea typeface="Calibri" panose="020F0502020204030204" pitchFamily="34" charset="-122"/>
+                <a:cs typeface="Calibri" panose="020F0502020204030204" pitchFamily="34" charset="-120"/>
               </a:rPr>
               <a:t>FEATURE SPOTLIGHT</a:t>
             </a:r>
@@ -11539,13 +11070,12 @@
             <a:avLst/>
           </a:prstGeom>
           <a:noFill/>
-          <a:ln/>
         </p:spPr>
         <p:txBody>
           <a:bodyPr wrap="square" lIns="0" tIns="0" rIns="0" bIns="0" rtlCol="0" anchor="t"/>
           <a:lstStyle/>
           <a:p>
-            <a:pPr algn="l" indent="0" marL="0">
+            <a:pPr marL="0" indent="0" algn="l">
               <a:lnSpc>
                 <a:spcPct val="106000"/>
               </a:lnSpc>
@@ -11556,43 +11086,31 @@
                 <a:solidFill>
                   <a:srgbClr val="FFFFFF"/>
                 </a:solidFill>
-                <a:latin typeface="Cambria" pitchFamily="34" charset="0"/>
-                <a:ea typeface="Cambria" pitchFamily="34" charset="-122"/>
-                <a:cs typeface="Cambria" pitchFamily="34" charset="-120"/>
+                <a:latin typeface="Cambria" panose="02040503050406030204" pitchFamily="34" charset="0"/>
+                <a:ea typeface="Cambria" panose="02040503050406030204" pitchFamily="34" charset="-122"/>
+                <a:cs typeface="Cambria" panose="02040503050406030204" pitchFamily="34" charset="-120"/>
               </a:rPr>
               <a:t>Report cards in </a:t>
             </a:r>
-            <a:pPr algn="l" indent="0" marL="0">
-              <a:lnSpc>
-                <a:spcPct val="106000"/>
-              </a:lnSpc>
-              <a:buNone/>
-            </a:pPr>
             <a:r>
               <a:rPr lang="en-US" sz="2900" b="1" dirty="0">
                 <a:solidFill>
                   <a:srgbClr val="FFFFFF"/>
                 </a:solidFill>
-                <a:latin typeface="Cambria" pitchFamily="34" charset="0"/>
-                <a:ea typeface="Cambria" pitchFamily="34" charset="-122"/>
-                <a:cs typeface="Cambria" pitchFamily="34" charset="-120"/>
+                <a:latin typeface="Cambria" panose="02040503050406030204" pitchFamily="34" charset="0"/>
+                <a:ea typeface="Cambria" panose="02040503050406030204" pitchFamily="34" charset="-122"/>
+                <a:cs typeface="Cambria" panose="02040503050406030204" pitchFamily="34" charset="-120"/>
               </a:rPr>
               <a:t>minutes</a:t>
             </a:r>
-            <a:pPr algn="l" indent="0" marL="0">
-              <a:lnSpc>
-                <a:spcPct val="106000"/>
-              </a:lnSpc>
-              <a:buNone/>
-            </a:pPr>
             <a:r>
               <a:rPr lang="en-US" sz="2900" b="1" dirty="0">
                 <a:solidFill>
                   <a:srgbClr val="FFFFFF"/>
                 </a:solidFill>
-                <a:latin typeface="Cambria" pitchFamily="34" charset="0"/>
-                <a:ea typeface="Cambria" pitchFamily="34" charset="-122"/>
-                <a:cs typeface="Cambria" pitchFamily="34" charset="-120"/>
+                <a:latin typeface="Cambria" panose="02040503050406030204" pitchFamily="34" charset="0"/>
+                <a:ea typeface="Cambria" panose="02040503050406030204" pitchFamily="34" charset="-122"/>
+                <a:cs typeface="Cambria" panose="02040503050406030204" pitchFamily="34" charset="-120"/>
               </a:rPr>
               <a:t>, not weeks</a:t>
             </a:r>
@@ -11642,13 +11160,12 @@
             <a:avLst/>
           </a:prstGeom>
           <a:noFill/>
-          <a:ln/>
         </p:spPr>
         <p:txBody>
           <a:bodyPr wrap="square" lIns="0" tIns="0" rIns="0" bIns="0" rtlCol="0" anchor="ctr"/>
           <a:lstStyle/>
           <a:p>
-            <a:pPr algn="ctr" indent="0" marL="0">
+            <a:pPr marL="0" indent="0" algn="ctr">
               <a:buNone/>
             </a:pPr>
             <a:r>
@@ -11656,9 +11173,9 @@
                 <a:solidFill>
                   <a:srgbClr val="10B981"/>
                 </a:solidFill>
-                <a:latin typeface="Calibri" pitchFamily="34" charset="0"/>
-                <a:ea typeface="Calibri" pitchFamily="34" charset="-122"/>
-                <a:cs typeface="Calibri" pitchFamily="34" charset="-120"/>
+                <a:latin typeface="Calibri" panose="020F0502020204030204" pitchFamily="34" charset="0"/>
+                <a:ea typeface="Calibri" panose="020F0502020204030204" pitchFamily="34" charset="-122"/>
+                <a:cs typeface="Calibri" panose="020F0502020204030204" pitchFamily="34" charset="-120"/>
               </a:rPr>
               <a:t>✓</a:t>
             </a:r>
@@ -11681,13 +11198,12 @@
             <a:avLst/>
           </a:prstGeom>
           <a:noFill/>
-          <a:ln/>
         </p:spPr>
         <p:txBody>
           <a:bodyPr wrap="square" lIns="0" tIns="0" rIns="0" bIns="0" rtlCol="0" anchor="t"/>
           <a:lstStyle/>
           <a:p>
-            <a:pPr indent="0" marL="0">
+            <a:pPr marL="0" indent="0">
               <a:lnSpc>
                 <a:spcPct val="110000"/>
               </a:lnSpc>
@@ -11698,26 +11214,20 @@
                 <a:solidFill>
                   <a:srgbClr val="FFFFFF"/>
                 </a:solidFill>
-                <a:latin typeface="Calibri" pitchFamily="34" charset="0"/>
-                <a:ea typeface="Calibri" pitchFamily="34" charset="-122"/>
-                <a:cs typeface="Calibri" pitchFamily="34" charset="-120"/>
+                <a:latin typeface="Calibri" panose="020F0502020204030204" pitchFamily="34" charset="0"/>
+                <a:ea typeface="Calibri" panose="020F0502020204030204" pitchFamily="34" charset="-122"/>
+                <a:cs typeface="Calibri" panose="020F0502020204030204" pitchFamily="34" charset="-120"/>
               </a:rPr>
               <a:t>Branded A4 PDF</a:t>
             </a:r>
-            <a:pPr indent="0" marL="0">
-              <a:lnSpc>
-                <a:spcPct val="110000"/>
-              </a:lnSpc>
-              <a:buNone/>
-            </a:pPr>
             <a:r>
               <a:rPr lang="en-US" sz="1250" dirty="0">
                 <a:solidFill>
                   <a:srgbClr val="94A3B8"/>
                 </a:solidFill>
-                <a:latin typeface="Calibri" pitchFamily="34" charset="0"/>
-                <a:ea typeface="Calibri" pitchFamily="34" charset="-122"/>
-                <a:cs typeface="Calibri" pitchFamily="34" charset="-120"/>
+                <a:latin typeface="Calibri" panose="020F0502020204030204" pitchFamily="34" charset="0"/>
+                <a:ea typeface="Calibri" panose="020F0502020204030204" pitchFamily="34" charset="-122"/>
+                <a:cs typeface="Calibri" panose="020F0502020204030204" pitchFamily="34" charset="-120"/>
               </a:rPr>
               <a:t> with your school's logo and colors — printed or shared as-is.</a:t>
             </a:r>
@@ -11767,13 +11277,12 @@
             <a:avLst/>
           </a:prstGeom>
           <a:noFill/>
-          <a:ln/>
         </p:spPr>
         <p:txBody>
           <a:bodyPr wrap="square" lIns="0" tIns="0" rIns="0" bIns="0" rtlCol="0" anchor="ctr"/>
           <a:lstStyle/>
           <a:p>
-            <a:pPr algn="ctr" indent="0" marL="0">
+            <a:pPr marL="0" indent="0" algn="ctr">
               <a:buNone/>
             </a:pPr>
             <a:r>
@@ -11781,9 +11290,9 @@
                 <a:solidFill>
                   <a:srgbClr val="10B981"/>
                 </a:solidFill>
-                <a:latin typeface="Calibri" pitchFamily="34" charset="0"/>
-                <a:ea typeface="Calibri" pitchFamily="34" charset="-122"/>
-                <a:cs typeface="Calibri" pitchFamily="34" charset="-120"/>
+                <a:latin typeface="Calibri" panose="020F0502020204030204" pitchFamily="34" charset="0"/>
+                <a:ea typeface="Calibri" panose="020F0502020204030204" pitchFamily="34" charset="-122"/>
+                <a:cs typeface="Calibri" panose="020F0502020204030204" pitchFamily="34" charset="-120"/>
               </a:rPr>
               <a:t>✓</a:t>
             </a:r>
@@ -11806,13 +11315,12 @@
             <a:avLst/>
           </a:prstGeom>
           <a:noFill/>
-          <a:ln/>
         </p:spPr>
         <p:txBody>
           <a:bodyPr wrap="square" lIns="0" tIns="0" rIns="0" bIns="0" rtlCol="0" anchor="t"/>
           <a:lstStyle/>
           <a:p>
-            <a:pPr indent="0" marL="0">
+            <a:pPr marL="0" indent="0">
               <a:lnSpc>
                 <a:spcPct val="110000"/>
               </a:lnSpc>
@@ -11823,26 +11331,20 @@
                 <a:solidFill>
                   <a:srgbClr val="FFFFFF"/>
                 </a:solidFill>
-                <a:latin typeface="Calibri" pitchFamily="34" charset="0"/>
-                <a:ea typeface="Calibri" pitchFamily="34" charset="-122"/>
-                <a:cs typeface="Calibri" pitchFamily="34" charset="-120"/>
+                <a:latin typeface="Calibri" panose="020F0502020204030204" pitchFamily="34" charset="0"/>
+                <a:ea typeface="Calibri" panose="020F0502020204030204" pitchFamily="34" charset="-122"/>
+                <a:cs typeface="Calibri" panose="020F0502020204030204" pitchFamily="34" charset="-120"/>
               </a:rPr>
               <a:t>Class positions, subject remarks, attendance and signature blocks</a:t>
             </a:r>
-            <a:pPr indent="0" marL="0">
-              <a:lnSpc>
-                <a:spcPct val="110000"/>
-              </a:lnSpc>
-              <a:buNone/>
-            </a:pPr>
             <a:r>
               <a:rPr lang="en-US" sz="1250" dirty="0">
                 <a:solidFill>
                   <a:srgbClr val="94A3B8"/>
                 </a:solidFill>
-                <a:latin typeface="Calibri" pitchFamily="34" charset="0"/>
-                <a:ea typeface="Calibri" pitchFamily="34" charset="-122"/>
-                <a:cs typeface="Calibri" pitchFamily="34" charset="-120"/>
+                <a:latin typeface="Calibri" panose="020F0502020204030204" pitchFamily="34" charset="0"/>
+                <a:ea typeface="Calibri" panose="020F0502020204030204" pitchFamily="34" charset="-122"/>
+                <a:cs typeface="Calibri" panose="020F0502020204030204" pitchFamily="34" charset="-120"/>
               </a:rPr>
               <a:t> — all on one card.</a:t>
             </a:r>
@@ -11892,13 +11394,12 @@
             <a:avLst/>
           </a:prstGeom>
           <a:noFill/>
-          <a:ln/>
         </p:spPr>
         <p:txBody>
           <a:bodyPr wrap="square" lIns="0" tIns="0" rIns="0" bIns="0" rtlCol="0" anchor="ctr"/>
           <a:lstStyle/>
           <a:p>
-            <a:pPr algn="ctr" indent="0" marL="0">
+            <a:pPr marL="0" indent="0" algn="ctr">
               <a:buNone/>
             </a:pPr>
             <a:r>
@@ -11906,9 +11407,9 @@
                 <a:solidFill>
                   <a:srgbClr val="10B981"/>
                 </a:solidFill>
-                <a:latin typeface="Calibri" pitchFamily="34" charset="0"/>
-                <a:ea typeface="Calibri" pitchFamily="34" charset="-122"/>
-                <a:cs typeface="Calibri" pitchFamily="34" charset="-120"/>
+                <a:latin typeface="Calibri" panose="020F0502020204030204" pitchFamily="34" charset="0"/>
+                <a:ea typeface="Calibri" panose="020F0502020204030204" pitchFamily="34" charset="-122"/>
+                <a:cs typeface="Calibri" panose="020F0502020204030204" pitchFamily="34" charset="-120"/>
               </a:rPr>
               <a:t>✓</a:t>
             </a:r>
@@ -11931,13 +11432,12 @@
             <a:avLst/>
           </a:prstGeom>
           <a:noFill/>
-          <a:ln/>
         </p:spPr>
         <p:txBody>
           <a:bodyPr wrap="square" lIns="0" tIns="0" rIns="0" bIns="0" rtlCol="0" anchor="t"/>
           <a:lstStyle/>
           <a:p>
-            <a:pPr indent="0" marL="0">
+            <a:pPr marL="0" indent="0">
               <a:lnSpc>
                 <a:spcPct val="110000"/>
               </a:lnSpc>
@@ -11948,26 +11448,20 @@
                 <a:solidFill>
                   <a:srgbClr val="FFFFFF"/>
                 </a:solidFill>
-                <a:latin typeface="Calibri" pitchFamily="34" charset="0"/>
-                <a:ea typeface="Calibri" pitchFamily="34" charset="-122"/>
-                <a:cs typeface="Calibri" pitchFamily="34" charset="-120"/>
+                <a:latin typeface="Calibri" panose="020F0502020204030204" pitchFamily="34" charset="0"/>
+                <a:ea typeface="Calibri" panose="020F0502020204030204" pitchFamily="34" charset="-122"/>
+                <a:cs typeface="Calibri" panose="020F0502020204030204" pitchFamily="34" charset="-120"/>
               </a:rPr>
               <a:t>Generated in one click</a:t>
             </a:r>
-            <a:pPr indent="0" marL="0">
-              <a:lnSpc>
-                <a:spcPct val="110000"/>
-              </a:lnSpc>
-              <a:buNone/>
-            </a:pPr>
             <a:r>
               <a:rPr lang="en-US" sz="1250" dirty="0">
                 <a:solidFill>
                   <a:srgbClr val="94A3B8"/>
                 </a:solidFill>
-                <a:latin typeface="Calibri" pitchFamily="34" charset="0"/>
-                <a:ea typeface="Calibri" pitchFamily="34" charset="-122"/>
-                <a:cs typeface="Calibri" pitchFamily="34" charset="-120"/>
+                <a:latin typeface="Calibri" panose="020F0502020204030204" pitchFamily="34" charset="0"/>
+                <a:ea typeface="Calibri" panose="020F0502020204030204" pitchFamily="34" charset="-122"/>
+                <a:cs typeface="Calibri" panose="020F0502020204030204" pitchFamily="34" charset="-120"/>
               </a:rPr>
               <a:t> by teachers, admins — and viewed instantly by students and parents.</a:t>
             </a:r>
@@ -12017,13 +11511,12 @@
             <a:avLst/>
           </a:prstGeom>
           <a:noFill/>
-          <a:ln/>
         </p:spPr>
         <p:txBody>
           <a:bodyPr wrap="square" lIns="0" tIns="0" rIns="0" bIns="0" rtlCol="0" anchor="ctr"/>
           <a:lstStyle/>
           <a:p>
-            <a:pPr algn="ctr" indent="0" marL="0">
+            <a:pPr marL="0" indent="0" algn="ctr">
               <a:buNone/>
             </a:pPr>
             <a:r>
@@ -12031,9 +11524,9 @@
                 <a:solidFill>
                   <a:srgbClr val="10B981"/>
                 </a:solidFill>
-                <a:latin typeface="Calibri" pitchFamily="34" charset="0"/>
-                <a:ea typeface="Calibri" pitchFamily="34" charset="-122"/>
-                <a:cs typeface="Calibri" pitchFamily="34" charset="-120"/>
+                <a:latin typeface="Calibri" panose="020F0502020204030204" pitchFamily="34" charset="0"/>
+                <a:ea typeface="Calibri" panose="020F0502020204030204" pitchFamily="34" charset="-122"/>
+                <a:cs typeface="Calibri" panose="020F0502020204030204" pitchFamily="34" charset="-120"/>
               </a:rPr>
               <a:t>✓</a:t>
             </a:r>
@@ -12056,13 +11549,12 @@
             <a:avLst/>
           </a:prstGeom>
           <a:noFill/>
-          <a:ln/>
         </p:spPr>
         <p:txBody>
           <a:bodyPr wrap="square" lIns="0" tIns="0" rIns="0" bIns="0" rtlCol="0" anchor="t"/>
           <a:lstStyle/>
           <a:p>
-            <a:pPr indent="0" marL="0">
+            <a:pPr marL="0" indent="0">
               <a:lnSpc>
                 <a:spcPct val="110000"/>
               </a:lnSpc>
@@ -12073,26 +11565,20 @@
                 <a:solidFill>
                   <a:srgbClr val="FFFFFF"/>
                 </a:solidFill>
-                <a:latin typeface="Calibri" pitchFamily="34" charset="0"/>
-                <a:ea typeface="Calibri" pitchFamily="34" charset="-122"/>
-                <a:cs typeface="Calibri" pitchFamily="34" charset="-120"/>
+                <a:latin typeface="Calibri" panose="020F0502020204030204" pitchFamily="34" charset="0"/>
+                <a:ea typeface="Calibri" panose="020F0502020204030204" pitchFamily="34" charset="-122"/>
+                <a:cs typeface="Calibri" panose="020F0502020204030204" pitchFamily="34" charset="-120"/>
               </a:rPr>
               <a:t>Auto-ranked</a:t>
             </a:r>
-            <a:pPr indent="0" marL="0">
-              <a:lnSpc>
-                <a:spcPct val="110000"/>
-              </a:lnSpc>
-              <a:buNone/>
-            </a:pPr>
             <a:r>
               <a:rPr lang="en-US" sz="1250" dirty="0">
                 <a:solidFill>
                   <a:srgbClr val="94A3B8"/>
                 </a:solidFill>
-                <a:latin typeface="Calibri" pitchFamily="34" charset="0"/>
-                <a:ea typeface="Calibri" pitchFamily="34" charset="-122"/>
-                <a:cs typeface="Calibri" pitchFamily="34" charset="-120"/>
+                <a:latin typeface="Calibri" panose="020F0502020204030204" pitchFamily="34" charset="0"/>
+                <a:ea typeface="Calibri" panose="020F0502020204030204" pitchFamily="34" charset="-122"/>
+                <a:cs typeface="Calibri" panose="020F0502020204030204" pitchFamily="34" charset="-120"/>
               </a:rPr>
               <a:t> — the best students surface automatically, by average, per class arm.</a:t>
             </a:r>
@@ -12142,13 +11628,12 @@
             <a:avLst/>
           </a:prstGeom>
           <a:noFill/>
-          <a:ln/>
         </p:spPr>
         <p:txBody>
           <a:bodyPr wrap="square" lIns="0" tIns="0" rIns="0" bIns="0" rtlCol="0" anchor="ctr"/>
           <a:lstStyle/>
           <a:p>
-            <a:pPr algn="ctr" indent="0" marL="0">
+            <a:pPr marL="0" indent="0" algn="ctr">
               <a:buNone/>
             </a:pPr>
             <a:r>
@@ -12156,9 +11641,9 @@
                 <a:solidFill>
                   <a:srgbClr val="10B981"/>
                 </a:solidFill>
-                <a:latin typeface="Cambria" pitchFamily="34" charset="0"/>
-                <a:ea typeface="Cambria" pitchFamily="34" charset="-122"/>
-                <a:cs typeface="Cambria" pitchFamily="34" charset="-120"/>
+                <a:latin typeface="Cambria" panose="02040503050406030204" pitchFamily="34" charset="0"/>
+                <a:ea typeface="Cambria" panose="02040503050406030204" pitchFamily="34" charset="-122"/>
+                <a:cs typeface="Cambria" panose="02040503050406030204" pitchFamily="34" charset="-120"/>
               </a:rPr>
               <a:t>2 weeks → 3 minutes</a:t>
             </a:r>
@@ -12181,13 +11666,12 @@
             <a:avLst/>
           </a:prstGeom>
           <a:noFill/>
-          <a:ln/>
         </p:spPr>
         <p:txBody>
           <a:bodyPr wrap="square" lIns="0" tIns="0" rIns="0" bIns="0" rtlCol="0" anchor="t"/>
           <a:lstStyle/>
           <a:p>
-            <a:pPr algn="ctr" indent="0" marL="0">
+            <a:pPr marL="0" indent="0" algn="ctr">
               <a:lnSpc>
                 <a:spcPct val="112000"/>
               </a:lnSpc>
@@ -12198,9 +11682,9 @@
                 <a:solidFill>
                   <a:srgbClr val="94A3B8"/>
                 </a:solidFill>
-                <a:latin typeface="Calibri" pitchFamily="34" charset="0"/>
-                <a:ea typeface="Calibri" pitchFamily="34" charset="-122"/>
-                <a:cs typeface="Calibri" pitchFamily="34" charset="-120"/>
+                <a:latin typeface="Calibri" panose="020F0502020204030204" pitchFamily="34" charset="0"/>
+                <a:ea typeface="Calibri" panose="020F0502020204030204" pitchFamily="34" charset="-122"/>
+                <a:cs typeface="Calibri" panose="020F0502020204030204" pitchFamily="34" charset="-120"/>
               </a:rPr>
               <a:t>from handwriting to printed branded report cards</a:t>
             </a:r>
@@ -12250,13 +11734,12 @@
             <a:avLst/>
           </a:prstGeom>
           <a:noFill/>
-          <a:ln/>
         </p:spPr>
         <p:txBody>
           <a:bodyPr wrap="square" lIns="0" tIns="0" rIns="0" bIns="0" rtlCol="0" anchor="ctr"/>
           <a:lstStyle/>
           <a:p>
-            <a:pPr algn="ctr" indent="0" marL="0">
+            <a:pPr marL="0" indent="0" algn="ctr">
               <a:buNone/>
             </a:pPr>
             <a:r>
@@ -12264,9 +11747,9 @@
                 <a:solidFill>
                   <a:srgbClr val="60A5FA"/>
                 </a:solidFill>
-                <a:latin typeface="Cambria" pitchFamily="34" charset="0"/>
-                <a:ea typeface="Cambria" pitchFamily="34" charset="-122"/>
-                <a:cs typeface="Cambria" pitchFamily="34" charset="-120"/>
+                <a:latin typeface="Cambria" panose="02040503050406030204" pitchFamily="34" charset="0"/>
+                <a:ea typeface="Cambria" panose="02040503050406030204" pitchFamily="34" charset="-122"/>
+                <a:cs typeface="Cambria" panose="02040503050406030204" pitchFamily="34" charset="-120"/>
               </a:rPr>
               <a:t>100%</a:t>
             </a:r>
@@ -12289,13 +11772,12 @@
             <a:avLst/>
           </a:prstGeom>
           <a:noFill/>
-          <a:ln/>
         </p:spPr>
         <p:txBody>
           <a:bodyPr wrap="square" lIns="0" tIns="0" rIns="0" bIns="0" rtlCol="0" anchor="t"/>
           <a:lstStyle/>
           <a:p>
-            <a:pPr algn="ctr" indent="0" marL="0">
+            <a:pPr marL="0" indent="0" algn="ctr">
               <a:lnSpc>
                 <a:spcPct val="112000"/>
               </a:lnSpc>
@@ -12306,9 +11788,9 @@
                 <a:solidFill>
                   <a:srgbClr val="94A3B8"/>
                 </a:solidFill>
-                <a:latin typeface="Calibri" pitchFamily="34" charset="0"/>
-                <a:ea typeface="Calibri" pitchFamily="34" charset="-122"/>
-                <a:cs typeface="Calibri" pitchFamily="34" charset="-120"/>
+                <a:latin typeface="Calibri" panose="020F0502020204030204" pitchFamily="34" charset="0"/>
+                <a:ea typeface="Calibri" panose="020F0502020204030204" pitchFamily="34" charset="-122"/>
+                <a:cs typeface="Calibri" panose="020F0502020204030204" pitchFamily="34" charset="-120"/>
               </a:rPr>
               <a:t>consistent format — no more uneven handwriting or layout errors</a:t>
             </a:r>
@@ -12331,13 +11813,12 @@
             <a:avLst/>
           </a:prstGeom>
           <a:noFill/>
-          <a:ln/>
         </p:spPr>
         <p:txBody>
           <a:bodyPr wrap="square" lIns="0" tIns="0" rIns="0" bIns="0" rtlCol="0" anchor="ctr"/>
           <a:lstStyle/>
           <a:p>
-            <a:pPr indent="0" marL="0">
+            <a:pPr marL="0" indent="0">
               <a:buNone/>
             </a:pPr>
             <a:r>
@@ -12345,9 +11826,9 @@
                 <a:solidFill>
                   <a:srgbClr val="64748B"/>
                 </a:solidFill>
-                <a:latin typeface="Calibri" pitchFamily="34" charset="0"/>
-                <a:ea typeface="Calibri" pitchFamily="34" charset="-122"/>
-                <a:cs typeface="Calibri" pitchFamily="34" charset="-120"/>
+                <a:latin typeface="Calibri" panose="020F0502020204030204" pitchFamily="34" charset="0"/>
+                <a:ea typeface="Calibri" panose="020F0502020204030204" pitchFamily="34" charset="-122"/>
+                <a:cs typeface="Calibri" panose="020F0502020204030204" pitchFamily="34" charset="-120"/>
               </a:rPr>
               <a:t>EduTrack — School Management Platform</a:t>
             </a:r>
@@ -12370,13 +11851,12 @@
             <a:avLst/>
           </a:prstGeom>
           <a:noFill/>
-          <a:ln/>
         </p:spPr>
         <p:txBody>
           <a:bodyPr wrap="square" lIns="0" tIns="0" rIns="0" bIns="0" rtlCol="0" anchor="ctr"/>
           <a:lstStyle/>
           <a:p>
-            <a:pPr algn="r" indent="0" marL="0">
+            <a:pPr marL="0" indent="0" algn="r">
               <a:buNone/>
             </a:pPr>
             <a:r>
@@ -12384,9 +11864,9 @@
                 <a:solidFill>
                   <a:srgbClr val="94A3B8"/>
                 </a:solidFill>
-                <a:latin typeface="Calibri" pitchFamily="34" charset="0"/>
-                <a:ea typeface="Calibri" pitchFamily="34" charset="-122"/>
-                <a:cs typeface="Calibri" pitchFamily="34" charset="-120"/>
+                <a:latin typeface="Calibri" panose="020F0502020204030204" pitchFamily="34" charset="0"/>
+                <a:ea typeface="Calibri" panose="020F0502020204030204" pitchFamily="34" charset="-122"/>
+                <a:cs typeface="Calibri" panose="020F0502020204030204" pitchFamily="34" charset="-120"/>
               </a:rPr>
               <a:t>05</a:t>
             </a:r>
@@ -12404,12 +11884,13 @@
 
 <file path=ppt/slides/slide6.xml><?xml version="1.0" encoding="utf-8"?>
 <p:sld xmlns:a="http://schemas.openxmlformats.org/drawingml/2006/main" xmlns:r="http://schemas.openxmlformats.org/officeDocument/2006/relationships" xmlns:p="http://schemas.openxmlformats.org/presentationml/2006/main">
-  <p:cSld name="Slide 6">
+  <p:cSld>
     <p:bg>
       <p:bgPr>
         <a:solidFill>
           <a:srgbClr val="0F172A"/>
         </a:solidFill>
+        <a:effectLst/>
       </p:bgPr>
     </p:bg>
     <p:spTree>
@@ -12441,23 +11922,22 @@
             <a:avLst/>
           </a:prstGeom>
           <a:noFill/>
-          <a:ln/>
         </p:spPr>
         <p:txBody>
           <a:bodyPr wrap="square" lIns="0" tIns="0" rIns="0" bIns="0" rtlCol="0" anchor="ctr"/>
           <a:lstStyle/>
           <a:p>
-            <a:pPr algn="l" indent="0" marL="0">
-              <a:buNone/>
-            </a:pPr>
-            <a:r>
-              <a:rPr lang="en-US" sz="1100" b="1" spc="300" kern="0" dirty="0">
+            <a:pPr marL="0" indent="0" algn="l">
+              <a:buNone/>
+            </a:pPr>
+            <a:r>
+              <a:rPr lang="en-US" sz="1100" b="1" kern="0" spc="300" dirty="0">
                 <a:solidFill>
                   <a:srgbClr val="60A5FA"/>
                 </a:solidFill>
-                <a:latin typeface="Calibri" pitchFamily="34" charset="0"/>
-                <a:ea typeface="Calibri" pitchFamily="34" charset="-122"/>
-                <a:cs typeface="Calibri" pitchFamily="34" charset="-120"/>
+                <a:latin typeface="Calibri" panose="020F0502020204030204" pitchFamily="34" charset="0"/>
+                <a:ea typeface="Calibri" panose="020F0502020204030204" pitchFamily="34" charset="-122"/>
+                <a:cs typeface="Calibri" panose="020F0502020204030204" pitchFamily="34" charset="-120"/>
               </a:rPr>
               <a:t>FOR TEACHERS</a:t>
             </a:r>
@@ -12480,13 +11960,12 @@
             <a:avLst/>
           </a:prstGeom>
           <a:noFill/>
-          <a:ln/>
         </p:spPr>
         <p:txBody>
           <a:bodyPr wrap="square" lIns="0" tIns="0" rIns="0" bIns="0" rtlCol="0" anchor="t"/>
           <a:lstStyle/>
           <a:p>
-            <a:pPr algn="l" indent="0" marL="0">
+            <a:pPr marL="0" indent="0" algn="l">
               <a:lnSpc>
                 <a:spcPct val="106000"/>
               </a:lnSpc>
@@ -12497,26 +11976,20 @@
                 <a:solidFill>
                   <a:srgbClr val="FFFFFF"/>
                 </a:solidFill>
-                <a:latin typeface="Cambria" pitchFamily="34" charset="0"/>
-                <a:ea typeface="Cambria" pitchFamily="34" charset="-122"/>
-                <a:cs typeface="Cambria" pitchFamily="34" charset="-120"/>
+                <a:latin typeface="Cambria" panose="02040503050406030204" pitchFamily="34" charset="0"/>
+                <a:ea typeface="Cambria" panose="02040503050406030204" pitchFamily="34" charset="-122"/>
+                <a:cs typeface="Cambria" panose="02040503050406030204" pitchFamily="34" charset="-120"/>
               </a:rPr>
               <a:t>An instant </a:t>
             </a:r>
-            <a:pPr algn="l" indent="0" marL="0">
-              <a:lnSpc>
-                <a:spcPct val="106000"/>
-              </a:lnSpc>
-              <a:buNone/>
-            </a:pPr>
             <a:r>
               <a:rPr lang="en-US" sz="2900" b="1" dirty="0">
                 <a:solidFill>
                   <a:srgbClr val="FFFFFF"/>
                 </a:solidFill>
-                <a:latin typeface="Cambria" pitchFamily="34" charset="0"/>
-                <a:ea typeface="Cambria" pitchFamily="34" charset="-122"/>
-                <a:cs typeface="Cambria" pitchFamily="34" charset="-120"/>
+                <a:latin typeface="Cambria" panose="02040503050406030204" pitchFamily="34" charset="0"/>
+                <a:ea typeface="Cambria" panose="02040503050406030204" pitchFamily="34" charset="-122"/>
+                <a:cs typeface="Cambria" panose="02040503050406030204" pitchFamily="34" charset="-120"/>
               </a:rPr>
               <a:t>grading matrix</a:t>
             </a:r>
@@ -12570,7 +12043,6 @@
           <a:solidFill>
             <a:srgbClr val="2563EB"/>
           </a:solidFill>
-          <a:ln/>
         </p:spPr>
       </p:sp>
       <p:sp>
@@ -12588,13 +12060,12 @@
             <a:avLst/>
           </a:prstGeom>
           <a:noFill/>
-          <a:ln/>
         </p:spPr>
         <p:txBody>
           <a:bodyPr wrap="square" lIns="0" tIns="0" rIns="0" bIns="0" rtlCol="0" anchor="ctr"/>
           <a:lstStyle/>
           <a:p>
-            <a:pPr algn="ctr" indent="0" marL="0">
+            <a:pPr marL="0" indent="0" algn="ctr">
               <a:buNone/>
             </a:pPr>
             <a:r>
@@ -12602,9 +12073,9 @@
                 <a:solidFill>
                   <a:srgbClr val="FFFFFF"/>
                 </a:solidFill>
-                <a:latin typeface="Calibri" pitchFamily="34" charset="0"/>
-                <a:ea typeface="Calibri" pitchFamily="34" charset="-122"/>
-                <a:cs typeface="Calibri" pitchFamily="34" charset="-120"/>
+                <a:latin typeface="Calibri" panose="020F0502020204030204" pitchFamily="34" charset="0"/>
+                <a:ea typeface="Calibri" panose="020F0502020204030204" pitchFamily="34" charset="-122"/>
+                <a:cs typeface="Calibri" panose="020F0502020204030204" pitchFamily="34" charset="-120"/>
               </a:rPr>
               <a:t>✎</a:t>
             </a:r>
@@ -12627,13 +12098,12 @@
             <a:avLst/>
           </a:prstGeom>
           <a:noFill/>
-          <a:ln/>
         </p:spPr>
         <p:txBody>
           <a:bodyPr wrap="square" lIns="0" tIns="0" rIns="0" bIns="0" rtlCol="0" anchor="t"/>
           <a:lstStyle/>
           <a:p>
-            <a:pPr indent="0" marL="0">
+            <a:pPr marL="0" indent="0">
               <a:lnSpc>
                 <a:spcPct val="100000"/>
               </a:lnSpc>
@@ -12644,9 +12114,9 @@
                 <a:solidFill>
                   <a:srgbClr val="FFFFFF"/>
                 </a:solidFill>
-                <a:latin typeface="Calibri" pitchFamily="34" charset="0"/>
-                <a:ea typeface="Calibri" pitchFamily="34" charset="-122"/>
-                <a:cs typeface="Calibri" pitchFamily="34" charset="-120"/>
+                <a:latin typeface="Calibri" panose="020F0502020204030204" pitchFamily="34" charset="0"/>
+                <a:ea typeface="Calibri" panose="020F0502020204030204" pitchFamily="34" charset="-122"/>
+                <a:cs typeface="Calibri" panose="020F0502020204030204" pitchFamily="34" charset="-120"/>
               </a:rPr>
               <a:t>Type scores, watch grades appear</a:t>
             </a:r>
@@ -12669,13 +12139,12 @@
             <a:avLst/>
           </a:prstGeom>
           <a:noFill/>
-          <a:ln/>
         </p:spPr>
         <p:txBody>
           <a:bodyPr wrap="square" lIns="0" tIns="0" rIns="0" bIns="0" rtlCol="0" anchor="t"/>
           <a:lstStyle/>
           <a:p>
-            <a:pPr indent="0" marL="0">
+            <a:pPr marL="0" indent="0">
               <a:lnSpc>
                 <a:spcPct val="112000"/>
               </a:lnSpc>
@@ -12686,9 +12155,9 @@
                 <a:solidFill>
                   <a:srgbClr val="94A3B8"/>
                 </a:solidFill>
-                <a:latin typeface="Calibri" pitchFamily="34" charset="0"/>
-                <a:ea typeface="Calibri" pitchFamily="34" charset="-122"/>
-                <a:cs typeface="Calibri" pitchFamily="34" charset="-120"/>
+                <a:latin typeface="Calibri" panose="020F0502020204030204" pitchFamily="34" charset="0"/>
+                <a:ea typeface="Calibri" panose="020F0502020204030204" pitchFamily="34" charset="-122"/>
+                <a:cs typeface="Calibri" panose="020F0502020204030204" pitchFamily="34" charset="-120"/>
               </a:rPr>
               <a:t>Enter CA (out of 40) and Exam (out of 60) — totals and letter grades (A–F) compute live as teachers type. No calculators, no look-up tables.</a:t>
             </a:r>
@@ -12742,7 +12211,6 @@
           <a:solidFill>
             <a:srgbClr val="10B981"/>
           </a:solidFill>
-          <a:ln/>
         </p:spPr>
       </p:sp>
       <p:sp>
@@ -12760,13 +12228,12 @@
             <a:avLst/>
           </a:prstGeom>
           <a:noFill/>
-          <a:ln/>
         </p:spPr>
         <p:txBody>
           <a:bodyPr wrap="square" lIns="0" tIns="0" rIns="0" bIns="0" rtlCol="0" anchor="ctr"/>
           <a:lstStyle/>
           <a:p>
-            <a:pPr algn="ctr" indent="0" marL="0">
+            <a:pPr marL="0" indent="0" algn="ctr">
               <a:buNone/>
             </a:pPr>
             <a:r>
@@ -12774,9 +12241,9 @@
                 <a:solidFill>
                   <a:srgbClr val="FFFFFF"/>
                 </a:solidFill>
-                <a:latin typeface="Calibri" pitchFamily="34" charset="0"/>
-                <a:ea typeface="Calibri" pitchFamily="34" charset="-122"/>
-                <a:cs typeface="Calibri" pitchFamily="34" charset="-120"/>
+                <a:latin typeface="Calibri" panose="020F0502020204030204" pitchFamily="34" charset="0"/>
+                <a:ea typeface="Calibri" panose="020F0502020204030204" pitchFamily="34" charset="-122"/>
+                <a:cs typeface="Calibri" panose="020F0502020204030204" pitchFamily="34" charset="-120"/>
               </a:rPr>
               <a:t>✓</a:t>
             </a:r>
@@ -12799,13 +12266,12 @@
             <a:avLst/>
           </a:prstGeom>
           <a:noFill/>
-          <a:ln/>
         </p:spPr>
         <p:txBody>
           <a:bodyPr wrap="square" lIns="0" tIns="0" rIns="0" bIns="0" rtlCol="0" anchor="t"/>
           <a:lstStyle/>
           <a:p>
-            <a:pPr indent="0" marL="0">
+            <a:pPr marL="0" indent="0">
               <a:lnSpc>
                 <a:spcPct val="100000"/>
               </a:lnSpc>
@@ -12816,9 +12282,9 @@
                 <a:solidFill>
                   <a:srgbClr val="FFFFFF"/>
                 </a:solidFill>
-                <a:latin typeface="Calibri" pitchFamily="34" charset="0"/>
-                <a:ea typeface="Calibri" pitchFamily="34" charset="-122"/>
-                <a:cs typeface="Calibri" pitchFamily="34" charset="-120"/>
+                <a:latin typeface="Calibri" panose="020F0502020204030204" pitchFamily="34" charset="0"/>
+                <a:ea typeface="Calibri" panose="020F0502020204030204" pitchFamily="34" charset="-122"/>
+                <a:cs typeface="Calibri" panose="020F0502020204030204" pitchFamily="34" charset="-120"/>
               </a:rPr>
               <a:t>Per class arm, per subject</a:t>
             </a:r>
@@ -12841,13 +12307,12 @@
             <a:avLst/>
           </a:prstGeom>
           <a:noFill/>
-          <a:ln/>
         </p:spPr>
         <p:txBody>
           <a:bodyPr wrap="square" lIns="0" tIns="0" rIns="0" bIns="0" rtlCol="0" anchor="t"/>
           <a:lstStyle/>
           <a:p>
-            <a:pPr indent="0" marL="0">
+            <a:pPr marL="0" indent="0">
               <a:lnSpc>
                 <a:spcPct val="112000"/>
               </a:lnSpc>
@@ -12858,9 +12323,9 @@
                 <a:solidFill>
                   <a:srgbClr val="94A3B8"/>
                 </a:solidFill>
-                <a:latin typeface="Calibri" pitchFamily="34" charset="0"/>
-                <a:ea typeface="Calibri" pitchFamily="34" charset="-122"/>
-                <a:cs typeface="Calibri" pitchFamily="34" charset="-120"/>
+                <a:latin typeface="Calibri" panose="020F0502020204030204" pitchFamily="34" charset="0"/>
+                <a:ea typeface="Calibri" panose="020F0502020204030204" pitchFamily="34" charset="-122"/>
+                <a:cs typeface="Calibri" panose="020F0502020204030204" pitchFamily="34" charset="-120"/>
               </a:rPr>
               <a:t>Each stream — SS1 Science, SS1 Arts, JSS — keeps its own matrix and its own roster. Teachers only ever see their own classes.</a:t>
             </a:r>
@@ -12914,7 +12379,6 @@
           <a:solidFill>
             <a:srgbClr val="F59E0B"/>
           </a:solidFill>
-          <a:ln/>
         </p:spPr>
       </p:sp>
       <p:sp>
@@ -12932,13 +12396,12 @@
             <a:avLst/>
           </a:prstGeom>
           <a:noFill/>
-          <a:ln/>
         </p:spPr>
         <p:txBody>
           <a:bodyPr wrap="square" lIns="0" tIns="0" rIns="0" bIns="0" rtlCol="0" anchor="ctr"/>
           <a:lstStyle/>
           <a:p>
-            <a:pPr algn="ctr" indent="0" marL="0">
+            <a:pPr marL="0" indent="0" algn="ctr">
               <a:buNone/>
             </a:pPr>
             <a:r>
@@ -12946,9 +12409,9 @@
                 <a:solidFill>
                   <a:srgbClr val="FFFFFF"/>
                 </a:solidFill>
-                <a:latin typeface="Calibri" pitchFamily="34" charset="0"/>
-                <a:ea typeface="Calibri" pitchFamily="34" charset="-122"/>
-                <a:cs typeface="Calibri" pitchFamily="34" charset="-120"/>
+                <a:latin typeface="Calibri" panose="020F0502020204030204" pitchFamily="34" charset="0"/>
+                <a:ea typeface="Calibri" panose="020F0502020204030204" pitchFamily="34" charset="-122"/>
+                <a:cs typeface="Calibri" panose="020F0502020204030204" pitchFamily="34" charset="-120"/>
               </a:rPr>
               <a:t>⚙</a:t>
             </a:r>
@@ -12971,13 +12434,12 @@
             <a:avLst/>
           </a:prstGeom>
           <a:noFill/>
-          <a:ln/>
         </p:spPr>
         <p:txBody>
           <a:bodyPr wrap="square" lIns="0" tIns="0" rIns="0" bIns="0" rtlCol="0" anchor="t"/>
           <a:lstStyle/>
           <a:p>
-            <a:pPr indent="0" marL="0">
+            <a:pPr marL="0" indent="0">
               <a:lnSpc>
                 <a:spcPct val="100000"/>
               </a:lnSpc>
@@ -12988,9 +12450,9 @@
                 <a:solidFill>
                   <a:srgbClr val="FFFFFF"/>
                 </a:solidFill>
-                <a:latin typeface="Calibri" pitchFamily="34" charset="0"/>
-                <a:ea typeface="Calibri" pitchFamily="34" charset="-122"/>
-                <a:cs typeface="Calibri" pitchFamily="34" charset="-120"/>
+                <a:latin typeface="Calibri" panose="020F0502020204030204" pitchFamily="34" charset="0"/>
+                <a:ea typeface="Calibri" panose="020F0502020204030204" pitchFamily="34" charset="-122"/>
+                <a:cs typeface="Calibri" panose="020F0502020204030204" pitchFamily="34" charset="-120"/>
               </a:rPr>
               <a:t>Batch save with safety</a:t>
             </a:r>
@@ -13013,13 +12475,12 @@
             <a:avLst/>
           </a:prstGeom>
           <a:noFill/>
-          <a:ln/>
         </p:spPr>
         <p:txBody>
           <a:bodyPr wrap="square" lIns="0" tIns="0" rIns="0" bIns="0" rtlCol="0" anchor="t"/>
           <a:lstStyle/>
           <a:p>
-            <a:pPr indent="0" marL="0">
+            <a:pPr marL="0" indent="0">
               <a:lnSpc>
                 <a:spcPct val="112000"/>
               </a:lnSpc>
@@ -13030,9 +12491,9 @@
                 <a:solidFill>
                   <a:srgbClr val="94A3B8"/>
                 </a:solidFill>
-                <a:latin typeface="Calibri" pitchFamily="34" charset="0"/>
-                <a:ea typeface="Calibri" pitchFamily="34" charset="-122"/>
-                <a:cs typeface="Calibri" pitchFamily="34" charset="-120"/>
+                <a:latin typeface="Calibri" panose="020F0502020204030204" pitchFamily="34" charset="0"/>
+                <a:ea typeface="Calibri" panose="020F0502020204030204" pitchFamily="34" charset="-122"/>
+                <a:cs typeface="Calibri" panose="020F0502020204030204" pitchFamily="34" charset="-120"/>
               </a:rPr>
               <a:t>Unsaved changes are flagged, and one click saves the whole class. Scores feed straight into report cards and rankings.</a:t>
             </a:r>
@@ -13086,7 +12547,6 @@
           <a:solidFill>
             <a:srgbClr val="A78BFA"/>
           </a:solidFill>
-          <a:ln/>
         </p:spPr>
       </p:sp>
       <p:sp>
@@ -13104,13 +12564,12 @@
             <a:avLst/>
           </a:prstGeom>
           <a:noFill/>
-          <a:ln/>
         </p:spPr>
         <p:txBody>
           <a:bodyPr wrap="square" lIns="0" tIns="0" rIns="0" bIns="0" rtlCol="0" anchor="ctr"/>
           <a:lstStyle/>
           <a:p>
-            <a:pPr algn="ctr" indent="0" marL="0">
+            <a:pPr marL="0" indent="0" algn="ctr">
               <a:buNone/>
             </a:pPr>
             <a:r>
@@ -13118,9 +12577,9 @@
                 <a:solidFill>
                   <a:srgbClr val="FFFFFF"/>
                 </a:solidFill>
-                <a:latin typeface="Calibri" pitchFamily="34" charset="0"/>
-                <a:ea typeface="Calibri" pitchFamily="34" charset="-122"/>
-                <a:cs typeface="Calibri" pitchFamily="34" charset="-120"/>
+                <a:latin typeface="Calibri" panose="020F0502020204030204" pitchFamily="34" charset="0"/>
+                <a:ea typeface="Calibri" panose="020F0502020204030204" pitchFamily="34" charset="-122"/>
+                <a:cs typeface="Calibri" panose="020F0502020204030204" pitchFamily="34" charset="-120"/>
               </a:rPr>
               <a:t>★</a:t>
             </a:r>
@@ -13143,13 +12602,12 @@
             <a:avLst/>
           </a:prstGeom>
           <a:noFill/>
-          <a:ln/>
         </p:spPr>
         <p:txBody>
           <a:bodyPr wrap="square" lIns="0" tIns="0" rIns="0" bIns="0" rtlCol="0" anchor="t"/>
           <a:lstStyle/>
           <a:p>
-            <a:pPr indent="0" marL="0">
+            <a:pPr marL="0" indent="0">
               <a:lnSpc>
                 <a:spcPct val="100000"/>
               </a:lnSpc>
@@ -13160,9 +12618,9 @@
                 <a:solidFill>
                   <a:srgbClr val="FFFFFF"/>
                 </a:solidFill>
-                <a:latin typeface="Calibri" pitchFamily="34" charset="0"/>
-                <a:ea typeface="Calibri" pitchFamily="34" charset="-122"/>
-                <a:cs typeface="Calibri" pitchFamily="34" charset="-120"/>
+                <a:latin typeface="Calibri" panose="020F0502020204030204" pitchFamily="34" charset="0"/>
+                <a:ea typeface="Calibri" panose="020F0502020204030204" pitchFamily="34" charset="-122"/>
+                <a:cs typeface="Calibri" panose="020F0502020204030204" pitchFamily="34" charset="-120"/>
               </a:rPr>
               <a:t>Best students, auto-ranked</a:t>
             </a:r>
@@ -13185,13 +12643,12 @@
             <a:avLst/>
           </a:prstGeom>
           <a:noFill/>
-          <a:ln/>
         </p:spPr>
         <p:txBody>
           <a:bodyPr wrap="square" lIns="0" tIns="0" rIns="0" bIns="0" rtlCol="0" anchor="t"/>
           <a:lstStyle/>
           <a:p>
-            <a:pPr indent="0" marL="0">
+            <a:pPr marL="0" indent="0">
               <a:lnSpc>
                 <a:spcPct val="112000"/>
               </a:lnSpc>
@@ -13202,9 +12659,9 @@
                 <a:solidFill>
                   <a:srgbClr val="94A3B8"/>
                 </a:solidFill>
-                <a:latin typeface="Calibri" pitchFamily="34" charset="0"/>
-                <a:ea typeface="Calibri" pitchFamily="34" charset="-122"/>
-                <a:cs typeface="Calibri" pitchFamily="34" charset="-120"/>
+                <a:latin typeface="Calibri" panose="020F0502020204030204" pitchFamily="34" charset="0"/>
+                <a:ea typeface="Calibri" panose="020F0502020204030204" pitchFamily="34" charset="-122"/>
+                <a:cs typeface="Calibri" panose="020F0502020204030204" pitchFamily="34" charset="-120"/>
               </a:rPr>
               <a:t>Every dashboard surfaces the top performers by average — perfect for prizes, assembly and records.</a:t>
             </a:r>
@@ -13227,13 +12684,12 @@
             <a:avLst/>
           </a:prstGeom>
           <a:noFill/>
-          <a:ln/>
         </p:spPr>
         <p:txBody>
           <a:bodyPr wrap="square" lIns="0" tIns="0" rIns="0" bIns="0" rtlCol="0" anchor="ctr"/>
           <a:lstStyle/>
           <a:p>
-            <a:pPr indent="0" marL="0">
+            <a:pPr marL="0" indent="0">
               <a:buNone/>
             </a:pPr>
             <a:r>
@@ -13241,9 +12697,9 @@
                 <a:solidFill>
                   <a:srgbClr val="64748B"/>
                 </a:solidFill>
-                <a:latin typeface="Calibri" pitchFamily="34" charset="0"/>
-                <a:ea typeface="Calibri" pitchFamily="34" charset="-122"/>
-                <a:cs typeface="Calibri" pitchFamily="34" charset="-120"/>
+                <a:latin typeface="Calibri" panose="020F0502020204030204" pitchFamily="34" charset="0"/>
+                <a:ea typeface="Calibri" panose="020F0502020204030204" pitchFamily="34" charset="-122"/>
+                <a:cs typeface="Calibri" panose="020F0502020204030204" pitchFamily="34" charset="-120"/>
               </a:rPr>
               <a:t>EduTrack — School Management Platform</a:t>
             </a:r>
@@ -13266,13 +12722,12 @@
             <a:avLst/>
           </a:prstGeom>
           <a:noFill/>
-          <a:ln/>
         </p:spPr>
         <p:txBody>
           <a:bodyPr wrap="square" lIns="0" tIns="0" rIns="0" bIns="0" rtlCol="0" anchor="ctr"/>
           <a:lstStyle/>
           <a:p>
-            <a:pPr algn="r" indent="0" marL="0">
+            <a:pPr marL="0" indent="0" algn="r">
               <a:buNone/>
             </a:pPr>
             <a:r>
@@ -13280,9 +12735,9 @@
                 <a:solidFill>
                   <a:srgbClr val="94A3B8"/>
                 </a:solidFill>
-                <a:latin typeface="Calibri" pitchFamily="34" charset="0"/>
-                <a:ea typeface="Calibri" pitchFamily="34" charset="-122"/>
-                <a:cs typeface="Calibri" pitchFamily="34" charset="-120"/>
+                <a:latin typeface="Calibri" panose="020F0502020204030204" pitchFamily="34" charset="0"/>
+                <a:ea typeface="Calibri" panose="020F0502020204030204" pitchFamily="34" charset="-122"/>
+                <a:cs typeface="Calibri" panose="020F0502020204030204" pitchFamily="34" charset="-120"/>
               </a:rPr>
               <a:t>06</a:t>
             </a:r>
@@ -13300,12 +12755,13 @@
 
 <file path=ppt/slides/slide7.xml><?xml version="1.0" encoding="utf-8"?>
 <p:sld xmlns:a="http://schemas.openxmlformats.org/drawingml/2006/main" xmlns:r="http://schemas.openxmlformats.org/officeDocument/2006/relationships" xmlns:p="http://schemas.openxmlformats.org/presentationml/2006/main">
-  <p:cSld name="Slide 7">
+  <p:cSld>
     <p:bg>
       <p:bgPr>
         <a:solidFill>
           <a:srgbClr val="0F172A"/>
         </a:solidFill>
+        <a:effectLst/>
       </p:bgPr>
     </p:bg>
     <p:spTree>
@@ -13341,7 +12797,6 @@
               <a:alpha val="10000"/>
             </a:srgbClr>
           </a:solidFill>
-          <a:ln/>
         </p:spPr>
       </p:sp>
       <p:sp>
@@ -13359,23 +12814,22 @@
             <a:avLst/>
           </a:prstGeom>
           <a:noFill/>
-          <a:ln/>
         </p:spPr>
         <p:txBody>
           <a:bodyPr wrap="square" lIns="0" tIns="0" rIns="0" bIns="0" rtlCol="0" anchor="ctr"/>
           <a:lstStyle/>
           <a:p>
-            <a:pPr algn="l" indent="0" marL="0">
-              <a:buNone/>
-            </a:pPr>
-            <a:r>
-              <a:rPr lang="en-US" sz="1100" b="1" spc="300" kern="0" dirty="0">
+            <a:pPr marL="0" indent="0" algn="l">
+              <a:buNone/>
+            </a:pPr>
+            <a:r>
+              <a:rPr lang="en-US" sz="1100" b="1" kern="0" spc="300" dirty="0">
                 <a:solidFill>
                   <a:srgbClr val="60A5FA"/>
                 </a:solidFill>
-                <a:latin typeface="Calibri" pitchFamily="34" charset="0"/>
-                <a:ea typeface="Calibri" pitchFamily="34" charset="-122"/>
-                <a:cs typeface="Calibri" pitchFamily="34" charset="-120"/>
+                <a:latin typeface="Calibri" panose="020F0502020204030204" pitchFamily="34" charset="0"/>
+                <a:ea typeface="Calibri" panose="020F0502020204030204" pitchFamily="34" charset="-122"/>
+                <a:cs typeface="Calibri" panose="020F0502020204030204" pitchFamily="34" charset="-120"/>
               </a:rPr>
               <a:t>EVERY DAY</a:t>
             </a:r>
@@ -13398,13 +12852,12 @@
             <a:avLst/>
           </a:prstGeom>
           <a:noFill/>
-          <a:ln/>
         </p:spPr>
         <p:txBody>
           <a:bodyPr wrap="square" lIns="0" tIns="0" rIns="0" bIns="0" rtlCol="0" anchor="t"/>
           <a:lstStyle/>
           <a:p>
-            <a:pPr algn="l" indent="0" marL="0">
+            <a:pPr marL="0" indent="0" algn="l">
               <a:lnSpc>
                 <a:spcPct val="106000"/>
               </a:lnSpc>
@@ -13415,43 +12868,31 @@
                 <a:solidFill>
                   <a:srgbClr val="FFFFFF"/>
                 </a:solidFill>
-                <a:latin typeface="Cambria" pitchFamily="34" charset="0"/>
-                <a:ea typeface="Cambria" pitchFamily="34" charset="-122"/>
-                <a:cs typeface="Cambria" pitchFamily="34" charset="-120"/>
+                <a:latin typeface="Cambria" panose="02040503050406030204" pitchFamily="34" charset="0"/>
+                <a:ea typeface="Cambria" panose="02040503050406030204" pitchFamily="34" charset="-122"/>
+                <a:cs typeface="Cambria" panose="02040503050406030204" pitchFamily="34" charset="-120"/>
               </a:rPr>
               <a:t>Attendance in </a:t>
             </a:r>
-            <a:pPr algn="l" indent="0" marL="0">
-              <a:lnSpc>
-                <a:spcPct val="106000"/>
-              </a:lnSpc>
-              <a:buNone/>
-            </a:pPr>
             <a:r>
               <a:rPr lang="en-US" sz="2900" b="1" dirty="0">
                 <a:solidFill>
                   <a:srgbClr val="FFFFFF"/>
                 </a:solidFill>
-                <a:latin typeface="Cambria" pitchFamily="34" charset="0"/>
-                <a:ea typeface="Cambria" pitchFamily="34" charset="-122"/>
-                <a:cs typeface="Cambria" pitchFamily="34" charset="-120"/>
+                <a:latin typeface="Cambria" panose="02040503050406030204" pitchFamily="34" charset="0"/>
+                <a:ea typeface="Cambria" panose="02040503050406030204" pitchFamily="34" charset="-122"/>
+                <a:cs typeface="Cambria" panose="02040503050406030204" pitchFamily="34" charset="-120"/>
               </a:rPr>
               <a:t>one tap</a:t>
             </a:r>
-            <a:pPr algn="l" indent="0" marL="0">
-              <a:lnSpc>
-                <a:spcPct val="106000"/>
-              </a:lnSpc>
-              <a:buNone/>
-            </a:pPr>
             <a:r>
               <a:rPr lang="en-US" sz="2900" b="1" dirty="0">
                 <a:solidFill>
                   <a:srgbClr val="FFFFFF"/>
                 </a:solidFill>
-                <a:latin typeface="Cambria" pitchFamily="34" charset="0"/>
-                <a:ea typeface="Cambria" pitchFamily="34" charset="-122"/>
-                <a:cs typeface="Cambria" pitchFamily="34" charset="-120"/>
+                <a:latin typeface="Cambria" panose="02040503050406030204" pitchFamily="34" charset="0"/>
+                <a:ea typeface="Cambria" panose="02040503050406030204" pitchFamily="34" charset="-122"/>
+                <a:cs typeface="Cambria" panose="02040503050406030204" pitchFamily="34" charset="-120"/>
               </a:rPr>
               <a:t> per student</a:t>
             </a:r>
@@ -13505,7 +12946,6 @@
           <a:solidFill>
             <a:srgbClr val="F59E0B"/>
           </a:solidFill>
-          <a:ln/>
         </p:spPr>
       </p:sp>
       <p:sp>
@@ -13523,13 +12963,12 @@
             <a:avLst/>
           </a:prstGeom>
           <a:noFill/>
-          <a:ln/>
         </p:spPr>
         <p:txBody>
           <a:bodyPr wrap="square" lIns="0" tIns="0" rIns="0" bIns="0" rtlCol="0" anchor="ctr"/>
           <a:lstStyle/>
           <a:p>
-            <a:pPr algn="ctr" indent="0" marL="0">
+            <a:pPr marL="0" indent="0" algn="ctr">
               <a:buNone/>
             </a:pPr>
             <a:r>
@@ -13537,9 +12976,9 @@
                 <a:solidFill>
                   <a:srgbClr val="FFFFFF"/>
                 </a:solidFill>
-                <a:latin typeface="Calibri" pitchFamily="34" charset="0"/>
-                <a:ea typeface="Calibri" pitchFamily="34" charset="-122"/>
-                <a:cs typeface="Calibri" pitchFamily="34" charset="-120"/>
+                <a:latin typeface="Calibri" panose="020F0502020204030204" pitchFamily="34" charset="0"/>
+                <a:ea typeface="Calibri" panose="020F0502020204030204" pitchFamily="34" charset="-122"/>
+                <a:cs typeface="Calibri" panose="020F0502020204030204" pitchFamily="34" charset="-120"/>
               </a:rPr>
               <a:t>◔</a:t>
             </a:r>
@@ -13562,13 +13001,12 @@
             <a:avLst/>
           </a:prstGeom>
           <a:noFill/>
-          <a:ln/>
         </p:spPr>
         <p:txBody>
           <a:bodyPr wrap="square" lIns="0" tIns="0" rIns="0" bIns="0" rtlCol="0" anchor="t"/>
           <a:lstStyle/>
           <a:p>
-            <a:pPr indent="0" marL="0">
+            <a:pPr marL="0" indent="0">
               <a:lnSpc>
                 <a:spcPct val="100000"/>
               </a:lnSpc>
@@ -13579,9 +13017,9 @@
                 <a:solidFill>
                   <a:srgbClr val="FFFFFF"/>
                 </a:solidFill>
-                <a:latin typeface="Calibri" pitchFamily="34" charset="0"/>
-                <a:ea typeface="Calibri" pitchFamily="34" charset="-122"/>
-                <a:cs typeface="Calibri" pitchFamily="34" charset="-120"/>
+                <a:latin typeface="Calibri" panose="020F0502020204030204" pitchFamily="34" charset="0"/>
+                <a:ea typeface="Calibri" panose="020F0502020204030204" pitchFamily="34" charset="-122"/>
+                <a:cs typeface="Calibri" panose="020F0502020204030204" pitchFamily="34" charset="-120"/>
               </a:rPr>
               <a:t>Daily registers per class arm</a:t>
             </a:r>
@@ -13604,13 +13042,12 @@
             <a:avLst/>
           </a:prstGeom>
           <a:noFill/>
-          <a:ln/>
         </p:spPr>
         <p:txBody>
           <a:bodyPr wrap="square" lIns="0" tIns="0" rIns="0" bIns="0" rtlCol="0" anchor="t"/>
           <a:lstStyle/>
           <a:p>
-            <a:pPr indent="0" marL="0">
+            <a:pPr marL="0" indent="0">
               <a:lnSpc>
                 <a:spcPct val="112000"/>
               </a:lnSpc>
@@ -13621,9 +13058,9 @@
                 <a:solidFill>
                   <a:srgbClr val="94A3B8"/>
                 </a:solidFill>
-                <a:latin typeface="Calibri" pitchFamily="34" charset="0"/>
-                <a:ea typeface="Calibri" pitchFamily="34" charset="-122"/>
-                <a:cs typeface="Calibri" pitchFamily="34" charset="-120"/>
+                <a:latin typeface="Calibri" panose="020F0502020204030204" pitchFamily="34" charset="0"/>
+                <a:ea typeface="Calibri" panose="020F0502020204030204" pitchFamily="34" charset="-122"/>
+                <a:cs typeface="Calibri" panose="020F0502020204030204" pitchFamily="34" charset="-120"/>
               </a:rPr>
               <a:t>Teachers open their class, tap Present / Absent for each student, and save. Done in under a minute.</a:t>
             </a:r>
@@ -13677,7 +13114,6 @@
           <a:solidFill>
             <a:srgbClr val="10B981"/>
           </a:solidFill>
-          <a:ln/>
         </p:spPr>
       </p:sp>
       <p:sp>
@@ -13695,13 +13131,12 @@
             <a:avLst/>
           </a:prstGeom>
           <a:noFill/>
-          <a:ln/>
         </p:spPr>
         <p:txBody>
           <a:bodyPr wrap="square" lIns="0" tIns="0" rIns="0" bIns="0" rtlCol="0" anchor="ctr"/>
           <a:lstStyle/>
           <a:p>
-            <a:pPr algn="ctr" indent="0" marL="0">
+            <a:pPr marL="0" indent="0" algn="ctr">
               <a:buNone/>
             </a:pPr>
             <a:r>
@@ -13709,9 +13144,9 @@
                 <a:solidFill>
                   <a:srgbClr val="FFFFFF"/>
                 </a:solidFill>
-                <a:latin typeface="Calibri" pitchFamily="34" charset="0"/>
-                <a:ea typeface="Calibri" pitchFamily="34" charset="-122"/>
-                <a:cs typeface="Calibri" pitchFamily="34" charset="-120"/>
+                <a:latin typeface="Calibri" panose="020F0502020204030204" pitchFamily="34" charset="0"/>
+                <a:ea typeface="Calibri" panose="020F0502020204030204" pitchFamily="34" charset="-122"/>
+                <a:cs typeface="Calibri" panose="020F0502020204030204" pitchFamily="34" charset="-120"/>
               </a:rPr>
               <a:t>✓</a:t>
             </a:r>
@@ -13734,13 +13169,12 @@
             <a:avLst/>
           </a:prstGeom>
           <a:noFill/>
-          <a:ln/>
         </p:spPr>
         <p:txBody>
           <a:bodyPr wrap="square" lIns="0" tIns="0" rIns="0" bIns="0" rtlCol="0" anchor="t"/>
           <a:lstStyle/>
           <a:p>
-            <a:pPr indent="0" marL="0">
+            <a:pPr marL="0" indent="0">
               <a:lnSpc>
                 <a:spcPct val="100000"/>
               </a:lnSpc>
@@ -13751,9 +13185,9 @@
                 <a:solidFill>
                   <a:srgbClr val="FFFFFF"/>
                 </a:solidFill>
-                <a:latin typeface="Calibri" pitchFamily="34" charset="0"/>
-                <a:ea typeface="Calibri" pitchFamily="34" charset="-122"/>
-                <a:cs typeface="Calibri" pitchFamily="34" charset="-120"/>
+                <a:latin typeface="Calibri" panose="020F0502020204030204" pitchFamily="34" charset="0"/>
+                <a:ea typeface="Calibri" panose="020F0502020204030204" pitchFamily="34" charset="-122"/>
+                <a:cs typeface="Calibri" panose="020F0502020204030204" pitchFamily="34" charset="-120"/>
               </a:rPr>
               <a:t>Flows onto report cards</a:t>
             </a:r>
@@ -13776,13 +13210,12 @@
             <a:avLst/>
           </a:prstGeom>
           <a:noFill/>
-          <a:ln/>
         </p:spPr>
         <p:txBody>
           <a:bodyPr wrap="square" lIns="0" tIns="0" rIns="0" bIns="0" rtlCol="0" anchor="t"/>
           <a:lstStyle/>
           <a:p>
-            <a:pPr indent="0" marL="0">
+            <a:pPr marL="0" indent="0">
               <a:lnSpc>
                 <a:spcPct val="112000"/>
               </a:lnSpc>
@@ -13793,9 +13226,9 @@
                 <a:solidFill>
                   <a:srgbClr val="94A3B8"/>
                 </a:solidFill>
-                <a:latin typeface="Calibri" pitchFamily="34" charset="0"/>
-                <a:ea typeface="Calibri" pitchFamily="34" charset="-122"/>
-                <a:cs typeface="Calibri" pitchFamily="34" charset="-120"/>
+                <a:latin typeface="Calibri" panose="020F0502020204030204" pitchFamily="34" charset="0"/>
+                <a:ea typeface="Calibri" panose="020F0502020204030204" pitchFamily="34" charset="-122"/>
+                <a:cs typeface="Calibri" panose="020F0502020204030204" pitchFamily="34" charset="-120"/>
               </a:rPr>
               <a:t>Days present are summarized per student per term — automatically included on every report card.</a:t>
             </a:r>
@@ -13849,7 +13282,6 @@
           <a:solidFill>
             <a:srgbClr val="2563EB"/>
           </a:solidFill>
-          <a:ln/>
         </p:spPr>
       </p:sp>
       <p:sp>
@@ -13867,13 +13299,12 @@
             <a:avLst/>
           </a:prstGeom>
           <a:noFill/>
-          <a:ln/>
         </p:spPr>
         <p:txBody>
           <a:bodyPr wrap="square" lIns="0" tIns="0" rIns="0" bIns="0" rtlCol="0" anchor="ctr"/>
           <a:lstStyle/>
           <a:p>
-            <a:pPr algn="ctr" indent="0" marL="0">
+            <a:pPr marL="0" indent="0" algn="ctr">
               <a:buNone/>
             </a:pPr>
             <a:r>
@@ -13881,9 +13312,9 @@
                 <a:solidFill>
                   <a:srgbClr val="FFFFFF"/>
                 </a:solidFill>
-                <a:latin typeface="Calibri" pitchFamily="34" charset="0"/>
-                <a:ea typeface="Calibri" pitchFamily="34" charset="-122"/>
-                <a:cs typeface="Calibri" pitchFamily="34" charset="-120"/>
+                <a:latin typeface="Calibri" panose="020F0502020204030204" pitchFamily="34" charset="0"/>
+                <a:ea typeface="Calibri" panose="020F0502020204030204" pitchFamily="34" charset="-122"/>
+                <a:cs typeface="Calibri" panose="020F0502020204030204" pitchFamily="34" charset="-120"/>
               </a:rPr>
               <a:t>☁</a:t>
             </a:r>
@@ -13906,13 +13337,12 @@
             <a:avLst/>
           </a:prstGeom>
           <a:noFill/>
-          <a:ln/>
         </p:spPr>
         <p:txBody>
           <a:bodyPr wrap="square" lIns="0" tIns="0" rIns="0" bIns="0" rtlCol="0" anchor="t"/>
           <a:lstStyle/>
           <a:p>
-            <a:pPr indent="0" marL="0">
+            <a:pPr marL="0" indent="0">
               <a:lnSpc>
                 <a:spcPct val="100000"/>
               </a:lnSpc>
@@ -13923,9 +13353,9 @@
                 <a:solidFill>
                   <a:srgbClr val="FFFFFF"/>
                 </a:solidFill>
-                <a:latin typeface="Calibri" pitchFamily="34" charset="0"/>
-                <a:ea typeface="Calibri" pitchFamily="34" charset="-122"/>
-                <a:cs typeface="Calibri" pitchFamily="34" charset="-120"/>
+                <a:latin typeface="Calibri" panose="020F0502020204030204" pitchFamily="34" charset="0"/>
+                <a:ea typeface="Calibri" panose="020F0502020204030204" pitchFamily="34" charset="-122"/>
+                <a:cs typeface="Calibri" panose="020F0502020204030204" pitchFamily="34" charset="-120"/>
               </a:rPr>
               <a:t>Spot problems early</a:t>
             </a:r>
@@ -13948,13 +13378,12 @@
             <a:avLst/>
           </a:prstGeom>
           <a:noFill/>
-          <a:ln/>
         </p:spPr>
         <p:txBody>
           <a:bodyPr wrap="square" lIns="0" tIns="0" rIns="0" bIns="0" rtlCol="0" anchor="t"/>
           <a:lstStyle/>
           <a:p>
-            <a:pPr indent="0" marL="0">
+            <a:pPr marL="0" indent="0">
               <a:lnSpc>
                 <a:spcPct val="112000"/>
               </a:lnSpc>
@@ -13965,9 +13394,9 @@
                 <a:solidFill>
                   <a:srgbClr val="94A3B8"/>
                 </a:solidFill>
-                <a:latin typeface="Calibri" pitchFamily="34" charset="0"/>
-                <a:ea typeface="Calibri" pitchFamily="34" charset="-122"/>
-                <a:cs typeface="Calibri" pitchFamily="34" charset="-120"/>
+                <a:latin typeface="Calibri" panose="020F0502020204030204" pitchFamily="34" charset="0"/>
+                <a:ea typeface="Calibri" panose="020F0502020204030204" pitchFamily="34" charset="-122"/>
+                <a:cs typeface="Calibri" panose="020F0502020204030204" pitchFamily="34" charset="-120"/>
               </a:rPr>
               <a:t>Admins see trends across classes — who's slipping, which class has the lowest turnout, and when to call a parent.</a:t>
             </a:r>
@@ -13990,13 +13419,12 @@
             <a:avLst/>
           </a:prstGeom>
           <a:noFill/>
-          <a:ln/>
         </p:spPr>
         <p:txBody>
           <a:bodyPr wrap="square" lIns="0" tIns="0" rIns="0" bIns="0" rtlCol="0" anchor="t"/>
           <a:lstStyle/>
           <a:p>
-            <a:pPr algn="l" indent="0" marL="0">
+            <a:pPr marL="0" indent="0" algn="l">
               <a:lnSpc>
                 <a:spcPct val="115000"/>
               </a:lnSpc>
@@ -14007,43 +13435,31 @@
                 <a:solidFill>
                   <a:srgbClr val="FFFFFF"/>
                 </a:solidFill>
-                <a:latin typeface="Calibri" pitchFamily="34" charset="0"/>
-                <a:ea typeface="Calibri" pitchFamily="34" charset="-122"/>
-                <a:cs typeface="Calibri" pitchFamily="34" charset="-120"/>
+                <a:latin typeface="Calibri" panose="020F0502020204030204" pitchFamily="34" charset="0"/>
+                <a:ea typeface="Calibri" panose="020F0502020204030204" pitchFamily="34" charset="-122"/>
+                <a:cs typeface="Calibri" panose="020F0502020204030204" pitchFamily="34" charset="-120"/>
               </a:rPr>
               <a:t>Attendance is no longer guesswork — it's </a:t>
             </a:r>
-            <a:pPr algn="l" indent="0" marL="0">
-              <a:lnSpc>
-                <a:spcPct val="115000"/>
-              </a:lnSpc>
-              <a:buNone/>
-            </a:pPr>
             <a:r>
               <a:rPr lang="en-US" sz="1600" b="1" dirty="0">
                 <a:solidFill>
                   <a:srgbClr val="FFFFFF"/>
                 </a:solidFill>
-                <a:latin typeface="Calibri" pitchFamily="34" charset="0"/>
-                <a:ea typeface="Calibri" pitchFamily="34" charset="-122"/>
-                <a:cs typeface="Calibri" pitchFamily="34" charset="-120"/>
+                <a:latin typeface="Calibri" panose="020F0502020204030204" pitchFamily="34" charset="0"/>
+                <a:ea typeface="Calibri" panose="020F0502020204030204" pitchFamily="34" charset="-122"/>
+                <a:cs typeface="Calibri" panose="020F0502020204030204" pitchFamily="34" charset="-120"/>
               </a:rPr>
               <a:t>a record that works for you</a:t>
             </a:r>
-            <a:pPr algn="l" indent="0" marL="0">
-              <a:lnSpc>
-                <a:spcPct val="115000"/>
-              </a:lnSpc>
-              <a:buNone/>
-            </a:pPr>
             <a:r>
               <a:rPr lang="en-US" sz="1600" b="1" dirty="0">
                 <a:solidFill>
                   <a:srgbClr val="FFFFFF"/>
                 </a:solidFill>
-                <a:latin typeface="Calibri" pitchFamily="34" charset="0"/>
-                <a:ea typeface="Calibri" pitchFamily="34" charset="-122"/>
-                <a:cs typeface="Calibri" pitchFamily="34" charset="-120"/>
+                <a:latin typeface="Calibri" panose="020F0502020204030204" pitchFamily="34" charset="0"/>
+                <a:ea typeface="Calibri" panose="020F0502020204030204" pitchFamily="34" charset="-122"/>
+                <a:cs typeface="Calibri" panose="020F0502020204030204" pitchFamily="34" charset="-120"/>
               </a:rPr>
               <a:t> every single day.</a:t>
             </a:r>
@@ -14066,13 +13482,12 @@
             <a:avLst/>
           </a:prstGeom>
           <a:noFill/>
-          <a:ln/>
         </p:spPr>
         <p:txBody>
           <a:bodyPr wrap="square" lIns="0" tIns="0" rIns="0" bIns="0" rtlCol="0" anchor="ctr"/>
           <a:lstStyle/>
           <a:p>
-            <a:pPr indent="0" marL="0">
+            <a:pPr marL="0" indent="0">
               <a:buNone/>
             </a:pPr>
             <a:r>
@@ -14080,9 +13495,9 @@
                 <a:solidFill>
                   <a:srgbClr val="64748B"/>
                 </a:solidFill>
-                <a:latin typeface="Calibri" pitchFamily="34" charset="0"/>
-                <a:ea typeface="Calibri" pitchFamily="34" charset="-122"/>
-                <a:cs typeface="Calibri" pitchFamily="34" charset="-120"/>
+                <a:latin typeface="Calibri" panose="020F0502020204030204" pitchFamily="34" charset="0"/>
+                <a:ea typeface="Calibri" panose="020F0502020204030204" pitchFamily="34" charset="-122"/>
+                <a:cs typeface="Calibri" panose="020F0502020204030204" pitchFamily="34" charset="-120"/>
               </a:rPr>
               <a:t>EduTrack — School Management Platform</a:t>
             </a:r>
@@ -14105,13 +13520,12 @@
             <a:avLst/>
           </a:prstGeom>
           <a:noFill/>
-          <a:ln/>
         </p:spPr>
         <p:txBody>
           <a:bodyPr wrap="square" lIns="0" tIns="0" rIns="0" bIns="0" rtlCol="0" anchor="ctr"/>
           <a:lstStyle/>
           <a:p>
-            <a:pPr algn="r" indent="0" marL="0">
+            <a:pPr marL="0" indent="0" algn="r">
               <a:buNone/>
             </a:pPr>
             <a:r>
@@ -14119,9 +13533,9 @@
                 <a:solidFill>
                   <a:srgbClr val="94A3B8"/>
                 </a:solidFill>
-                <a:latin typeface="Calibri" pitchFamily="34" charset="0"/>
-                <a:ea typeface="Calibri" pitchFamily="34" charset="-122"/>
-                <a:cs typeface="Calibri" pitchFamily="34" charset="-120"/>
+                <a:latin typeface="Calibri" panose="020F0502020204030204" pitchFamily="34" charset="0"/>
+                <a:ea typeface="Calibri" panose="020F0502020204030204" pitchFamily="34" charset="-122"/>
+                <a:cs typeface="Calibri" panose="020F0502020204030204" pitchFamily="34" charset="-120"/>
               </a:rPr>
               <a:t>07</a:t>
             </a:r>
@@ -14139,12 +13553,13 @@
 
 <file path=ppt/slides/slide8.xml><?xml version="1.0" encoding="utf-8"?>
 <p:sld xmlns:a="http://schemas.openxmlformats.org/drawingml/2006/main" xmlns:r="http://schemas.openxmlformats.org/officeDocument/2006/relationships" xmlns:p="http://schemas.openxmlformats.org/presentationml/2006/main">
-  <p:cSld name="Slide 8">
+  <p:cSld>
     <p:bg>
       <p:bgPr>
         <a:solidFill>
           <a:srgbClr val="0F172A"/>
         </a:solidFill>
+        <a:effectLst/>
       </p:bgPr>
     </p:bg>
     <p:spTree>
@@ -14176,23 +13591,22 @@
             <a:avLst/>
           </a:prstGeom>
           <a:noFill/>
-          <a:ln/>
         </p:spPr>
         <p:txBody>
           <a:bodyPr wrap="square" lIns="0" tIns="0" rIns="0" bIns="0" rtlCol="0" anchor="ctr"/>
           <a:lstStyle/>
           <a:p>
-            <a:pPr algn="l" indent="0" marL="0">
-              <a:buNone/>
-            </a:pPr>
-            <a:r>
-              <a:rPr lang="en-US" sz="1100" b="1" spc="300" kern="0" dirty="0">
+            <a:pPr marL="0" indent="0" algn="l">
+              <a:buNone/>
+            </a:pPr>
+            <a:r>
+              <a:rPr lang="en-US" sz="1100" b="1" kern="0" spc="300" dirty="0">
                 <a:solidFill>
                   <a:srgbClr val="60A5FA"/>
                 </a:solidFill>
-                <a:latin typeface="Calibri" pitchFamily="34" charset="0"/>
-                <a:ea typeface="Calibri" pitchFamily="34" charset="-122"/>
-                <a:cs typeface="Calibri" pitchFamily="34" charset="-120"/>
+                <a:latin typeface="Calibri" panose="020F0502020204030204" pitchFamily="34" charset="0"/>
+                <a:ea typeface="Calibri" panose="020F0502020204030204" pitchFamily="34" charset="-122"/>
+                <a:cs typeface="Calibri" panose="020F0502020204030204" pitchFamily="34" charset="-120"/>
               </a:rPr>
               <a:t>REVENUE &amp; PARENTS</a:t>
             </a:r>
@@ -14215,13 +13629,12 @@
             <a:avLst/>
           </a:prstGeom>
           <a:noFill/>
-          <a:ln/>
         </p:spPr>
         <p:txBody>
           <a:bodyPr wrap="square" lIns="0" tIns="0" rIns="0" bIns="0" rtlCol="0" anchor="t"/>
           <a:lstStyle/>
           <a:p>
-            <a:pPr algn="l" indent="0" marL="0">
+            <a:pPr marL="0" indent="0" algn="l">
               <a:lnSpc>
                 <a:spcPct val="106000"/>
               </a:lnSpc>
@@ -14232,26 +13645,20 @@
                 <a:solidFill>
                   <a:srgbClr val="FFFFFF"/>
                 </a:solidFill>
-                <a:latin typeface="Cambria" pitchFamily="34" charset="0"/>
-                <a:ea typeface="Cambria" pitchFamily="34" charset="-122"/>
-                <a:cs typeface="Cambria" pitchFamily="34" charset="-120"/>
+                <a:latin typeface="Cambria" panose="02040503050406030204" pitchFamily="34" charset="0"/>
+                <a:ea typeface="Cambria" panose="02040503050406030204" pitchFamily="34" charset="-122"/>
+                <a:cs typeface="Cambria" panose="02040503050406030204" pitchFamily="34" charset="-120"/>
               </a:rPr>
               <a:t>Fees that </a:t>
             </a:r>
-            <a:pPr algn="l" indent="0" marL="0">
-              <a:lnSpc>
-                <a:spcPct val="106000"/>
-              </a:lnSpc>
-              <a:buNone/>
-            </a:pPr>
             <a:r>
               <a:rPr lang="en-US" sz="2900" b="1" dirty="0">
                 <a:solidFill>
                   <a:srgbClr val="FFFFFF"/>
                 </a:solidFill>
-                <a:latin typeface="Cambria" pitchFamily="34" charset="0"/>
-                <a:ea typeface="Cambria" pitchFamily="34" charset="-122"/>
-                <a:cs typeface="Cambria" pitchFamily="34" charset="-120"/>
+                <a:latin typeface="Cambria" panose="02040503050406030204" pitchFamily="34" charset="0"/>
+                <a:ea typeface="Cambria" panose="02040503050406030204" pitchFamily="34" charset="-122"/>
+                <a:cs typeface="Cambria" panose="02040503050406030204" pitchFamily="34" charset="-120"/>
               </a:rPr>
               <a:t>collect themselves</a:t>
             </a:r>
@@ -14301,13 +13708,12 @@
             <a:avLst/>
           </a:prstGeom>
           <a:noFill/>
-          <a:ln/>
         </p:spPr>
         <p:txBody>
           <a:bodyPr wrap="square" lIns="0" tIns="0" rIns="0" bIns="0" rtlCol="0" anchor="ctr"/>
           <a:lstStyle/>
           <a:p>
-            <a:pPr algn="ctr" indent="0" marL="0">
+            <a:pPr marL="0" indent="0" algn="ctr">
               <a:buNone/>
             </a:pPr>
             <a:r>
@@ -14315,9 +13721,9 @@
                 <a:solidFill>
                   <a:srgbClr val="10B981"/>
                 </a:solidFill>
-                <a:latin typeface="Calibri" pitchFamily="34" charset="0"/>
-                <a:ea typeface="Calibri" pitchFamily="34" charset="-122"/>
-                <a:cs typeface="Calibri" pitchFamily="34" charset="-120"/>
+                <a:latin typeface="Calibri" panose="020F0502020204030204" pitchFamily="34" charset="0"/>
+                <a:ea typeface="Calibri" panose="020F0502020204030204" pitchFamily="34" charset="-122"/>
+                <a:cs typeface="Calibri" panose="020F0502020204030204" pitchFamily="34" charset="-120"/>
               </a:rPr>
               <a:t>✓</a:t>
             </a:r>
@@ -14340,13 +13746,12 @@
             <a:avLst/>
           </a:prstGeom>
           <a:noFill/>
-          <a:ln/>
         </p:spPr>
         <p:txBody>
           <a:bodyPr wrap="square" lIns="0" tIns="0" rIns="0" bIns="0" rtlCol="0" anchor="t"/>
           <a:lstStyle/>
           <a:p>
-            <a:pPr indent="0" marL="0">
+            <a:pPr marL="0" indent="0">
               <a:lnSpc>
                 <a:spcPct val="110000"/>
               </a:lnSpc>
@@ -14357,26 +13762,20 @@
                 <a:solidFill>
                   <a:srgbClr val="FFFFFF"/>
                 </a:solidFill>
-                <a:latin typeface="Calibri" pitchFamily="34" charset="0"/>
-                <a:ea typeface="Calibri" pitchFamily="34" charset="-122"/>
-                <a:cs typeface="Calibri" pitchFamily="34" charset="-120"/>
+                <a:latin typeface="Calibri" panose="020F0502020204030204" pitchFamily="34" charset="0"/>
+                <a:ea typeface="Calibri" panose="020F0502020204030204" pitchFamily="34" charset="-122"/>
+                <a:cs typeface="Calibri" panose="020F0502020204030204" pitchFamily="34" charset="-120"/>
               </a:rPr>
               <a:t>Fee structures per class arm &amp; term</a:t>
             </a:r>
-            <a:pPr indent="0" marL="0">
-              <a:lnSpc>
-                <a:spcPct val="110000"/>
-              </a:lnSpc>
-              <a:buNone/>
-            </a:pPr>
             <a:r>
               <a:rPr lang="en-US" sz="1250" dirty="0">
                 <a:solidFill>
                   <a:srgbClr val="94A3B8"/>
                 </a:solidFill>
-                <a:latin typeface="Calibri" pitchFamily="34" charset="0"/>
-                <a:ea typeface="Calibri" pitchFamily="34" charset="-122"/>
-                <a:cs typeface="Calibri" pitchFamily="34" charset="-120"/>
+                <a:latin typeface="Calibri" panose="020F0502020204030204" pitchFamily="34" charset="0"/>
+                <a:ea typeface="Calibri" panose="020F0502020204030204" pitchFamily="34" charset="-122"/>
+                <a:cs typeface="Calibri" panose="020F0502020204030204" pitchFamily="34" charset="-120"/>
               </a:rPr>
               <a:t> — set once, billed automatically.</a:t>
             </a:r>
@@ -14426,13 +13825,12 @@
             <a:avLst/>
           </a:prstGeom>
           <a:noFill/>
-          <a:ln/>
         </p:spPr>
         <p:txBody>
           <a:bodyPr wrap="square" lIns="0" tIns="0" rIns="0" bIns="0" rtlCol="0" anchor="ctr"/>
           <a:lstStyle/>
           <a:p>
-            <a:pPr algn="ctr" indent="0" marL="0">
+            <a:pPr marL="0" indent="0" algn="ctr">
               <a:buNone/>
             </a:pPr>
             <a:r>
@@ -14440,9 +13838,9 @@
                 <a:solidFill>
                   <a:srgbClr val="10B981"/>
                 </a:solidFill>
-                <a:latin typeface="Calibri" pitchFamily="34" charset="0"/>
-                <a:ea typeface="Calibri" pitchFamily="34" charset="-122"/>
-                <a:cs typeface="Calibri" pitchFamily="34" charset="-120"/>
+                <a:latin typeface="Calibri" panose="020F0502020204030204" pitchFamily="34" charset="0"/>
+                <a:ea typeface="Calibri" panose="020F0502020204030204" pitchFamily="34" charset="-122"/>
+                <a:cs typeface="Calibri" panose="020F0502020204030204" pitchFamily="34" charset="-120"/>
               </a:rPr>
               <a:t>✓</a:t>
             </a:r>
@@ -14465,13 +13863,12 @@
             <a:avLst/>
           </a:prstGeom>
           <a:noFill/>
-          <a:ln/>
         </p:spPr>
         <p:txBody>
           <a:bodyPr wrap="square" lIns="0" tIns="0" rIns="0" bIns="0" rtlCol="0" anchor="t"/>
           <a:lstStyle/>
           <a:p>
-            <a:pPr indent="0" marL="0">
+            <a:pPr marL="0" indent="0">
               <a:lnSpc>
                 <a:spcPct val="110000"/>
               </a:lnSpc>
@@ -14482,26 +13879,20 @@
                 <a:solidFill>
                   <a:srgbClr val="FFFFFF"/>
                 </a:solidFill>
-                <a:latin typeface="Calibri" pitchFamily="34" charset="0"/>
-                <a:ea typeface="Calibri" pitchFamily="34" charset="-122"/>
-                <a:cs typeface="Calibri" pitchFamily="34" charset="-120"/>
+                <a:latin typeface="Calibri" panose="020F0502020204030204" pitchFamily="34" charset="0"/>
+                <a:ea typeface="Calibri" panose="020F0502020204030204" pitchFamily="34" charset="-122"/>
+                <a:cs typeface="Calibri" panose="020F0502020204030204" pitchFamily="34" charset="-120"/>
               </a:rPr>
               <a:t>Live balances &amp; auto receipts</a:t>
             </a:r>
-            <a:pPr indent="0" marL="0">
-              <a:lnSpc>
-                <a:spcPct val="110000"/>
-              </a:lnSpc>
-              <a:buNone/>
-            </a:pPr>
             <a:r>
               <a:rPr lang="en-US" sz="1250" dirty="0">
                 <a:solidFill>
                   <a:srgbClr val="94A3B8"/>
                 </a:solidFill>
-                <a:latin typeface="Calibri" pitchFamily="34" charset="0"/>
-                <a:ea typeface="Calibri" pitchFamily="34" charset="-122"/>
-                <a:cs typeface="Calibri" pitchFamily="34" charset="-120"/>
+                <a:latin typeface="Calibri" panose="020F0502020204030204" pitchFamily="34" charset="0"/>
+                <a:ea typeface="Calibri" panose="020F0502020204030204" pitchFamily="34" charset="-122"/>
+                <a:cs typeface="Calibri" panose="020F0502020204030204" pitchFamily="34" charset="-120"/>
               </a:rPr>
               <a:t> — every student's paid / owing at a glance, plus a defaulter list.</a:t>
             </a:r>
@@ -14551,13 +13942,12 @@
             <a:avLst/>
           </a:prstGeom>
           <a:noFill/>
-          <a:ln/>
         </p:spPr>
         <p:txBody>
           <a:bodyPr wrap="square" lIns="0" tIns="0" rIns="0" bIns="0" rtlCol="0" anchor="ctr"/>
           <a:lstStyle/>
           <a:p>
-            <a:pPr algn="ctr" indent="0" marL="0">
+            <a:pPr marL="0" indent="0" algn="ctr">
               <a:buNone/>
             </a:pPr>
             <a:r>
@@ -14565,9 +13955,9 @@
                 <a:solidFill>
                   <a:srgbClr val="10B981"/>
                 </a:solidFill>
-                <a:latin typeface="Calibri" pitchFamily="34" charset="0"/>
-                <a:ea typeface="Calibri" pitchFamily="34" charset="-122"/>
-                <a:cs typeface="Calibri" pitchFamily="34" charset="-120"/>
+                <a:latin typeface="Calibri" panose="020F0502020204030204" pitchFamily="34" charset="0"/>
+                <a:ea typeface="Calibri" panose="020F0502020204030204" pitchFamily="34" charset="-122"/>
+                <a:cs typeface="Calibri" panose="020F0502020204030204" pitchFamily="34" charset="-120"/>
               </a:rPr>
               <a:t>✓</a:t>
             </a:r>
@@ -14590,13 +13980,12 @@
             <a:avLst/>
           </a:prstGeom>
           <a:noFill/>
-          <a:ln/>
         </p:spPr>
         <p:txBody>
           <a:bodyPr wrap="square" lIns="0" tIns="0" rIns="0" bIns="0" rtlCol="0" anchor="t"/>
           <a:lstStyle/>
           <a:p>
-            <a:pPr indent="0" marL="0">
+            <a:pPr marL="0" indent="0">
               <a:lnSpc>
                 <a:spcPct val="110000"/>
               </a:lnSpc>
@@ -14607,26 +13996,20 @@
                 <a:solidFill>
                   <a:srgbClr val="FFFFFF"/>
                 </a:solidFill>
-                <a:latin typeface="Calibri" pitchFamily="34" charset="0"/>
-                <a:ea typeface="Calibri" pitchFamily="34" charset="-122"/>
-                <a:cs typeface="Calibri" pitchFamily="34" charset="-120"/>
+                <a:latin typeface="Calibri" panose="020F0502020204030204" pitchFamily="34" charset="0"/>
+                <a:ea typeface="Calibri" panose="020F0502020204030204" pitchFamily="34" charset="-122"/>
+                <a:cs typeface="Calibri" panose="020F0502020204030204" pitchFamily="34" charset="-120"/>
               </a:rPr>
               <a:t>Parents log in, see balances, tap Pay Now</a:t>
             </a:r>
-            <a:pPr indent="0" marL="0">
-              <a:lnSpc>
-                <a:spcPct val="110000"/>
-              </a:lnSpc>
-              <a:buNone/>
-            </a:pPr>
             <a:r>
               <a:rPr lang="en-US" sz="1250" dirty="0">
                 <a:solidFill>
                   <a:srgbClr val="94A3B8"/>
                 </a:solidFill>
-                <a:latin typeface="Calibri" pitchFamily="34" charset="0"/>
-                <a:ea typeface="Calibri" pitchFamily="34" charset="-122"/>
-                <a:cs typeface="Calibri" pitchFamily="34" charset="-120"/>
+                <a:latin typeface="Calibri" panose="020F0502020204030204" pitchFamily="34" charset="0"/>
+                <a:ea typeface="Calibri" panose="020F0502020204030204" pitchFamily="34" charset="-122"/>
+                <a:cs typeface="Calibri" panose="020F0502020204030204" pitchFamily="34" charset="-120"/>
               </a:rPr>
               <a:t> — from their phone, anytime.</a:t>
             </a:r>
@@ -14676,13 +14059,12 @@
             <a:avLst/>
           </a:prstGeom>
           <a:noFill/>
-          <a:ln/>
         </p:spPr>
         <p:txBody>
           <a:bodyPr wrap="square" lIns="0" tIns="0" rIns="0" bIns="0" rtlCol="0" anchor="ctr"/>
           <a:lstStyle/>
           <a:p>
-            <a:pPr algn="ctr" indent="0" marL="0">
+            <a:pPr marL="0" indent="0" algn="ctr">
               <a:buNone/>
             </a:pPr>
             <a:r>
@@ -14690,9 +14072,9 @@
                 <a:solidFill>
                   <a:srgbClr val="10B981"/>
                 </a:solidFill>
-                <a:latin typeface="Calibri" pitchFamily="34" charset="0"/>
-                <a:ea typeface="Calibri" pitchFamily="34" charset="-122"/>
-                <a:cs typeface="Calibri" pitchFamily="34" charset="-120"/>
+                <a:latin typeface="Calibri" panose="020F0502020204030204" pitchFamily="34" charset="0"/>
+                <a:ea typeface="Calibri" panose="020F0502020204030204" pitchFamily="34" charset="-122"/>
+                <a:cs typeface="Calibri" panose="020F0502020204030204" pitchFamily="34" charset="-120"/>
               </a:rPr>
               <a:t>✓</a:t>
             </a:r>
@@ -14715,13 +14097,12 @@
             <a:avLst/>
           </a:prstGeom>
           <a:noFill/>
-          <a:ln/>
         </p:spPr>
         <p:txBody>
           <a:bodyPr wrap="square" lIns="0" tIns="0" rIns="0" bIns="0" rtlCol="0" anchor="t"/>
           <a:lstStyle/>
           <a:p>
-            <a:pPr indent="0" marL="0">
+            <a:pPr marL="0" indent="0">
               <a:lnSpc>
                 <a:spcPct val="110000"/>
               </a:lnSpc>
@@ -14732,26 +14113,20 @@
                 <a:solidFill>
                   <a:srgbClr val="FFFFFF"/>
                 </a:solidFill>
-                <a:latin typeface="Calibri" pitchFamily="34" charset="0"/>
-                <a:ea typeface="Calibri" pitchFamily="34" charset="-122"/>
-                <a:cs typeface="Calibri" pitchFamily="34" charset="-120"/>
+                <a:latin typeface="Calibri" panose="020F0502020204030204" pitchFamily="34" charset="0"/>
+                <a:ea typeface="Calibri" panose="020F0502020204030204" pitchFamily="34" charset="-122"/>
+                <a:cs typeface="Calibri" panose="020F0502020204030204" pitchFamily="34" charset="-120"/>
               </a:rPr>
               <a:t>Anti-fraud by design</a:t>
             </a:r>
-            <a:pPr indent="0" marL="0">
-              <a:lnSpc>
-                <a:spcPct val="110000"/>
-              </a:lnSpc>
-              <a:buNone/>
-            </a:pPr>
             <a:r>
               <a:rPr lang="en-US" sz="1250" dirty="0">
                 <a:solidFill>
                   <a:srgbClr val="94A3B8"/>
                 </a:solidFill>
-                <a:latin typeface="Calibri" pitchFamily="34" charset="0"/>
-                <a:ea typeface="Calibri" pitchFamily="34" charset="-122"/>
-                <a:cs typeface="Calibri" pitchFamily="34" charset="-120"/>
+                <a:latin typeface="Calibri" panose="020F0502020204030204" pitchFamily="34" charset="0"/>
+                <a:ea typeface="Calibri" panose="020F0502020204030204" pitchFamily="34" charset="-122"/>
+                <a:cs typeface="Calibri" panose="020F0502020204030204" pitchFamily="34" charset="-120"/>
               </a:rPr>
               <a:t> — online payments wait for your confirmation before balances move. You're always in control.</a:t>
             </a:r>
@@ -14801,13 +14176,12 @@
             <a:avLst/>
           </a:prstGeom>
           <a:noFill/>
-          <a:ln/>
         </p:spPr>
         <p:txBody>
           <a:bodyPr wrap="square" lIns="0" tIns="0" rIns="0" bIns="0" rtlCol="0" anchor="ctr"/>
           <a:lstStyle/>
           <a:p>
-            <a:pPr algn="ctr" indent="0" marL="0">
+            <a:pPr marL="0" indent="0" algn="ctr">
               <a:buNone/>
             </a:pPr>
             <a:r>
@@ -14815,9 +14189,9 @@
                 <a:solidFill>
                   <a:srgbClr val="10B981"/>
                 </a:solidFill>
-                <a:latin typeface="Cambria" pitchFamily="34" charset="0"/>
-                <a:ea typeface="Cambria" pitchFamily="34" charset="-122"/>
-                <a:cs typeface="Cambria" pitchFamily="34" charset="-120"/>
+                <a:latin typeface="Cambria" panose="02040503050406030204" pitchFamily="34" charset="0"/>
+                <a:ea typeface="Cambria" panose="02040503050406030204" pitchFamily="34" charset="-122"/>
+                <a:cs typeface="Cambria" panose="02040503050406030204" pitchFamily="34" charset="-120"/>
               </a:rPr>
               <a:t>60%</a:t>
             </a:r>
@@ -14840,13 +14214,12 @@
             <a:avLst/>
           </a:prstGeom>
           <a:noFill/>
-          <a:ln/>
         </p:spPr>
         <p:txBody>
           <a:bodyPr wrap="square" lIns="0" tIns="0" rIns="0" bIns="0" rtlCol="0" anchor="t"/>
           <a:lstStyle/>
           <a:p>
-            <a:pPr algn="ctr" indent="0" marL="0">
+            <a:pPr marL="0" indent="0" algn="ctr">
               <a:lnSpc>
                 <a:spcPct val="112000"/>
               </a:lnSpc>
@@ -14857,9 +14230,9 @@
                 <a:solidFill>
                   <a:srgbClr val="94A3B8"/>
                 </a:solidFill>
-                <a:latin typeface="Calibri" pitchFamily="34" charset="0"/>
-                <a:ea typeface="Calibri" pitchFamily="34" charset="-122"/>
-                <a:cs typeface="Calibri" pitchFamily="34" charset="-120"/>
+                <a:latin typeface="Calibri" panose="020F0502020204030204" pitchFamily="34" charset="0"/>
+                <a:ea typeface="Calibri" panose="020F0502020204030204" pitchFamily="34" charset="-122"/>
+                <a:cs typeface="Calibri" panose="020F0502020204030204" pitchFamily="34" charset="-120"/>
               </a:rPr>
               <a:t>faster fee collection when parents can pay online</a:t>
             </a:r>
@@ -14909,13 +14282,12 @@
             <a:avLst/>
           </a:prstGeom>
           <a:noFill/>
-          <a:ln/>
         </p:spPr>
         <p:txBody>
           <a:bodyPr wrap="square" lIns="0" tIns="0" rIns="0" bIns="0" rtlCol="0" anchor="ctr"/>
           <a:lstStyle/>
           <a:p>
-            <a:pPr algn="ctr" indent="0" marL="0">
+            <a:pPr marL="0" indent="0" algn="ctr">
               <a:buNone/>
             </a:pPr>
             <a:r>
@@ -14923,9 +14295,9 @@
                 <a:solidFill>
                   <a:srgbClr val="F59E0B"/>
                 </a:solidFill>
-                <a:latin typeface="Cambria" pitchFamily="34" charset="0"/>
-                <a:ea typeface="Cambria" pitchFamily="34" charset="-122"/>
-                <a:cs typeface="Cambria" pitchFamily="34" charset="-120"/>
+                <a:latin typeface="Cambria" panose="02040503050406030204" pitchFamily="34" charset="0"/>
+                <a:ea typeface="Cambria" panose="02040503050406030204" pitchFamily="34" charset="-122"/>
+                <a:cs typeface="Cambria" panose="02040503050406030204" pitchFamily="34" charset="-120"/>
               </a:rPr>
               <a:t>1 tap</a:t>
             </a:r>
@@ -14948,13 +14320,12 @@
             <a:avLst/>
           </a:prstGeom>
           <a:noFill/>
-          <a:ln/>
         </p:spPr>
         <p:txBody>
           <a:bodyPr wrap="square" lIns="0" tIns="0" rIns="0" bIns="0" rtlCol="0" anchor="t"/>
           <a:lstStyle/>
           <a:p>
-            <a:pPr algn="ctr" indent="0" marL="0">
+            <a:pPr marL="0" indent="0" algn="ctr">
               <a:lnSpc>
                 <a:spcPct val="112000"/>
               </a:lnSpc>
@@ -14965,9 +14336,9 @@
                 <a:solidFill>
                   <a:srgbClr val="94A3B8"/>
                 </a:solidFill>
-                <a:latin typeface="Calibri" pitchFamily="34" charset="0"/>
-                <a:ea typeface="Calibri" pitchFamily="34" charset="-122"/>
-                <a:cs typeface="Calibri" pitchFamily="34" charset="-120"/>
+                <a:latin typeface="Calibri" panose="020F0502020204030204" pitchFamily="34" charset="0"/>
+                <a:ea typeface="Calibri" panose="020F0502020204030204" pitchFamily="34" charset="-122"/>
+                <a:cs typeface="Calibri" panose="020F0502020204030204" pitchFamily="34" charset="-120"/>
               </a:rPr>
               <a:t>for a parent to pay — and 1 tap for you to confirm</a:t>
             </a:r>
@@ -14990,13 +14361,12 @@
             <a:avLst/>
           </a:prstGeom>
           <a:noFill/>
-          <a:ln/>
         </p:spPr>
         <p:txBody>
           <a:bodyPr wrap="square" lIns="0" tIns="0" rIns="0" bIns="0" rtlCol="0" anchor="ctr"/>
           <a:lstStyle/>
           <a:p>
-            <a:pPr indent="0" marL="0">
+            <a:pPr marL="0" indent="0">
               <a:buNone/>
             </a:pPr>
             <a:r>
@@ -15004,9 +14374,9 @@
                 <a:solidFill>
                   <a:srgbClr val="64748B"/>
                 </a:solidFill>
-                <a:latin typeface="Calibri" pitchFamily="34" charset="0"/>
-                <a:ea typeface="Calibri" pitchFamily="34" charset="-122"/>
-                <a:cs typeface="Calibri" pitchFamily="34" charset="-120"/>
+                <a:latin typeface="Calibri" panose="020F0502020204030204" pitchFamily="34" charset="0"/>
+                <a:ea typeface="Calibri" panose="020F0502020204030204" pitchFamily="34" charset="-122"/>
+                <a:cs typeface="Calibri" panose="020F0502020204030204" pitchFamily="34" charset="-120"/>
               </a:rPr>
               <a:t>EduTrack — School Management Platform</a:t>
             </a:r>
@@ -15029,13 +14399,12 @@
             <a:avLst/>
           </a:prstGeom>
           <a:noFill/>
-          <a:ln/>
         </p:spPr>
         <p:txBody>
           <a:bodyPr wrap="square" lIns="0" tIns="0" rIns="0" bIns="0" rtlCol="0" anchor="ctr"/>
           <a:lstStyle/>
           <a:p>
-            <a:pPr algn="r" indent="0" marL="0">
+            <a:pPr marL="0" indent="0" algn="r">
               <a:buNone/>
             </a:pPr>
             <a:r>
@@ -15043,9 +14412,9 @@
                 <a:solidFill>
                   <a:srgbClr val="94A3B8"/>
                 </a:solidFill>
-                <a:latin typeface="Calibri" pitchFamily="34" charset="0"/>
-                <a:ea typeface="Calibri" pitchFamily="34" charset="-122"/>
-                <a:cs typeface="Calibri" pitchFamily="34" charset="-120"/>
+                <a:latin typeface="Calibri" panose="020F0502020204030204" pitchFamily="34" charset="0"/>
+                <a:ea typeface="Calibri" panose="020F0502020204030204" pitchFamily="34" charset="-122"/>
+                <a:cs typeface="Calibri" panose="020F0502020204030204" pitchFamily="34" charset="-120"/>
               </a:rPr>
               <a:t>08</a:t>
             </a:r>
@@ -15063,12 +14432,13 @@
 
 <file path=ppt/slides/slide9.xml><?xml version="1.0" encoding="utf-8"?>
 <p:sld xmlns:a="http://schemas.openxmlformats.org/drawingml/2006/main" xmlns:r="http://schemas.openxmlformats.org/officeDocument/2006/relationships" xmlns:p="http://schemas.openxmlformats.org/presentationml/2006/main">
-  <p:cSld name="Slide 9">
+  <p:cSld>
     <p:bg>
       <p:bgPr>
         <a:solidFill>
           <a:srgbClr val="0F172A"/>
         </a:solidFill>
+        <a:effectLst/>
       </p:bgPr>
     </p:bg>
     <p:spTree>
@@ -15104,7 +14474,6 @@
               <a:alpha val="8000"/>
             </a:srgbClr>
           </a:solidFill>
-          <a:ln/>
         </p:spPr>
       </p:sp>
       <p:sp>
@@ -15122,23 +14491,22 @@
             <a:avLst/>
           </a:prstGeom>
           <a:noFill/>
-          <a:ln/>
         </p:spPr>
         <p:txBody>
           <a:bodyPr wrap="square" lIns="0" tIns="0" rIns="0" bIns="0" rtlCol="0" anchor="ctr"/>
           <a:lstStyle/>
           <a:p>
-            <a:pPr algn="l" indent="0" marL="0">
-              <a:buNone/>
-            </a:pPr>
-            <a:r>
-              <a:rPr lang="en-US" sz="1100" b="1" spc="300" kern="0" dirty="0">
+            <a:pPr marL="0" indent="0" algn="l">
+              <a:buNone/>
+            </a:pPr>
+            <a:r>
+              <a:rPr lang="en-US" sz="1100" b="1" kern="0" spc="300" dirty="0">
                 <a:solidFill>
                   <a:srgbClr val="60A5FA"/>
                 </a:solidFill>
-                <a:latin typeface="Calibri" pitchFamily="34" charset="0"/>
-                <a:ea typeface="Calibri" pitchFamily="34" charset="-122"/>
-                <a:cs typeface="Calibri" pitchFamily="34" charset="-120"/>
+                <a:latin typeface="Calibri" panose="020F0502020204030204" pitchFamily="34" charset="0"/>
+                <a:ea typeface="Calibri" panose="020F0502020204030204" pitchFamily="34" charset="-122"/>
+                <a:cs typeface="Calibri" panose="020F0502020204030204" pitchFamily="34" charset="-120"/>
               </a:rPr>
               <a:t>STAFF</a:t>
             </a:r>
@@ -15161,13 +14529,12 @@
             <a:avLst/>
           </a:prstGeom>
           <a:noFill/>
-          <a:ln/>
         </p:spPr>
         <p:txBody>
           <a:bodyPr wrap="square" lIns="0" tIns="0" rIns="0" bIns="0" rtlCol="0" anchor="t"/>
           <a:lstStyle/>
           <a:p>
-            <a:pPr algn="l" indent="0" marL="0">
+            <a:pPr marL="0" indent="0" algn="l">
               <a:lnSpc>
                 <a:spcPct val="106000"/>
               </a:lnSpc>
@@ -15178,26 +14545,20 @@
                 <a:solidFill>
                   <a:srgbClr val="FFFFFF"/>
                 </a:solidFill>
-                <a:latin typeface="Cambria" pitchFamily="34" charset="0"/>
-                <a:ea typeface="Cambria" pitchFamily="34" charset="-122"/>
-                <a:cs typeface="Cambria" pitchFamily="34" charset="-120"/>
+                <a:latin typeface="Cambria" panose="02040503050406030204" pitchFamily="34" charset="0"/>
+                <a:ea typeface="Cambria" panose="02040503050406030204" pitchFamily="34" charset="-122"/>
+                <a:cs typeface="Cambria" panose="02040503050406030204" pitchFamily="34" charset="-120"/>
               </a:rPr>
               <a:t>Teacher payroll, </a:t>
             </a:r>
-            <a:pPr algn="l" indent="0" marL="0">
-              <a:lnSpc>
-                <a:spcPct val="106000"/>
-              </a:lnSpc>
-              <a:buNone/>
-            </a:pPr>
             <a:r>
               <a:rPr lang="en-US" sz="2900" b="1" dirty="0">
                 <a:solidFill>
                   <a:srgbClr val="FFFFFF"/>
                 </a:solidFill>
-                <a:latin typeface="Cambria" pitchFamily="34" charset="0"/>
-                <a:ea typeface="Cambria" pitchFamily="34" charset="-122"/>
-                <a:cs typeface="Cambria" pitchFamily="34" charset="-120"/>
+                <a:latin typeface="Cambria" panose="02040503050406030204" pitchFamily="34" charset="0"/>
+                <a:ea typeface="Cambria" panose="02040503050406030204" pitchFamily="34" charset="-122"/>
+                <a:cs typeface="Cambria" panose="02040503050406030204" pitchFamily="34" charset="-120"/>
               </a:rPr>
               <a:t>always up to date</a:t>
             </a:r>
@@ -15251,7 +14612,6 @@
           <a:solidFill>
             <a:srgbClr val="2563EB"/>
           </a:solidFill>
-          <a:ln/>
         </p:spPr>
       </p:sp>
       <p:sp>
@@ -15269,13 +14629,12 @@
             <a:avLst/>
           </a:prstGeom>
           <a:noFill/>
-          <a:ln/>
         </p:spPr>
         <p:txBody>
           <a:bodyPr wrap="square" lIns="0" tIns="0" rIns="0" bIns="0" rtlCol="0" anchor="ctr"/>
           <a:lstStyle/>
           <a:p>
-            <a:pPr algn="ctr" indent="0" marL="0">
+            <a:pPr marL="0" indent="0" algn="ctr">
               <a:buNone/>
             </a:pPr>
             <a:r>
@@ -15283,9 +14642,9 @@
                 <a:solidFill>
                   <a:srgbClr val="FFFFFF"/>
                 </a:solidFill>
-                <a:latin typeface="Calibri" pitchFamily="34" charset="0"/>
-                <a:ea typeface="Calibri" pitchFamily="34" charset="-122"/>
-                <a:cs typeface="Calibri" pitchFamily="34" charset="-120"/>
+                <a:latin typeface="Calibri" panose="020F0502020204030204" pitchFamily="34" charset="0"/>
+                <a:ea typeface="Calibri" panose="020F0502020204030204" pitchFamily="34" charset="-122"/>
+                <a:cs typeface="Calibri" panose="020F0502020204030204" pitchFamily="34" charset="-120"/>
               </a:rPr>
               <a:t>⚙</a:t>
             </a:r>
@@ -15308,13 +14667,12 @@
             <a:avLst/>
           </a:prstGeom>
           <a:noFill/>
-          <a:ln/>
         </p:spPr>
         <p:txBody>
           <a:bodyPr wrap="square" lIns="0" tIns="0" rIns="0" bIns="0" rtlCol="0" anchor="t"/>
           <a:lstStyle/>
           <a:p>
-            <a:pPr indent="0" marL="0">
+            <a:pPr marL="0" indent="0">
               <a:lnSpc>
                 <a:spcPct val="100000"/>
               </a:lnSpc>
@@ -15325,9 +14683,9 @@
                 <a:solidFill>
                   <a:srgbClr val="FFFFFF"/>
                 </a:solidFill>
-                <a:latin typeface="Calibri" pitchFamily="34" charset="0"/>
-                <a:ea typeface="Calibri" pitchFamily="34" charset="-122"/>
-                <a:cs typeface="Calibri" pitchFamily="34" charset="-120"/>
+                <a:latin typeface="Calibri" panose="020F0502020204030204" pitchFamily="34" charset="0"/>
+                <a:ea typeface="Calibri" panose="020F0502020204030204" pitchFamily="34" charset="-122"/>
+                <a:cs typeface="Calibri" panose="020F0502020204030204" pitchFamily="34" charset="-120"/>
               </a:rPr>
               <a:t>Paid / pending in one click</a:t>
             </a:r>
@@ -15350,13 +14708,12 @@
             <a:avLst/>
           </a:prstGeom>
           <a:noFill/>
-          <a:ln/>
         </p:spPr>
         <p:txBody>
           <a:bodyPr wrap="square" lIns="0" tIns="0" rIns="0" bIns="0" rtlCol="0" anchor="t"/>
           <a:lstStyle/>
           <a:p>
-            <a:pPr indent="0" marL="0">
+            <a:pPr marL="0" indent="0">
               <a:lnSpc>
                 <a:spcPct val="112000"/>
               </a:lnSpc>
@@ -15367,9 +14724,9 @@
                 <a:solidFill>
                   <a:srgbClr val="94A3B8"/>
                 </a:solidFill>
-                <a:latin typeface="Calibri" pitchFamily="34" charset="0"/>
-                <a:ea typeface="Calibri" pitchFamily="34" charset="-122"/>
-                <a:cs typeface="Calibri" pitchFamily="34" charset="-120"/>
+                <a:latin typeface="Calibri" panose="020F0502020204030204" pitchFamily="34" charset="0"/>
+                <a:ea typeface="Calibri" panose="020F0502020204030204" pitchFamily="34" charset="-122"/>
+                <a:cs typeface="Calibri" panose="020F0502020204030204" pitchFamily="34" charset="-120"/>
               </a:rPr>
               <a:t>Mark salaries as paid or pending as you disburse — the record updates instantly.</a:t>
             </a:r>
@@ -15423,7 +14780,6 @@
           <a:solidFill>
             <a:srgbClr val="10B981"/>
           </a:solidFill>
-          <a:ln/>
         </p:spPr>
       </p:sp>
       <p:sp>
@@ -15441,13 +14797,12 @@
             <a:avLst/>
           </a:prstGeom>
           <a:noFill/>
-          <a:ln/>
         </p:spPr>
         <p:txBody>
           <a:bodyPr wrap="square" lIns="0" tIns="0" rIns="0" bIns="0" rtlCol="0" anchor="ctr"/>
           <a:lstStyle/>
           <a:p>
-            <a:pPr algn="ctr" indent="0" marL="0">
+            <a:pPr marL="0" indent="0" algn="ctr">
               <a:buNone/>
             </a:pPr>
             <a:r>
@@ -15455,9 +14810,9 @@
                 <a:solidFill>
                   <a:srgbClr val="FFFFFF"/>
                 </a:solidFill>
-                <a:latin typeface="Calibri" pitchFamily="34" charset="0"/>
-                <a:ea typeface="Calibri" pitchFamily="34" charset="-122"/>
-                <a:cs typeface="Calibri" pitchFamily="34" charset="-120"/>
+                <a:latin typeface="Calibri" panose="020F0502020204030204" pitchFamily="34" charset="0"/>
+                <a:ea typeface="Calibri" panose="020F0502020204030204" pitchFamily="34" charset="-122"/>
+                <a:cs typeface="Calibri" panose="020F0502020204030204" pitchFamily="34" charset="-120"/>
               </a:rPr>
               <a:t>◔</a:t>
             </a:r>
@@ -15480,13 +14835,12 @@
             <a:avLst/>
           </a:prstGeom>
           <a:noFill/>
-          <a:ln/>
         </p:spPr>
         <p:txBody>
           <a:bodyPr wrap="square" lIns="0" tIns="0" rIns="0" bIns="0" rtlCol="0" anchor="t"/>
           <a:lstStyle/>
           <a:p>
-            <a:pPr indent="0" marL="0">
+            <a:pPr marL="0" indent="0">
               <a:lnSpc>
                 <a:spcPct val="100000"/>
               </a:lnSpc>
@@ -15497,9 +14851,9 @@
                 <a:solidFill>
                   <a:srgbClr val="FFFFFF"/>
                 </a:solidFill>
-                <a:latin typeface="Calibri" pitchFamily="34" charset="0"/>
-                <a:ea typeface="Calibri" pitchFamily="34" charset="-122"/>
-                <a:cs typeface="Calibri" pitchFamily="34" charset="-120"/>
+                <a:latin typeface="Calibri" panose="020F0502020204030204" pitchFamily="34" charset="0"/>
+                <a:ea typeface="Calibri" panose="020F0502020204030204" pitchFamily="34" charset="-122"/>
+                <a:cs typeface="Calibri" panose="020F0502020204030204" pitchFamily="34" charset="-120"/>
               </a:rPr>
               <a:t>Payroll metrics</a:t>
             </a:r>
@@ -15522,13 +14876,12 @@
             <a:avLst/>
           </a:prstGeom>
           <a:noFill/>
-          <a:ln/>
         </p:spPr>
         <p:txBody>
           <a:bodyPr wrap="square" lIns="0" tIns="0" rIns="0" bIns="0" rtlCol="0" anchor="t"/>
           <a:lstStyle/>
           <a:p>
-            <a:pPr indent="0" marL="0">
+            <a:pPr marL="0" indent="0">
               <a:lnSpc>
                 <a:spcPct val="112000"/>
               </a:lnSpc>
@@ -15539,9 +14892,9 @@
                 <a:solidFill>
                   <a:srgbClr val="94A3B8"/>
                 </a:solidFill>
-                <a:latin typeface="Calibri" pitchFamily="34" charset="0"/>
-                <a:ea typeface="Calibri" pitchFamily="34" charset="-122"/>
-                <a:cs typeface="Calibri" pitchFamily="34" charset="-120"/>
+                <a:latin typeface="Calibri" panose="020F0502020204030204" pitchFamily="34" charset="0"/>
+                <a:ea typeface="Calibri" panose="020F0502020204030204" pitchFamily="34" charset="-122"/>
+                <a:cs typeface="Calibri" panose="020F0502020204030204" pitchFamily="34" charset="-120"/>
               </a:rPr>
               <a:t>See paid counts, pending counts and staff totals at a glance — no spreadsheet reconciliation.</a:t>
             </a:r>
@@ -15595,7 +14948,6 @@
           <a:solidFill>
             <a:srgbClr val="A78BFA"/>
           </a:solidFill>
-          <a:ln/>
         </p:spPr>
       </p:sp>
       <p:sp>
@@ -15613,13 +14965,12 @@
             <a:avLst/>
           </a:prstGeom>
           <a:noFill/>
-          <a:ln/>
         </p:spPr>
         <p:txBody>
           <a:bodyPr wrap="square" lIns="0" tIns="0" rIns="0" bIns="0" rtlCol="0" anchor="ctr"/>
           <a:lstStyle/>
           <a:p>
-            <a:pPr algn="ctr" indent="0" marL="0">
+            <a:pPr marL="0" indent="0" algn="ctr">
               <a:buNone/>
             </a:pPr>
             <a:r>
@@ -15627,9 +14978,9 @@
                 <a:solidFill>
                   <a:srgbClr val="FFFFFF"/>
                 </a:solidFill>
-                <a:latin typeface="Calibri" pitchFamily="34" charset="0"/>
-                <a:ea typeface="Calibri" pitchFamily="34" charset="-122"/>
-                <a:cs typeface="Calibri" pitchFamily="34" charset="-120"/>
+                <a:latin typeface="Calibri" panose="020F0502020204030204" pitchFamily="34" charset="0"/>
+                <a:ea typeface="Calibri" panose="020F0502020204030204" pitchFamily="34" charset="-122"/>
+                <a:cs typeface="Calibri" panose="020F0502020204030204" pitchFamily="34" charset="-120"/>
               </a:rPr>
               <a:t>✉</a:t>
             </a:r>
@@ -15652,13 +15003,12 @@
             <a:avLst/>
           </a:prstGeom>
           <a:noFill/>
-          <a:ln/>
         </p:spPr>
         <p:txBody>
           <a:bodyPr wrap="square" lIns="0" tIns="0" rIns="0" bIns="0" rtlCol="0" anchor="t"/>
           <a:lstStyle/>
           <a:p>
-            <a:pPr indent="0" marL="0">
+            <a:pPr marL="0" indent="0">
               <a:lnSpc>
                 <a:spcPct val="100000"/>
               </a:lnSpc>
@@ -15669,9 +15019,9 @@
                 <a:solidFill>
                   <a:srgbClr val="FFFFFF"/>
                 </a:solidFill>
-                <a:latin typeface="Calibri" pitchFamily="34" charset="0"/>
-                <a:ea typeface="Calibri" pitchFamily="34" charset="-122"/>
-                <a:cs typeface="Calibri" pitchFamily="34" charset="-120"/>
+                <a:latin typeface="Calibri" panose="020F0502020204030204" pitchFamily="34" charset="0"/>
+                <a:ea typeface="Calibri" panose="020F0502020204030204" pitchFamily="34" charset="-122"/>
+                <a:cs typeface="Calibri" panose="020F0502020204030204" pitchFamily="34" charset="-120"/>
               </a:rPr>
               <a:t>Complete staff directory</a:t>
             </a:r>
@@ -15694,13 +15044,12 @@
             <a:avLst/>
           </a:prstGeom>
           <a:noFill/>
-          <a:ln/>
         </p:spPr>
         <p:txBody>
           <a:bodyPr wrap="square" lIns="0" tIns="0" rIns="0" bIns="0" rtlCol="0" anchor="t"/>
           <a:lstStyle/>
           <a:p>
-            <a:pPr indent="0" marL="0">
+            <a:pPr marL="0" indent="0">
               <a:lnSpc>
                 <a:spcPct val="112000"/>
               </a:lnSpc>
@@ -15711,9 +15060,9 @@
                 <a:solidFill>
                   <a:srgbClr val="94A3B8"/>
                 </a:solidFill>
-                <a:latin typeface="Calibri" pitchFamily="34" charset="0"/>
-                <a:ea typeface="Calibri" pitchFamily="34" charset="-122"/>
-                <a:cs typeface="Calibri" pitchFamily="34" charset="-120"/>
+                <a:latin typeface="Calibri" panose="020F0502020204030204" pitchFamily="34" charset="0"/>
+                <a:ea typeface="Calibri" panose="020F0502020204030204" pitchFamily="34" charset="-122"/>
+                <a:cs typeface="Calibri" panose="020F0502020204030204" pitchFamily="34" charset="-120"/>
               </a:rPr>
               <a:t>Every teacher, their class arm and their payroll status — one list, always current.</a:t>
             </a:r>
@@ -15736,13 +15085,12 @@
             <a:avLst/>
           </a:prstGeom>
           <a:noFill/>
-          <a:ln/>
         </p:spPr>
         <p:txBody>
           <a:bodyPr wrap="square" lIns="0" tIns="0" rIns="0" bIns="0" rtlCol="0" anchor="t"/>
           <a:lstStyle/>
           <a:p>
-            <a:pPr algn="l" indent="0" marL="0">
+            <a:pPr marL="0" indent="0" algn="l">
               <a:lnSpc>
                 <a:spcPct val="115000"/>
               </a:lnSpc>
@@ -15753,43 +15101,31 @@
                 <a:solidFill>
                   <a:srgbClr val="FFFFFF"/>
                 </a:solidFill>
-                <a:latin typeface="Calibri" pitchFamily="34" charset="0"/>
-                <a:ea typeface="Calibri" pitchFamily="34" charset="-122"/>
-                <a:cs typeface="Calibri" pitchFamily="34" charset="-120"/>
+                <a:latin typeface="Calibri" panose="020F0502020204030204" pitchFamily="34" charset="0"/>
+                <a:ea typeface="Calibri" panose="020F0502020204030204" pitchFamily="34" charset="-122"/>
+                <a:cs typeface="Calibri" panose="020F0502020204030204" pitchFamily="34" charset="-120"/>
               </a:rPr>
               <a:t>Payroll questions disappear — the answer is </a:t>
             </a:r>
-            <a:pPr algn="l" indent="0" marL="0">
-              <a:lnSpc>
-                <a:spcPct val="115000"/>
-              </a:lnSpc>
-              <a:buNone/>
-            </a:pPr>
             <a:r>
               <a:rPr lang="en-US" sz="1600" b="1" dirty="0">
                 <a:solidFill>
                   <a:srgbClr val="FFFFFF"/>
                 </a:solidFill>
-                <a:latin typeface="Calibri" pitchFamily="34" charset="0"/>
-                <a:ea typeface="Calibri" pitchFamily="34" charset="-122"/>
-                <a:cs typeface="Calibri" pitchFamily="34" charset="-120"/>
+                <a:latin typeface="Calibri" panose="020F0502020204030204" pitchFamily="34" charset="0"/>
+                <a:ea typeface="Calibri" panose="020F0502020204030204" pitchFamily="34" charset="-122"/>
+                <a:cs typeface="Calibri" panose="020F0502020204030204" pitchFamily="34" charset="-120"/>
               </a:rPr>
               <a:t>always one click away</a:t>
             </a:r>
-            <a:pPr algn="l" indent="0" marL="0">
-              <a:lnSpc>
-                <a:spcPct val="115000"/>
-              </a:lnSpc>
-              <a:buNone/>
-            </a:pPr>
             <a:r>
               <a:rPr lang="en-US" sz="1600" b="1" dirty="0">
                 <a:solidFill>
                   <a:srgbClr val="FFFFFF"/>
                 </a:solidFill>
-                <a:latin typeface="Calibri" pitchFamily="34" charset="0"/>
-                <a:ea typeface="Calibri" pitchFamily="34" charset="-122"/>
-                <a:cs typeface="Calibri" pitchFamily="34" charset="-120"/>
+                <a:latin typeface="Calibri" panose="020F0502020204030204" pitchFamily="34" charset="0"/>
+                <a:ea typeface="Calibri" panose="020F0502020204030204" pitchFamily="34" charset="-122"/>
+                <a:cs typeface="Calibri" panose="020F0502020204030204" pitchFamily="34" charset="-120"/>
               </a:rPr>
               <a:t>.</a:t>
             </a:r>
@@ -15812,13 +15148,12 @@
             <a:avLst/>
           </a:prstGeom>
           <a:noFill/>
-          <a:ln/>
         </p:spPr>
         <p:txBody>
           <a:bodyPr wrap="square" lIns="0" tIns="0" rIns="0" bIns="0" rtlCol="0" anchor="ctr"/>
           <a:lstStyle/>
           <a:p>
-            <a:pPr indent="0" marL="0">
+            <a:pPr marL="0" indent="0">
               <a:buNone/>
             </a:pPr>
             <a:r>
@@ -15826,9 +15161,9 @@
                 <a:solidFill>
                   <a:srgbClr val="64748B"/>
                 </a:solidFill>
-                <a:latin typeface="Calibri" pitchFamily="34" charset="0"/>
-                <a:ea typeface="Calibri" pitchFamily="34" charset="-122"/>
-                <a:cs typeface="Calibri" pitchFamily="34" charset="-120"/>
+                <a:latin typeface="Calibri" panose="020F0502020204030204" pitchFamily="34" charset="0"/>
+                <a:ea typeface="Calibri" panose="020F0502020204030204" pitchFamily="34" charset="-122"/>
+                <a:cs typeface="Calibri" panose="020F0502020204030204" pitchFamily="34" charset="-120"/>
               </a:rPr>
               <a:t>EduTrack — School Management Platform</a:t>
             </a:r>
@@ -15851,13 +15186,12 @@
             <a:avLst/>
           </a:prstGeom>
           <a:noFill/>
-          <a:ln/>
         </p:spPr>
         <p:txBody>
           <a:bodyPr wrap="square" lIns="0" tIns="0" rIns="0" bIns="0" rtlCol="0" anchor="ctr"/>
           <a:lstStyle/>
           <a:p>
-            <a:pPr algn="r" indent="0" marL="0">
+            <a:pPr marL="0" indent="0" algn="r">
               <a:buNone/>
             </a:pPr>
             <a:r>
@@ -15865,9 +15199,9 @@
                 <a:solidFill>
                   <a:srgbClr val="94A3B8"/>
                 </a:solidFill>
-                <a:latin typeface="Calibri" pitchFamily="34" charset="0"/>
-                <a:ea typeface="Calibri" pitchFamily="34" charset="-122"/>
-                <a:cs typeface="Calibri" pitchFamily="34" charset="-120"/>
+                <a:latin typeface="Calibri" panose="020F0502020204030204" pitchFamily="34" charset="0"/>
+                <a:ea typeface="Calibri" panose="020F0502020204030204" pitchFamily="34" charset="-122"/>
+                <a:cs typeface="Calibri" panose="020F0502020204030204" pitchFamily="34" charset="-120"/>
               </a:rPr>
               <a:t>09</a:t>
             </a:r>
@@ -15926,7 +15260,7 @@
     </a:clrScheme>
     <a:fontScheme name="Office">
       <a:majorFont>
-        <a:latin typeface="Calibri Light" panose="020F0302020204030204"/>
+        <a:latin typeface="Calibri Light"/>
         <a:ea typeface=""/>
         <a:cs typeface=""/>
         <a:font script="Jpan" typeface="游ゴシック Light"/>
@@ -15959,26 +15293,9 @@
         <a:font script="Viet" typeface="Times New Roman"/>
         <a:font script="Uigh" typeface="Microsoft Uighur"/>
         <a:font script="Geor" typeface="Sylfaen"/>
-        <a:font script="Armn" typeface="Arial"/>
-        <a:font script="Bugi" typeface="Leelawadee UI"/>
-        <a:font script="Bopo" typeface="Microsoft JhengHei"/>
-        <a:font script="Java" typeface="Javanese Text"/>
-        <a:font script="Lisu" typeface="Segoe UI"/>
-        <a:font script="Mymr" typeface="Myanmar Text"/>
-        <a:font script="Nkoo" typeface="Ebrima"/>
-        <a:font script="Olck" typeface="Nirmala UI"/>
-        <a:font script="Osma" typeface="Ebrima"/>
-        <a:font script="Phag" typeface="Phagspa"/>
-        <a:font script="Syrn" typeface="Estrangelo Edessa"/>
-        <a:font script="Syrj" typeface="Estrangelo Edessa"/>
-        <a:font script="Syre" typeface="Estrangelo Edessa"/>
-        <a:font script="Sora" typeface="Nirmala UI"/>
-        <a:font script="Tale" typeface="Microsoft Tai Le"/>
-        <a:font script="Talu" typeface="Microsoft New Tai Lue"/>
-        <a:font script="Tfng" typeface="Ebrima"/>
       </a:majorFont>
       <a:minorFont>
-        <a:latin typeface="Calibri" panose="020F0502020204030204"/>
+        <a:latin typeface="Calibri"/>
         <a:ea typeface=""/>
         <a:cs typeface=""/>
         <a:font script="Jpan" typeface="游ゴシック"/>
@@ -16011,23 +15328,6 @@
         <a:font script="Viet" typeface="Arial"/>
         <a:font script="Uigh" typeface="Microsoft Uighur"/>
         <a:font script="Geor" typeface="Sylfaen"/>
-        <a:font script="Armn" typeface="Arial"/>
-        <a:font script="Bugi" typeface="Leelawadee UI"/>
-        <a:font script="Bopo" typeface="Microsoft JhengHei"/>
-        <a:font script="Java" typeface="Javanese Text"/>
-        <a:font script="Lisu" typeface="Segoe UI"/>
-        <a:font script="Mymr" typeface="Myanmar Text"/>
-        <a:font script="Nkoo" typeface="Ebrima"/>
-        <a:font script="Olck" typeface="Nirmala UI"/>
-        <a:font script="Osma" typeface="Ebrima"/>
-        <a:font script="Phag" typeface="Phagspa"/>
-        <a:font script="Syrn" typeface="Estrangelo Edessa"/>
-        <a:font script="Syrj" typeface="Estrangelo Edessa"/>
-        <a:font script="Syre" typeface="Estrangelo Edessa"/>
-        <a:font script="Sora" typeface="Nirmala UI"/>
-        <a:font script="Tale" typeface="Microsoft Tai Le"/>
-        <a:font script="Talu" typeface="Microsoft New Tai Lue"/>
-        <a:font script="Tfng" typeface="Ebrima"/>
       </a:minorFont>
     </a:fontScheme>
     <a:fmtScheme name="Office">
@@ -16168,8 +15468,265 @@
       </a:bgFillStyleLst>
     </a:fmtScheme>
   </a:themeElements>
-  <a:objectDefaults/>
-  <a:extraClrSchemeLst/>
+  <a:extLst>
+    <a:ext uri="{05A4C25C-085E-4340-85A3-A5531E510DB2}">
+      <thm15:themeFamily xmlns:thm15="http://schemas.microsoft.com/office/thememl/2012/main" name="Office Theme" id="{62F939B6-93AF-4DB8-9C6B-D6C7DFDC589F}" vid="{4A3C46E8-61CC-4603-A589-7422A47A8E4A}"/>
+    </a:ext>
+  </a:extLst>
+</a:theme>
+</file>
+
+<file path=ppt/theme/theme2.xml><?xml version="1.0" encoding="utf-8"?>
+<a:theme xmlns:a="http://schemas.openxmlformats.org/drawingml/2006/main" name="Office Theme">
+  <a:themeElements>
+    <a:clrScheme name="Office">
+      <a:dk1>
+        <a:sysClr val="windowText" lastClr="000000"/>
+      </a:dk1>
+      <a:lt1>
+        <a:sysClr val="window" lastClr="FFFFFF"/>
+      </a:lt1>
+      <a:dk2>
+        <a:srgbClr val="44546A"/>
+      </a:dk2>
+      <a:lt2>
+        <a:srgbClr val="E7E6E6"/>
+      </a:lt2>
+      <a:accent1>
+        <a:srgbClr val="4472C4"/>
+      </a:accent1>
+      <a:accent2>
+        <a:srgbClr val="ED7D31"/>
+      </a:accent2>
+      <a:accent3>
+        <a:srgbClr val="A5A5A5"/>
+      </a:accent3>
+      <a:accent4>
+        <a:srgbClr val="FFC000"/>
+      </a:accent4>
+      <a:accent5>
+        <a:srgbClr val="5B9BD5"/>
+      </a:accent5>
+      <a:accent6>
+        <a:srgbClr val="70AD47"/>
+      </a:accent6>
+      <a:hlink>
+        <a:srgbClr val="0563C1"/>
+      </a:hlink>
+      <a:folHlink>
+        <a:srgbClr val="954F72"/>
+      </a:folHlink>
+    </a:clrScheme>
+    <a:fontScheme name="Office">
+      <a:majorFont>
+        <a:latin typeface="Calibri Light"/>
+        <a:ea typeface=""/>
+        <a:cs typeface=""/>
+        <a:font script="Jpan" typeface="游ゴシック Light"/>
+        <a:font script="Hang" typeface="맑은 고딕"/>
+        <a:font script="Hans" typeface="等线 Light"/>
+        <a:font script="Hant" typeface="新細明體"/>
+        <a:font script="Arab" typeface="Times New Roman"/>
+        <a:font script="Hebr" typeface="Times New Roman"/>
+        <a:font script="Thai" typeface="Angsana New"/>
+        <a:font script="Ethi" typeface="Nyala"/>
+        <a:font script="Beng" typeface="Vrinda"/>
+        <a:font script="Gujr" typeface="Shruti"/>
+        <a:font script="Khmr" typeface="MoolBoran"/>
+        <a:font script="Knda" typeface="Tunga"/>
+        <a:font script="Guru" typeface="Raavi"/>
+        <a:font script="Cans" typeface="Euphemia"/>
+        <a:font script="Cher" typeface="Plantagenet Cherokee"/>
+        <a:font script="Yiii" typeface="Microsoft Yi Baiti"/>
+        <a:font script="Tibt" typeface="Microsoft Himalaya"/>
+        <a:font script="Thaa" typeface="MV Boli"/>
+        <a:font script="Deva" typeface="Mangal"/>
+        <a:font script="Telu" typeface="Gautami"/>
+        <a:font script="Taml" typeface="Latha"/>
+        <a:font script="Syrc" typeface="Estrangelo Edessa"/>
+        <a:font script="Orya" typeface="Kalinga"/>
+        <a:font script="Mlym" typeface="Kartika"/>
+        <a:font script="Laoo" typeface="DokChampa"/>
+        <a:font script="Sinh" typeface="Iskoola Pota"/>
+        <a:font script="Mong" typeface="Mongolian Baiti"/>
+        <a:font script="Viet" typeface="Times New Roman"/>
+        <a:font script="Uigh" typeface="Microsoft Uighur"/>
+        <a:font script="Geor" typeface="Sylfaen"/>
+      </a:majorFont>
+      <a:minorFont>
+        <a:latin typeface="Calibri"/>
+        <a:ea typeface=""/>
+        <a:cs typeface=""/>
+        <a:font script="Jpan" typeface="游ゴシック"/>
+        <a:font script="Hang" typeface="맑은 고딕"/>
+        <a:font script="Hans" typeface="等线"/>
+        <a:font script="Hant" typeface="新細明體"/>
+        <a:font script="Arab" typeface="Arial"/>
+        <a:font script="Hebr" typeface="Arial"/>
+        <a:font script="Thai" typeface="Cordia New"/>
+        <a:font script="Ethi" typeface="Nyala"/>
+        <a:font script="Beng" typeface="Vrinda"/>
+        <a:font script="Gujr" typeface="Shruti"/>
+        <a:font script="Khmr" typeface="DaunPenh"/>
+        <a:font script="Knda" typeface="Tunga"/>
+        <a:font script="Guru" typeface="Raavi"/>
+        <a:font script="Cans" typeface="Euphemia"/>
+        <a:font script="Cher" typeface="Plantagenet Cherokee"/>
+        <a:font script="Yiii" typeface="Microsoft Yi Baiti"/>
+        <a:font script="Tibt" typeface="Microsoft Himalaya"/>
+        <a:font script="Thaa" typeface="MV Boli"/>
+        <a:font script="Deva" typeface="Mangal"/>
+        <a:font script="Telu" typeface="Gautami"/>
+        <a:font script="Taml" typeface="Latha"/>
+        <a:font script="Syrc" typeface="Estrangelo Edessa"/>
+        <a:font script="Orya" typeface="Kalinga"/>
+        <a:font script="Mlym" typeface="Kartika"/>
+        <a:font script="Laoo" typeface="DokChampa"/>
+        <a:font script="Sinh" typeface="Iskoola Pota"/>
+        <a:font script="Mong" typeface="Mongolian Baiti"/>
+        <a:font script="Viet" typeface="Arial"/>
+        <a:font script="Uigh" typeface="Microsoft Uighur"/>
+        <a:font script="Geor" typeface="Sylfaen"/>
+      </a:minorFont>
+    </a:fontScheme>
+    <a:fmtScheme name="Office">
+      <a:fillStyleLst>
+        <a:solidFill>
+          <a:schemeClr val="phClr"/>
+        </a:solidFill>
+        <a:gradFill rotWithShape="1">
+          <a:gsLst>
+            <a:gs pos="0">
+              <a:schemeClr val="phClr">
+                <a:lumMod val="110000"/>
+                <a:satMod val="105000"/>
+                <a:tint val="67000"/>
+              </a:schemeClr>
+            </a:gs>
+            <a:gs pos="50000">
+              <a:schemeClr val="phClr">
+                <a:lumMod val="105000"/>
+                <a:satMod val="103000"/>
+                <a:tint val="73000"/>
+              </a:schemeClr>
+            </a:gs>
+            <a:gs pos="100000">
+              <a:schemeClr val="phClr">
+                <a:lumMod val="105000"/>
+                <a:satMod val="109000"/>
+                <a:tint val="81000"/>
+              </a:schemeClr>
+            </a:gs>
+          </a:gsLst>
+          <a:lin ang="5400000" scaled="0"/>
+        </a:gradFill>
+        <a:gradFill rotWithShape="1">
+          <a:gsLst>
+            <a:gs pos="0">
+              <a:schemeClr val="phClr">
+                <a:satMod val="103000"/>
+                <a:lumMod val="102000"/>
+                <a:tint val="94000"/>
+              </a:schemeClr>
+            </a:gs>
+            <a:gs pos="50000">
+              <a:schemeClr val="phClr">
+                <a:satMod val="110000"/>
+                <a:lumMod val="100000"/>
+                <a:shade val="100000"/>
+              </a:schemeClr>
+            </a:gs>
+            <a:gs pos="100000">
+              <a:schemeClr val="phClr">
+                <a:lumMod val="99000"/>
+                <a:satMod val="120000"/>
+                <a:shade val="78000"/>
+              </a:schemeClr>
+            </a:gs>
+          </a:gsLst>
+          <a:lin ang="5400000" scaled="0"/>
+        </a:gradFill>
+      </a:fillStyleLst>
+      <a:lnStyleLst>
+        <a:ln w="6350" cap="flat" cmpd="sng" algn="ctr">
+          <a:solidFill>
+            <a:schemeClr val="phClr"/>
+          </a:solidFill>
+          <a:prstDash val="solid"/>
+          <a:miter lim="800000"/>
+        </a:ln>
+        <a:ln w="12700" cap="flat" cmpd="sng" algn="ctr">
+          <a:solidFill>
+            <a:schemeClr val="phClr"/>
+          </a:solidFill>
+          <a:prstDash val="solid"/>
+          <a:miter lim="800000"/>
+        </a:ln>
+        <a:ln w="19050" cap="flat" cmpd="sng" algn="ctr">
+          <a:solidFill>
+            <a:schemeClr val="phClr"/>
+          </a:solidFill>
+          <a:prstDash val="solid"/>
+          <a:miter lim="800000"/>
+        </a:ln>
+      </a:lnStyleLst>
+      <a:effectStyleLst>
+        <a:effectStyle>
+          <a:effectLst/>
+        </a:effectStyle>
+        <a:effectStyle>
+          <a:effectLst/>
+        </a:effectStyle>
+        <a:effectStyle>
+          <a:effectLst>
+            <a:outerShdw blurRad="57150" dist="19050" dir="5400000" algn="ctr" rotWithShape="0">
+              <a:srgbClr val="000000">
+                <a:alpha val="63000"/>
+              </a:srgbClr>
+            </a:outerShdw>
+          </a:effectLst>
+        </a:effectStyle>
+      </a:effectStyleLst>
+      <a:bgFillStyleLst>
+        <a:solidFill>
+          <a:schemeClr val="phClr"/>
+        </a:solidFill>
+        <a:solidFill>
+          <a:schemeClr val="phClr">
+            <a:tint val="95000"/>
+            <a:satMod val="170000"/>
+          </a:schemeClr>
+        </a:solidFill>
+        <a:gradFill rotWithShape="1">
+          <a:gsLst>
+            <a:gs pos="0">
+              <a:schemeClr val="phClr">
+                <a:tint val="93000"/>
+                <a:satMod val="150000"/>
+                <a:shade val="98000"/>
+                <a:lumMod val="102000"/>
+              </a:schemeClr>
+            </a:gs>
+            <a:gs pos="50000">
+              <a:schemeClr val="phClr">
+                <a:tint val="98000"/>
+                <a:satMod val="130000"/>
+                <a:shade val="90000"/>
+                <a:lumMod val="103000"/>
+              </a:schemeClr>
+            </a:gs>
+            <a:gs pos="100000">
+              <a:schemeClr val="phClr">
+                <a:shade val="63000"/>
+                <a:satMod val="120000"/>
+              </a:schemeClr>
+            </a:gs>
+          </a:gsLst>
+          <a:lin ang="5400000" scaled="0"/>
+        </a:gradFill>
+      </a:bgFillStyleLst>
+    </a:fmtScheme>
+  </a:themeElements>
   <a:extLst>
     <a:ext uri="{05A4C25C-085E-4340-85A3-A5531E510DB2}">
       <thm15:themeFamily xmlns:thm15="http://schemas.microsoft.com/office/thememl/2012/main" name="Office Theme" id="{62F939B6-93AF-4DB8-9C6B-D6C7DFDC589F}" vid="{4A3C46E8-61CC-4603-A589-7422A47A8E4A}"/>
